--- a/output/wordlabs-scope-3day.pptx
+++ b/output/wordlabs-scope-3day.pptx
@@ -4240,7 +4240,7 @@
                 <a:ea typeface="Calibri" pitchFamily="34" charset="-122"/>
                 <a:cs typeface="Calibri" pitchFamily="34" charset="-120"/>
               </a:rPr>
-              <a:t>"to look, view, or observe"</a:t>
+              <a:t>"to look, see, observe"</a:t>
             </a:r>
             <a:endParaRPr lang="en-US" sz="2200" dirty="0"/>
           </a:p>
@@ -5288,7 +5288,7 @@
                 <a:ea typeface="Calibri" pitchFamily="34" charset="-122"/>
                 <a:cs typeface="Calibri" pitchFamily="34" charset="-120"/>
               </a:rPr>
-              <a:t>Word Labs  •  wordlabs.app  •  Root: 'scope' = to look, view, or observe</a:t>
+              <a:t>Word Labs  •  wordlabs.app  •  Root: 'scope' = to look, see, observe</a:t>
             </a:r>
             <a:endParaRPr lang="en-US" sz="800" dirty="0"/>
           </a:p>
@@ -5622,7 +5622,7 @@
                 <a:ea typeface="Trebuchet MS" pitchFamily="34" charset="-122"/>
                 <a:cs typeface="Trebuchet MS" pitchFamily="34" charset="-120"/>
               </a:rPr>
-              <a:t>1</a:t>
+              <a:t>2</a:t>
             </a:r>
             <a:pPr algn="ctr" indent="0" marL="0">
               <a:buNone/>
@@ -5636,7 +5636,7 @@
                 <a:ea typeface="Trebuchet MS" pitchFamily="34" charset="-122"/>
                 <a:cs typeface="Trebuchet MS" pitchFamily="34" charset="-120"/>
               </a:rPr>
-              <a:t>  punctuation mark</a:t>
+              <a:t>  punctuation marks</a:t>
             </a:r>
             <a:endParaRPr lang="en-US" sz="2800" dirty="0"/>
           </a:p>
@@ -5928,7 +5928,7 @@
                 <a:ea typeface="Calibri" pitchFamily="34" charset="-122"/>
                 <a:cs typeface="Calibri" pitchFamily="34" charset="-120"/>
               </a:rPr>
-              <a:t>Word Labs  •  wordlabs.app  •  Root: 'scope' = to look, view, or observe</a:t>
+              <a:t>Word Labs  •  wordlabs.app  •  Root: 'scope' = to look, see, observe</a:t>
             </a:r>
             <a:endParaRPr lang="en-US" sz="800" dirty="0"/>
           </a:p>
@@ -6071,7 +6071,7 @@
                 <a:ea typeface="Calibri" pitchFamily="34" charset="-122"/>
                 <a:cs typeface="Calibri" pitchFamily="34" charset="-120"/>
               </a:rPr>
-              <a:t> and a </a:t>
+              <a:t>, the astronomer studied the stars, while a </a:t>
             </a:r>
             <a:pPr algn="l" indent="0" marL="0">
               <a:buNone/>
@@ -6088,7 +6088,7 @@
                 <a:ea typeface="Calibri" pitchFamily="34" charset="-122"/>
                 <a:cs typeface="Calibri" pitchFamily="34" charset="-120"/>
               </a:rPr>
-              <a:t>microscope</a:t>
+              <a:t>periscope</a:t>
             </a:r>
             <a:pPr algn="l" indent="0" marL="0">
               <a:buNone/>
@@ -6102,7 +6102,7 @@
                 <a:ea typeface="Calibri" pitchFamily="34" charset="-122"/>
                 <a:cs typeface="Calibri" pitchFamily="34" charset="-120"/>
               </a:rPr>
-              <a:t>, the students explored both the vast universe and the invisible world of cells.</a:t>
+              <a:t> helped the submarine crew see above the water.</a:t>
             </a:r>
             <a:endParaRPr lang="en-US" sz="1800" dirty="0"/>
           </a:p>
@@ -6385,7 +6385,7 @@
                 <a:ea typeface="Trebuchet MS" pitchFamily="34" charset="-122"/>
                 <a:cs typeface="Trebuchet MS" pitchFamily="34" charset="-120"/>
               </a:rPr>
-              <a:t>microscope</a:t>
+              <a:t>periscope</a:t>
             </a:r>
             <a:endParaRPr lang="en-US" sz="1400" dirty="0"/>
           </a:p>
@@ -6716,7 +6716,7 @@
                 <a:ea typeface="Calibri" pitchFamily="34" charset="-122"/>
                 <a:cs typeface="Calibri" pitchFamily="34" charset="-120"/>
               </a:rPr>
-              <a:t>Word Labs  •  wordlabs.app  •  Root: 'scope' = to look, view, or observe</a:t>
+              <a:t>Word Labs  •  wordlabs.app  •  Root: 'scope' = to look, see, observe</a:t>
             </a:r>
             <a:endParaRPr lang="en-US" sz="800" dirty="0"/>
           </a:p>
@@ -7543,7 +7543,7 @@
                 <a:ea typeface="Calibri" pitchFamily="34" charset="-122"/>
                 <a:cs typeface="Calibri" pitchFamily="34" charset="-120"/>
               </a:rPr>
-              <a:t>Word Labs  •  wordlabs.app  •  Root: 'scope' = to look, view, or observe</a:t>
+              <a:t>Word Labs  •  wordlabs.app  •  Root: 'scope' = to look, see, observe</a:t>
             </a:r>
             <a:endParaRPr lang="en-US" sz="800" dirty="0"/>
           </a:p>
@@ -7860,7 +7860,7 @@
                 <a:ea typeface="Calibri" pitchFamily="34" charset="-122"/>
                 <a:cs typeface="Calibri" pitchFamily="34" charset="-120"/>
               </a:rPr>
-              <a:t>far, distant</a:t>
+              <a:t>far away</a:t>
             </a:r>
             <a:endParaRPr lang="en-US" sz="850" dirty="0"/>
           </a:p>
@@ -7972,7 +7972,7 @@
                 <a:ea typeface="Calibri" pitchFamily="34" charset="-122"/>
                 <a:cs typeface="Calibri" pitchFamily="34" charset="-120"/>
               </a:rPr>
-              <a:t>to look, view</a:t>
+              <a:t>to look or observe</a:t>
             </a:r>
             <a:endParaRPr lang="en-US" sz="850" dirty="0"/>
           </a:p>
@@ -8528,7 +8528,7 @@
                 <a:ea typeface="Calibri" pitchFamily="34" charset="-122"/>
                 <a:cs typeface="Calibri" pitchFamily="34" charset="-120"/>
               </a:rPr>
-              <a:t>Word Labs  •  wordlabs.app  •  Root: 'scope' = to look, view, or observe</a:t>
+              <a:t>Word Labs  •  wordlabs.app  •  Root: 'scope' = to look, see, observe</a:t>
             </a:r>
             <a:endParaRPr lang="en-US" sz="800" dirty="0"/>
           </a:p>
@@ -8845,7 +8845,7 @@
                 <a:ea typeface="Calibri" pitchFamily="34" charset="-122"/>
                 <a:cs typeface="Calibri" pitchFamily="34" charset="-120"/>
               </a:rPr>
-              <a:t>far, distant</a:t>
+              <a:t>far away</a:t>
             </a:r>
             <a:endParaRPr lang="en-US" sz="850" dirty="0"/>
           </a:p>
@@ -8957,7 +8957,7 @@
                 <a:ea typeface="Calibri" pitchFamily="34" charset="-122"/>
                 <a:cs typeface="Calibri" pitchFamily="34" charset="-120"/>
               </a:rPr>
-              <a:t>to look, view</a:t>
+              <a:t>to look or observe</a:t>
             </a:r>
             <a:endParaRPr lang="en-US" sz="850" dirty="0"/>
           </a:p>
@@ -9750,7 +9750,7 @@
                 <a:ea typeface="Calibri" pitchFamily="34" charset="-122"/>
                 <a:cs typeface="Calibri" pitchFamily="34" charset="-120"/>
               </a:rPr>
-              <a:t>Word Labs  •  wordlabs.app  •  Root: 'scope' = to look, view, or observe</a:t>
+              <a:t>Word Labs  •  wordlabs.app  •  Root: 'scope' = to look, see, observe</a:t>
             </a:r>
             <a:endParaRPr lang="en-US" sz="800" dirty="0"/>
           </a:p>
@@ -10067,7 +10067,7 @@
                 <a:ea typeface="Calibri" pitchFamily="34" charset="-122"/>
                 <a:cs typeface="Calibri" pitchFamily="34" charset="-120"/>
               </a:rPr>
-              <a:t>far, distant</a:t>
+              <a:t>far away</a:t>
             </a:r>
             <a:endParaRPr lang="en-US" sz="850" dirty="0"/>
           </a:p>
@@ -10179,7 +10179,7 @@
                 <a:ea typeface="Calibri" pitchFamily="34" charset="-122"/>
                 <a:cs typeface="Calibri" pitchFamily="34" charset="-120"/>
               </a:rPr>
-              <a:t>to look, view</a:t>
+              <a:t>to look or observe</a:t>
             </a:r>
             <a:endParaRPr lang="en-US" sz="850" dirty="0"/>
           </a:p>
@@ -11434,7 +11434,7 @@
                 <a:ea typeface="Calibri" pitchFamily="34" charset="-122"/>
                 <a:cs typeface="Calibri" pitchFamily="34" charset="-120"/>
               </a:rPr>
-              <a:t>Word Labs  •  wordlabs.app  •  Root: 'scope' = to look, view, or observe</a:t>
+              <a:t>Word Labs  •  wordlabs.app  •  Root: 'scope' = to look, see, observe</a:t>
             </a:r>
             <a:endParaRPr lang="en-US" sz="800" dirty="0"/>
           </a:p>
@@ -11573,7 +11573,7 @@
                 <a:ea typeface="Trebuchet MS" pitchFamily="34" charset="-122"/>
                 <a:cs typeface="Trebuchet MS" pitchFamily="34" charset="-120"/>
               </a:rPr>
-              <a:t>microscope</a:t>
+              <a:t>periscope</a:t>
             </a:r>
             <a:endParaRPr lang="en-US" sz="2800" dirty="0"/>
           </a:p>
@@ -12261,7 +12261,7 @@
                 <a:ea typeface="Calibri" pitchFamily="34" charset="-122"/>
                 <a:cs typeface="Calibri" pitchFamily="34" charset="-120"/>
               </a:rPr>
-              <a:t>Word Labs  •  wordlabs.app  •  Root: 'scope' = to look, view, or observe</a:t>
+              <a:t>Word Labs  •  wordlabs.app  •  Root: 'scope' = to look, see, observe</a:t>
             </a:r>
             <a:endParaRPr lang="en-US" sz="800" dirty="0"/>
           </a:p>
@@ -12400,7 +12400,7 @@
                 <a:ea typeface="Trebuchet MS" pitchFamily="34" charset="-122"/>
                 <a:cs typeface="Trebuchet MS" pitchFamily="34" charset="-120"/>
               </a:rPr>
-              <a:t>microscope</a:t>
+              <a:t>periscope</a:t>
             </a:r>
             <a:endParaRPr lang="en-US" sz="2800" dirty="0"/>
           </a:p>
@@ -12539,7 +12539,7 @@
                 <a:ea typeface="Trebuchet MS" pitchFamily="34" charset="-122"/>
                 <a:cs typeface="Trebuchet MS" pitchFamily="34" charset="-120"/>
               </a:rPr>
-              <a:t>micro</a:t>
+              <a:t>peri</a:t>
             </a:r>
             <a:endParaRPr lang="en-US" sz="1300" dirty="0"/>
           </a:p>
@@ -12578,7 +12578,7 @@
                 <a:ea typeface="Calibri" pitchFamily="34" charset="-122"/>
                 <a:cs typeface="Calibri" pitchFamily="34" charset="-120"/>
               </a:rPr>
-              <a:t>very small</a:t>
+              <a:t>around</a:t>
             </a:r>
             <a:endParaRPr lang="en-US" sz="850" dirty="0"/>
           </a:p>
@@ -12690,7 +12690,7 @@
                 <a:ea typeface="Calibri" pitchFamily="34" charset="-122"/>
                 <a:cs typeface="Calibri" pitchFamily="34" charset="-120"/>
               </a:rPr>
-              <a:t>to look, view</a:t>
+              <a:t>to look or observe</a:t>
             </a:r>
             <a:endParaRPr lang="en-US" sz="850" dirty="0"/>
           </a:p>
@@ -13246,7 +13246,7 @@
                 <a:ea typeface="Calibri" pitchFamily="34" charset="-122"/>
                 <a:cs typeface="Calibri" pitchFamily="34" charset="-120"/>
               </a:rPr>
-              <a:t>Word Labs  •  wordlabs.app  •  Root: 'scope' = to look, view, or observe</a:t>
+              <a:t>Word Labs  •  wordlabs.app  •  Root: 'scope' = to look, see, observe</a:t>
             </a:r>
             <a:endParaRPr lang="en-US" sz="800" dirty="0"/>
           </a:p>
@@ -13385,7 +13385,7 @@
                 <a:ea typeface="Trebuchet MS" pitchFamily="34" charset="-122"/>
                 <a:cs typeface="Trebuchet MS" pitchFamily="34" charset="-120"/>
               </a:rPr>
-              <a:t>microscope</a:t>
+              <a:t>periscope</a:t>
             </a:r>
             <a:endParaRPr lang="en-US" sz="2800" dirty="0"/>
           </a:p>
@@ -13524,7 +13524,7 @@
                 <a:ea typeface="Trebuchet MS" pitchFamily="34" charset="-122"/>
                 <a:cs typeface="Trebuchet MS" pitchFamily="34" charset="-120"/>
               </a:rPr>
-              <a:t>micro</a:t>
+              <a:t>peri</a:t>
             </a:r>
             <a:endParaRPr lang="en-US" sz="1300" dirty="0"/>
           </a:p>
@@ -13563,7 +13563,7 @@
                 <a:ea typeface="Calibri" pitchFamily="34" charset="-122"/>
                 <a:cs typeface="Calibri" pitchFamily="34" charset="-120"/>
               </a:rPr>
-              <a:t>very small</a:t>
+              <a:t>around</a:t>
             </a:r>
             <a:endParaRPr lang="en-US" sz="850" dirty="0"/>
           </a:p>
@@ -13675,7 +13675,7 @@
                 <a:ea typeface="Calibri" pitchFamily="34" charset="-122"/>
                 <a:cs typeface="Calibri" pitchFamily="34" charset="-120"/>
               </a:rPr>
-              <a:t>to look, view</a:t>
+              <a:t>to look or observe</a:t>
             </a:r>
             <a:endParaRPr lang="en-US" sz="850" dirty="0"/>
           </a:p>
@@ -13834,7 +13834,7 @@
                 <a:ea typeface="Trebuchet MS" pitchFamily="34" charset="-122"/>
                 <a:cs typeface="Trebuchet MS" pitchFamily="34" charset="-120"/>
               </a:rPr>
-              <a:t>mi</a:t>
+              <a:t>per</a:t>
             </a:r>
             <a:endParaRPr lang="en-US" sz="1400" dirty="0"/>
           </a:p>
@@ -13939,7 +13939,7 @@
                 <a:ea typeface="Trebuchet MS" pitchFamily="34" charset="-122"/>
                 <a:cs typeface="Trebuchet MS" pitchFamily="34" charset="-120"/>
               </a:rPr>
-              <a:t>cro</a:t>
+              <a:t>i</a:t>
             </a:r>
             <a:endParaRPr lang="en-US" sz="1400" dirty="0"/>
           </a:p>
@@ -14377,7 +14377,7 @@
                 <a:ea typeface="Calibri" pitchFamily="34" charset="-122"/>
                 <a:cs typeface="Calibri" pitchFamily="34" charset="-120"/>
               </a:rPr>
-              <a:t>Root 'scope' — to look, view, or observe</a:t>
+              <a:t>Root 'scope' — to look, see, observe</a:t>
             </a:r>
             <a:endParaRPr lang="en-US" sz="1600" dirty="0"/>
           </a:p>
@@ -14733,7 +14733,7 @@
                 <a:ea typeface="Calibri" pitchFamily="34" charset="-122"/>
                 <a:cs typeface="Calibri" pitchFamily="34" charset="-120"/>
               </a:rPr>
-              <a:t>Word Labs  •  wordlabs.app  •  Root: 'scope' = to look, view, or observe</a:t>
+              <a:t>Word Labs  •  wordlabs.app  •  Root: 'scope' = to look, see, observe</a:t>
             </a:r>
             <a:endParaRPr lang="en-US" sz="800" dirty="0"/>
           </a:p>
@@ -14872,7 +14872,7 @@
                 <a:ea typeface="Trebuchet MS" pitchFamily="34" charset="-122"/>
                 <a:cs typeface="Trebuchet MS" pitchFamily="34" charset="-120"/>
               </a:rPr>
-              <a:t>microscope</a:t>
+              <a:t>periscope</a:t>
             </a:r>
             <a:endParaRPr lang="en-US" sz="2800" dirty="0"/>
           </a:p>
@@ -15011,7 +15011,7 @@
                 <a:ea typeface="Trebuchet MS" pitchFamily="34" charset="-122"/>
                 <a:cs typeface="Trebuchet MS" pitchFamily="34" charset="-120"/>
               </a:rPr>
-              <a:t>micro</a:t>
+              <a:t>peri</a:t>
             </a:r>
             <a:endParaRPr lang="en-US" sz="1300" dirty="0"/>
           </a:p>
@@ -15050,7 +15050,7 @@
                 <a:ea typeface="Calibri" pitchFamily="34" charset="-122"/>
                 <a:cs typeface="Calibri" pitchFamily="34" charset="-120"/>
               </a:rPr>
-              <a:t>very small</a:t>
+              <a:t>around</a:t>
             </a:r>
             <a:endParaRPr lang="en-US" sz="850" dirty="0"/>
           </a:p>
@@ -15162,7 +15162,7 @@
                 <a:ea typeface="Calibri" pitchFamily="34" charset="-122"/>
                 <a:cs typeface="Calibri" pitchFamily="34" charset="-120"/>
               </a:rPr>
-              <a:t>to look, view</a:t>
+              <a:t>to look or observe</a:t>
             </a:r>
             <a:endParaRPr lang="en-US" sz="850" dirty="0"/>
           </a:p>
@@ -15321,7 +15321,7 @@
                 <a:ea typeface="Trebuchet MS" pitchFamily="34" charset="-122"/>
                 <a:cs typeface="Trebuchet MS" pitchFamily="34" charset="-120"/>
               </a:rPr>
-              <a:t>mi</a:t>
+              <a:t>per</a:t>
             </a:r>
             <a:endParaRPr lang="en-US" sz="1400" dirty="0"/>
           </a:p>
@@ -15426,7 +15426,7 @@
                 <a:ea typeface="Trebuchet MS" pitchFamily="34" charset="-122"/>
                 <a:cs typeface="Trebuchet MS" pitchFamily="34" charset="-120"/>
               </a:rPr>
-              <a:t>cro</a:t>
+              <a:t>i</a:t>
             </a:r>
             <a:endParaRPr lang="en-US" sz="1400" dirty="0"/>
           </a:p>
@@ -15638,7 +15638,7 @@
         </p:nvSpPr>
         <p:spPr>
           <a:xfrm>
-            <a:off x="2124837" y="4169664"/>
+            <a:off x="2254649" y="4169664"/>
             <a:ext cx="685800" cy="384048"/>
           </a:xfrm>
           <a:prstGeom prst="rect">
@@ -15665,7 +15665,7 @@
         </p:nvSpPr>
         <p:spPr>
           <a:xfrm>
-            <a:off x="2124837" y="4169664"/>
+            <a:off x="2254649" y="4169664"/>
             <a:ext cx="685800" cy="384048"/>
           </a:xfrm>
           <a:prstGeom prst="rect">
@@ -15690,7 +15690,7 @@
                 <a:ea typeface="Trebuchet MS" pitchFamily="34" charset="-122"/>
                 <a:cs typeface="Trebuchet MS" pitchFamily="34" charset="-120"/>
               </a:rPr>
-              <a:t>m</a:t>
+              <a:t>p</a:t>
             </a:r>
             <a:endParaRPr lang="en-US" sz="900" dirty="0"/>
           </a:p>
@@ -15704,7 +15704,7 @@
         </p:nvSpPr>
         <p:spPr>
           <a:xfrm>
-            <a:off x="3033522" y="4169664"/>
+            <a:off x="3293146" y="4169664"/>
             <a:ext cx="685800" cy="384048"/>
           </a:xfrm>
           <a:prstGeom prst="rect">
@@ -15731,7 +15731,7 @@
         </p:nvSpPr>
         <p:spPr>
           <a:xfrm>
-            <a:off x="3033522" y="4169664"/>
+            <a:off x="3293146" y="4169664"/>
             <a:ext cx="685800" cy="384048"/>
           </a:xfrm>
           <a:prstGeom prst="rect">
@@ -15756,7 +15756,7 @@
                 <a:ea typeface="Trebuchet MS" pitchFamily="34" charset="-122"/>
                 <a:cs typeface="Trebuchet MS" pitchFamily="34" charset="-120"/>
               </a:rPr>
-              <a:t>i</a:t>
+              <a:t>er</a:t>
             </a:r>
             <a:endParaRPr lang="en-US" sz="900" dirty="0"/>
           </a:p>
@@ -15770,7 +15770,7 @@
         </p:nvSpPr>
         <p:spPr>
           <a:xfrm>
-            <a:off x="3942207" y="4169664"/>
+            <a:off x="4331643" y="4169664"/>
             <a:ext cx="685800" cy="384048"/>
           </a:xfrm>
           <a:prstGeom prst="rect">
@@ -15797,7 +15797,7 @@
         </p:nvSpPr>
         <p:spPr>
           <a:xfrm>
-            <a:off x="3942207" y="4169664"/>
+            <a:off x="4331643" y="4169664"/>
             <a:ext cx="685800" cy="384048"/>
           </a:xfrm>
           <a:prstGeom prst="rect">
@@ -15822,7 +15822,7 @@
                 <a:ea typeface="Trebuchet MS" pitchFamily="34" charset="-122"/>
                 <a:cs typeface="Trebuchet MS" pitchFamily="34" charset="-120"/>
               </a:rPr>
-              <a:t>cr</a:t>
+              <a:t>i</a:t>
             </a:r>
             <a:endParaRPr lang="en-US" sz="900" dirty="0"/>
           </a:p>
@@ -15830,13 +15830,79 @@
       </p:sp>
       <p:sp>
         <p:nvSpPr>
-          <p:cNvPr id="42" name="Text 40"/>
-          <p:cNvSpPr/>
-          <p:nvPr/>
-        </p:nvSpPr>
-        <p:spPr>
-          <a:xfrm>
-            <a:off x="3942207" y="4572000"/>
+          <p:cNvPr id="42" name="Shape 40"/>
+          <p:cNvSpPr/>
+          <p:nvPr/>
+        </p:nvSpPr>
+        <p:spPr>
+          <a:xfrm>
+            <a:off x="5370141" y="4169664"/>
+            <a:ext cx="685800" cy="384048"/>
+          </a:xfrm>
+          <a:prstGeom prst="rect">
+            <a:avLst>
+              <a:gd name="adj" fmla="val 9524"/>
+            </a:avLst>
+          </a:prstGeom>
+          <a:solidFill>
+            <a:srgbClr val="FFFFFF"/>
+          </a:solidFill>
+          <a:ln w="12700">
+            <a:solidFill>
+              <a:srgbClr val="DB2777"/>
+            </a:solidFill>
+            <a:prstDash val="solid"/>
+          </a:ln>
+        </p:spPr>
+      </p:sp>
+      <p:sp>
+        <p:nvSpPr>
+          <p:cNvPr id="43" name="Text 41"/>
+          <p:cNvSpPr/>
+          <p:nvPr/>
+        </p:nvSpPr>
+        <p:spPr>
+          <a:xfrm>
+            <a:off x="5370141" y="4169664"/>
+            <a:ext cx="685800" cy="384048"/>
+          </a:xfrm>
+          <a:prstGeom prst="rect">
+            <a:avLst/>
+          </a:prstGeom>
+          <a:noFill/>
+          <a:ln/>
+        </p:spPr>
+        <p:txBody>
+          <a:bodyPr wrap="square" lIns="0" tIns="0" rIns="0" bIns="0" rtlCol="0" anchor="ctr"/>
+          <a:lstStyle/>
+          <a:p>
+            <a:pPr algn="ctr" indent="0" marL="0">
+              <a:buNone/>
+            </a:pPr>
+            <a:r>
+              <a:rPr lang="en-US" sz="900" b="1" dirty="0">
+                <a:solidFill>
+                  <a:srgbClr val="9D174D"/>
+                </a:solidFill>
+                <a:latin typeface="Trebuchet MS" pitchFamily="34" charset="0"/>
+                <a:ea typeface="Trebuchet MS" pitchFamily="34" charset="-122"/>
+                <a:cs typeface="Trebuchet MS" pitchFamily="34" charset="-120"/>
+              </a:rPr>
+              <a:t>sc</a:t>
+            </a:r>
+            <a:endParaRPr lang="en-US" sz="900" dirty="0"/>
+          </a:p>
+        </p:txBody>
+      </p:sp>
+      <p:sp>
+        <p:nvSpPr>
+          <p:cNvPr id="44" name="Text 42"/>
+          <p:cNvSpPr/>
+          <p:nvPr/>
+        </p:nvSpPr>
+        <p:spPr>
+          <a:xfrm>
+            <a:off x="5370141" y="4572000"/>
             <a:ext cx="685800" cy="219456"/>
           </a:xfrm>
           <a:prstGeom prst="rect">
@@ -15861,7 +15927,7 @@
                 <a:ea typeface="Calibri" pitchFamily="34" charset="-122"/>
                 <a:cs typeface="Calibri" pitchFamily="34" charset="-120"/>
               </a:rPr>
-              <a:t>/kr/</a:t>
+              <a:t>/sk/</a:t>
             </a:r>
             <a:endParaRPr lang="en-US" sz="750" dirty="0"/>
           </a:p>
@@ -15869,13 +15935,13 @@
       </p:sp>
       <p:sp>
         <p:nvSpPr>
-          <p:cNvPr id="43" name="Shape 41"/>
-          <p:cNvSpPr/>
-          <p:nvPr/>
-        </p:nvSpPr>
-        <p:spPr>
-          <a:xfrm>
-            <a:off x="4850892" y="4169664"/>
+          <p:cNvPr id="45" name="Shape 43"/>
+          <p:cNvSpPr/>
+          <p:nvPr/>
+        </p:nvSpPr>
+        <p:spPr>
+          <a:xfrm>
+            <a:off x="6408638" y="4169664"/>
             <a:ext cx="685800" cy="384048"/>
           </a:xfrm>
           <a:prstGeom prst="rect">
@@ -15896,13 +15962,13 @@
       </p:sp>
       <p:sp>
         <p:nvSpPr>
-          <p:cNvPr id="44" name="Text 42"/>
-          <p:cNvSpPr/>
-          <p:nvPr/>
-        </p:nvSpPr>
-        <p:spPr>
-          <a:xfrm>
-            <a:off x="4850892" y="4169664"/>
+          <p:cNvPr id="46" name="Text 44"/>
+          <p:cNvSpPr/>
+          <p:nvPr/>
+        </p:nvSpPr>
+        <p:spPr>
+          <a:xfrm>
+            <a:off x="6408638" y="4169664"/>
             <a:ext cx="685800" cy="384048"/>
           </a:xfrm>
           <a:prstGeom prst="rect">
@@ -15935,13 +16001,13 @@
       </p:sp>
       <p:sp>
         <p:nvSpPr>
-          <p:cNvPr id="45" name="Shape 43"/>
-          <p:cNvSpPr/>
-          <p:nvPr/>
-        </p:nvSpPr>
-        <p:spPr>
-          <a:xfrm>
-            <a:off x="5759577" y="4169664"/>
+          <p:cNvPr id="47" name="Shape 45"/>
+          <p:cNvSpPr/>
+          <p:nvPr/>
+        </p:nvSpPr>
+        <p:spPr>
+          <a:xfrm>
+            <a:off x="7447135" y="4169664"/>
             <a:ext cx="685800" cy="384048"/>
           </a:xfrm>
           <a:prstGeom prst="rect">
@@ -15962,184 +16028,13 @@
       </p:sp>
       <p:sp>
         <p:nvSpPr>
-          <p:cNvPr id="46" name="Text 44"/>
-          <p:cNvSpPr/>
-          <p:nvPr/>
-        </p:nvSpPr>
-        <p:spPr>
-          <a:xfrm>
-            <a:off x="5759577" y="4169664"/>
-            <a:ext cx="685800" cy="384048"/>
-          </a:xfrm>
-          <a:prstGeom prst="rect">
-            <a:avLst/>
-          </a:prstGeom>
-          <a:noFill/>
-          <a:ln/>
-        </p:spPr>
-        <p:txBody>
-          <a:bodyPr wrap="square" lIns="0" tIns="0" rIns="0" bIns="0" rtlCol="0" anchor="ctr"/>
-          <a:lstStyle/>
-          <a:p>
-            <a:pPr algn="ctr" indent="0" marL="0">
-              <a:buNone/>
-            </a:pPr>
-            <a:r>
-              <a:rPr lang="en-US" sz="900" b="1" dirty="0">
-                <a:solidFill>
-                  <a:srgbClr val="9D174D"/>
-                </a:solidFill>
-                <a:latin typeface="Trebuchet MS" pitchFamily="34" charset="0"/>
-                <a:ea typeface="Trebuchet MS" pitchFamily="34" charset="-122"/>
-                <a:cs typeface="Trebuchet MS" pitchFamily="34" charset="-120"/>
-              </a:rPr>
-              <a:t>sc</a:t>
-            </a:r>
-            <a:endParaRPr lang="en-US" sz="900" dirty="0"/>
-          </a:p>
-        </p:txBody>
-      </p:sp>
-      <p:sp>
-        <p:nvSpPr>
-          <p:cNvPr id="47" name="Text 45"/>
-          <p:cNvSpPr/>
-          <p:nvPr/>
-        </p:nvSpPr>
-        <p:spPr>
-          <a:xfrm>
-            <a:off x="5759577" y="4572000"/>
-            <a:ext cx="685800" cy="219456"/>
-          </a:xfrm>
-          <a:prstGeom prst="rect">
-            <a:avLst/>
-          </a:prstGeom>
-          <a:noFill/>
-          <a:ln/>
-        </p:spPr>
-        <p:txBody>
-          <a:bodyPr wrap="square" lIns="0" tIns="0" rIns="0" bIns="0" rtlCol="0" anchor="t"/>
-          <a:lstStyle/>
-          <a:p>
-            <a:pPr algn="ctr" indent="0" marL="0">
-              <a:buNone/>
-            </a:pPr>
-            <a:r>
-              <a:rPr lang="en-US" sz="750" i="1" dirty="0">
-                <a:solidFill>
-                  <a:srgbClr val="94A3B8"/>
-                </a:solidFill>
-                <a:latin typeface="Calibri" pitchFamily="34" charset="0"/>
-                <a:ea typeface="Calibri" pitchFamily="34" charset="-122"/>
-                <a:cs typeface="Calibri" pitchFamily="34" charset="-120"/>
-              </a:rPr>
-              <a:t>/sk/</a:t>
-            </a:r>
-            <a:endParaRPr lang="en-US" sz="750" dirty="0"/>
-          </a:p>
-        </p:txBody>
-      </p:sp>
-      <p:sp>
-        <p:nvSpPr>
-          <p:cNvPr id="48" name="Shape 46"/>
-          <p:cNvSpPr/>
-          <p:nvPr/>
-        </p:nvSpPr>
-        <p:spPr>
-          <a:xfrm>
-            <a:off x="6668262" y="4169664"/>
-            <a:ext cx="685800" cy="384048"/>
-          </a:xfrm>
-          <a:prstGeom prst="rect">
-            <a:avLst>
-              <a:gd name="adj" fmla="val 9524"/>
-            </a:avLst>
-          </a:prstGeom>
-          <a:solidFill>
-            <a:srgbClr val="FFFFFF"/>
-          </a:solidFill>
-          <a:ln w="12700">
-            <a:solidFill>
-              <a:srgbClr val="DB2777"/>
-            </a:solidFill>
-            <a:prstDash val="solid"/>
-          </a:ln>
-        </p:spPr>
-      </p:sp>
-      <p:sp>
-        <p:nvSpPr>
-          <p:cNvPr id="49" name="Text 47"/>
-          <p:cNvSpPr/>
-          <p:nvPr/>
-        </p:nvSpPr>
-        <p:spPr>
-          <a:xfrm>
-            <a:off x="6668262" y="4169664"/>
-            <a:ext cx="685800" cy="384048"/>
-          </a:xfrm>
-          <a:prstGeom prst="rect">
-            <a:avLst/>
-          </a:prstGeom>
-          <a:noFill/>
-          <a:ln/>
-        </p:spPr>
-        <p:txBody>
-          <a:bodyPr wrap="square" lIns="0" tIns="0" rIns="0" bIns="0" rtlCol="0" anchor="ctr"/>
-          <a:lstStyle/>
-          <a:p>
-            <a:pPr algn="ctr" indent="0" marL="0">
-              <a:buNone/>
-            </a:pPr>
-            <a:r>
-              <a:rPr lang="en-US" sz="900" b="1" dirty="0">
-                <a:solidFill>
-                  <a:srgbClr val="9D174D"/>
-                </a:solidFill>
-                <a:latin typeface="Trebuchet MS" pitchFamily="34" charset="0"/>
-                <a:ea typeface="Trebuchet MS" pitchFamily="34" charset="-122"/>
-                <a:cs typeface="Trebuchet MS" pitchFamily="34" charset="-120"/>
-              </a:rPr>
-              <a:t>o</a:t>
-            </a:r>
-            <a:endParaRPr lang="en-US" sz="900" dirty="0"/>
-          </a:p>
-        </p:txBody>
-      </p:sp>
-      <p:sp>
-        <p:nvSpPr>
-          <p:cNvPr id="50" name="Shape 48"/>
-          <p:cNvSpPr/>
-          <p:nvPr/>
-        </p:nvSpPr>
-        <p:spPr>
-          <a:xfrm>
-            <a:off x="7576947" y="4169664"/>
-            <a:ext cx="685800" cy="384048"/>
-          </a:xfrm>
-          <a:prstGeom prst="rect">
-            <a:avLst>
-              <a:gd name="adj" fmla="val 9524"/>
-            </a:avLst>
-          </a:prstGeom>
-          <a:solidFill>
-            <a:srgbClr val="FFFFFF"/>
-          </a:solidFill>
-          <a:ln w="12700">
-            <a:solidFill>
-              <a:srgbClr val="DB2777"/>
-            </a:solidFill>
-            <a:prstDash val="solid"/>
-          </a:ln>
-        </p:spPr>
-      </p:sp>
-      <p:sp>
-        <p:nvSpPr>
-          <p:cNvPr id="51" name="Text 49"/>
-          <p:cNvSpPr/>
-          <p:nvPr/>
-        </p:nvSpPr>
-        <p:spPr>
-          <a:xfrm>
-            <a:off x="7576947" y="4169664"/>
+          <p:cNvPr id="48" name="Text 46"/>
+          <p:cNvSpPr/>
+          <p:nvPr/>
+        </p:nvSpPr>
+        <p:spPr>
+          <a:xfrm>
+            <a:off x="7447135" y="4169664"/>
             <a:ext cx="685800" cy="384048"/>
           </a:xfrm>
           <a:prstGeom prst="rect">
@@ -16738,7 +16633,7 @@
                 <a:ea typeface="Calibri" pitchFamily="34" charset="-122"/>
                 <a:cs typeface="Calibri" pitchFamily="34" charset="-120"/>
               </a:rPr>
-              <a:t>Word Labs  •  wordlabs.app  •  Root: 'scope' = to look, view, or observe</a:t>
+              <a:t>Word Labs  •  wordlabs.app  •  Root: 'scope' = to look, see, observe</a:t>
             </a:r>
             <a:endParaRPr lang="en-US" sz="800" dirty="0"/>
           </a:p>
@@ -17378,7 +17273,7 @@
                 <a:ea typeface="Calibri" pitchFamily="34" charset="-122"/>
                 <a:cs typeface="Calibri" pitchFamily="34" charset="-120"/>
               </a:rPr>
-              <a:t>Word Labs  •  wordlabs.app  •  Root: 'scope' = to look, view, or observe</a:t>
+              <a:t>Word Labs  •  wordlabs.app  •  Root: 'scope' = to look, see, observe</a:t>
             </a:r>
             <a:endParaRPr lang="en-US" sz="800" dirty="0"/>
           </a:p>
@@ -17521,7 +17416,7 @@
                 <a:ea typeface="Calibri" pitchFamily="34" charset="-122"/>
                 <a:cs typeface="Calibri" pitchFamily="34" charset="-120"/>
               </a:rPr>
-              <a:t> to check inside the patient, while the students peered through a </a:t>
+              <a:t> to check inside the patient's body; meanwhile, the children took turns looking through the </a:t>
             </a:r>
             <a:pPr algn="l" indent="0" marL="0">
               <a:buNone/>
@@ -17538,7 +17433,7 @@
                 <a:ea typeface="Calibri" pitchFamily="34" charset="-122"/>
                 <a:cs typeface="Calibri" pitchFamily="34" charset="-120"/>
               </a:rPr>
-              <a:t>periscope</a:t>
+              <a:t>kaleidoscope</a:t>
             </a:r>
             <a:pPr algn="l" indent="0" marL="0">
               <a:buNone/>
@@ -17552,7 +17447,7 @@
                 <a:ea typeface="Calibri" pitchFamily="34" charset="-122"/>
                 <a:cs typeface="Calibri" pitchFamily="34" charset="-120"/>
               </a:rPr>
-              <a:t> and later studied pond life under a </a:t>
+              <a:t> and the </a:t>
             </a:r>
             <a:pPr algn="l" indent="0" marL="0">
               <a:buNone/>
@@ -17866,7 +17761,7 @@
                 <a:ea typeface="Trebuchet MS" pitchFamily="34" charset="-122"/>
                 <a:cs typeface="Trebuchet MS" pitchFamily="34" charset="-120"/>
               </a:rPr>
-              <a:t>periscope</a:t>
+              <a:t>kaleidoscope</a:t>
             </a:r>
             <a:endParaRPr lang="en-US" sz="1400" dirty="0"/>
           </a:p>
@@ -18325,7 +18220,7 @@
                 <a:ea typeface="Calibri" pitchFamily="34" charset="-122"/>
                 <a:cs typeface="Calibri" pitchFamily="34" charset="-120"/>
               </a:rPr>
-              <a:t>Word Labs  •  wordlabs.app  •  Root: 'scope' = to look, view, or observe</a:t>
+              <a:t>Word Labs  •  wordlabs.app  •  Root: 'scope' = to look, see, observe</a:t>
             </a:r>
             <a:endParaRPr lang="en-US" sz="800" dirty="0"/>
           </a:p>
@@ -19152,7 +19047,7 @@
                 <a:ea typeface="Calibri" pitchFamily="34" charset="-122"/>
                 <a:cs typeface="Calibri" pitchFamily="34" charset="-120"/>
               </a:rPr>
-              <a:t>Word Labs  •  wordlabs.app  •  Root: 'scope' = to look, view, or observe</a:t>
+              <a:t>Word Labs  •  wordlabs.app  •  Root: 'scope' = to look, see, observe</a:t>
             </a:r>
             <a:endParaRPr lang="en-US" sz="800" dirty="0"/>
           </a:p>
@@ -19581,7 +19476,7 @@
                 <a:ea typeface="Calibri" pitchFamily="34" charset="-122"/>
                 <a:cs typeface="Calibri" pitchFamily="34" charset="-120"/>
               </a:rPr>
-              <a:t>to look, view</a:t>
+              <a:t>to look or observe</a:t>
             </a:r>
             <a:endParaRPr lang="en-US" sz="850" dirty="0"/>
           </a:p>
@@ -20137,7 +20032,7 @@
                 <a:ea typeface="Calibri" pitchFamily="34" charset="-122"/>
                 <a:cs typeface="Calibri" pitchFamily="34" charset="-120"/>
               </a:rPr>
-              <a:t>Word Labs  •  wordlabs.app  •  Root: 'scope' = to look, view, or observe</a:t>
+              <a:t>Word Labs  •  wordlabs.app  •  Root: 'scope' = to look, see, observe</a:t>
             </a:r>
             <a:endParaRPr lang="en-US" sz="800" dirty="0"/>
           </a:p>
@@ -20566,7 +20461,7 @@
                 <a:ea typeface="Calibri" pitchFamily="34" charset="-122"/>
                 <a:cs typeface="Calibri" pitchFamily="34" charset="-120"/>
               </a:rPr>
-              <a:t>to look, view</a:t>
+              <a:t>to look or observe</a:t>
             </a:r>
             <a:endParaRPr lang="en-US" sz="850" dirty="0"/>
           </a:p>
@@ -21359,7 +21254,7 @@
                 <a:ea typeface="Calibri" pitchFamily="34" charset="-122"/>
                 <a:cs typeface="Calibri" pitchFamily="34" charset="-120"/>
               </a:rPr>
-              <a:t>Word Labs  •  wordlabs.app  •  Root: 'scope' = to look, view, or observe</a:t>
+              <a:t>Word Labs  •  wordlabs.app  •  Root: 'scope' = to look, see, observe</a:t>
             </a:r>
             <a:endParaRPr lang="en-US" sz="800" dirty="0"/>
           </a:p>
@@ -21788,7 +21683,7 @@
                 <a:ea typeface="Calibri" pitchFamily="34" charset="-122"/>
                 <a:cs typeface="Calibri" pitchFamily="34" charset="-120"/>
               </a:rPr>
-              <a:t>to look, view</a:t>
+              <a:t>to look or observe</a:t>
             </a:r>
             <a:endParaRPr lang="en-US" sz="850" dirty="0"/>
           </a:p>
@@ -23043,7 +22938,7 @@
                 <a:ea typeface="Calibri" pitchFamily="34" charset="-122"/>
                 <a:cs typeface="Calibri" pitchFamily="34" charset="-120"/>
               </a:rPr>
-              <a:t>Word Labs  •  wordlabs.app  •  Root: 'scope' = to look, view, or observe</a:t>
+              <a:t>Word Labs  •  wordlabs.app  •  Root: 'scope' = to look, see, observe</a:t>
             </a:r>
             <a:endParaRPr lang="en-US" sz="800" dirty="0"/>
           </a:p>
@@ -23182,7 +23077,7 @@
                 <a:ea typeface="Trebuchet MS" pitchFamily="34" charset="-122"/>
                 <a:cs typeface="Trebuchet MS" pitchFamily="34" charset="-120"/>
               </a:rPr>
-              <a:t>periscope</a:t>
+              <a:t>kaleidoscope</a:t>
             </a:r>
             <a:endParaRPr lang="en-US" sz="2800" dirty="0"/>
           </a:p>
@@ -23870,7 +23765,7 @@
                 <a:ea typeface="Calibri" pitchFamily="34" charset="-122"/>
                 <a:cs typeface="Calibri" pitchFamily="34" charset="-120"/>
               </a:rPr>
-              <a:t>Word Labs  •  wordlabs.app  •  Root: 'scope' = to look, view, or observe</a:t>
+              <a:t>Word Labs  •  wordlabs.app  •  Root: 'scope' = to look, see, observe</a:t>
             </a:r>
             <a:endParaRPr lang="en-US" sz="800" dirty="0"/>
           </a:p>
@@ -24009,7 +23904,7 @@
                 <a:ea typeface="Trebuchet MS" pitchFamily="34" charset="-122"/>
                 <a:cs typeface="Trebuchet MS" pitchFamily="34" charset="-120"/>
               </a:rPr>
-              <a:t>periscope</a:t>
+              <a:t>kaleidoscope</a:t>
             </a:r>
             <a:endParaRPr lang="en-US" sz="2800" dirty="0"/>
           </a:p>
@@ -24089,7 +23984,7 @@
         </p:nvSpPr>
         <p:spPr>
           <a:xfrm>
-            <a:off x="2938272" y="2258568"/>
+            <a:off x="2221992" y="2258568"/>
             <a:ext cx="1828800" cy="292608"/>
           </a:xfrm>
           <a:prstGeom prst="rect">
@@ -24123,7 +24018,7 @@
         </p:nvSpPr>
         <p:spPr>
           <a:xfrm>
-            <a:off x="2938272" y="2258568"/>
+            <a:off x="2221992" y="2258568"/>
             <a:ext cx="1828800" cy="292608"/>
           </a:xfrm>
           <a:prstGeom prst="rect">
@@ -24148,7 +24043,7 @@
                 <a:ea typeface="Trebuchet MS" pitchFamily="34" charset="-122"/>
                 <a:cs typeface="Trebuchet MS" pitchFamily="34" charset="-120"/>
               </a:rPr>
-              <a:t>peri</a:t>
+              <a:t>kaleid</a:t>
             </a:r>
             <a:endParaRPr lang="en-US" sz="1300" dirty="0"/>
           </a:p>
@@ -24162,7 +24057,7 @@
         </p:nvSpPr>
         <p:spPr>
           <a:xfrm>
-            <a:off x="2938272" y="2569464"/>
+            <a:off x="2221992" y="2569464"/>
             <a:ext cx="1828800" cy="201168"/>
           </a:xfrm>
           <a:prstGeom prst="rect">
@@ -24187,7 +24082,7 @@
                 <a:ea typeface="Calibri" pitchFamily="34" charset="-122"/>
                 <a:cs typeface="Calibri" pitchFamily="34" charset="-120"/>
               </a:rPr>
-              <a:t>around, near</a:t>
+              <a:t>beautiful form</a:t>
             </a:r>
             <a:endParaRPr lang="en-US" sz="850" dirty="0"/>
           </a:p>
@@ -24201,7 +24096,7 @@
         </p:nvSpPr>
         <p:spPr>
           <a:xfrm>
-            <a:off x="5803392" y="2258568"/>
+            <a:off x="4370832" y="2258568"/>
             <a:ext cx="1828800" cy="292608"/>
           </a:xfrm>
           <a:prstGeom prst="rect">
@@ -24210,11 +24105,11 @@
             </a:avLst>
           </a:prstGeom>
           <a:solidFill>
-            <a:srgbClr val="CCFBF1"/>
+            <a:srgbClr val="FCE7F3"/>
           </a:solidFill>
           <a:ln w="19050">
             <a:solidFill>
-              <a:srgbClr val="0D9488"/>
+              <a:srgbClr val="DB2777"/>
             </a:solidFill>
             <a:prstDash val="solid"/>
           </a:ln>
@@ -24235,7 +24130,7 @@
         </p:nvSpPr>
         <p:spPr>
           <a:xfrm>
-            <a:off x="5803392" y="2258568"/>
+            <a:off x="4370832" y="2258568"/>
             <a:ext cx="1828800" cy="292608"/>
           </a:xfrm>
           <a:prstGeom prst="rect">
@@ -24254,13 +24149,13 @@
             <a:r>
               <a:rPr lang="en-US" sz="1300" b="1" dirty="0">
                 <a:solidFill>
-                  <a:srgbClr val="0F766E"/>
+                  <a:srgbClr val="9D174D"/>
                 </a:solidFill>
                 <a:latin typeface="Trebuchet MS" pitchFamily="34" charset="0"/>
                 <a:ea typeface="Trebuchet MS" pitchFamily="34" charset="-122"/>
                 <a:cs typeface="Trebuchet MS" pitchFamily="34" charset="-120"/>
               </a:rPr>
-              <a:t>scope</a:t>
+              <a:t>o</a:t>
             </a:r>
             <a:endParaRPr lang="en-US" sz="1300" dirty="0"/>
           </a:p>
@@ -24274,7 +24169,7 @@
         </p:nvSpPr>
         <p:spPr>
           <a:xfrm>
-            <a:off x="5803392" y="2569464"/>
+            <a:off x="4370832" y="2569464"/>
             <a:ext cx="1828800" cy="201168"/>
           </a:xfrm>
           <a:prstGeom prst="rect">
@@ -24299,7 +24194,7 @@
                 <a:ea typeface="Calibri" pitchFamily="34" charset="-122"/>
                 <a:cs typeface="Calibri" pitchFamily="34" charset="-120"/>
               </a:rPr>
-              <a:t>to look, view</a:t>
+              <a:t>connecting vowel</a:t>
             </a:r>
             <a:endParaRPr lang="en-US" sz="850" dirty="0"/>
           </a:p>
@@ -24307,7 +24202,158 @@
       </p:sp>
       <p:sp>
         <p:nvSpPr>
-          <p:cNvPr id="22" name="Shape 20"/>
+          <p:cNvPr id="22" name="Text 20"/>
+          <p:cNvSpPr/>
+          <p:nvPr/>
+        </p:nvSpPr>
+        <p:spPr>
+          <a:xfrm>
+            <a:off x="4370832" y="2752344"/>
+            <a:ext cx="1828800" cy="182880"/>
+          </a:xfrm>
+          <a:prstGeom prst="rect">
+            <a:avLst/>
+          </a:prstGeom>
+          <a:noFill/>
+          <a:ln/>
+        </p:spPr>
+        <p:txBody>
+          <a:bodyPr wrap="square" lIns="0" tIns="0" rIns="0" bIns="0" rtlCol="0" anchor="t"/>
+          <a:lstStyle/>
+          <a:p>
+            <a:pPr algn="ctr" indent="0" marL="0">
+              <a:buNone/>
+            </a:pPr>
+            <a:r>
+              <a:rPr lang="en-US" sz="700" i="1" dirty="0">
+                <a:solidFill>
+                  <a:srgbClr val="94A3B8"/>
+                </a:solidFill>
+                <a:latin typeface="Calibri" pitchFamily="34" charset="0"/>
+                <a:ea typeface="Calibri" pitchFamily="34" charset="-122"/>
+                <a:cs typeface="Calibri" pitchFamily="34" charset="-120"/>
+              </a:rPr>
+              <a:t>links base to root</a:t>
+            </a:r>
+            <a:endParaRPr lang="en-US" sz="700" dirty="0"/>
+          </a:p>
+        </p:txBody>
+      </p:sp>
+      <p:sp>
+        <p:nvSpPr>
+          <p:cNvPr id="23" name="Shape 21"/>
+          <p:cNvSpPr/>
+          <p:nvPr/>
+        </p:nvSpPr>
+        <p:spPr>
+          <a:xfrm>
+            <a:off x="6519672" y="2258568"/>
+            <a:ext cx="1828800" cy="292608"/>
+          </a:xfrm>
+          <a:prstGeom prst="rect">
+            <a:avLst>
+              <a:gd name="adj" fmla="val 25000"/>
+            </a:avLst>
+          </a:prstGeom>
+          <a:solidFill>
+            <a:srgbClr val="CCFBF1"/>
+          </a:solidFill>
+          <a:ln w="19050">
+            <a:solidFill>
+              <a:srgbClr val="0D9488"/>
+            </a:solidFill>
+            <a:prstDash val="solid"/>
+          </a:ln>
+          <a:effectLst>
+            <a:outerShdw sx="100000" sy="100000" kx="0" ky="0" algn="bl" rotWithShape="0" blurRad="101600" dist="38100" dir="8100000">
+              <a:srgbClr val="000000">
+                <a:alpha val="12000"/>
+              </a:srgbClr>
+            </a:outerShdw>
+          </a:effectLst>
+        </p:spPr>
+      </p:sp>
+      <p:sp>
+        <p:nvSpPr>
+          <p:cNvPr id="24" name="Text 22"/>
+          <p:cNvSpPr/>
+          <p:nvPr/>
+        </p:nvSpPr>
+        <p:spPr>
+          <a:xfrm>
+            <a:off x="6519672" y="2258568"/>
+            <a:ext cx="1828800" cy="292608"/>
+          </a:xfrm>
+          <a:prstGeom prst="rect">
+            <a:avLst/>
+          </a:prstGeom>
+          <a:noFill/>
+          <a:ln/>
+        </p:spPr>
+        <p:txBody>
+          <a:bodyPr wrap="square" lIns="0" tIns="0" rIns="0" bIns="0" rtlCol="0" anchor="ctr"/>
+          <a:lstStyle/>
+          <a:p>
+            <a:pPr algn="ctr" indent="0" marL="0">
+              <a:buNone/>
+            </a:pPr>
+            <a:r>
+              <a:rPr lang="en-US" sz="1300" b="1" dirty="0">
+                <a:solidFill>
+                  <a:srgbClr val="0F766E"/>
+                </a:solidFill>
+                <a:latin typeface="Trebuchet MS" pitchFamily="34" charset="0"/>
+                <a:ea typeface="Trebuchet MS" pitchFamily="34" charset="-122"/>
+                <a:cs typeface="Trebuchet MS" pitchFamily="34" charset="-120"/>
+              </a:rPr>
+              <a:t>scope</a:t>
+            </a:r>
+            <a:endParaRPr lang="en-US" sz="1300" dirty="0"/>
+          </a:p>
+        </p:txBody>
+      </p:sp>
+      <p:sp>
+        <p:nvSpPr>
+          <p:cNvPr id="25" name="Text 23"/>
+          <p:cNvSpPr/>
+          <p:nvPr/>
+        </p:nvSpPr>
+        <p:spPr>
+          <a:xfrm>
+            <a:off x="6519672" y="2569464"/>
+            <a:ext cx="1828800" cy="201168"/>
+          </a:xfrm>
+          <a:prstGeom prst="rect">
+            <a:avLst/>
+          </a:prstGeom>
+          <a:noFill/>
+          <a:ln/>
+        </p:spPr>
+        <p:txBody>
+          <a:bodyPr wrap="square" lIns="0" tIns="0" rIns="0" bIns="0" rtlCol="0" anchor="t"/>
+          <a:lstStyle/>
+          <a:p>
+            <a:pPr algn="ctr" indent="0" marL="0">
+              <a:buNone/>
+            </a:pPr>
+            <a:r>
+              <a:rPr lang="en-US" sz="850" dirty="0">
+                <a:solidFill>
+                  <a:srgbClr val="475569"/>
+                </a:solidFill>
+                <a:latin typeface="Calibri" pitchFamily="34" charset="0"/>
+                <a:ea typeface="Calibri" pitchFamily="34" charset="-122"/>
+                <a:cs typeface="Calibri" pitchFamily="34" charset="-120"/>
+              </a:rPr>
+              <a:t>to look or observe</a:t>
+            </a:r>
+            <a:endParaRPr lang="en-US" sz="850" dirty="0"/>
+          </a:p>
+        </p:txBody>
+      </p:sp>
+      <p:sp>
+        <p:nvSpPr>
+          <p:cNvPr id="26" name="Shape 24"/>
           <p:cNvSpPr/>
           <p:nvPr/>
         </p:nvSpPr>
@@ -24334,7 +24380,7 @@
       </p:sp>
       <p:sp>
         <p:nvSpPr>
-          <p:cNvPr id="23" name="Text 21"/>
+          <p:cNvPr id="27" name="Text 25"/>
           <p:cNvSpPr/>
           <p:nvPr/>
         </p:nvSpPr>
@@ -24373,7 +24419,7 @@
       </p:sp>
       <p:sp>
         <p:nvSpPr>
-          <p:cNvPr id="24" name="Shape 22"/>
+          <p:cNvPr id="28" name="Shape 26"/>
           <p:cNvSpPr/>
           <p:nvPr/>
         </p:nvSpPr>
@@ -24400,7 +24446,7 @@
       </p:sp>
       <p:sp>
         <p:nvSpPr>
-          <p:cNvPr id="25" name="Text 23"/>
+          <p:cNvPr id="29" name="Text 27"/>
           <p:cNvSpPr/>
           <p:nvPr/>
         </p:nvSpPr>
@@ -24439,7 +24485,7 @@
       </p:sp>
       <p:sp>
         <p:nvSpPr>
-          <p:cNvPr id="26" name="Shape 24"/>
+          <p:cNvPr id="30" name="Shape 28"/>
           <p:cNvSpPr/>
           <p:nvPr/>
         </p:nvSpPr>
@@ -24466,7 +24512,7 @@
       </p:sp>
       <p:sp>
         <p:nvSpPr>
-          <p:cNvPr id="27" name="Text 25"/>
+          <p:cNvPr id="31" name="Text 29"/>
           <p:cNvSpPr/>
           <p:nvPr/>
         </p:nvSpPr>
@@ -24505,7 +24551,7 @@
       </p:sp>
       <p:sp>
         <p:nvSpPr>
-          <p:cNvPr id="28" name="Shape 26"/>
+          <p:cNvPr id="32" name="Shape 30"/>
           <p:cNvSpPr/>
           <p:nvPr/>
         </p:nvSpPr>
@@ -24532,7 +24578,7 @@
       </p:sp>
       <p:sp>
         <p:nvSpPr>
-          <p:cNvPr id="29" name="Text 27"/>
+          <p:cNvPr id="33" name="Text 31"/>
           <p:cNvSpPr/>
           <p:nvPr/>
         </p:nvSpPr>
@@ -24855,7 +24901,7 @@
                 <a:ea typeface="Calibri" pitchFamily="34" charset="-122"/>
                 <a:cs typeface="Calibri" pitchFamily="34" charset="-120"/>
               </a:rPr>
-              <a:t>Word Labs  •  wordlabs.app  •  Root: 'scope' = to look, view, or observe</a:t>
+              <a:t>Word Labs  •  wordlabs.app  •  Root: 'scope' = to look, see, observe</a:t>
             </a:r>
             <a:endParaRPr lang="en-US" sz="800" dirty="0"/>
           </a:p>
@@ -24928,7 +24974,7 @@
                 <a:ea typeface="Trebuchet MS" pitchFamily="34" charset="-122"/>
                 <a:cs typeface="Trebuchet MS" pitchFamily="34" charset="-120"/>
               </a:rPr>
-              <a:t>We are learning that the root 'scope' means 'to look, view, or observe'.</a:t>
+              <a:t>We are learning that the root 'scope' means 'to look, see, observe'.</a:t>
             </a:r>
             <a:endParaRPr lang="en-US" sz="2000" dirty="0"/>
           </a:p>
@@ -25574,7 +25620,7 @@
                 <a:ea typeface="Calibri" pitchFamily="34" charset="-122"/>
                 <a:cs typeface="Calibri" pitchFamily="34" charset="-120"/>
               </a:rPr>
-              <a:t>Word Labs  •  wordlabs.app  •  Root: 'scope' = to look, view, or observe</a:t>
+              <a:t>Word Labs  •  wordlabs.app  •  Root: 'scope' = to look, see, observe</a:t>
             </a:r>
             <a:endParaRPr lang="en-US" sz="800" dirty="0"/>
           </a:p>
@@ -25713,7 +25759,7 @@
                 <a:ea typeface="Trebuchet MS" pitchFamily="34" charset="-122"/>
                 <a:cs typeface="Trebuchet MS" pitchFamily="34" charset="-120"/>
               </a:rPr>
-              <a:t>periscope</a:t>
+              <a:t>kaleidoscope</a:t>
             </a:r>
             <a:endParaRPr lang="en-US" sz="2800" dirty="0"/>
           </a:p>
@@ -25793,7 +25839,7 @@
         </p:nvSpPr>
         <p:spPr>
           <a:xfrm>
-            <a:off x="2938272" y="2258568"/>
+            <a:off x="2221992" y="2258568"/>
             <a:ext cx="1828800" cy="292608"/>
           </a:xfrm>
           <a:prstGeom prst="rect">
@@ -25827,7 +25873,7 @@
         </p:nvSpPr>
         <p:spPr>
           <a:xfrm>
-            <a:off x="2938272" y="2258568"/>
+            <a:off x="2221992" y="2258568"/>
             <a:ext cx="1828800" cy="292608"/>
           </a:xfrm>
           <a:prstGeom prst="rect">
@@ -25852,7 +25898,7 @@
                 <a:ea typeface="Trebuchet MS" pitchFamily="34" charset="-122"/>
                 <a:cs typeface="Trebuchet MS" pitchFamily="34" charset="-120"/>
               </a:rPr>
-              <a:t>peri</a:t>
+              <a:t>kaleid</a:t>
             </a:r>
             <a:endParaRPr lang="en-US" sz="1300" dirty="0"/>
           </a:p>
@@ -25866,7 +25912,7 @@
         </p:nvSpPr>
         <p:spPr>
           <a:xfrm>
-            <a:off x="2938272" y="2569464"/>
+            <a:off x="2221992" y="2569464"/>
             <a:ext cx="1828800" cy="201168"/>
           </a:xfrm>
           <a:prstGeom prst="rect">
@@ -25891,7 +25937,7 @@
                 <a:ea typeface="Calibri" pitchFamily="34" charset="-122"/>
                 <a:cs typeface="Calibri" pitchFamily="34" charset="-120"/>
               </a:rPr>
-              <a:t>around, near</a:t>
+              <a:t>beautiful form</a:t>
             </a:r>
             <a:endParaRPr lang="en-US" sz="850" dirty="0"/>
           </a:p>
@@ -25905,7 +25951,7 @@
         </p:nvSpPr>
         <p:spPr>
           <a:xfrm>
-            <a:off x="5803392" y="2258568"/>
+            <a:off x="4370832" y="2258568"/>
             <a:ext cx="1828800" cy="292608"/>
           </a:xfrm>
           <a:prstGeom prst="rect">
@@ -25914,11 +25960,11 @@
             </a:avLst>
           </a:prstGeom>
           <a:solidFill>
-            <a:srgbClr val="CCFBF1"/>
+            <a:srgbClr val="FCE7F3"/>
           </a:solidFill>
           <a:ln w="19050">
             <a:solidFill>
-              <a:srgbClr val="0D9488"/>
+              <a:srgbClr val="DB2777"/>
             </a:solidFill>
             <a:prstDash val="solid"/>
           </a:ln>
@@ -25939,7 +25985,7 @@
         </p:nvSpPr>
         <p:spPr>
           <a:xfrm>
-            <a:off x="5803392" y="2258568"/>
+            <a:off x="4370832" y="2258568"/>
             <a:ext cx="1828800" cy="292608"/>
           </a:xfrm>
           <a:prstGeom prst="rect">
@@ -25958,13 +26004,13 @@
             <a:r>
               <a:rPr lang="en-US" sz="1300" b="1" dirty="0">
                 <a:solidFill>
-                  <a:srgbClr val="0F766E"/>
+                  <a:srgbClr val="9D174D"/>
                 </a:solidFill>
                 <a:latin typeface="Trebuchet MS" pitchFamily="34" charset="0"/>
                 <a:ea typeface="Trebuchet MS" pitchFamily="34" charset="-122"/>
                 <a:cs typeface="Trebuchet MS" pitchFamily="34" charset="-120"/>
               </a:rPr>
-              <a:t>scope</a:t>
+              <a:t>o</a:t>
             </a:r>
             <a:endParaRPr lang="en-US" sz="1300" dirty="0"/>
           </a:p>
@@ -25978,7 +26024,7 @@
         </p:nvSpPr>
         <p:spPr>
           <a:xfrm>
-            <a:off x="5803392" y="2569464"/>
+            <a:off x="4370832" y="2569464"/>
             <a:ext cx="1828800" cy="201168"/>
           </a:xfrm>
           <a:prstGeom prst="rect">
@@ -26003,7 +26049,7 @@
                 <a:ea typeface="Calibri" pitchFamily="34" charset="-122"/>
                 <a:cs typeface="Calibri" pitchFamily="34" charset="-120"/>
               </a:rPr>
-              <a:t>to look, view</a:t>
+              <a:t>connecting vowel</a:t>
             </a:r>
             <a:endParaRPr lang="en-US" sz="850" dirty="0"/>
           </a:p>
@@ -26011,7 +26057,158 @@
       </p:sp>
       <p:sp>
         <p:nvSpPr>
-          <p:cNvPr id="22" name="Shape 20"/>
+          <p:cNvPr id="22" name="Text 20"/>
+          <p:cNvSpPr/>
+          <p:nvPr/>
+        </p:nvSpPr>
+        <p:spPr>
+          <a:xfrm>
+            <a:off x="4370832" y="2752344"/>
+            <a:ext cx="1828800" cy="182880"/>
+          </a:xfrm>
+          <a:prstGeom prst="rect">
+            <a:avLst/>
+          </a:prstGeom>
+          <a:noFill/>
+          <a:ln/>
+        </p:spPr>
+        <p:txBody>
+          <a:bodyPr wrap="square" lIns="0" tIns="0" rIns="0" bIns="0" rtlCol="0" anchor="t"/>
+          <a:lstStyle/>
+          <a:p>
+            <a:pPr algn="ctr" indent="0" marL="0">
+              <a:buNone/>
+            </a:pPr>
+            <a:r>
+              <a:rPr lang="en-US" sz="700" i="1" dirty="0">
+                <a:solidFill>
+                  <a:srgbClr val="94A3B8"/>
+                </a:solidFill>
+                <a:latin typeface="Calibri" pitchFamily="34" charset="0"/>
+                <a:ea typeface="Calibri" pitchFamily="34" charset="-122"/>
+                <a:cs typeface="Calibri" pitchFamily="34" charset="-120"/>
+              </a:rPr>
+              <a:t>links base to root</a:t>
+            </a:r>
+            <a:endParaRPr lang="en-US" sz="700" dirty="0"/>
+          </a:p>
+        </p:txBody>
+      </p:sp>
+      <p:sp>
+        <p:nvSpPr>
+          <p:cNvPr id="23" name="Shape 21"/>
+          <p:cNvSpPr/>
+          <p:nvPr/>
+        </p:nvSpPr>
+        <p:spPr>
+          <a:xfrm>
+            <a:off x="6519672" y="2258568"/>
+            <a:ext cx="1828800" cy="292608"/>
+          </a:xfrm>
+          <a:prstGeom prst="rect">
+            <a:avLst>
+              <a:gd name="adj" fmla="val 25000"/>
+            </a:avLst>
+          </a:prstGeom>
+          <a:solidFill>
+            <a:srgbClr val="CCFBF1"/>
+          </a:solidFill>
+          <a:ln w="19050">
+            <a:solidFill>
+              <a:srgbClr val="0D9488"/>
+            </a:solidFill>
+            <a:prstDash val="solid"/>
+          </a:ln>
+          <a:effectLst>
+            <a:outerShdw sx="100000" sy="100000" kx="0" ky="0" algn="bl" rotWithShape="0" blurRad="101600" dist="38100" dir="8100000">
+              <a:srgbClr val="000000">
+                <a:alpha val="12000"/>
+              </a:srgbClr>
+            </a:outerShdw>
+          </a:effectLst>
+        </p:spPr>
+      </p:sp>
+      <p:sp>
+        <p:nvSpPr>
+          <p:cNvPr id="24" name="Text 22"/>
+          <p:cNvSpPr/>
+          <p:nvPr/>
+        </p:nvSpPr>
+        <p:spPr>
+          <a:xfrm>
+            <a:off x="6519672" y="2258568"/>
+            <a:ext cx="1828800" cy="292608"/>
+          </a:xfrm>
+          <a:prstGeom prst="rect">
+            <a:avLst/>
+          </a:prstGeom>
+          <a:noFill/>
+          <a:ln/>
+        </p:spPr>
+        <p:txBody>
+          <a:bodyPr wrap="square" lIns="0" tIns="0" rIns="0" bIns="0" rtlCol="0" anchor="ctr"/>
+          <a:lstStyle/>
+          <a:p>
+            <a:pPr algn="ctr" indent="0" marL="0">
+              <a:buNone/>
+            </a:pPr>
+            <a:r>
+              <a:rPr lang="en-US" sz="1300" b="1" dirty="0">
+                <a:solidFill>
+                  <a:srgbClr val="0F766E"/>
+                </a:solidFill>
+                <a:latin typeface="Trebuchet MS" pitchFamily="34" charset="0"/>
+                <a:ea typeface="Trebuchet MS" pitchFamily="34" charset="-122"/>
+                <a:cs typeface="Trebuchet MS" pitchFamily="34" charset="-120"/>
+              </a:rPr>
+              <a:t>scope</a:t>
+            </a:r>
+            <a:endParaRPr lang="en-US" sz="1300" dirty="0"/>
+          </a:p>
+        </p:txBody>
+      </p:sp>
+      <p:sp>
+        <p:nvSpPr>
+          <p:cNvPr id="25" name="Text 23"/>
+          <p:cNvSpPr/>
+          <p:nvPr/>
+        </p:nvSpPr>
+        <p:spPr>
+          <a:xfrm>
+            <a:off x="6519672" y="2569464"/>
+            <a:ext cx="1828800" cy="201168"/>
+          </a:xfrm>
+          <a:prstGeom prst="rect">
+            <a:avLst/>
+          </a:prstGeom>
+          <a:noFill/>
+          <a:ln/>
+        </p:spPr>
+        <p:txBody>
+          <a:bodyPr wrap="square" lIns="0" tIns="0" rIns="0" bIns="0" rtlCol="0" anchor="t"/>
+          <a:lstStyle/>
+          <a:p>
+            <a:pPr algn="ctr" indent="0" marL="0">
+              <a:buNone/>
+            </a:pPr>
+            <a:r>
+              <a:rPr lang="en-US" sz="850" dirty="0">
+                <a:solidFill>
+                  <a:srgbClr val="475569"/>
+                </a:solidFill>
+                <a:latin typeface="Calibri" pitchFamily="34" charset="0"/>
+                <a:ea typeface="Calibri" pitchFamily="34" charset="-122"/>
+                <a:cs typeface="Calibri" pitchFamily="34" charset="-120"/>
+              </a:rPr>
+              <a:t>to look or observe</a:t>
+            </a:r>
+            <a:endParaRPr lang="en-US" sz="850" dirty="0"/>
+          </a:p>
+        </p:txBody>
+      </p:sp>
+      <p:sp>
+        <p:nvSpPr>
+          <p:cNvPr id="26" name="Shape 24"/>
           <p:cNvSpPr/>
           <p:nvPr/>
         </p:nvSpPr>
@@ -26038,7 +26235,7 @@
       </p:sp>
       <p:sp>
         <p:nvSpPr>
-          <p:cNvPr id="23" name="Text 21"/>
+          <p:cNvPr id="27" name="Text 25"/>
           <p:cNvSpPr/>
           <p:nvPr/>
         </p:nvSpPr>
@@ -26077,7 +26274,7 @@
       </p:sp>
       <p:sp>
         <p:nvSpPr>
-          <p:cNvPr id="24" name="Shape 22"/>
+          <p:cNvPr id="28" name="Shape 26"/>
           <p:cNvSpPr/>
           <p:nvPr/>
         </p:nvSpPr>
@@ -26104,14 +26301,14 @@
       </p:sp>
       <p:sp>
         <p:nvSpPr>
-          <p:cNvPr id="25" name="Shape 23"/>
-          <p:cNvSpPr/>
-          <p:nvPr/>
-        </p:nvSpPr>
-        <p:spPr>
-          <a:xfrm>
-            <a:off x="2313432" y="3364992"/>
-            <a:ext cx="1645920" cy="475488"/>
+          <p:cNvPr id="29" name="Shape 27"/>
+          <p:cNvSpPr/>
+          <p:nvPr/>
+        </p:nvSpPr>
+        <p:spPr>
+          <a:xfrm>
+            <a:off x="1975104" y="3364992"/>
+            <a:ext cx="1554480" cy="475488"/>
           </a:xfrm>
           <a:prstGeom prst="rect">
             <a:avLst>
@@ -26131,14 +26328,14 @@
       </p:sp>
       <p:sp>
         <p:nvSpPr>
-          <p:cNvPr id="26" name="Text 24"/>
-          <p:cNvSpPr/>
-          <p:nvPr/>
-        </p:nvSpPr>
-        <p:spPr>
-          <a:xfrm>
-            <a:off x="2313432" y="3364992"/>
-            <a:ext cx="1645920" cy="475488"/>
+          <p:cNvPr id="30" name="Text 28"/>
+          <p:cNvSpPr/>
+          <p:nvPr/>
+        </p:nvSpPr>
+        <p:spPr>
+          <a:xfrm>
+            <a:off x="1975104" y="3364992"/>
+            <a:ext cx="1554480" cy="475488"/>
           </a:xfrm>
           <a:prstGeom prst="rect">
             <a:avLst/>
@@ -26162,7 +26359,7 @@
                 <a:ea typeface="Trebuchet MS" pitchFamily="34" charset="-122"/>
                 <a:cs typeface="Trebuchet MS" pitchFamily="34" charset="-120"/>
               </a:rPr>
-              <a:t>per</a:t>
+              <a:t>ka</a:t>
             </a:r>
             <a:endParaRPr lang="en-US" sz="1400" dirty="0"/>
           </a:p>
@@ -26170,14 +26367,14 @@
       </p:sp>
       <p:sp>
         <p:nvSpPr>
-          <p:cNvPr id="27" name="Text 25"/>
-          <p:cNvSpPr/>
-          <p:nvPr/>
-        </p:nvSpPr>
-        <p:spPr>
-          <a:xfrm>
-            <a:off x="3959352" y="3364992"/>
-            <a:ext cx="411480" cy="475488"/>
+          <p:cNvPr id="31" name="Text 29"/>
+          <p:cNvSpPr/>
+          <p:nvPr/>
+        </p:nvSpPr>
+        <p:spPr>
+          <a:xfrm>
+            <a:off x="3529584" y="3364992"/>
+            <a:ext cx="73152" cy="475488"/>
           </a:xfrm>
           <a:prstGeom prst="rect">
             <a:avLst/>
@@ -26209,14 +26406,14 @@
       </p:sp>
       <p:sp>
         <p:nvSpPr>
-          <p:cNvPr id="28" name="Shape 26"/>
-          <p:cNvSpPr/>
-          <p:nvPr/>
-        </p:nvSpPr>
-        <p:spPr>
-          <a:xfrm>
-            <a:off x="4370832" y="3364992"/>
-            <a:ext cx="1645920" cy="475488"/>
+          <p:cNvPr id="32" name="Shape 30"/>
+          <p:cNvSpPr/>
+          <p:nvPr/>
+        </p:nvSpPr>
+        <p:spPr>
+          <a:xfrm>
+            <a:off x="3602736" y="3364992"/>
+            <a:ext cx="1554480" cy="475488"/>
           </a:xfrm>
           <a:prstGeom prst="rect">
             <a:avLst>
@@ -26236,14 +26433,14 @@
       </p:sp>
       <p:sp>
         <p:nvSpPr>
-          <p:cNvPr id="29" name="Text 27"/>
-          <p:cNvSpPr/>
-          <p:nvPr/>
-        </p:nvSpPr>
-        <p:spPr>
-          <a:xfrm>
-            <a:off x="4370832" y="3364992"/>
-            <a:ext cx="1645920" cy="475488"/>
+          <p:cNvPr id="33" name="Text 31"/>
+          <p:cNvSpPr/>
+          <p:nvPr/>
+        </p:nvSpPr>
+        <p:spPr>
+          <a:xfrm>
+            <a:off x="3602736" y="3364992"/>
+            <a:ext cx="1554480" cy="475488"/>
           </a:xfrm>
           <a:prstGeom prst="rect">
             <a:avLst/>
@@ -26267,7 +26464,7 @@
                 <a:ea typeface="Trebuchet MS" pitchFamily="34" charset="-122"/>
                 <a:cs typeface="Trebuchet MS" pitchFamily="34" charset="-120"/>
               </a:rPr>
-              <a:t>i</a:t>
+              <a:t>lei</a:t>
             </a:r>
             <a:endParaRPr lang="en-US" sz="1400" dirty="0"/>
           </a:p>
@@ -26275,14 +26472,14 @@
       </p:sp>
       <p:sp>
         <p:nvSpPr>
-          <p:cNvPr id="30" name="Text 28"/>
-          <p:cNvSpPr/>
-          <p:nvPr/>
-        </p:nvSpPr>
-        <p:spPr>
-          <a:xfrm>
-            <a:off x="6016752" y="3364992"/>
-            <a:ext cx="411480" cy="475488"/>
+          <p:cNvPr id="34" name="Text 32"/>
+          <p:cNvSpPr/>
+          <p:nvPr/>
+        </p:nvSpPr>
+        <p:spPr>
+          <a:xfrm>
+            <a:off x="5157216" y="3364992"/>
+            <a:ext cx="73152" cy="475488"/>
           </a:xfrm>
           <a:prstGeom prst="rect">
             <a:avLst/>
@@ -26314,14 +26511,14 @@
       </p:sp>
       <p:sp>
         <p:nvSpPr>
-          <p:cNvPr id="31" name="Shape 29"/>
-          <p:cNvSpPr/>
-          <p:nvPr/>
-        </p:nvSpPr>
-        <p:spPr>
-          <a:xfrm>
-            <a:off x="6428232" y="3364992"/>
-            <a:ext cx="1645920" cy="475488"/>
+          <p:cNvPr id="35" name="Shape 33"/>
+          <p:cNvSpPr/>
+          <p:nvPr/>
+        </p:nvSpPr>
+        <p:spPr>
+          <a:xfrm>
+            <a:off x="5230368" y="3364992"/>
+            <a:ext cx="1554480" cy="475488"/>
           </a:xfrm>
           <a:prstGeom prst="rect">
             <a:avLst>
@@ -26341,14 +26538,14 @@
       </p:sp>
       <p:sp>
         <p:nvSpPr>
-          <p:cNvPr id="32" name="Text 30"/>
-          <p:cNvSpPr/>
-          <p:nvPr/>
-        </p:nvSpPr>
-        <p:spPr>
-          <a:xfrm>
-            <a:off x="6428232" y="3364992"/>
-            <a:ext cx="1645920" cy="475488"/>
+          <p:cNvPr id="36" name="Text 34"/>
+          <p:cNvSpPr/>
+          <p:nvPr/>
+        </p:nvSpPr>
+        <p:spPr>
+          <a:xfrm>
+            <a:off x="5230368" y="3364992"/>
+            <a:ext cx="1554480" cy="475488"/>
           </a:xfrm>
           <a:prstGeom prst="rect">
             <a:avLst/>
@@ -26372,6 +26569,111 @@
                 <a:ea typeface="Trebuchet MS" pitchFamily="34" charset="-122"/>
                 <a:cs typeface="Trebuchet MS" pitchFamily="34" charset="-120"/>
               </a:rPr>
+              <a:t>do</a:t>
+            </a:r>
+            <a:endParaRPr lang="en-US" sz="1400" dirty="0"/>
+          </a:p>
+        </p:txBody>
+      </p:sp>
+      <p:sp>
+        <p:nvSpPr>
+          <p:cNvPr id="37" name="Text 35"/>
+          <p:cNvSpPr/>
+          <p:nvPr/>
+        </p:nvSpPr>
+        <p:spPr>
+          <a:xfrm>
+            <a:off x="6784848" y="3364992"/>
+            <a:ext cx="73152" cy="475488"/>
+          </a:xfrm>
+          <a:prstGeom prst="rect">
+            <a:avLst/>
+          </a:prstGeom>
+          <a:noFill/>
+          <a:ln/>
+        </p:spPr>
+        <p:txBody>
+          <a:bodyPr wrap="square" lIns="0" tIns="0" rIns="0" bIns="0" rtlCol="0" anchor="ctr"/>
+          <a:lstStyle/>
+          <a:p>
+            <a:pPr algn="ctr" indent="0" marL="0">
+              <a:buNone/>
+            </a:pPr>
+            <a:r>
+              <a:rPr lang="en-US" sz="1600" b="1" dirty="0">
+                <a:solidFill>
+                  <a:srgbClr val="0D9488"/>
+                </a:solidFill>
+                <a:latin typeface="Trebuchet MS" pitchFamily="34" charset="0"/>
+                <a:ea typeface="Trebuchet MS" pitchFamily="34" charset="-122"/>
+                <a:cs typeface="Trebuchet MS" pitchFamily="34" charset="-120"/>
+              </a:rPr>
+              <a:t>·</a:t>
+            </a:r>
+            <a:endParaRPr lang="en-US" sz="1600" dirty="0"/>
+          </a:p>
+        </p:txBody>
+      </p:sp>
+      <p:sp>
+        <p:nvSpPr>
+          <p:cNvPr id="38" name="Shape 36"/>
+          <p:cNvSpPr/>
+          <p:nvPr/>
+        </p:nvSpPr>
+        <p:spPr>
+          <a:xfrm>
+            <a:off x="6858000" y="3364992"/>
+            <a:ext cx="1554480" cy="475488"/>
+          </a:xfrm>
+          <a:prstGeom prst="rect">
+            <a:avLst>
+              <a:gd name="adj" fmla="val 9615"/>
+            </a:avLst>
+          </a:prstGeom>
+          <a:solidFill>
+            <a:srgbClr val="FFFFFF"/>
+          </a:solidFill>
+          <a:ln w="12700">
+            <a:solidFill>
+              <a:srgbClr val="0D9488"/>
+            </a:solidFill>
+            <a:prstDash val="solid"/>
+          </a:ln>
+        </p:spPr>
+      </p:sp>
+      <p:sp>
+        <p:nvSpPr>
+          <p:cNvPr id="39" name="Text 37"/>
+          <p:cNvSpPr/>
+          <p:nvPr/>
+        </p:nvSpPr>
+        <p:spPr>
+          <a:xfrm>
+            <a:off x="6858000" y="3364992"/>
+            <a:ext cx="1554480" cy="475488"/>
+          </a:xfrm>
+          <a:prstGeom prst="rect">
+            <a:avLst/>
+          </a:prstGeom>
+          <a:noFill/>
+          <a:ln/>
+        </p:spPr>
+        <p:txBody>
+          <a:bodyPr wrap="square" lIns="0" tIns="0" rIns="0" bIns="0" rtlCol="0" anchor="ctr"/>
+          <a:lstStyle/>
+          <a:p>
+            <a:pPr algn="ctr" indent="0" marL="0">
+              <a:buNone/>
+            </a:pPr>
+            <a:r>
+              <a:rPr lang="en-US" sz="1400" b="1" dirty="0">
+                <a:solidFill>
+                  <a:srgbClr val="0D9488"/>
+                </a:solidFill>
+                <a:latin typeface="Trebuchet MS" pitchFamily="34" charset="0"/>
+                <a:ea typeface="Trebuchet MS" pitchFamily="34" charset="-122"/>
+                <a:cs typeface="Trebuchet MS" pitchFamily="34" charset="-120"/>
+              </a:rPr>
               <a:t>scope</a:t>
             </a:r>
             <a:endParaRPr lang="en-US" sz="1400" dirty="0"/>
@@ -26380,7 +26682,7 @@
       </p:sp>
       <p:sp>
         <p:nvSpPr>
-          <p:cNvPr id="33" name="Shape 31"/>
+          <p:cNvPr id="40" name="Shape 38"/>
           <p:cNvSpPr/>
           <p:nvPr/>
         </p:nvSpPr>
@@ -26407,7 +26709,7 @@
       </p:sp>
       <p:sp>
         <p:nvSpPr>
-          <p:cNvPr id="34" name="Text 32"/>
+          <p:cNvPr id="41" name="Text 39"/>
           <p:cNvSpPr/>
           <p:nvPr/>
         </p:nvSpPr>
@@ -26446,7 +26748,7 @@
       </p:sp>
       <p:sp>
         <p:nvSpPr>
-          <p:cNvPr id="35" name="Shape 33"/>
+          <p:cNvPr id="42" name="Shape 40"/>
           <p:cNvSpPr/>
           <p:nvPr/>
         </p:nvSpPr>
@@ -26473,7 +26775,7 @@
       </p:sp>
       <p:sp>
         <p:nvSpPr>
-          <p:cNvPr id="36" name="Text 34"/>
+          <p:cNvPr id="43" name="Text 41"/>
           <p:cNvSpPr/>
           <p:nvPr/>
         </p:nvSpPr>
@@ -26796,7 +27098,7 @@
                 <a:ea typeface="Calibri" pitchFamily="34" charset="-122"/>
                 <a:cs typeface="Calibri" pitchFamily="34" charset="-120"/>
               </a:rPr>
-              <a:t>Word Labs  •  wordlabs.app  •  Root: 'scope' = to look, view, or observe</a:t>
+              <a:t>Word Labs  •  wordlabs.app  •  Root: 'scope' = to look, see, observe</a:t>
             </a:r>
             <a:endParaRPr lang="en-US" sz="800" dirty="0"/>
           </a:p>
@@ -26935,7 +27237,7 @@
                 <a:ea typeface="Trebuchet MS" pitchFamily="34" charset="-122"/>
                 <a:cs typeface="Trebuchet MS" pitchFamily="34" charset="-120"/>
               </a:rPr>
-              <a:t>periscope</a:t>
+              <a:t>kaleidoscope</a:t>
             </a:r>
             <a:endParaRPr lang="en-US" sz="2800" dirty="0"/>
           </a:p>
@@ -27015,7 +27317,7 @@
         </p:nvSpPr>
         <p:spPr>
           <a:xfrm>
-            <a:off x="2938272" y="2258568"/>
+            <a:off x="2221992" y="2258568"/>
             <a:ext cx="1828800" cy="292608"/>
           </a:xfrm>
           <a:prstGeom prst="rect">
@@ -27049,7 +27351,7 @@
         </p:nvSpPr>
         <p:spPr>
           <a:xfrm>
-            <a:off x="2938272" y="2258568"/>
+            <a:off x="2221992" y="2258568"/>
             <a:ext cx="1828800" cy="292608"/>
           </a:xfrm>
           <a:prstGeom prst="rect">
@@ -27074,7 +27376,7 @@
                 <a:ea typeface="Trebuchet MS" pitchFamily="34" charset="-122"/>
                 <a:cs typeface="Trebuchet MS" pitchFamily="34" charset="-120"/>
               </a:rPr>
-              <a:t>peri</a:t>
+              <a:t>kaleid</a:t>
             </a:r>
             <a:endParaRPr lang="en-US" sz="1300" dirty="0"/>
           </a:p>
@@ -27088,7 +27390,7 @@
         </p:nvSpPr>
         <p:spPr>
           <a:xfrm>
-            <a:off x="2938272" y="2569464"/>
+            <a:off x="2221992" y="2569464"/>
             <a:ext cx="1828800" cy="201168"/>
           </a:xfrm>
           <a:prstGeom prst="rect">
@@ -27113,7 +27415,7 @@
                 <a:ea typeface="Calibri" pitchFamily="34" charset="-122"/>
                 <a:cs typeface="Calibri" pitchFamily="34" charset="-120"/>
               </a:rPr>
-              <a:t>around, near</a:t>
+              <a:t>beautiful form</a:t>
             </a:r>
             <a:endParaRPr lang="en-US" sz="850" dirty="0"/>
           </a:p>
@@ -27127,7 +27429,7 @@
         </p:nvSpPr>
         <p:spPr>
           <a:xfrm>
-            <a:off x="5803392" y="2258568"/>
+            <a:off x="4370832" y="2258568"/>
             <a:ext cx="1828800" cy="292608"/>
           </a:xfrm>
           <a:prstGeom prst="rect">
@@ -27136,11 +27438,11 @@
             </a:avLst>
           </a:prstGeom>
           <a:solidFill>
-            <a:srgbClr val="CCFBF1"/>
+            <a:srgbClr val="FCE7F3"/>
           </a:solidFill>
           <a:ln w="19050">
             <a:solidFill>
-              <a:srgbClr val="0D9488"/>
+              <a:srgbClr val="DB2777"/>
             </a:solidFill>
             <a:prstDash val="solid"/>
           </a:ln>
@@ -27161,7 +27463,7 @@
         </p:nvSpPr>
         <p:spPr>
           <a:xfrm>
-            <a:off x="5803392" y="2258568"/>
+            <a:off x="4370832" y="2258568"/>
             <a:ext cx="1828800" cy="292608"/>
           </a:xfrm>
           <a:prstGeom prst="rect">
@@ -27180,13 +27482,13 @@
             <a:r>
               <a:rPr lang="en-US" sz="1300" b="1" dirty="0">
                 <a:solidFill>
-                  <a:srgbClr val="0F766E"/>
+                  <a:srgbClr val="9D174D"/>
                 </a:solidFill>
                 <a:latin typeface="Trebuchet MS" pitchFamily="34" charset="0"/>
                 <a:ea typeface="Trebuchet MS" pitchFamily="34" charset="-122"/>
                 <a:cs typeface="Trebuchet MS" pitchFamily="34" charset="-120"/>
               </a:rPr>
-              <a:t>scope</a:t>
+              <a:t>o</a:t>
             </a:r>
             <a:endParaRPr lang="en-US" sz="1300" dirty="0"/>
           </a:p>
@@ -27200,7 +27502,7 @@
         </p:nvSpPr>
         <p:spPr>
           <a:xfrm>
-            <a:off x="5803392" y="2569464"/>
+            <a:off x="4370832" y="2569464"/>
             <a:ext cx="1828800" cy="201168"/>
           </a:xfrm>
           <a:prstGeom prst="rect">
@@ -27225,7 +27527,7 @@
                 <a:ea typeface="Calibri" pitchFamily="34" charset="-122"/>
                 <a:cs typeface="Calibri" pitchFamily="34" charset="-120"/>
               </a:rPr>
-              <a:t>to look, view</a:t>
+              <a:t>connecting vowel</a:t>
             </a:r>
             <a:endParaRPr lang="en-US" sz="850" dirty="0"/>
           </a:p>
@@ -27233,7 +27535,158 @@
       </p:sp>
       <p:sp>
         <p:nvSpPr>
-          <p:cNvPr id="22" name="Shape 20"/>
+          <p:cNvPr id="22" name="Text 20"/>
+          <p:cNvSpPr/>
+          <p:nvPr/>
+        </p:nvSpPr>
+        <p:spPr>
+          <a:xfrm>
+            <a:off x="4370832" y="2752344"/>
+            <a:ext cx="1828800" cy="182880"/>
+          </a:xfrm>
+          <a:prstGeom prst="rect">
+            <a:avLst/>
+          </a:prstGeom>
+          <a:noFill/>
+          <a:ln/>
+        </p:spPr>
+        <p:txBody>
+          <a:bodyPr wrap="square" lIns="0" tIns="0" rIns="0" bIns="0" rtlCol="0" anchor="t"/>
+          <a:lstStyle/>
+          <a:p>
+            <a:pPr algn="ctr" indent="0" marL="0">
+              <a:buNone/>
+            </a:pPr>
+            <a:r>
+              <a:rPr lang="en-US" sz="700" i="1" dirty="0">
+                <a:solidFill>
+                  <a:srgbClr val="94A3B8"/>
+                </a:solidFill>
+                <a:latin typeface="Calibri" pitchFamily="34" charset="0"/>
+                <a:ea typeface="Calibri" pitchFamily="34" charset="-122"/>
+                <a:cs typeface="Calibri" pitchFamily="34" charset="-120"/>
+              </a:rPr>
+              <a:t>links base to root</a:t>
+            </a:r>
+            <a:endParaRPr lang="en-US" sz="700" dirty="0"/>
+          </a:p>
+        </p:txBody>
+      </p:sp>
+      <p:sp>
+        <p:nvSpPr>
+          <p:cNvPr id="23" name="Shape 21"/>
+          <p:cNvSpPr/>
+          <p:nvPr/>
+        </p:nvSpPr>
+        <p:spPr>
+          <a:xfrm>
+            <a:off x="6519672" y="2258568"/>
+            <a:ext cx="1828800" cy="292608"/>
+          </a:xfrm>
+          <a:prstGeom prst="rect">
+            <a:avLst>
+              <a:gd name="adj" fmla="val 25000"/>
+            </a:avLst>
+          </a:prstGeom>
+          <a:solidFill>
+            <a:srgbClr val="CCFBF1"/>
+          </a:solidFill>
+          <a:ln w="19050">
+            <a:solidFill>
+              <a:srgbClr val="0D9488"/>
+            </a:solidFill>
+            <a:prstDash val="solid"/>
+          </a:ln>
+          <a:effectLst>
+            <a:outerShdw sx="100000" sy="100000" kx="0" ky="0" algn="bl" rotWithShape="0" blurRad="101600" dist="38100" dir="8100000">
+              <a:srgbClr val="000000">
+                <a:alpha val="12000"/>
+              </a:srgbClr>
+            </a:outerShdw>
+          </a:effectLst>
+        </p:spPr>
+      </p:sp>
+      <p:sp>
+        <p:nvSpPr>
+          <p:cNvPr id="24" name="Text 22"/>
+          <p:cNvSpPr/>
+          <p:nvPr/>
+        </p:nvSpPr>
+        <p:spPr>
+          <a:xfrm>
+            <a:off x="6519672" y="2258568"/>
+            <a:ext cx="1828800" cy="292608"/>
+          </a:xfrm>
+          <a:prstGeom prst="rect">
+            <a:avLst/>
+          </a:prstGeom>
+          <a:noFill/>
+          <a:ln/>
+        </p:spPr>
+        <p:txBody>
+          <a:bodyPr wrap="square" lIns="0" tIns="0" rIns="0" bIns="0" rtlCol="0" anchor="ctr"/>
+          <a:lstStyle/>
+          <a:p>
+            <a:pPr algn="ctr" indent="0" marL="0">
+              <a:buNone/>
+            </a:pPr>
+            <a:r>
+              <a:rPr lang="en-US" sz="1300" b="1" dirty="0">
+                <a:solidFill>
+                  <a:srgbClr val="0F766E"/>
+                </a:solidFill>
+                <a:latin typeface="Trebuchet MS" pitchFamily="34" charset="0"/>
+                <a:ea typeface="Trebuchet MS" pitchFamily="34" charset="-122"/>
+                <a:cs typeface="Trebuchet MS" pitchFamily="34" charset="-120"/>
+              </a:rPr>
+              <a:t>scope</a:t>
+            </a:r>
+            <a:endParaRPr lang="en-US" sz="1300" dirty="0"/>
+          </a:p>
+        </p:txBody>
+      </p:sp>
+      <p:sp>
+        <p:nvSpPr>
+          <p:cNvPr id="25" name="Text 23"/>
+          <p:cNvSpPr/>
+          <p:nvPr/>
+        </p:nvSpPr>
+        <p:spPr>
+          <a:xfrm>
+            <a:off x="6519672" y="2569464"/>
+            <a:ext cx="1828800" cy="201168"/>
+          </a:xfrm>
+          <a:prstGeom prst="rect">
+            <a:avLst/>
+          </a:prstGeom>
+          <a:noFill/>
+          <a:ln/>
+        </p:spPr>
+        <p:txBody>
+          <a:bodyPr wrap="square" lIns="0" tIns="0" rIns="0" bIns="0" rtlCol="0" anchor="t"/>
+          <a:lstStyle/>
+          <a:p>
+            <a:pPr algn="ctr" indent="0" marL="0">
+              <a:buNone/>
+            </a:pPr>
+            <a:r>
+              <a:rPr lang="en-US" sz="850" dirty="0">
+                <a:solidFill>
+                  <a:srgbClr val="475569"/>
+                </a:solidFill>
+                <a:latin typeface="Calibri" pitchFamily="34" charset="0"/>
+                <a:ea typeface="Calibri" pitchFamily="34" charset="-122"/>
+                <a:cs typeface="Calibri" pitchFamily="34" charset="-120"/>
+              </a:rPr>
+              <a:t>to look or observe</a:t>
+            </a:r>
+            <a:endParaRPr lang="en-US" sz="850" dirty="0"/>
+          </a:p>
+        </p:txBody>
+      </p:sp>
+      <p:sp>
+        <p:nvSpPr>
+          <p:cNvPr id="26" name="Shape 24"/>
           <p:cNvSpPr/>
           <p:nvPr/>
         </p:nvSpPr>
@@ -27260,7 +27713,7 @@
       </p:sp>
       <p:sp>
         <p:nvSpPr>
-          <p:cNvPr id="23" name="Text 21"/>
+          <p:cNvPr id="27" name="Text 25"/>
           <p:cNvSpPr/>
           <p:nvPr/>
         </p:nvSpPr>
@@ -27299,7 +27752,7 @@
       </p:sp>
       <p:sp>
         <p:nvSpPr>
-          <p:cNvPr id="24" name="Shape 22"/>
+          <p:cNvPr id="28" name="Shape 26"/>
           <p:cNvSpPr/>
           <p:nvPr/>
         </p:nvSpPr>
@@ -27326,14 +27779,14 @@
       </p:sp>
       <p:sp>
         <p:nvSpPr>
-          <p:cNvPr id="25" name="Shape 23"/>
-          <p:cNvSpPr/>
-          <p:nvPr/>
-        </p:nvSpPr>
-        <p:spPr>
-          <a:xfrm>
-            <a:off x="2313432" y="3364992"/>
-            <a:ext cx="1645920" cy="475488"/>
+          <p:cNvPr id="29" name="Shape 27"/>
+          <p:cNvSpPr/>
+          <p:nvPr/>
+        </p:nvSpPr>
+        <p:spPr>
+          <a:xfrm>
+            <a:off x="1975104" y="3364992"/>
+            <a:ext cx="1554480" cy="475488"/>
           </a:xfrm>
           <a:prstGeom prst="rect">
             <a:avLst>
@@ -27353,14 +27806,14 @@
       </p:sp>
       <p:sp>
         <p:nvSpPr>
-          <p:cNvPr id="26" name="Text 24"/>
-          <p:cNvSpPr/>
-          <p:nvPr/>
-        </p:nvSpPr>
-        <p:spPr>
-          <a:xfrm>
-            <a:off x="2313432" y="3364992"/>
-            <a:ext cx="1645920" cy="475488"/>
+          <p:cNvPr id="30" name="Text 28"/>
+          <p:cNvSpPr/>
+          <p:nvPr/>
+        </p:nvSpPr>
+        <p:spPr>
+          <a:xfrm>
+            <a:off x="1975104" y="3364992"/>
+            <a:ext cx="1554480" cy="475488"/>
           </a:xfrm>
           <a:prstGeom prst="rect">
             <a:avLst/>
@@ -27384,7 +27837,7 @@
                 <a:ea typeface="Trebuchet MS" pitchFamily="34" charset="-122"/>
                 <a:cs typeface="Trebuchet MS" pitchFamily="34" charset="-120"/>
               </a:rPr>
-              <a:t>per</a:t>
+              <a:t>ka</a:t>
             </a:r>
             <a:endParaRPr lang="en-US" sz="1400" dirty="0"/>
           </a:p>
@@ -27392,14 +27845,14 @@
       </p:sp>
       <p:sp>
         <p:nvSpPr>
-          <p:cNvPr id="27" name="Text 25"/>
-          <p:cNvSpPr/>
-          <p:nvPr/>
-        </p:nvSpPr>
-        <p:spPr>
-          <a:xfrm>
-            <a:off x="3959352" y="3364992"/>
-            <a:ext cx="411480" cy="475488"/>
+          <p:cNvPr id="31" name="Text 29"/>
+          <p:cNvSpPr/>
+          <p:nvPr/>
+        </p:nvSpPr>
+        <p:spPr>
+          <a:xfrm>
+            <a:off x="3529584" y="3364992"/>
+            <a:ext cx="73152" cy="475488"/>
           </a:xfrm>
           <a:prstGeom prst="rect">
             <a:avLst/>
@@ -27431,14 +27884,14 @@
       </p:sp>
       <p:sp>
         <p:nvSpPr>
-          <p:cNvPr id="28" name="Shape 26"/>
-          <p:cNvSpPr/>
-          <p:nvPr/>
-        </p:nvSpPr>
-        <p:spPr>
-          <a:xfrm>
-            <a:off x="4370832" y="3364992"/>
-            <a:ext cx="1645920" cy="475488"/>
+          <p:cNvPr id="32" name="Shape 30"/>
+          <p:cNvSpPr/>
+          <p:nvPr/>
+        </p:nvSpPr>
+        <p:spPr>
+          <a:xfrm>
+            <a:off x="3602736" y="3364992"/>
+            <a:ext cx="1554480" cy="475488"/>
           </a:xfrm>
           <a:prstGeom prst="rect">
             <a:avLst>
@@ -27458,14 +27911,14 @@
       </p:sp>
       <p:sp>
         <p:nvSpPr>
-          <p:cNvPr id="29" name="Text 27"/>
-          <p:cNvSpPr/>
-          <p:nvPr/>
-        </p:nvSpPr>
-        <p:spPr>
-          <a:xfrm>
-            <a:off x="4370832" y="3364992"/>
-            <a:ext cx="1645920" cy="475488"/>
+          <p:cNvPr id="33" name="Text 31"/>
+          <p:cNvSpPr/>
+          <p:nvPr/>
+        </p:nvSpPr>
+        <p:spPr>
+          <a:xfrm>
+            <a:off x="3602736" y="3364992"/>
+            <a:ext cx="1554480" cy="475488"/>
           </a:xfrm>
           <a:prstGeom prst="rect">
             <a:avLst/>
@@ -27489,7 +27942,7 @@
                 <a:ea typeface="Trebuchet MS" pitchFamily="34" charset="-122"/>
                 <a:cs typeface="Trebuchet MS" pitchFamily="34" charset="-120"/>
               </a:rPr>
-              <a:t>i</a:t>
+              <a:t>lei</a:t>
             </a:r>
             <a:endParaRPr lang="en-US" sz="1400" dirty="0"/>
           </a:p>
@@ -27497,14 +27950,14 @@
       </p:sp>
       <p:sp>
         <p:nvSpPr>
-          <p:cNvPr id="30" name="Text 28"/>
-          <p:cNvSpPr/>
-          <p:nvPr/>
-        </p:nvSpPr>
-        <p:spPr>
-          <a:xfrm>
-            <a:off x="6016752" y="3364992"/>
-            <a:ext cx="411480" cy="475488"/>
+          <p:cNvPr id="34" name="Text 32"/>
+          <p:cNvSpPr/>
+          <p:nvPr/>
+        </p:nvSpPr>
+        <p:spPr>
+          <a:xfrm>
+            <a:off x="5157216" y="3364992"/>
+            <a:ext cx="73152" cy="475488"/>
           </a:xfrm>
           <a:prstGeom prst="rect">
             <a:avLst/>
@@ -27536,14 +27989,14 @@
       </p:sp>
       <p:sp>
         <p:nvSpPr>
-          <p:cNvPr id="31" name="Shape 29"/>
-          <p:cNvSpPr/>
-          <p:nvPr/>
-        </p:nvSpPr>
-        <p:spPr>
-          <a:xfrm>
-            <a:off x="6428232" y="3364992"/>
-            <a:ext cx="1645920" cy="475488"/>
+          <p:cNvPr id="35" name="Shape 33"/>
+          <p:cNvSpPr/>
+          <p:nvPr/>
+        </p:nvSpPr>
+        <p:spPr>
+          <a:xfrm>
+            <a:off x="5230368" y="3364992"/>
+            <a:ext cx="1554480" cy="475488"/>
           </a:xfrm>
           <a:prstGeom prst="rect">
             <a:avLst>
@@ -27563,14 +28016,14 @@
       </p:sp>
       <p:sp>
         <p:nvSpPr>
-          <p:cNvPr id="32" name="Text 30"/>
-          <p:cNvSpPr/>
-          <p:nvPr/>
-        </p:nvSpPr>
-        <p:spPr>
-          <a:xfrm>
-            <a:off x="6428232" y="3364992"/>
-            <a:ext cx="1645920" cy="475488"/>
+          <p:cNvPr id="36" name="Text 34"/>
+          <p:cNvSpPr/>
+          <p:nvPr/>
+        </p:nvSpPr>
+        <p:spPr>
+          <a:xfrm>
+            <a:off x="5230368" y="3364992"/>
+            <a:ext cx="1554480" cy="475488"/>
           </a:xfrm>
           <a:prstGeom prst="rect">
             <a:avLst/>
@@ -27594,6 +28047,111 @@
                 <a:ea typeface="Trebuchet MS" pitchFamily="34" charset="-122"/>
                 <a:cs typeface="Trebuchet MS" pitchFamily="34" charset="-120"/>
               </a:rPr>
+              <a:t>do</a:t>
+            </a:r>
+            <a:endParaRPr lang="en-US" sz="1400" dirty="0"/>
+          </a:p>
+        </p:txBody>
+      </p:sp>
+      <p:sp>
+        <p:nvSpPr>
+          <p:cNvPr id="37" name="Text 35"/>
+          <p:cNvSpPr/>
+          <p:nvPr/>
+        </p:nvSpPr>
+        <p:spPr>
+          <a:xfrm>
+            <a:off x="6784848" y="3364992"/>
+            <a:ext cx="73152" cy="475488"/>
+          </a:xfrm>
+          <a:prstGeom prst="rect">
+            <a:avLst/>
+          </a:prstGeom>
+          <a:noFill/>
+          <a:ln/>
+        </p:spPr>
+        <p:txBody>
+          <a:bodyPr wrap="square" lIns="0" tIns="0" rIns="0" bIns="0" rtlCol="0" anchor="ctr"/>
+          <a:lstStyle/>
+          <a:p>
+            <a:pPr algn="ctr" indent="0" marL="0">
+              <a:buNone/>
+            </a:pPr>
+            <a:r>
+              <a:rPr lang="en-US" sz="1600" b="1" dirty="0">
+                <a:solidFill>
+                  <a:srgbClr val="0D9488"/>
+                </a:solidFill>
+                <a:latin typeface="Trebuchet MS" pitchFamily="34" charset="0"/>
+                <a:ea typeface="Trebuchet MS" pitchFamily="34" charset="-122"/>
+                <a:cs typeface="Trebuchet MS" pitchFamily="34" charset="-120"/>
+              </a:rPr>
+              <a:t>·</a:t>
+            </a:r>
+            <a:endParaRPr lang="en-US" sz="1600" dirty="0"/>
+          </a:p>
+        </p:txBody>
+      </p:sp>
+      <p:sp>
+        <p:nvSpPr>
+          <p:cNvPr id="38" name="Shape 36"/>
+          <p:cNvSpPr/>
+          <p:nvPr/>
+        </p:nvSpPr>
+        <p:spPr>
+          <a:xfrm>
+            <a:off x="6858000" y="3364992"/>
+            <a:ext cx="1554480" cy="475488"/>
+          </a:xfrm>
+          <a:prstGeom prst="rect">
+            <a:avLst>
+              <a:gd name="adj" fmla="val 9615"/>
+            </a:avLst>
+          </a:prstGeom>
+          <a:solidFill>
+            <a:srgbClr val="FFFFFF"/>
+          </a:solidFill>
+          <a:ln w="12700">
+            <a:solidFill>
+              <a:srgbClr val="0D9488"/>
+            </a:solidFill>
+            <a:prstDash val="solid"/>
+          </a:ln>
+        </p:spPr>
+      </p:sp>
+      <p:sp>
+        <p:nvSpPr>
+          <p:cNvPr id="39" name="Text 37"/>
+          <p:cNvSpPr/>
+          <p:nvPr/>
+        </p:nvSpPr>
+        <p:spPr>
+          <a:xfrm>
+            <a:off x="6858000" y="3364992"/>
+            <a:ext cx="1554480" cy="475488"/>
+          </a:xfrm>
+          <a:prstGeom prst="rect">
+            <a:avLst/>
+          </a:prstGeom>
+          <a:noFill/>
+          <a:ln/>
+        </p:spPr>
+        <p:txBody>
+          <a:bodyPr wrap="square" lIns="0" tIns="0" rIns="0" bIns="0" rtlCol="0" anchor="ctr"/>
+          <a:lstStyle/>
+          <a:p>
+            <a:pPr algn="ctr" indent="0" marL="0">
+              <a:buNone/>
+            </a:pPr>
+            <a:r>
+              <a:rPr lang="en-US" sz="1400" b="1" dirty="0">
+                <a:solidFill>
+                  <a:srgbClr val="0D9488"/>
+                </a:solidFill>
+                <a:latin typeface="Trebuchet MS" pitchFamily="34" charset="0"/>
+                <a:ea typeface="Trebuchet MS" pitchFamily="34" charset="-122"/>
+                <a:cs typeface="Trebuchet MS" pitchFamily="34" charset="-120"/>
+              </a:rPr>
               <a:t>scope</a:t>
             </a:r>
             <a:endParaRPr lang="en-US" sz="1400" dirty="0"/>
@@ -27602,7 +28160,7 @@
       </p:sp>
       <p:sp>
         <p:nvSpPr>
-          <p:cNvPr id="33" name="Shape 31"/>
+          <p:cNvPr id="40" name="Shape 38"/>
           <p:cNvSpPr/>
           <p:nvPr/>
         </p:nvSpPr>
@@ -27629,7 +28187,7 @@
       </p:sp>
       <p:sp>
         <p:nvSpPr>
-          <p:cNvPr id="34" name="Text 32"/>
+          <p:cNvPr id="41" name="Text 39"/>
           <p:cNvSpPr/>
           <p:nvPr/>
         </p:nvSpPr>
@@ -27668,7 +28226,7 @@
       </p:sp>
       <p:sp>
         <p:nvSpPr>
-          <p:cNvPr id="35" name="Shape 33"/>
+          <p:cNvPr id="42" name="Shape 40"/>
           <p:cNvSpPr/>
           <p:nvPr/>
         </p:nvSpPr>
@@ -27695,14 +28253,14 @@
       </p:sp>
       <p:sp>
         <p:nvSpPr>
-          <p:cNvPr id="36" name="Shape 34"/>
-          <p:cNvSpPr/>
-          <p:nvPr/>
-        </p:nvSpPr>
-        <p:spPr>
-          <a:xfrm>
-            <a:off x="2254649" y="4169664"/>
-            <a:ext cx="685800" cy="384048"/>
+          <p:cNvPr id="43" name="Shape 41"/>
+          <p:cNvSpPr/>
+          <p:nvPr/>
+        </p:nvSpPr>
+        <p:spPr>
+          <a:xfrm>
+            <a:off x="1951330" y="4169664"/>
+            <a:ext cx="676656" cy="384048"/>
           </a:xfrm>
           <a:prstGeom prst="rect">
             <a:avLst>
@@ -27722,14 +28280,14 @@
       </p:sp>
       <p:sp>
         <p:nvSpPr>
-          <p:cNvPr id="37" name="Text 35"/>
-          <p:cNvSpPr/>
-          <p:nvPr/>
-        </p:nvSpPr>
-        <p:spPr>
-          <a:xfrm>
-            <a:off x="2254649" y="4169664"/>
-            <a:ext cx="685800" cy="384048"/>
+          <p:cNvPr id="44" name="Text 42"/>
+          <p:cNvSpPr/>
+          <p:nvPr/>
+        </p:nvSpPr>
+        <p:spPr>
+          <a:xfrm>
+            <a:off x="1951330" y="4169664"/>
+            <a:ext cx="676656" cy="384048"/>
           </a:xfrm>
           <a:prstGeom prst="rect">
             <a:avLst/>
@@ -27753,7 +28311,7 @@
                 <a:ea typeface="Trebuchet MS" pitchFamily="34" charset="-122"/>
                 <a:cs typeface="Trebuchet MS" pitchFamily="34" charset="-120"/>
               </a:rPr>
-              <a:t>p</a:t>
+              <a:t>k</a:t>
             </a:r>
             <a:endParaRPr lang="en-US" sz="900" dirty="0"/>
           </a:p>
@@ -27761,14 +28319,14 @@
       </p:sp>
       <p:sp>
         <p:nvSpPr>
-          <p:cNvPr id="38" name="Shape 36"/>
-          <p:cNvSpPr/>
-          <p:nvPr/>
-        </p:nvSpPr>
-        <p:spPr>
-          <a:xfrm>
-            <a:off x="3293146" y="4169664"/>
-            <a:ext cx="685800" cy="384048"/>
+          <p:cNvPr id="45" name="Shape 43"/>
+          <p:cNvSpPr/>
+          <p:nvPr/>
+        </p:nvSpPr>
+        <p:spPr>
+          <a:xfrm>
+            <a:off x="2677363" y="4169664"/>
+            <a:ext cx="676656" cy="384048"/>
           </a:xfrm>
           <a:prstGeom prst="rect">
             <a:avLst>
@@ -27788,14 +28346,14 @@
       </p:sp>
       <p:sp>
         <p:nvSpPr>
-          <p:cNvPr id="39" name="Text 37"/>
-          <p:cNvSpPr/>
-          <p:nvPr/>
-        </p:nvSpPr>
-        <p:spPr>
-          <a:xfrm>
-            <a:off x="3293146" y="4169664"/>
-            <a:ext cx="685800" cy="384048"/>
+          <p:cNvPr id="46" name="Text 44"/>
+          <p:cNvSpPr/>
+          <p:nvPr/>
+        </p:nvSpPr>
+        <p:spPr>
+          <a:xfrm>
+            <a:off x="2677363" y="4169664"/>
+            <a:ext cx="676656" cy="384048"/>
           </a:xfrm>
           <a:prstGeom prst="rect">
             <a:avLst/>
@@ -27819,7 +28377,7 @@
                 <a:ea typeface="Trebuchet MS" pitchFamily="34" charset="-122"/>
                 <a:cs typeface="Trebuchet MS" pitchFamily="34" charset="-120"/>
               </a:rPr>
-              <a:t>er</a:t>
+              <a:t>a</a:t>
             </a:r>
             <a:endParaRPr lang="en-US" sz="900" dirty="0"/>
           </a:p>
@@ -27827,14 +28385,14 @@
       </p:sp>
       <p:sp>
         <p:nvSpPr>
-          <p:cNvPr id="40" name="Shape 38"/>
-          <p:cNvSpPr/>
-          <p:nvPr/>
-        </p:nvSpPr>
-        <p:spPr>
-          <a:xfrm>
-            <a:off x="4331643" y="4169664"/>
-            <a:ext cx="685800" cy="384048"/>
+          <p:cNvPr id="47" name="Shape 45"/>
+          <p:cNvSpPr/>
+          <p:nvPr/>
+        </p:nvSpPr>
+        <p:spPr>
+          <a:xfrm>
+            <a:off x="3403397" y="4169664"/>
+            <a:ext cx="676656" cy="384048"/>
           </a:xfrm>
           <a:prstGeom prst="rect">
             <a:avLst>
@@ -27854,14 +28412,14 @@
       </p:sp>
       <p:sp>
         <p:nvSpPr>
-          <p:cNvPr id="41" name="Text 39"/>
-          <p:cNvSpPr/>
-          <p:nvPr/>
-        </p:nvSpPr>
-        <p:spPr>
-          <a:xfrm>
-            <a:off x="4331643" y="4169664"/>
-            <a:ext cx="685800" cy="384048"/>
+          <p:cNvPr id="48" name="Text 46"/>
+          <p:cNvSpPr/>
+          <p:nvPr/>
+        </p:nvSpPr>
+        <p:spPr>
+          <a:xfrm>
+            <a:off x="3403397" y="4169664"/>
+            <a:ext cx="676656" cy="384048"/>
           </a:xfrm>
           <a:prstGeom prst="rect">
             <a:avLst/>
@@ -27885,7 +28443,7 @@
                 <a:ea typeface="Trebuchet MS" pitchFamily="34" charset="-122"/>
                 <a:cs typeface="Trebuchet MS" pitchFamily="34" charset="-120"/>
               </a:rPr>
-              <a:t>i</a:t>
+              <a:t>l</a:t>
             </a:r>
             <a:endParaRPr lang="en-US" sz="900" dirty="0"/>
           </a:p>
@@ -27893,14 +28451,14 @@
       </p:sp>
       <p:sp>
         <p:nvSpPr>
-          <p:cNvPr id="42" name="Shape 40"/>
-          <p:cNvSpPr/>
-          <p:nvPr/>
-        </p:nvSpPr>
-        <p:spPr>
-          <a:xfrm>
-            <a:off x="5370141" y="4169664"/>
-            <a:ext cx="685800" cy="384048"/>
+          <p:cNvPr id="49" name="Shape 47"/>
+          <p:cNvSpPr/>
+          <p:nvPr/>
+        </p:nvSpPr>
+        <p:spPr>
+          <a:xfrm>
+            <a:off x="4129430" y="4169664"/>
+            <a:ext cx="676656" cy="384048"/>
           </a:xfrm>
           <a:prstGeom prst="rect">
             <a:avLst>
@@ -27920,14 +28478,14 @@
       </p:sp>
       <p:sp>
         <p:nvSpPr>
-          <p:cNvPr id="43" name="Text 41"/>
-          <p:cNvSpPr/>
-          <p:nvPr/>
-        </p:nvSpPr>
-        <p:spPr>
-          <a:xfrm>
-            <a:off x="5370141" y="4169664"/>
-            <a:ext cx="685800" cy="384048"/>
+          <p:cNvPr id="50" name="Text 48"/>
+          <p:cNvSpPr/>
+          <p:nvPr/>
+        </p:nvSpPr>
+        <p:spPr>
+          <a:xfrm>
+            <a:off x="4129430" y="4169664"/>
+            <a:ext cx="676656" cy="384048"/>
           </a:xfrm>
           <a:prstGeom prst="rect">
             <a:avLst/>
@@ -27951,6 +28509,204 @@
                 <a:ea typeface="Trebuchet MS" pitchFamily="34" charset="-122"/>
                 <a:cs typeface="Trebuchet MS" pitchFamily="34" charset="-120"/>
               </a:rPr>
+              <a:t>ei</a:t>
+            </a:r>
+            <a:endParaRPr lang="en-US" sz="900" dirty="0"/>
+          </a:p>
+        </p:txBody>
+      </p:sp>
+      <p:sp>
+        <p:nvSpPr>
+          <p:cNvPr id="51" name="Shape 49"/>
+          <p:cNvSpPr/>
+          <p:nvPr/>
+        </p:nvSpPr>
+        <p:spPr>
+          <a:xfrm>
+            <a:off x="4855464" y="4169664"/>
+            <a:ext cx="676656" cy="384048"/>
+          </a:xfrm>
+          <a:prstGeom prst="rect">
+            <a:avLst>
+              <a:gd name="adj" fmla="val 9524"/>
+            </a:avLst>
+          </a:prstGeom>
+          <a:solidFill>
+            <a:srgbClr val="FFFFFF"/>
+          </a:solidFill>
+          <a:ln w="12700">
+            <a:solidFill>
+              <a:srgbClr val="DB2777"/>
+            </a:solidFill>
+            <a:prstDash val="solid"/>
+          </a:ln>
+        </p:spPr>
+      </p:sp>
+      <p:sp>
+        <p:nvSpPr>
+          <p:cNvPr id="52" name="Text 50"/>
+          <p:cNvSpPr/>
+          <p:nvPr/>
+        </p:nvSpPr>
+        <p:spPr>
+          <a:xfrm>
+            <a:off x="4855464" y="4169664"/>
+            <a:ext cx="676656" cy="384048"/>
+          </a:xfrm>
+          <a:prstGeom prst="rect">
+            <a:avLst/>
+          </a:prstGeom>
+          <a:noFill/>
+          <a:ln/>
+        </p:spPr>
+        <p:txBody>
+          <a:bodyPr wrap="square" lIns="0" tIns="0" rIns="0" bIns="0" rtlCol="0" anchor="ctr"/>
+          <a:lstStyle/>
+          <a:p>
+            <a:pPr algn="ctr" indent="0" marL="0">
+              <a:buNone/>
+            </a:pPr>
+            <a:r>
+              <a:rPr lang="en-US" sz="900" b="1" dirty="0">
+                <a:solidFill>
+                  <a:srgbClr val="9D174D"/>
+                </a:solidFill>
+                <a:latin typeface="Trebuchet MS" pitchFamily="34" charset="0"/>
+                <a:ea typeface="Trebuchet MS" pitchFamily="34" charset="-122"/>
+                <a:cs typeface="Trebuchet MS" pitchFamily="34" charset="-120"/>
+              </a:rPr>
+              <a:t>d</a:t>
+            </a:r>
+            <a:endParaRPr lang="en-US" sz="900" dirty="0"/>
+          </a:p>
+        </p:txBody>
+      </p:sp>
+      <p:sp>
+        <p:nvSpPr>
+          <p:cNvPr id="53" name="Shape 51"/>
+          <p:cNvSpPr/>
+          <p:nvPr/>
+        </p:nvSpPr>
+        <p:spPr>
+          <a:xfrm>
+            <a:off x="5581498" y="4169664"/>
+            <a:ext cx="676656" cy="384048"/>
+          </a:xfrm>
+          <a:prstGeom prst="rect">
+            <a:avLst>
+              <a:gd name="adj" fmla="val 9524"/>
+            </a:avLst>
+          </a:prstGeom>
+          <a:solidFill>
+            <a:srgbClr val="FFFFFF"/>
+          </a:solidFill>
+          <a:ln w="12700">
+            <a:solidFill>
+              <a:srgbClr val="DB2777"/>
+            </a:solidFill>
+            <a:prstDash val="solid"/>
+          </a:ln>
+        </p:spPr>
+      </p:sp>
+      <p:sp>
+        <p:nvSpPr>
+          <p:cNvPr id="54" name="Text 52"/>
+          <p:cNvSpPr/>
+          <p:nvPr/>
+        </p:nvSpPr>
+        <p:spPr>
+          <a:xfrm>
+            <a:off x="5581498" y="4169664"/>
+            <a:ext cx="676656" cy="384048"/>
+          </a:xfrm>
+          <a:prstGeom prst="rect">
+            <a:avLst/>
+          </a:prstGeom>
+          <a:noFill/>
+          <a:ln/>
+        </p:spPr>
+        <p:txBody>
+          <a:bodyPr wrap="square" lIns="0" tIns="0" rIns="0" bIns="0" rtlCol="0" anchor="ctr"/>
+          <a:lstStyle/>
+          <a:p>
+            <a:pPr algn="ctr" indent="0" marL="0">
+              <a:buNone/>
+            </a:pPr>
+            <a:r>
+              <a:rPr lang="en-US" sz="900" b="1" dirty="0">
+                <a:solidFill>
+                  <a:srgbClr val="9D174D"/>
+                </a:solidFill>
+                <a:latin typeface="Trebuchet MS" pitchFamily="34" charset="0"/>
+                <a:ea typeface="Trebuchet MS" pitchFamily="34" charset="-122"/>
+                <a:cs typeface="Trebuchet MS" pitchFamily="34" charset="-120"/>
+              </a:rPr>
+              <a:t>o</a:t>
+            </a:r>
+            <a:endParaRPr lang="en-US" sz="900" dirty="0"/>
+          </a:p>
+        </p:txBody>
+      </p:sp>
+      <p:sp>
+        <p:nvSpPr>
+          <p:cNvPr id="55" name="Shape 53"/>
+          <p:cNvSpPr/>
+          <p:nvPr/>
+        </p:nvSpPr>
+        <p:spPr>
+          <a:xfrm>
+            <a:off x="6307531" y="4169664"/>
+            <a:ext cx="676656" cy="384048"/>
+          </a:xfrm>
+          <a:prstGeom prst="rect">
+            <a:avLst>
+              <a:gd name="adj" fmla="val 9524"/>
+            </a:avLst>
+          </a:prstGeom>
+          <a:solidFill>
+            <a:srgbClr val="FFFFFF"/>
+          </a:solidFill>
+          <a:ln w="12700">
+            <a:solidFill>
+              <a:srgbClr val="DB2777"/>
+            </a:solidFill>
+            <a:prstDash val="solid"/>
+          </a:ln>
+        </p:spPr>
+      </p:sp>
+      <p:sp>
+        <p:nvSpPr>
+          <p:cNvPr id="56" name="Text 54"/>
+          <p:cNvSpPr/>
+          <p:nvPr/>
+        </p:nvSpPr>
+        <p:spPr>
+          <a:xfrm>
+            <a:off x="6307531" y="4169664"/>
+            <a:ext cx="676656" cy="384048"/>
+          </a:xfrm>
+          <a:prstGeom prst="rect">
+            <a:avLst/>
+          </a:prstGeom>
+          <a:noFill/>
+          <a:ln/>
+        </p:spPr>
+        <p:txBody>
+          <a:bodyPr wrap="square" lIns="0" tIns="0" rIns="0" bIns="0" rtlCol="0" anchor="ctr"/>
+          <a:lstStyle/>
+          <a:p>
+            <a:pPr algn="ctr" indent="0" marL="0">
+              <a:buNone/>
+            </a:pPr>
+            <a:r>
+              <a:rPr lang="en-US" sz="900" b="1" dirty="0">
+                <a:solidFill>
+                  <a:srgbClr val="9D174D"/>
+                </a:solidFill>
+                <a:latin typeface="Trebuchet MS" pitchFamily="34" charset="0"/>
+                <a:ea typeface="Trebuchet MS" pitchFamily="34" charset="-122"/>
+                <a:cs typeface="Trebuchet MS" pitchFamily="34" charset="-120"/>
+              </a:rPr>
               <a:t>sc</a:t>
             </a:r>
             <a:endParaRPr lang="en-US" sz="900" dirty="0"/>
@@ -27959,14 +28715,14 @@
       </p:sp>
       <p:sp>
         <p:nvSpPr>
-          <p:cNvPr id="44" name="Text 42"/>
-          <p:cNvSpPr/>
-          <p:nvPr/>
-        </p:nvSpPr>
-        <p:spPr>
-          <a:xfrm>
-            <a:off x="5370141" y="4572000"/>
-            <a:ext cx="685800" cy="219456"/>
+          <p:cNvPr id="57" name="Text 55"/>
+          <p:cNvSpPr/>
+          <p:nvPr/>
+        </p:nvSpPr>
+        <p:spPr>
+          <a:xfrm>
+            <a:off x="6307531" y="4572000"/>
+            <a:ext cx="676656" cy="219456"/>
           </a:xfrm>
           <a:prstGeom prst="rect">
             <a:avLst/>
@@ -27998,14 +28754,14 @@
       </p:sp>
       <p:sp>
         <p:nvSpPr>
-          <p:cNvPr id="45" name="Shape 43"/>
-          <p:cNvSpPr/>
-          <p:nvPr/>
-        </p:nvSpPr>
-        <p:spPr>
-          <a:xfrm>
-            <a:off x="6408638" y="4169664"/>
-            <a:ext cx="685800" cy="384048"/>
+          <p:cNvPr id="58" name="Shape 56"/>
+          <p:cNvSpPr/>
+          <p:nvPr/>
+        </p:nvSpPr>
+        <p:spPr>
+          <a:xfrm>
+            <a:off x="7033565" y="4169664"/>
+            <a:ext cx="676656" cy="384048"/>
           </a:xfrm>
           <a:prstGeom prst="rect">
             <a:avLst>
@@ -28025,14 +28781,14 @@
       </p:sp>
       <p:sp>
         <p:nvSpPr>
-          <p:cNvPr id="46" name="Text 44"/>
-          <p:cNvSpPr/>
-          <p:nvPr/>
-        </p:nvSpPr>
-        <p:spPr>
-          <a:xfrm>
-            <a:off x="6408638" y="4169664"/>
-            <a:ext cx="685800" cy="384048"/>
+          <p:cNvPr id="59" name="Text 57"/>
+          <p:cNvSpPr/>
+          <p:nvPr/>
+        </p:nvSpPr>
+        <p:spPr>
+          <a:xfrm>
+            <a:off x="7033565" y="4169664"/>
+            <a:ext cx="676656" cy="384048"/>
           </a:xfrm>
           <a:prstGeom prst="rect">
             <a:avLst/>
@@ -28064,14 +28820,14 @@
       </p:sp>
       <p:sp>
         <p:nvSpPr>
-          <p:cNvPr id="47" name="Shape 45"/>
-          <p:cNvSpPr/>
-          <p:nvPr/>
-        </p:nvSpPr>
-        <p:spPr>
-          <a:xfrm>
-            <a:off x="7447135" y="4169664"/>
-            <a:ext cx="685800" cy="384048"/>
+          <p:cNvPr id="60" name="Shape 58"/>
+          <p:cNvSpPr/>
+          <p:nvPr/>
+        </p:nvSpPr>
+        <p:spPr>
+          <a:xfrm>
+            <a:off x="7759598" y="4169664"/>
+            <a:ext cx="676656" cy="384048"/>
           </a:xfrm>
           <a:prstGeom prst="rect">
             <a:avLst>
@@ -28091,14 +28847,14 @@
       </p:sp>
       <p:sp>
         <p:nvSpPr>
-          <p:cNvPr id="48" name="Text 46"/>
-          <p:cNvSpPr/>
-          <p:nvPr/>
-        </p:nvSpPr>
-        <p:spPr>
-          <a:xfrm>
-            <a:off x="7447135" y="4169664"/>
-            <a:ext cx="685800" cy="384048"/>
+          <p:cNvPr id="61" name="Text 59"/>
+          <p:cNvSpPr/>
+          <p:nvPr/>
+        </p:nvSpPr>
+        <p:spPr>
+          <a:xfrm>
+            <a:off x="7759598" y="4169664"/>
+            <a:ext cx="676656" cy="384048"/>
           </a:xfrm>
           <a:prstGeom prst="rect">
             <a:avLst/>
@@ -28414,7 +29170,7 @@
                 <a:ea typeface="Calibri" pitchFamily="34" charset="-122"/>
                 <a:cs typeface="Calibri" pitchFamily="34" charset="-120"/>
               </a:rPr>
-              <a:t>Word Labs  •  wordlabs.app  •  Root: 'scope' = to look, view, or observe</a:t>
+              <a:t>Word Labs  •  wordlabs.app  •  Root: 'scope' = to look, see, observe</a:t>
             </a:r>
             <a:endParaRPr lang="en-US" sz="800" dirty="0"/>
           </a:p>
@@ -29241,7 +29997,7 @@
                 <a:ea typeface="Calibri" pitchFamily="34" charset="-122"/>
                 <a:cs typeface="Calibri" pitchFamily="34" charset="-120"/>
               </a:rPr>
-              <a:t>Word Labs  •  wordlabs.app  •  Root: 'scope' = to look, view, or observe</a:t>
+              <a:t>Word Labs  •  wordlabs.app  •  Root: 'scope' = to look, see, observe</a:t>
             </a:r>
             <a:endParaRPr lang="en-US" sz="800" dirty="0"/>
           </a:p>
@@ -29670,7 +30426,7 @@
                 <a:ea typeface="Calibri" pitchFamily="34" charset="-122"/>
                 <a:cs typeface="Calibri" pitchFamily="34" charset="-120"/>
               </a:rPr>
-              <a:t>to look, view</a:t>
+              <a:t>to look or observe</a:t>
             </a:r>
             <a:endParaRPr lang="en-US" sz="850" dirty="0"/>
           </a:p>
@@ -30226,7 +30982,7 @@
                 <a:ea typeface="Calibri" pitchFamily="34" charset="-122"/>
                 <a:cs typeface="Calibri" pitchFamily="34" charset="-120"/>
               </a:rPr>
-              <a:t>Word Labs  •  wordlabs.app  •  Root: 'scope' = to look, view, or observe</a:t>
+              <a:t>Word Labs  •  wordlabs.app  •  Root: 'scope' = to look, see, observe</a:t>
             </a:r>
             <a:endParaRPr lang="en-US" sz="800" dirty="0"/>
           </a:p>
@@ -30655,7 +31411,7 @@
                 <a:ea typeface="Calibri" pitchFamily="34" charset="-122"/>
                 <a:cs typeface="Calibri" pitchFamily="34" charset="-120"/>
               </a:rPr>
-              <a:t>to look, view</a:t>
+              <a:t>to look or observe</a:t>
             </a:r>
             <a:endParaRPr lang="en-US" sz="850" dirty="0"/>
           </a:p>
@@ -31448,7 +32204,7 @@
                 <a:ea typeface="Calibri" pitchFamily="34" charset="-122"/>
                 <a:cs typeface="Calibri" pitchFamily="34" charset="-120"/>
               </a:rPr>
-              <a:t>Word Labs  •  wordlabs.app  •  Root: 'scope' = to look, view, or observe</a:t>
+              <a:t>Word Labs  •  wordlabs.app  •  Root: 'scope' = to look, see, observe</a:t>
             </a:r>
             <a:endParaRPr lang="en-US" sz="800" dirty="0"/>
           </a:p>
@@ -31877,7 +32633,7 @@
                 <a:ea typeface="Calibri" pitchFamily="34" charset="-122"/>
                 <a:cs typeface="Calibri" pitchFamily="34" charset="-120"/>
               </a:rPr>
-              <a:t>to look, view</a:t>
+              <a:t>to look or observe</a:t>
             </a:r>
             <a:endParaRPr lang="en-US" sz="850" dirty="0"/>
           </a:p>
@@ -33171,7 +33927,7 @@
                 <a:ea typeface="Calibri" pitchFamily="34" charset="-122"/>
                 <a:cs typeface="Calibri" pitchFamily="34" charset="-120"/>
               </a:rPr>
-              <a:t>Word Labs  •  wordlabs.app  •  Root: 'scope' = to look, view, or observe</a:t>
+              <a:t>Word Labs  •  wordlabs.app  •  Root: 'scope' = to look, see, observe</a:t>
             </a:r>
             <a:endParaRPr lang="en-US" sz="800" dirty="0"/>
           </a:p>
@@ -34340,7 +35096,7 @@
                 <a:ea typeface="Calibri" pitchFamily="34" charset="-122"/>
                 <a:cs typeface="Calibri" pitchFamily="34" charset="-120"/>
               </a:rPr>
-              <a:t>Word Labs  •  wordlabs.app  •  Root: 'scope' = to look, view, or observe</a:t>
+              <a:t>Word Labs  •  wordlabs.app  •  Root: 'scope' = to look, see, observe</a:t>
             </a:r>
             <a:endParaRPr lang="en-US" sz="800" dirty="0"/>
           </a:p>
@@ -35228,7 +35984,7 @@
                 <a:ea typeface="Trebuchet MS" pitchFamily="34" charset="-122"/>
                 <a:cs typeface="Trebuchet MS" pitchFamily="34" charset="-120"/>
               </a:rPr>
-              <a:t>-ically</a:t>
+              <a:t>-ed</a:t>
             </a:r>
             <a:endParaRPr lang="en-US" sz="1300" dirty="0"/>
           </a:p>
@@ -35381,7 +36137,7 @@
                 <a:ea typeface="Trebuchet MS" pitchFamily="34" charset="-122"/>
                 <a:cs typeface="Trebuchet MS" pitchFamily="34" charset="-120"/>
               </a:rPr>
-              <a:t>-s</a:t>
+              <a:t>-ing</a:t>
             </a:r>
             <a:endParaRPr lang="en-US" sz="1300" dirty="0"/>
           </a:p>
@@ -35816,7 +36572,7 @@
                 <a:ea typeface="Trebuchet MS" pitchFamily="34" charset="-122"/>
                 <a:cs typeface="Trebuchet MS" pitchFamily="34" charset="-120"/>
               </a:rPr>
-              <a:t>horoscope</a:t>
+              <a:t>stethoscope</a:t>
             </a:r>
             <a:endParaRPr lang="en-US" sz="1200" dirty="0"/>
           </a:p>
@@ -35882,7 +36638,7 @@
                 <a:ea typeface="Trebuchet MS" pitchFamily="34" charset="-122"/>
                 <a:cs typeface="Trebuchet MS" pitchFamily="34" charset="-120"/>
               </a:rPr>
-              <a:t>stethoscope</a:t>
+              <a:t>horoscope</a:t>
             </a:r>
             <a:endParaRPr lang="en-US" sz="1200" dirty="0"/>
           </a:p>
@@ -36240,7 +36996,7 @@
                 <a:ea typeface="Calibri" pitchFamily="34" charset="-122"/>
                 <a:cs typeface="Calibri" pitchFamily="34" charset="-120"/>
               </a:rPr>
-              <a:t>Word Labs  •  wordlabs.app  •  Root: 'scope' = to look, view, or observe</a:t>
+              <a:t>Word Labs  •  wordlabs.app  •  Root: 'scope' = to look, see, observe</a:t>
             </a:r>
             <a:endParaRPr lang="en-US" sz="800" dirty="0"/>
           </a:p>
@@ -36404,7 +37160,7 @@
                 <a:ea typeface="Calibri" pitchFamily="34" charset="-122"/>
                 <a:cs typeface="Calibri" pitchFamily="34" charset="-120"/>
               </a:rPr>
-              <a:t>The core part of a word carrying its basic meaning. For example, 'scope' means 'to look, view, or observe'.</a:t>
+              <a:t>The core part of a word carrying its basic meaning. For example, 'scope' means 'to look, see, observe'.</a:t>
             </a:r>
             <a:endParaRPr lang="en-US" sz="1350" dirty="0"/>
           </a:p>
@@ -37024,7 +37780,7 @@
                 <a:ea typeface="Calibri" pitchFamily="34" charset="-122"/>
                 <a:cs typeface="Calibri" pitchFamily="34" charset="-120"/>
               </a:rPr>
-              <a:t>Word Labs  •  wordlabs.app  •  Root: 'scope' = to look, view, or observe</a:t>
+              <a:t>Word Labs  •  wordlabs.app  •  Root: 'scope' = to look, see, observe</a:t>
             </a:r>
             <a:endParaRPr lang="en-US" sz="800" dirty="0"/>
           </a:p>
@@ -37136,7 +37892,7 @@
                 <a:ea typeface="Calibri" pitchFamily="34" charset="-122"/>
                 <a:cs typeface="Calibri" pitchFamily="34" charset="-120"/>
               </a:rPr>
-              <a:t>1.  The root 'scope' comes from a Greek word meaning to look or observe.</a:t>
+              <a:t>1.  A periscope uses mirrors to help you see around corners or over obstacles.</a:t>
             </a:r>
             <a:endParaRPr lang="en-US" sz="1300" dirty="0"/>
           </a:p>
@@ -37275,7 +38031,7 @@
                 <a:ea typeface="Calibri" pitchFamily="34" charset="-122"/>
                 <a:cs typeface="Calibri" pitchFamily="34" charset="-120"/>
               </a:rPr>
-              <a:t>2.  A microscope is used to look at objects that are very far away.</a:t>
+              <a:t>2.  The root 'scope' comes from a Greek word meaning to look or observe.</a:t>
             </a:r>
             <a:endParaRPr lang="en-US" sz="1300" dirty="0"/>
           </a:p>
@@ -37298,11 +38054,11 @@
             </a:avLst>
           </a:prstGeom>
           <a:solidFill>
-            <a:srgbClr val="FEE2E2"/>
-          </a:solidFill>
-          <a:ln w="12700">
-            <a:solidFill>
-              <a:srgbClr val="DC2626"/>
+            <a:srgbClr val="DCFCE7"/>
+          </a:solidFill>
+          <a:ln w="12700">
+            <a:solidFill>
+              <a:srgbClr val="16A34A"/>
             </a:solidFill>
             <a:prstDash val="solid"/>
           </a:ln>
@@ -37335,13 +38091,13 @@
             <a:r>
               <a:rPr lang="en-US" sz="1100" b="1" dirty="0">
                 <a:solidFill>
-                  <a:srgbClr val="DC2626"/>
+                  <a:srgbClr val="16A34A"/>
                 </a:solidFill>
                 <a:latin typeface="Trebuchet MS" pitchFamily="34" charset="0"/>
                 <a:ea typeface="Trebuchet MS" pitchFamily="34" charset="-122"/>
                 <a:cs typeface="Trebuchet MS" pitchFamily="34" charset="-120"/>
               </a:rPr>
-              <a:t>FALSE</a:t>
+              <a:t>TRUE</a:t>
             </a:r>
             <a:endParaRPr lang="en-US" sz="1100" dirty="0"/>
           </a:p>
@@ -37414,7 +38170,7 @@
                 <a:ea typeface="Calibri" pitchFamily="34" charset="-122"/>
                 <a:cs typeface="Calibri" pitchFamily="34" charset="-120"/>
               </a:rPr>
-              <a:t>3.  A periscope uses mirrors to help you see around corners or over objects.</a:t>
+              <a:t>3.  A microscope is used to see things that are very far away.</a:t>
             </a:r>
             <a:endParaRPr lang="en-US" sz="1300" dirty="0"/>
           </a:p>
@@ -37437,11 +38193,11 @@
             </a:avLst>
           </a:prstGeom>
           <a:solidFill>
-            <a:srgbClr val="DCFCE7"/>
-          </a:solidFill>
-          <a:ln w="12700">
-            <a:solidFill>
-              <a:srgbClr val="16A34A"/>
+            <a:srgbClr val="FEE2E2"/>
+          </a:solidFill>
+          <a:ln w="12700">
+            <a:solidFill>
+              <a:srgbClr val="DC2626"/>
             </a:solidFill>
             <a:prstDash val="solid"/>
           </a:ln>
@@ -37474,13 +38230,13 @@
             <a:r>
               <a:rPr lang="en-US" sz="1100" b="1" dirty="0">
                 <a:solidFill>
-                  <a:srgbClr val="16A34A"/>
+                  <a:srgbClr val="DC2626"/>
                 </a:solidFill>
                 <a:latin typeface="Trebuchet MS" pitchFamily="34" charset="0"/>
                 <a:ea typeface="Trebuchet MS" pitchFamily="34" charset="-122"/>
                 <a:cs typeface="Trebuchet MS" pitchFamily="34" charset="-120"/>
               </a:rPr>
-              <a:t>TRUE</a:t>
+              <a:t>FALSE</a:t>
             </a:r>
             <a:endParaRPr lang="en-US" sz="1100" dirty="0"/>
           </a:p>
@@ -37553,7 +38309,7 @@
                 <a:ea typeface="Calibri" pitchFamily="34" charset="-122"/>
                 <a:cs typeface="Calibri" pitchFamily="34" charset="-120"/>
               </a:rPr>
-              <a:t>4.  The prefix 'tele' in telescope means far or distant.</a:t>
+              <a:t>4.  The word 'stethoscope' contains the root 'scope'.</a:t>
             </a:r>
             <a:endParaRPr lang="en-US" sz="1300" dirty="0"/>
           </a:p>
@@ -37692,7 +38448,7 @@
                 <a:ea typeface="Calibri" pitchFamily="34" charset="-122"/>
                 <a:cs typeface="Calibri" pitchFamily="34" charset="-120"/>
               </a:rPr>
-              <a:t>5.  A stethoscope is used by doctors to look inside the ear.</a:t>
+              <a:t>5.  The root 'scope' comes from a Latin word meaning to measure.</a:t>
             </a:r>
             <a:endParaRPr lang="en-US" sz="1300" dirty="0"/>
           </a:p>
@@ -38050,7 +38806,7 @@
                 <a:ea typeface="Calibri" pitchFamily="34" charset="-122"/>
                 <a:cs typeface="Calibri" pitchFamily="34" charset="-120"/>
               </a:rPr>
-              <a:t>Word Labs  •  wordlabs.app  •  Root: 'scope' = to look, view, or observe</a:t>
+              <a:t>Word Labs  •  wordlabs.app  •  Root: 'scope' = to look, see, observe</a:t>
             </a:r>
             <a:endParaRPr lang="en-US" sz="800" dirty="0"/>
           </a:p>
@@ -38187,7 +38943,7 @@
                 <a:ea typeface="Trebuchet MS" pitchFamily="34" charset="-122"/>
                 <a:cs typeface="Trebuchet MS" pitchFamily="34" charset="-120"/>
               </a:rPr>
-              <a:t>to look, view, or observe</a:t>
+              <a:t>to look, see, observe</a:t>
             </a:r>
             <a:endParaRPr lang="en-US" sz="2000" dirty="0"/>
           </a:p>
@@ -38661,7 +39417,7 @@
                 <a:ea typeface="Trebuchet MS" pitchFamily="34" charset="-122"/>
                 <a:cs typeface="Trebuchet MS" pitchFamily="34" charset="-120"/>
               </a:rPr>
-              <a:t>horoscope</a:t>
+              <a:t>stethoscope</a:t>
             </a:r>
             <a:endParaRPr lang="en-US" sz="1300" dirty="0"/>
           </a:p>
@@ -38727,7 +39483,7 @@
                 <a:ea typeface="Trebuchet MS" pitchFamily="34" charset="-122"/>
                 <a:cs typeface="Trebuchet MS" pitchFamily="34" charset="-120"/>
               </a:rPr>
-              <a:t>stethoscope</a:t>
+              <a:t>horoscope</a:t>
             </a:r>
             <a:endParaRPr lang="en-US" sz="1300" dirty="0"/>
           </a:p>
@@ -39019,7 +39775,7 @@
                 <a:ea typeface="Calibri" pitchFamily="34" charset="-122"/>
                 <a:cs typeface="Calibri" pitchFamily="34" charset="-120"/>
               </a:rPr>
-              <a:t>Word Labs  •  wordlabs.app  •  Root: 'scope' = to look, view, or observe</a:t>
+              <a:t>Word Labs  •  wordlabs.app  •  Root: 'scope' = to look, see, observe</a:t>
             </a:r>
             <a:endParaRPr lang="en-US" sz="800" dirty="0"/>
           </a:p>
@@ -39907,7 +40663,7 @@
                 <a:ea typeface="Trebuchet MS" pitchFamily="34" charset="-122"/>
                 <a:cs typeface="Trebuchet MS" pitchFamily="34" charset="-120"/>
               </a:rPr>
-              <a:t>-ically</a:t>
+              <a:t>-ed</a:t>
             </a:r>
             <a:endParaRPr lang="en-US" sz="1300" dirty="0"/>
           </a:p>
@@ -40060,7 +40816,7 @@
                 <a:ea typeface="Trebuchet MS" pitchFamily="34" charset="-122"/>
                 <a:cs typeface="Trebuchet MS" pitchFamily="34" charset="-120"/>
               </a:rPr>
-              <a:t>-s</a:t>
+              <a:t>-ing</a:t>
             </a:r>
             <a:endParaRPr lang="en-US" sz="1300" dirty="0"/>
           </a:p>
@@ -40793,7 +41549,7 @@
                 <a:ea typeface="Calibri" pitchFamily="34" charset="-122"/>
                 <a:cs typeface="Calibri" pitchFamily="34" charset="-120"/>
               </a:rPr>
-              <a:t>Word Labs  •  wordlabs.app  •  Root: 'scope' = to look, view, or observe</a:t>
+              <a:t>Word Labs  •  wordlabs.app  •  Root: 'scope' = to look, see, observe</a:t>
             </a:r>
             <a:endParaRPr lang="en-US" sz="800" dirty="0"/>
           </a:p>
@@ -40971,7 +41727,7 @@
                 <a:ea typeface="Calibri" pitchFamily="34" charset="-122"/>
                 <a:cs typeface="Calibri" pitchFamily="34" charset="-120"/>
               </a:rPr>
-              <a:t>A medical instrument doctors use to listen to the sounds of your heartbeat and breathing.</a:t>
+              <a:t>A reading based on stars and planets that some people believe predicts what might happen in their life.</a:t>
             </a:r>
             <a:endParaRPr lang="en-US" sz="1200" dirty="0"/>
           </a:p>
@@ -41110,7 +41866,7 @@
                 <a:ea typeface="Calibri" pitchFamily="34" charset="-122"/>
                 <a:cs typeface="Calibri" pitchFamily="34" charset="-120"/>
               </a:rPr>
-              <a:t>A thin, flexible tube with a tiny camera that doctors use to look inside a person's body.</a:t>
+              <a:t>A special medical tool that lets doctors look inside a person's body.</a:t>
             </a:r>
             <a:endParaRPr lang="en-US" sz="1200" dirty="0"/>
           </a:p>
@@ -41249,7 +42005,7 @@
                 <a:ea typeface="Calibri" pitchFamily="34" charset="-122"/>
                 <a:cs typeface="Calibri" pitchFamily="34" charset="-120"/>
               </a:rPr>
-              <a:t>A tube with mirrors inside that lets you see things around corners or above your head, used on submarines.</a:t>
+              <a:t>A tube with mirrors that lets you see around corners or above water, used in submarines.</a:t>
             </a:r>
             <a:endParaRPr lang="en-US" sz="1200" dirty="0"/>
           </a:p>
@@ -41388,7 +42144,7 @@
                 <a:ea typeface="Calibri" pitchFamily="34" charset="-122"/>
                 <a:cs typeface="Calibri" pitchFamily="34" charset="-120"/>
               </a:rPr>
-              <a:t>A prediction about your life based on the position of stars and planets at the time you were born.</a:t>
+              <a:t>A medical tool that doctors use to listen to your heart and lungs.</a:t>
             </a:r>
             <a:endParaRPr lang="en-US" sz="1200" dirty="0"/>
           </a:p>
@@ -41527,7 +42283,7 @@
                 <a:ea typeface="Calibri" pitchFamily="34" charset="-122"/>
                 <a:cs typeface="Calibri" pitchFamily="34" charset="-120"/>
               </a:rPr>
-              <a:t>A tube you look through that shows beautiful, ever-changing patterns made by mirrors and coloured pieces inside.</a:t>
+              <a:t>A tube you look through that shows colourful, changing patterns when you twist it.</a:t>
             </a:r>
             <a:endParaRPr lang="en-US" sz="1200" dirty="0"/>
           </a:p>
@@ -41600,7 +42356,7 @@
                 <a:ea typeface="Trebuchet MS" pitchFamily="34" charset="-122"/>
                 <a:cs typeface="Trebuchet MS" pitchFamily="34" charset="-120"/>
               </a:rPr>
-              <a:t>horoscope</a:t>
+              <a:t>stethoscope</a:t>
             </a:r>
             <a:endParaRPr lang="en-US" sz="1200" dirty="0"/>
           </a:p>
@@ -41666,7 +42422,7 @@
                 <a:ea typeface="Calibri" pitchFamily="34" charset="-122"/>
                 <a:cs typeface="Calibri" pitchFamily="34" charset="-120"/>
               </a:rPr>
-              <a:t>A tube-shaped instrument that makes faraway objects like stars and planets appear closer and bigger.</a:t>
+              <a:t>A tool that makes faraway things like stars and planets look much closer.</a:t>
             </a:r>
             <a:endParaRPr lang="en-US" sz="1200" dirty="0"/>
           </a:p>
@@ -41739,7 +42495,7 @@
                 <a:ea typeface="Trebuchet MS" pitchFamily="34" charset="-122"/>
                 <a:cs typeface="Trebuchet MS" pitchFamily="34" charset="-120"/>
               </a:rPr>
-              <a:t>stethoscope</a:t>
+              <a:t>horoscope</a:t>
             </a:r>
             <a:endParaRPr lang="en-US" sz="1200" dirty="0"/>
           </a:p>
@@ -41805,7 +42561,7 @@
                 <a:ea typeface="Calibri" pitchFamily="34" charset="-122"/>
                 <a:cs typeface="Calibri" pitchFamily="34" charset="-120"/>
               </a:rPr>
-              <a:t>A scientific instrument that makes very tiny things look much larger so you can see them clearly.</a:t>
+              <a:t>A tool that makes very tiny things look much bigger so you can see them clearly.</a:t>
             </a:r>
             <a:endParaRPr lang="en-US" sz="1200" dirty="0"/>
           </a:p>
@@ -42097,7 +42853,7 @@
                 <a:ea typeface="Calibri" pitchFamily="34" charset="-122"/>
                 <a:cs typeface="Calibri" pitchFamily="34" charset="-120"/>
               </a:rPr>
-              <a:t>Word Labs  •  wordlabs.app  •  Root: 'scope' = to look, view, or observe</a:t>
+              <a:t>Word Labs  •  wordlabs.app  •  Root: 'scope' = to look, see, observe</a:t>
             </a:r>
             <a:endParaRPr lang="en-US" sz="800" dirty="0"/>
           </a:p>
@@ -42300,7 +43056,7 @@
                 <a:ea typeface="Calibri" pitchFamily="34" charset="-122"/>
                 <a:cs typeface="Calibri" pitchFamily="34" charset="-120"/>
               </a:rPr>
-              <a:t>The scientist used a microscope to examine the tiny bacteria growing on the slide.</a:t>
+              <a:t>The scientist used a microscope to look at the tiny cells on the slide.</a:t>
             </a:r>
             <a:endParaRPr lang="en-US" sz="1500" dirty="0"/>
           </a:p>
@@ -42464,7 +43220,7 @@
                 <a:ea typeface="Calibri" pitchFamily="34" charset="-122"/>
                 <a:cs typeface="Calibri" pitchFamily="34" charset="-120"/>
               </a:rPr>
-              <a:t>We pointed the telescope at the night sky and could clearly see the craters on the moon.</a:t>
+              <a:t>We pointed the telescope at the sky and could clearly see the craters on the moon.</a:t>
             </a:r>
             <a:endParaRPr lang="en-US" sz="1500" dirty="0"/>
           </a:p>
@@ -42628,7 +43384,7 @@
                 <a:ea typeface="Calibri" pitchFamily="34" charset="-122"/>
                 <a:cs typeface="Calibri" pitchFamily="34" charset="-120"/>
               </a:rPr>
-              <a:t>The submarine crew used a periscope to look above the surface of the water without being seen.</a:t>
+              <a:t>The doctor used a stethoscope to listen to the patient's heartbeat.</a:t>
             </a:r>
             <a:endParaRPr lang="en-US" sz="1500" dirty="0"/>
           </a:p>

--- a/output/wordlabs-scope-3day.pptx
+++ b/output/wordlabs-scope-3day.pptx
@@ -4240,7 +4240,7 @@
                 <a:ea typeface="Calibri" pitchFamily="34" charset="-122"/>
                 <a:cs typeface="Calibri" pitchFamily="34" charset="-120"/>
               </a:rPr>
-              <a:t>"to look, see, observe"</a:t>
+              <a:t>"look; view; examine"</a:t>
             </a:r>
             <a:endParaRPr lang="en-US" sz="2200" dirty="0"/>
           </a:p>
@@ -4279,7 +4279,7 @@
                 <a:ea typeface="Calibri" pitchFamily="34" charset="-122"/>
                 <a:cs typeface="Calibri" pitchFamily="34" charset="-120"/>
               </a:rPr>
-              <a:t>Origin: Greek: skopein</a:t>
+              <a:t>Origin: Greek root</a:t>
             </a:r>
             <a:endParaRPr lang="en-US" sz="1300" dirty="0"/>
           </a:p>
@@ -5288,7 +5288,7 @@
                 <a:ea typeface="Calibri" pitchFamily="34" charset="-122"/>
                 <a:cs typeface="Calibri" pitchFamily="34" charset="-120"/>
               </a:rPr>
-              <a:t>Word Labs  •  wordlabs.app  •  Root: 'scope' = to look, see, observe</a:t>
+              <a:t>Word Labs  •  wordlabs.app  •  Root: 'scope' = look; view; examine</a:t>
             </a:r>
             <a:endParaRPr lang="en-US" sz="800" dirty="0"/>
           </a:p>
@@ -5622,7 +5622,7 @@
                 <a:ea typeface="Trebuchet MS" pitchFamily="34" charset="-122"/>
                 <a:cs typeface="Trebuchet MS" pitchFamily="34" charset="-120"/>
               </a:rPr>
-              <a:t>2</a:t>
+              <a:t>0</a:t>
             </a:r>
             <a:pPr algn="ctr" indent="0" marL="0">
               <a:buNone/>
@@ -5636,7 +5636,7 @@
                 <a:ea typeface="Trebuchet MS" pitchFamily="34" charset="-122"/>
                 <a:cs typeface="Trebuchet MS" pitchFamily="34" charset="-120"/>
               </a:rPr>
-              <a:t>  punctuation marks</a:t>
+              <a:t>  punctuation mark</a:t>
             </a:r>
             <a:endParaRPr lang="en-US" sz="2800" dirty="0"/>
           </a:p>
@@ -5928,7 +5928,7 @@
                 <a:ea typeface="Calibri" pitchFamily="34" charset="-122"/>
                 <a:cs typeface="Calibri" pitchFamily="34" charset="-120"/>
               </a:rPr>
-              <a:t>Word Labs  •  wordlabs.app  •  Root: 'scope' = to look, see, observe</a:t>
+              <a:t>Word Labs  •  wordlabs.app  •  Root: 'scope' = look; view; examine</a:t>
             </a:r>
             <a:endParaRPr lang="en-US" sz="800" dirty="0"/>
           </a:p>
@@ -6040,7 +6040,7 @@
                 <a:ea typeface="Calibri" pitchFamily="34" charset="-122"/>
                 <a:cs typeface="Calibri" pitchFamily="34" charset="-120"/>
               </a:rPr>
-              <a:t>Using a </a:t>
+              <a:t>The magazine printed </a:t>
             </a:r>
             <a:pPr algn="l" indent="0" marL="0">
               <a:buNone/>
@@ -6057,7 +6057,7 @@
                 <a:ea typeface="Calibri" pitchFamily="34" charset="-122"/>
                 <a:cs typeface="Calibri" pitchFamily="34" charset="-120"/>
               </a:rPr>
-              <a:t>telescope</a:t>
+              <a:t>horoscopes</a:t>
             </a:r>
             <a:pPr algn="l" indent="0" marL="0">
               <a:buNone/>
@@ -6071,7 +6071,7 @@
                 <a:ea typeface="Calibri" pitchFamily="34" charset="-122"/>
                 <a:cs typeface="Calibri" pitchFamily="34" charset="-120"/>
               </a:rPr>
-              <a:t>, the astronomer studied the stars, while a </a:t>
+              <a:t> for every star sign each month. The doctor used a </a:t>
             </a:r>
             <a:pPr algn="l" indent="0" marL="0">
               <a:buNone/>
@@ -6088,7 +6088,7 @@
                 <a:ea typeface="Calibri" pitchFamily="34" charset="-122"/>
                 <a:cs typeface="Calibri" pitchFamily="34" charset="-120"/>
               </a:rPr>
-              <a:t>periscope</a:t>
+              <a:t>stethoscope</a:t>
             </a:r>
             <a:pPr algn="l" indent="0" marL="0">
               <a:buNone/>
@@ -6102,7 +6102,7 @@
                 <a:ea typeface="Calibri" pitchFamily="34" charset="-122"/>
                 <a:cs typeface="Calibri" pitchFamily="34" charset="-120"/>
               </a:rPr>
-              <a:t> helped the submarine crew see above the water.</a:t>
+              <a:t> to listen to my heartbeat.</a:t>
             </a:r>
             <a:endParaRPr lang="en-US" sz="1800" dirty="0"/>
           </a:p>
@@ -6257,7 +6257,7 @@
                 <a:ea typeface="Trebuchet MS" pitchFamily="34" charset="-122"/>
                 <a:cs typeface="Trebuchet MS" pitchFamily="34" charset="-120"/>
               </a:rPr>
-              <a:t>telescope</a:t>
+              <a:t>horoscopes</a:t>
             </a:r>
             <a:endParaRPr lang="en-US" sz="1400" dirty="0"/>
           </a:p>
@@ -6385,7 +6385,7 @@
                 <a:ea typeface="Trebuchet MS" pitchFamily="34" charset="-122"/>
                 <a:cs typeface="Trebuchet MS" pitchFamily="34" charset="-120"/>
               </a:rPr>
-              <a:t>periscope</a:t>
+              <a:t>stethoscope</a:t>
             </a:r>
             <a:endParaRPr lang="en-US" sz="1400" dirty="0"/>
           </a:p>
@@ -6716,7 +6716,7 @@
                 <a:ea typeface="Calibri" pitchFamily="34" charset="-122"/>
                 <a:cs typeface="Calibri" pitchFamily="34" charset="-120"/>
               </a:rPr>
-              <a:t>Word Labs  •  wordlabs.app  •  Root: 'scope' = to look, see, observe</a:t>
+              <a:t>Word Labs  •  wordlabs.app  •  Root: 'scope' = look; view; examine</a:t>
             </a:r>
             <a:endParaRPr lang="en-US" sz="800" dirty="0"/>
           </a:p>
@@ -6855,7 +6855,7 @@
                 <a:ea typeface="Trebuchet MS" pitchFamily="34" charset="-122"/>
                 <a:cs typeface="Trebuchet MS" pitchFamily="34" charset="-120"/>
               </a:rPr>
-              <a:t>telescope</a:t>
+              <a:t>horoscopes</a:t>
             </a:r>
             <a:endParaRPr lang="en-US" sz="2800" dirty="0"/>
           </a:p>
@@ -7543,7 +7543,7 @@
                 <a:ea typeface="Calibri" pitchFamily="34" charset="-122"/>
                 <a:cs typeface="Calibri" pitchFamily="34" charset="-120"/>
               </a:rPr>
-              <a:t>Word Labs  •  wordlabs.app  •  Root: 'scope' = to look, see, observe</a:t>
+              <a:t>Word Labs  •  wordlabs.app  •  Root: 'scope' = look; view; examine</a:t>
             </a:r>
             <a:endParaRPr lang="en-US" sz="800" dirty="0"/>
           </a:p>
@@ -7682,7 +7682,7 @@
                 <a:ea typeface="Trebuchet MS" pitchFamily="34" charset="-122"/>
                 <a:cs typeface="Trebuchet MS" pitchFamily="34" charset="-120"/>
               </a:rPr>
-              <a:t>telescope</a:t>
+              <a:t>horoscopes</a:t>
             </a:r>
             <a:endParaRPr lang="en-US" sz="2800" dirty="0"/>
           </a:p>
@@ -7762,7 +7762,7 @@
         </p:nvSpPr>
         <p:spPr>
           <a:xfrm>
-            <a:off x="2938272" y="2258568"/>
+            <a:off x="2221992" y="2258568"/>
             <a:ext cx="1828800" cy="292608"/>
           </a:xfrm>
           <a:prstGeom prst="rect">
@@ -7796,7 +7796,7 @@
         </p:nvSpPr>
         <p:spPr>
           <a:xfrm>
-            <a:off x="2938272" y="2258568"/>
+            <a:off x="2221992" y="2258568"/>
             <a:ext cx="1828800" cy="292608"/>
           </a:xfrm>
           <a:prstGeom prst="rect">
@@ -7821,7 +7821,7 @@
                 <a:ea typeface="Trebuchet MS" pitchFamily="34" charset="-122"/>
                 <a:cs typeface="Trebuchet MS" pitchFamily="34" charset="-120"/>
               </a:rPr>
-              <a:t>tele</a:t>
+              <a:t>horo</a:t>
             </a:r>
             <a:endParaRPr lang="en-US" sz="1300" dirty="0"/>
           </a:p>
@@ -7835,7 +7835,7 @@
         </p:nvSpPr>
         <p:spPr>
           <a:xfrm>
-            <a:off x="2938272" y="2569464"/>
+            <a:off x="2221992" y="2569464"/>
             <a:ext cx="1828800" cy="201168"/>
           </a:xfrm>
           <a:prstGeom prst="rect">
@@ -7860,7 +7860,7 @@
                 <a:ea typeface="Calibri" pitchFamily="34" charset="-122"/>
                 <a:cs typeface="Calibri" pitchFamily="34" charset="-120"/>
               </a:rPr>
-              <a:t>far away</a:t>
+              <a:t>time; hour</a:t>
             </a:r>
             <a:endParaRPr lang="en-US" sz="850" dirty="0"/>
           </a:p>
@@ -7874,7 +7874,7 @@
         </p:nvSpPr>
         <p:spPr>
           <a:xfrm>
-            <a:off x="5803392" y="2258568"/>
+            <a:off x="4370832" y="2258568"/>
             <a:ext cx="1828800" cy="292608"/>
           </a:xfrm>
           <a:prstGeom prst="rect">
@@ -7908,7 +7908,7 @@
         </p:nvSpPr>
         <p:spPr>
           <a:xfrm>
-            <a:off x="5803392" y="2258568"/>
+            <a:off x="4370832" y="2258568"/>
             <a:ext cx="1828800" cy="292608"/>
           </a:xfrm>
           <a:prstGeom prst="rect">
@@ -7947,7 +7947,7 @@
         </p:nvSpPr>
         <p:spPr>
           <a:xfrm>
-            <a:off x="5803392" y="2569464"/>
+            <a:off x="4370832" y="2569464"/>
             <a:ext cx="1828800" cy="201168"/>
           </a:xfrm>
           <a:prstGeom prst="rect">
@@ -7972,7 +7972,7 @@
                 <a:ea typeface="Calibri" pitchFamily="34" charset="-122"/>
                 <a:cs typeface="Calibri" pitchFamily="34" charset="-120"/>
               </a:rPr>
-              <a:t>to look or observe</a:t>
+              <a:t>look; view; examine</a:t>
             </a:r>
             <a:endParaRPr lang="en-US" sz="850" dirty="0"/>
           </a:p>
@@ -7981,6 +7981,118 @@
       <p:sp>
         <p:nvSpPr>
           <p:cNvPr id="22" name="Shape 20"/>
+          <p:cNvSpPr/>
+          <p:nvPr/>
+        </p:nvSpPr>
+        <p:spPr>
+          <a:xfrm>
+            <a:off x="6519672" y="2258568"/>
+            <a:ext cx="1828800" cy="292608"/>
+          </a:xfrm>
+          <a:prstGeom prst="rect">
+            <a:avLst>
+              <a:gd name="adj" fmla="val 25000"/>
+            </a:avLst>
+          </a:prstGeom>
+          <a:solidFill>
+            <a:srgbClr val="FCE7F3"/>
+          </a:solidFill>
+          <a:ln w="19050">
+            <a:solidFill>
+              <a:srgbClr val="DB2777"/>
+            </a:solidFill>
+            <a:prstDash val="solid"/>
+          </a:ln>
+          <a:effectLst>
+            <a:outerShdw sx="100000" sy="100000" kx="0" ky="0" algn="bl" rotWithShape="0" blurRad="101600" dist="38100" dir="8100000">
+              <a:srgbClr val="000000">
+                <a:alpha val="12000"/>
+              </a:srgbClr>
+            </a:outerShdw>
+          </a:effectLst>
+        </p:spPr>
+      </p:sp>
+      <p:sp>
+        <p:nvSpPr>
+          <p:cNvPr id="23" name="Text 21"/>
+          <p:cNvSpPr/>
+          <p:nvPr/>
+        </p:nvSpPr>
+        <p:spPr>
+          <a:xfrm>
+            <a:off x="6519672" y="2258568"/>
+            <a:ext cx="1828800" cy="292608"/>
+          </a:xfrm>
+          <a:prstGeom prst="rect">
+            <a:avLst/>
+          </a:prstGeom>
+          <a:noFill/>
+          <a:ln/>
+        </p:spPr>
+        <p:txBody>
+          <a:bodyPr wrap="square" lIns="0" tIns="0" rIns="0" bIns="0" rtlCol="0" anchor="ctr"/>
+          <a:lstStyle/>
+          <a:p>
+            <a:pPr algn="ctr" indent="0" marL="0">
+              <a:buNone/>
+            </a:pPr>
+            <a:r>
+              <a:rPr lang="en-US" sz="1300" b="1" dirty="0">
+                <a:solidFill>
+                  <a:srgbClr val="9D174D"/>
+                </a:solidFill>
+                <a:latin typeface="Trebuchet MS" pitchFamily="34" charset="0"/>
+                <a:ea typeface="Trebuchet MS" pitchFamily="34" charset="-122"/>
+                <a:cs typeface="Trebuchet MS" pitchFamily="34" charset="-120"/>
+              </a:rPr>
+              <a:t>s</a:t>
+            </a:r>
+            <a:endParaRPr lang="en-US" sz="1300" dirty="0"/>
+          </a:p>
+        </p:txBody>
+      </p:sp>
+      <p:sp>
+        <p:nvSpPr>
+          <p:cNvPr id="24" name="Text 22"/>
+          <p:cNvSpPr/>
+          <p:nvPr/>
+        </p:nvSpPr>
+        <p:spPr>
+          <a:xfrm>
+            <a:off x="6519672" y="2569464"/>
+            <a:ext cx="1828800" cy="201168"/>
+          </a:xfrm>
+          <a:prstGeom prst="rect">
+            <a:avLst/>
+          </a:prstGeom>
+          <a:noFill/>
+          <a:ln/>
+        </p:spPr>
+        <p:txBody>
+          <a:bodyPr wrap="square" lIns="0" tIns="0" rIns="0" bIns="0" rtlCol="0" anchor="t"/>
+          <a:lstStyle/>
+          <a:p>
+            <a:pPr algn="ctr" indent="0" marL="0">
+              <a:buNone/>
+            </a:pPr>
+            <a:r>
+              <a:rPr lang="en-US" sz="850" dirty="0">
+                <a:solidFill>
+                  <a:srgbClr val="475569"/>
+                </a:solidFill>
+                <a:latin typeface="Calibri" pitchFamily="34" charset="0"/>
+                <a:ea typeface="Calibri" pitchFamily="34" charset="-122"/>
+                <a:cs typeface="Calibri" pitchFamily="34" charset="-120"/>
+              </a:rPr>
+              <a:t>plural or present tense</a:t>
+            </a:r>
+            <a:endParaRPr lang="en-US" sz="850" dirty="0"/>
+          </a:p>
+        </p:txBody>
+      </p:sp>
+      <p:sp>
+        <p:nvSpPr>
+          <p:cNvPr id="25" name="Shape 23"/>
           <p:cNvSpPr/>
           <p:nvPr/>
         </p:nvSpPr>
@@ -8007,7 +8119,7 @@
       </p:sp>
       <p:sp>
         <p:nvSpPr>
-          <p:cNvPr id="23" name="Text 21"/>
+          <p:cNvPr id="26" name="Text 24"/>
           <p:cNvSpPr/>
           <p:nvPr/>
         </p:nvSpPr>
@@ -8046,7 +8158,7 @@
       </p:sp>
       <p:sp>
         <p:nvSpPr>
-          <p:cNvPr id="24" name="Shape 22"/>
+          <p:cNvPr id="27" name="Shape 25"/>
           <p:cNvSpPr/>
           <p:nvPr/>
         </p:nvSpPr>
@@ -8073,7 +8185,7 @@
       </p:sp>
       <p:sp>
         <p:nvSpPr>
-          <p:cNvPr id="25" name="Text 23"/>
+          <p:cNvPr id="28" name="Text 26"/>
           <p:cNvSpPr/>
           <p:nvPr/>
         </p:nvSpPr>
@@ -8112,7 +8224,7 @@
       </p:sp>
       <p:sp>
         <p:nvSpPr>
-          <p:cNvPr id="26" name="Shape 24"/>
+          <p:cNvPr id="29" name="Shape 27"/>
           <p:cNvSpPr/>
           <p:nvPr/>
         </p:nvSpPr>
@@ -8139,7 +8251,7 @@
       </p:sp>
       <p:sp>
         <p:nvSpPr>
-          <p:cNvPr id="27" name="Text 25"/>
+          <p:cNvPr id="30" name="Text 28"/>
           <p:cNvSpPr/>
           <p:nvPr/>
         </p:nvSpPr>
@@ -8178,7 +8290,7 @@
       </p:sp>
       <p:sp>
         <p:nvSpPr>
-          <p:cNvPr id="28" name="Shape 26"/>
+          <p:cNvPr id="31" name="Shape 29"/>
           <p:cNvSpPr/>
           <p:nvPr/>
         </p:nvSpPr>
@@ -8205,7 +8317,7 @@
       </p:sp>
       <p:sp>
         <p:nvSpPr>
-          <p:cNvPr id="29" name="Text 27"/>
+          <p:cNvPr id="32" name="Text 30"/>
           <p:cNvSpPr/>
           <p:nvPr/>
         </p:nvSpPr>
@@ -8528,7 +8640,7 @@
                 <a:ea typeface="Calibri" pitchFamily="34" charset="-122"/>
                 <a:cs typeface="Calibri" pitchFamily="34" charset="-120"/>
               </a:rPr>
-              <a:t>Word Labs  •  wordlabs.app  •  Root: 'scope' = to look, see, observe</a:t>
+              <a:t>Word Labs  •  wordlabs.app  •  Root: 'scope' = look; view; examine</a:t>
             </a:r>
             <a:endParaRPr lang="en-US" sz="800" dirty="0"/>
           </a:p>
@@ -8667,7 +8779,7 @@
                 <a:ea typeface="Trebuchet MS" pitchFamily="34" charset="-122"/>
                 <a:cs typeface="Trebuchet MS" pitchFamily="34" charset="-120"/>
               </a:rPr>
-              <a:t>telescope</a:t>
+              <a:t>horoscopes</a:t>
             </a:r>
             <a:endParaRPr lang="en-US" sz="2800" dirty="0"/>
           </a:p>
@@ -8747,7 +8859,7 @@
         </p:nvSpPr>
         <p:spPr>
           <a:xfrm>
-            <a:off x="2938272" y="2258568"/>
+            <a:off x="2221992" y="2258568"/>
             <a:ext cx="1828800" cy="292608"/>
           </a:xfrm>
           <a:prstGeom prst="rect">
@@ -8781,7 +8893,7 @@
         </p:nvSpPr>
         <p:spPr>
           <a:xfrm>
-            <a:off x="2938272" y="2258568"/>
+            <a:off x="2221992" y="2258568"/>
             <a:ext cx="1828800" cy="292608"/>
           </a:xfrm>
           <a:prstGeom prst="rect">
@@ -8806,7 +8918,7 @@
                 <a:ea typeface="Trebuchet MS" pitchFamily="34" charset="-122"/>
                 <a:cs typeface="Trebuchet MS" pitchFamily="34" charset="-120"/>
               </a:rPr>
-              <a:t>tele</a:t>
+              <a:t>horo</a:t>
             </a:r>
             <a:endParaRPr lang="en-US" sz="1300" dirty="0"/>
           </a:p>
@@ -8820,7 +8932,7 @@
         </p:nvSpPr>
         <p:spPr>
           <a:xfrm>
-            <a:off x="2938272" y="2569464"/>
+            <a:off x="2221992" y="2569464"/>
             <a:ext cx="1828800" cy="201168"/>
           </a:xfrm>
           <a:prstGeom prst="rect">
@@ -8845,7 +8957,7 @@
                 <a:ea typeface="Calibri" pitchFamily="34" charset="-122"/>
                 <a:cs typeface="Calibri" pitchFamily="34" charset="-120"/>
               </a:rPr>
-              <a:t>far away</a:t>
+              <a:t>time; hour</a:t>
             </a:r>
             <a:endParaRPr lang="en-US" sz="850" dirty="0"/>
           </a:p>
@@ -8859,7 +8971,7 @@
         </p:nvSpPr>
         <p:spPr>
           <a:xfrm>
-            <a:off x="5803392" y="2258568"/>
+            <a:off x="4370832" y="2258568"/>
             <a:ext cx="1828800" cy="292608"/>
           </a:xfrm>
           <a:prstGeom prst="rect">
@@ -8893,7 +9005,7 @@
         </p:nvSpPr>
         <p:spPr>
           <a:xfrm>
-            <a:off x="5803392" y="2258568"/>
+            <a:off x="4370832" y="2258568"/>
             <a:ext cx="1828800" cy="292608"/>
           </a:xfrm>
           <a:prstGeom prst="rect">
@@ -8932,7 +9044,7 @@
         </p:nvSpPr>
         <p:spPr>
           <a:xfrm>
-            <a:off x="5803392" y="2569464"/>
+            <a:off x="4370832" y="2569464"/>
             <a:ext cx="1828800" cy="201168"/>
           </a:xfrm>
           <a:prstGeom prst="rect">
@@ -8957,7 +9069,7 @@
                 <a:ea typeface="Calibri" pitchFamily="34" charset="-122"/>
                 <a:cs typeface="Calibri" pitchFamily="34" charset="-120"/>
               </a:rPr>
-              <a:t>to look or observe</a:t>
+              <a:t>look; view; examine</a:t>
             </a:r>
             <a:endParaRPr lang="en-US" sz="850" dirty="0"/>
           </a:p>
@@ -8966,6 +9078,118 @@
       <p:sp>
         <p:nvSpPr>
           <p:cNvPr id="22" name="Shape 20"/>
+          <p:cNvSpPr/>
+          <p:nvPr/>
+        </p:nvSpPr>
+        <p:spPr>
+          <a:xfrm>
+            <a:off x="6519672" y="2258568"/>
+            <a:ext cx="1828800" cy="292608"/>
+          </a:xfrm>
+          <a:prstGeom prst="rect">
+            <a:avLst>
+              <a:gd name="adj" fmla="val 25000"/>
+            </a:avLst>
+          </a:prstGeom>
+          <a:solidFill>
+            <a:srgbClr val="FCE7F3"/>
+          </a:solidFill>
+          <a:ln w="19050">
+            <a:solidFill>
+              <a:srgbClr val="DB2777"/>
+            </a:solidFill>
+            <a:prstDash val="solid"/>
+          </a:ln>
+          <a:effectLst>
+            <a:outerShdw sx="100000" sy="100000" kx="0" ky="0" algn="bl" rotWithShape="0" blurRad="101600" dist="38100" dir="8100000">
+              <a:srgbClr val="000000">
+                <a:alpha val="12000"/>
+              </a:srgbClr>
+            </a:outerShdw>
+          </a:effectLst>
+        </p:spPr>
+      </p:sp>
+      <p:sp>
+        <p:nvSpPr>
+          <p:cNvPr id="23" name="Text 21"/>
+          <p:cNvSpPr/>
+          <p:nvPr/>
+        </p:nvSpPr>
+        <p:spPr>
+          <a:xfrm>
+            <a:off x="6519672" y="2258568"/>
+            <a:ext cx="1828800" cy="292608"/>
+          </a:xfrm>
+          <a:prstGeom prst="rect">
+            <a:avLst/>
+          </a:prstGeom>
+          <a:noFill/>
+          <a:ln/>
+        </p:spPr>
+        <p:txBody>
+          <a:bodyPr wrap="square" lIns="0" tIns="0" rIns="0" bIns="0" rtlCol="0" anchor="ctr"/>
+          <a:lstStyle/>
+          <a:p>
+            <a:pPr algn="ctr" indent="0" marL="0">
+              <a:buNone/>
+            </a:pPr>
+            <a:r>
+              <a:rPr lang="en-US" sz="1300" b="1" dirty="0">
+                <a:solidFill>
+                  <a:srgbClr val="9D174D"/>
+                </a:solidFill>
+                <a:latin typeface="Trebuchet MS" pitchFamily="34" charset="0"/>
+                <a:ea typeface="Trebuchet MS" pitchFamily="34" charset="-122"/>
+                <a:cs typeface="Trebuchet MS" pitchFamily="34" charset="-120"/>
+              </a:rPr>
+              <a:t>s</a:t>
+            </a:r>
+            <a:endParaRPr lang="en-US" sz="1300" dirty="0"/>
+          </a:p>
+        </p:txBody>
+      </p:sp>
+      <p:sp>
+        <p:nvSpPr>
+          <p:cNvPr id="24" name="Text 22"/>
+          <p:cNvSpPr/>
+          <p:nvPr/>
+        </p:nvSpPr>
+        <p:spPr>
+          <a:xfrm>
+            <a:off x="6519672" y="2569464"/>
+            <a:ext cx="1828800" cy="201168"/>
+          </a:xfrm>
+          <a:prstGeom prst="rect">
+            <a:avLst/>
+          </a:prstGeom>
+          <a:noFill/>
+          <a:ln/>
+        </p:spPr>
+        <p:txBody>
+          <a:bodyPr wrap="square" lIns="0" tIns="0" rIns="0" bIns="0" rtlCol="0" anchor="t"/>
+          <a:lstStyle/>
+          <a:p>
+            <a:pPr algn="ctr" indent="0" marL="0">
+              <a:buNone/>
+            </a:pPr>
+            <a:r>
+              <a:rPr lang="en-US" sz="850" dirty="0">
+                <a:solidFill>
+                  <a:srgbClr val="475569"/>
+                </a:solidFill>
+                <a:latin typeface="Calibri" pitchFamily="34" charset="0"/>
+                <a:ea typeface="Calibri" pitchFamily="34" charset="-122"/>
+                <a:cs typeface="Calibri" pitchFamily="34" charset="-120"/>
+              </a:rPr>
+              <a:t>plural or present tense</a:t>
+            </a:r>
+            <a:endParaRPr lang="en-US" sz="850" dirty="0"/>
+          </a:p>
+        </p:txBody>
+      </p:sp>
+      <p:sp>
+        <p:nvSpPr>
+          <p:cNvPr id="25" name="Shape 23"/>
           <p:cNvSpPr/>
           <p:nvPr/>
         </p:nvSpPr>
@@ -8992,7 +9216,7 @@
       </p:sp>
       <p:sp>
         <p:nvSpPr>
-          <p:cNvPr id="23" name="Text 21"/>
+          <p:cNvPr id="26" name="Text 24"/>
           <p:cNvSpPr/>
           <p:nvPr/>
         </p:nvSpPr>
@@ -9031,7 +9255,7 @@
       </p:sp>
       <p:sp>
         <p:nvSpPr>
-          <p:cNvPr id="24" name="Shape 22"/>
+          <p:cNvPr id="27" name="Shape 25"/>
           <p:cNvSpPr/>
           <p:nvPr/>
         </p:nvSpPr>
@@ -9058,7 +9282,7 @@
       </p:sp>
       <p:sp>
         <p:nvSpPr>
-          <p:cNvPr id="25" name="Shape 23"/>
+          <p:cNvPr id="28" name="Shape 26"/>
           <p:cNvSpPr/>
           <p:nvPr/>
         </p:nvSpPr>
@@ -9085,7 +9309,7 @@
       </p:sp>
       <p:sp>
         <p:nvSpPr>
-          <p:cNvPr id="26" name="Text 24"/>
+          <p:cNvPr id="29" name="Text 27"/>
           <p:cNvSpPr/>
           <p:nvPr/>
         </p:nvSpPr>
@@ -9116,7 +9340,7 @@
                 <a:ea typeface="Trebuchet MS" pitchFamily="34" charset="-122"/>
                 <a:cs typeface="Trebuchet MS" pitchFamily="34" charset="-120"/>
               </a:rPr>
-              <a:t>tel</a:t>
+              <a:t>hor</a:t>
             </a:r>
             <a:endParaRPr lang="en-US" sz="1400" dirty="0"/>
           </a:p>
@@ -9124,7 +9348,7 @@
       </p:sp>
       <p:sp>
         <p:nvSpPr>
-          <p:cNvPr id="27" name="Text 25"/>
+          <p:cNvPr id="30" name="Text 28"/>
           <p:cNvSpPr/>
           <p:nvPr/>
         </p:nvSpPr>
@@ -9163,7 +9387,7 @@
       </p:sp>
       <p:sp>
         <p:nvSpPr>
-          <p:cNvPr id="28" name="Shape 26"/>
+          <p:cNvPr id="31" name="Shape 29"/>
           <p:cNvSpPr/>
           <p:nvPr/>
         </p:nvSpPr>
@@ -9190,7 +9414,7 @@
       </p:sp>
       <p:sp>
         <p:nvSpPr>
-          <p:cNvPr id="29" name="Text 27"/>
+          <p:cNvPr id="32" name="Text 30"/>
           <p:cNvSpPr/>
           <p:nvPr/>
         </p:nvSpPr>
@@ -9221,7 +9445,7 @@
                 <a:ea typeface="Trebuchet MS" pitchFamily="34" charset="-122"/>
                 <a:cs typeface="Trebuchet MS" pitchFamily="34" charset="-120"/>
               </a:rPr>
-              <a:t>e</a:t>
+              <a:t>o</a:t>
             </a:r>
             <a:endParaRPr lang="en-US" sz="1400" dirty="0"/>
           </a:p>
@@ -9229,7 +9453,7 @@
       </p:sp>
       <p:sp>
         <p:nvSpPr>
-          <p:cNvPr id="30" name="Text 28"/>
+          <p:cNvPr id="33" name="Text 31"/>
           <p:cNvSpPr/>
           <p:nvPr/>
         </p:nvSpPr>
@@ -9268,7 +9492,7 @@
       </p:sp>
       <p:sp>
         <p:nvSpPr>
-          <p:cNvPr id="31" name="Shape 29"/>
+          <p:cNvPr id="34" name="Shape 32"/>
           <p:cNvSpPr/>
           <p:nvPr/>
         </p:nvSpPr>
@@ -9295,7 +9519,7 @@
       </p:sp>
       <p:sp>
         <p:nvSpPr>
-          <p:cNvPr id="32" name="Text 30"/>
+          <p:cNvPr id="35" name="Text 33"/>
           <p:cNvSpPr/>
           <p:nvPr/>
         </p:nvSpPr>
@@ -9326,7 +9550,7 @@
                 <a:ea typeface="Trebuchet MS" pitchFamily="34" charset="-122"/>
                 <a:cs typeface="Trebuchet MS" pitchFamily="34" charset="-120"/>
               </a:rPr>
-              <a:t>scope</a:t>
+              <a:t>scopes</a:t>
             </a:r>
             <a:endParaRPr lang="en-US" sz="1400" dirty="0"/>
           </a:p>
@@ -9334,7 +9558,7 @@
       </p:sp>
       <p:sp>
         <p:nvSpPr>
-          <p:cNvPr id="33" name="Shape 31"/>
+          <p:cNvPr id="36" name="Shape 34"/>
           <p:cNvSpPr/>
           <p:nvPr/>
         </p:nvSpPr>
@@ -9361,7 +9585,7 @@
       </p:sp>
       <p:sp>
         <p:nvSpPr>
-          <p:cNvPr id="34" name="Text 32"/>
+          <p:cNvPr id="37" name="Text 35"/>
           <p:cNvSpPr/>
           <p:nvPr/>
         </p:nvSpPr>
@@ -9400,7 +9624,7 @@
       </p:sp>
       <p:sp>
         <p:nvSpPr>
-          <p:cNvPr id="35" name="Shape 33"/>
+          <p:cNvPr id="38" name="Shape 36"/>
           <p:cNvSpPr/>
           <p:nvPr/>
         </p:nvSpPr>
@@ -9427,7 +9651,7 @@
       </p:sp>
       <p:sp>
         <p:nvSpPr>
-          <p:cNvPr id="36" name="Text 34"/>
+          <p:cNvPr id="39" name="Text 37"/>
           <p:cNvSpPr/>
           <p:nvPr/>
         </p:nvSpPr>
@@ -9750,7 +9974,7 @@
                 <a:ea typeface="Calibri" pitchFamily="34" charset="-122"/>
                 <a:cs typeface="Calibri" pitchFamily="34" charset="-120"/>
               </a:rPr>
-              <a:t>Word Labs  •  wordlabs.app  •  Root: 'scope' = to look, see, observe</a:t>
+              <a:t>Word Labs  •  wordlabs.app  •  Root: 'scope' = look; view; examine</a:t>
             </a:r>
             <a:endParaRPr lang="en-US" sz="800" dirty="0"/>
           </a:p>
@@ -9889,7 +10113,7 @@
                 <a:ea typeface="Trebuchet MS" pitchFamily="34" charset="-122"/>
                 <a:cs typeface="Trebuchet MS" pitchFamily="34" charset="-120"/>
               </a:rPr>
-              <a:t>telescope</a:t>
+              <a:t>horoscopes</a:t>
             </a:r>
             <a:endParaRPr lang="en-US" sz="2800" dirty="0"/>
           </a:p>
@@ -9969,7 +10193,7 @@
         </p:nvSpPr>
         <p:spPr>
           <a:xfrm>
-            <a:off x="2938272" y="2258568"/>
+            <a:off x="2221992" y="2258568"/>
             <a:ext cx="1828800" cy="292608"/>
           </a:xfrm>
           <a:prstGeom prst="rect">
@@ -10003,7 +10227,7 @@
         </p:nvSpPr>
         <p:spPr>
           <a:xfrm>
-            <a:off x="2938272" y="2258568"/>
+            <a:off x="2221992" y="2258568"/>
             <a:ext cx="1828800" cy="292608"/>
           </a:xfrm>
           <a:prstGeom prst="rect">
@@ -10028,7 +10252,7 @@
                 <a:ea typeface="Trebuchet MS" pitchFamily="34" charset="-122"/>
                 <a:cs typeface="Trebuchet MS" pitchFamily="34" charset="-120"/>
               </a:rPr>
-              <a:t>tele</a:t>
+              <a:t>horo</a:t>
             </a:r>
             <a:endParaRPr lang="en-US" sz="1300" dirty="0"/>
           </a:p>
@@ -10042,7 +10266,7 @@
         </p:nvSpPr>
         <p:spPr>
           <a:xfrm>
-            <a:off x="2938272" y="2569464"/>
+            <a:off x="2221992" y="2569464"/>
             <a:ext cx="1828800" cy="201168"/>
           </a:xfrm>
           <a:prstGeom prst="rect">
@@ -10067,7 +10291,7 @@
                 <a:ea typeface="Calibri" pitchFamily="34" charset="-122"/>
                 <a:cs typeface="Calibri" pitchFamily="34" charset="-120"/>
               </a:rPr>
-              <a:t>far away</a:t>
+              <a:t>time; hour</a:t>
             </a:r>
             <a:endParaRPr lang="en-US" sz="850" dirty="0"/>
           </a:p>
@@ -10081,7 +10305,7 @@
         </p:nvSpPr>
         <p:spPr>
           <a:xfrm>
-            <a:off x="5803392" y="2258568"/>
+            <a:off x="4370832" y="2258568"/>
             <a:ext cx="1828800" cy="292608"/>
           </a:xfrm>
           <a:prstGeom prst="rect">
@@ -10115,7 +10339,7 @@
         </p:nvSpPr>
         <p:spPr>
           <a:xfrm>
-            <a:off x="5803392" y="2258568"/>
+            <a:off x="4370832" y="2258568"/>
             <a:ext cx="1828800" cy="292608"/>
           </a:xfrm>
           <a:prstGeom prst="rect">
@@ -10154,7 +10378,7 @@
         </p:nvSpPr>
         <p:spPr>
           <a:xfrm>
-            <a:off x="5803392" y="2569464"/>
+            <a:off x="4370832" y="2569464"/>
             <a:ext cx="1828800" cy="201168"/>
           </a:xfrm>
           <a:prstGeom prst="rect">
@@ -10179,7 +10403,7 @@
                 <a:ea typeface="Calibri" pitchFamily="34" charset="-122"/>
                 <a:cs typeface="Calibri" pitchFamily="34" charset="-120"/>
               </a:rPr>
-              <a:t>to look or observe</a:t>
+              <a:t>look; view; examine</a:t>
             </a:r>
             <a:endParaRPr lang="en-US" sz="850" dirty="0"/>
           </a:p>
@@ -10188,6 +10412,118 @@
       <p:sp>
         <p:nvSpPr>
           <p:cNvPr id="22" name="Shape 20"/>
+          <p:cNvSpPr/>
+          <p:nvPr/>
+        </p:nvSpPr>
+        <p:spPr>
+          <a:xfrm>
+            <a:off x="6519672" y="2258568"/>
+            <a:ext cx="1828800" cy="292608"/>
+          </a:xfrm>
+          <a:prstGeom prst="rect">
+            <a:avLst>
+              <a:gd name="adj" fmla="val 25000"/>
+            </a:avLst>
+          </a:prstGeom>
+          <a:solidFill>
+            <a:srgbClr val="FCE7F3"/>
+          </a:solidFill>
+          <a:ln w="19050">
+            <a:solidFill>
+              <a:srgbClr val="DB2777"/>
+            </a:solidFill>
+            <a:prstDash val="solid"/>
+          </a:ln>
+          <a:effectLst>
+            <a:outerShdw sx="100000" sy="100000" kx="0" ky="0" algn="bl" rotWithShape="0" blurRad="101600" dist="38100" dir="8100000">
+              <a:srgbClr val="000000">
+                <a:alpha val="12000"/>
+              </a:srgbClr>
+            </a:outerShdw>
+          </a:effectLst>
+        </p:spPr>
+      </p:sp>
+      <p:sp>
+        <p:nvSpPr>
+          <p:cNvPr id="23" name="Text 21"/>
+          <p:cNvSpPr/>
+          <p:nvPr/>
+        </p:nvSpPr>
+        <p:spPr>
+          <a:xfrm>
+            <a:off x="6519672" y="2258568"/>
+            <a:ext cx="1828800" cy="292608"/>
+          </a:xfrm>
+          <a:prstGeom prst="rect">
+            <a:avLst/>
+          </a:prstGeom>
+          <a:noFill/>
+          <a:ln/>
+        </p:spPr>
+        <p:txBody>
+          <a:bodyPr wrap="square" lIns="0" tIns="0" rIns="0" bIns="0" rtlCol="0" anchor="ctr"/>
+          <a:lstStyle/>
+          <a:p>
+            <a:pPr algn="ctr" indent="0" marL="0">
+              <a:buNone/>
+            </a:pPr>
+            <a:r>
+              <a:rPr lang="en-US" sz="1300" b="1" dirty="0">
+                <a:solidFill>
+                  <a:srgbClr val="9D174D"/>
+                </a:solidFill>
+                <a:latin typeface="Trebuchet MS" pitchFamily="34" charset="0"/>
+                <a:ea typeface="Trebuchet MS" pitchFamily="34" charset="-122"/>
+                <a:cs typeface="Trebuchet MS" pitchFamily="34" charset="-120"/>
+              </a:rPr>
+              <a:t>s</a:t>
+            </a:r>
+            <a:endParaRPr lang="en-US" sz="1300" dirty="0"/>
+          </a:p>
+        </p:txBody>
+      </p:sp>
+      <p:sp>
+        <p:nvSpPr>
+          <p:cNvPr id="24" name="Text 22"/>
+          <p:cNvSpPr/>
+          <p:nvPr/>
+        </p:nvSpPr>
+        <p:spPr>
+          <a:xfrm>
+            <a:off x="6519672" y="2569464"/>
+            <a:ext cx="1828800" cy="201168"/>
+          </a:xfrm>
+          <a:prstGeom prst="rect">
+            <a:avLst/>
+          </a:prstGeom>
+          <a:noFill/>
+          <a:ln/>
+        </p:spPr>
+        <p:txBody>
+          <a:bodyPr wrap="square" lIns="0" tIns="0" rIns="0" bIns="0" rtlCol="0" anchor="t"/>
+          <a:lstStyle/>
+          <a:p>
+            <a:pPr algn="ctr" indent="0" marL="0">
+              <a:buNone/>
+            </a:pPr>
+            <a:r>
+              <a:rPr lang="en-US" sz="850" dirty="0">
+                <a:solidFill>
+                  <a:srgbClr val="475569"/>
+                </a:solidFill>
+                <a:latin typeface="Calibri" pitchFamily="34" charset="0"/>
+                <a:ea typeface="Calibri" pitchFamily="34" charset="-122"/>
+                <a:cs typeface="Calibri" pitchFamily="34" charset="-120"/>
+              </a:rPr>
+              <a:t>plural or present tense</a:t>
+            </a:r>
+            <a:endParaRPr lang="en-US" sz="850" dirty="0"/>
+          </a:p>
+        </p:txBody>
+      </p:sp>
+      <p:sp>
+        <p:nvSpPr>
+          <p:cNvPr id="25" name="Shape 23"/>
           <p:cNvSpPr/>
           <p:nvPr/>
         </p:nvSpPr>
@@ -10214,7 +10550,7 @@
       </p:sp>
       <p:sp>
         <p:nvSpPr>
-          <p:cNvPr id="23" name="Text 21"/>
+          <p:cNvPr id="26" name="Text 24"/>
           <p:cNvSpPr/>
           <p:nvPr/>
         </p:nvSpPr>
@@ -10253,7 +10589,7 @@
       </p:sp>
       <p:sp>
         <p:nvSpPr>
-          <p:cNvPr id="24" name="Shape 22"/>
+          <p:cNvPr id="27" name="Shape 25"/>
           <p:cNvSpPr/>
           <p:nvPr/>
         </p:nvSpPr>
@@ -10280,7 +10616,7 @@
       </p:sp>
       <p:sp>
         <p:nvSpPr>
-          <p:cNvPr id="25" name="Shape 23"/>
+          <p:cNvPr id="28" name="Shape 26"/>
           <p:cNvSpPr/>
           <p:nvPr/>
         </p:nvSpPr>
@@ -10307,7 +10643,7 @@
       </p:sp>
       <p:sp>
         <p:nvSpPr>
-          <p:cNvPr id="26" name="Text 24"/>
+          <p:cNvPr id="29" name="Text 27"/>
           <p:cNvSpPr/>
           <p:nvPr/>
         </p:nvSpPr>
@@ -10338,7 +10674,7 @@
                 <a:ea typeface="Trebuchet MS" pitchFamily="34" charset="-122"/>
                 <a:cs typeface="Trebuchet MS" pitchFamily="34" charset="-120"/>
               </a:rPr>
-              <a:t>tel</a:t>
+              <a:t>hor</a:t>
             </a:r>
             <a:endParaRPr lang="en-US" sz="1400" dirty="0"/>
           </a:p>
@@ -10346,7 +10682,7 @@
       </p:sp>
       <p:sp>
         <p:nvSpPr>
-          <p:cNvPr id="27" name="Text 25"/>
+          <p:cNvPr id="30" name="Text 28"/>
           <p:cNvSpPr/>
           <p:nvPr/>
         </p:nvSpPr>
@@ -10385,7 +10721,7 @@
       </p:sp>
       <p:sp>
         <p:nvSpPr>
-          <p:cNvPr id="28" name="Shape 26"/>
+          <p:cNvPr id="31" name="Shape 29"/>
           <p:cNvSpPr/>
           <p:nvPr/>
         </p:nvSpPr>
@@ -10412,7 +10748,7 @@
       </p:sp>
       <p:sp>
         <p:nvSpPr>
-          <p:cNvPr id="29" name="Text 27"/>
+          <p:cNvPr id="32" name="Text 30"/>
           <p:cNvSpPr/>
           <p:nvPr/>
         </p:nvSpPr>
@@ -10443,7 +10779,7 @@
                 <a:ea typeface="Trebuchet MS" pitchFamily="34" charset="-122"/>
                 <a:cs typeface="Trebuchet MS" pitchFamily="34" charset="-120"/>
               </a:rPr>
-              <a:t>e</a:t>
+              <a:t>o</a:t>
             </a:r>
             <a:endParaRPr lang="en-US" sz="1400" dirty="0"/>
           </a:p>
@@ -10451,7 +10787,7 @@
       </p:sp>
       <p:sp>
         <p:nvSpPr>
-          <p:cNvPr id="30" name="Text 28"/>
+          <p:cNvPr id="33" name="Text 31"/>
           <p:cNvSpPr/>
           <p:nvPr/>
         </p:nvSpPr>
@@ -10490,7 +10826,7 @@
       </p:sp>
       <p:sp>
         <p:nvSpPr>
-          <p:cNvPr id="31" name="Shape 29"/>
+          <p:cNvPr id="34" name="Shape 32"/>
           <p:cNvSpPr/>
           <p:nvPr/>
         </p:nvSpPr>
@@ -10517,7 +10853,7 @@
       </p:sp>
       <p:sp>
         <p:nvSpPr>
-          <p:cNvPr id="32" name="Text 30"/>
+          <p:cNvPr id="35" name="Text 33"/>
           <p:cNvSpPr/>
           <p:nvPr/>
         </p:nvSpPr>
@@ -10548,7 +10884,7 @@
                 <a:ea typeface="Trebuchet MS" pitchFamily="34" charset="-122"/>
                 <a:cs typeface="Trebuchet MS" pitchFamily="34" charset="-120"/>
               </a:rPr>
-              <a:t>scope</a:t>
+              <a:t>scopes</a:t>
             </a:r>
             <a:endParaRPr lang="en-US" sz="1400" dirty="0"/>
           </a:p>
@@ -10556,7 +10892,7 @@
       </p:sp>
       <p:sp>
         <p:nvSpPr>
-          <p:cNvPr id="33" name="Shape 31"/>
+          <p:cNvPr id="36" name="Shape 34"/>
           <p:cNvSpPr/>
           <p:nvPr/>
         </p:nvSpPr>
@@ -10583,7 +10919,7 @@
       </p:sp>
       <p:sp>
         <p:nvSpPr>
-          <p:cNvPr id="34" name="Text 32"/>
+          <p:cNvPr id="37" name="Text 35"/>
           <p:cNvSpPr/>
           <p:nvPr/>
         </p:nvSpPr>
@@ -10622,18 +10958,18 @@
       </p:sp>
       <p:sp>
         <p:nvSpPr>
-          <p:cNvPr id="35" name="Shape 33"/>
+          <p:cNvPr id="38" name="Shape 36"/>
           <p:cNvSpPr/>
           <p:nvPr/>
         </p:nvSpPr>
         <p:spPr>
           <a:xfrm>
             <a:off x="1874520" y="4096512"/>
-            <a:ext cx="6903720" cy="804672"/>
+            <a:ext cx="6903720" cy="658368"/>
           </a:xfrm>
           <a:prstGeom prst="rect">
             <a:avLst>
-              <a:gd name="adj" fmla="val 6818"/>
+              <a:gd name="adj" fmla="val 8333"/>
             </a:avLst>
           </a:prstGeom>
           <a:solidFill>
@@ -10649,18 +10985,18 @@
       </p:sp>
       <p:sp>
         <p:nvSpPr>
-          <p:cNvPr id="36" name="Shape 34"/>
-          <p:cNvSpPr/>
-          <p:nvPr/>
-        </p:nvSpPr>
-        <p:spPr>
-          <a:xfrm>
-            <a:off x="2124837" y="4169664"/>
-            <a:ext cx="685800" cy="384048"/>
+          <p:cNvPr id="39" name="Shape 37"/>
+          <p:cNvSpPr/>
+          <p:nvPr/>
+        </p:nvSpPr>
+        <p:spPr>
+          <a:xfrm>
+            <a:off x="1951330" y="4169664"/>
+            <a:ext cx="676656" cy="475488"/>
           </a:xfrm>
           <a:prstGeom prst="rect">
             <a:avLst>
-              <a:gd name="adj" fmla="val 9524"/>
+              <a:gd name="adj" fmla="val 7692"/>
             </a:avLst>
           </a:prstGeom>
           <a:solidFill>
@@ -10676,14 +11012,14 @@
       </p:sp>
       <p:sp>
         <p:nvSpPr>
-          <p:cNvPr id="37" name="Text 35"/>
-          <p:cNvSpPr/>
-          <p:nvPr/>
-        </p:nvSpPr>
-        <p:spPr>
-          <a:xfrm>
-            <a:off x="2124837" y="4169664"/>
-            <a:ext cx="685800" cy="384048"/>
+          <p:cNvPr id="40" name="Text 38"/>
+          <p:cNvSpPr/>
+          <p:nvPr/>
+        </p:nvSpPr>
+        <p:spPr>
+          <a:xfrm>
+            <a:off x="1951330" y="4169664"/>
+            <a:ext cx="676656" cy="475488"/>
           </a:xfrm>
           <a:prstGeom prst="rect">
             <a:avLst/>
@@ -10707,7 +11043,7 @@
                 <a:ea typeface="Trebuchet MS" pitchFamily="34" charset="-122"/>
                 <a:cs typeface="Trebuchet MS" pitchFamily="34" charset="-120"/>
               </a:rPr>
-              <a:t>t</a:t>
+              <a:t>h</a:t>
             </a:r>
             <a:endParaRPr lang="en-US" sz="900" dirty="0"/>
           </a:p>
@@ -10715,18 +11051,18 @@
       </p:sp>
       <p:sp>
         <p:nvSpPr>
-          <p:cNvPr id="38" name="Shape 36"/>
-          <p:cNvSpPr/>
-          <p:nvPr/>
-        </p:nvSpPr>
-        <p:spPr>
-          <a:xfrm>
-            <a:off x="3033522" y="4169664"/>
-            <a:ext cx="685800" cy="384048"/>
+          <p:cNvPr id="41" name="Shape 39"/>
+          <p:cNvSpPr/>
+          <p:nvPr/>
+        </p:nvSpPr>
+        <p:spPr>
+          <a:xfrm>
+            <a:off x="2677363" y="4169664"/>
+            <a:ext cx="676656" cy="475488"/>
           </a:xfrm>
           <a:prstGeom prst="rect">
             <a:avLst>
-              <a:gd name="adj" fmla="val 9524"/>
+              <a:gd name="adj" fmla="val 7692"/>
             </a:avLst>
           </a:prstGeom>
           <a:solidFill>
@@ -10742,14 +11078,14 @@
       </p:sp>
       <p:sp>
         <p:nvSpPr>
-          <p:cNvPr id="39" name="Text 37"/>
-          <p:cNvSpPr/>
-          <p:nvPr/>
-        </p:nvSpPr>
-        <p:spPr>
-          <a:xfrm>
-            <a:off x="3033522" y="4169664"/>
-            <a:ext cx="685800" cy="384048"/>
+          <p:cNvPr id="42" name="Text 40"/>
+          <p:cNvSpPr/>
+          <p:nvPr/>
+        </p:nvSpPr>
+        <p:spPr>
+          <a:xfrm>
+            <a:off x="2677363" y="4169664"/>
+            <a:ext cx="676656" cy="475488"/>
           </a:xfrm>
           <a:prstGeom prst="rect">
             <a:avLst/>
@@ -10773,7 +11109,7 @@
                 <a:ea typeface="Trebuchet MS" pitchFamily="34" charset="-122"/>
                 <a:cs typeface="Trebuchet MS" pitchFamily="34" charset="-120"/>
               </a:rPr>
-              <a:t>e</a:t>
+              <a:t>o</a:t>
             </a:r>
             <a:endParaRPr lang="en-US" sz="900" dirty="0"/>
           </a:p>
@@ -10781,18 +11117,18 @@
       </p:sp>
       <p:sp>
         <p:nvSpPr>
-          <p:cNvPr id="40" name="Shape 38"/>
-          <p:cNvSpPr/>
-          <p:nvPr/>
-        </p:nvSpPr>
-        <p:spPr>
-          <a:xfrm>
-            <a:off x="3942207" y="4169664"/>
-            <a:ext cx="685800" cy="384048"/>
+          <p:cNvPr id="43" name="Shape 41"/>
+          <p:cNvSpPr/>
+          <p:nvPr/>
+        </p:nvSpPr>
+        <p:spPr>
+          <a:xfrm>
+            <a:off x="3403397" y="4169664"/>
+            <a:ext cx="676656" cy="475488"/>
           </a:xfrm>
           <a:prstGeom prst="rect">
             <a:avLst>
-              <a:gd name="adj" fmla="val 9524"/>
+              <a:gd name="adj" fmla="val 7692"/>
             </a:avLst>
           </a:prstGeom>
           <a:solidFill>
@@ -10808,14 +11144,14 @@
       </p:sp>
       <p:sp>
         <p:nvSpPr>
-          <p:cNvPr id="41" name="Text 39"/>
-          <p:cNvSpPr/>
-          <p:nvPr/>
-        </p:nvSpPr>
-        <p:spPr>
-          <a:xfrm>
-            <a:off x="3942207" y="4169664"/>
-            <a:ext cx="685800" cy="384048"/>
+          <p:cNvPr id="44" name="Text 42"/>
+          <p:cNvSpPr/>
+          <p:nvPr/>
+        </p:nvSpPr>
+        <p:spPr>
+          <a:xfrm>
+            <a:off x="3403397" y="4169664"/>
+            <a:ext cx="676656" cy="475488"/>
           </a:xfrm>
           <a:prstGeom prst="rect">
             <a:avLst/>
@@ -10839,7 +11175,7 @@
                 <a:ea typeface="Trebuchet MS" pitchFamily="34" charset="-122"/>
                 <a:cs typeface="Trebuchet MS" pitchFamily="34" charset="-120"/>
               </a:rPr>
-              <a:t>l</a:t>
+              <a:t>r</a:t>
             </a:r>
             <a:endParaRPr lang="en-US" sz="900" dirty="0"/>
           </a:p>
@@ -10847,18 +11183,18 @@
       </p:sp>
       <p:sp>
         <p:nvSpPr>
-          <p:cNvPr id="42" name="Shape 40"/>
-          <p:cNvSpPr/>
-          <p:nvPr/>
-        </p:nvSpPr>
-        <p:spPr>
-          <a:xfrm>
-            <a:off x="4850892" y="4169664"/>
-            <a:ext cx="685800" cy="384048"/>
+          <p:cNvPr id="45" name="Shape 43"/>
+          <p:cNvSpPr/>
+          <p:nvPr/>
+        </p:nvSpPr>
+        <p:spPr>
+          <a:xfrm>
+            <a:off x="4129430" y="4169664"/>
+            <a:ext cx="676656" cy="475488"/>
           </a:xfrm>
           <a:prstGeom prst="rect">
             <a:avLst>
-              <a:gd name="adj" fmla="val 9524"/>
+              <a:gd name="adj" fmla="val 7692"/>
             </a:avLst>
           </a:prstGeom>
           <a:solidFill>
@@ -10874,14 +11210,14 @@
       </p:sp>
       <p:sp>
         <p:nvSpPr>
-          <p:cNvPr id="43" name="Text 41"/>
-          <p:cNvSpPr/>
-          <p:nvPr/>
-        </p:nvSpPr>
-        <p:spPr>
-          <a:xfrm>
-            <a:off x="4850892" y="4169664"/>
-            <a:ext cx="685800" cy="384048"/>
+          <p:cNvPr id="46" name="Text 44"/>
+          <p:cNvSpPr/>
+          <p:nvPr/>
+        </p:nvSpPr>
+        <p:spPr>
+          <a:xfrm>
+            <a:off x="4129430" y="4169664"/>
+            <a:ext cx="676656" cy="475488"/>
           </a:xfrm>
           <a:prstGeom prst="rect">
             <a:avLst/>
@@ -10905,7 +11241,7 @@
                 <a:ea typeface="Trebuchet MS" pitchFamily="34" charset="-122"/>
                 <a:cs typeface="Trebuchet MS" pitchFamily="34" charset="-120"/>
               </a:rPr>
-              <a:t>e</a:t>
+              <a:t>o</a:t>
             </a:r>
             <a:endParaRPr lang="en-US" sz="900" dirty="0"/>
           </a:p>
@@ -10913,18 +11249,18 @@
       </p:sp>
       <p:sp>
         <p:nvSpPr>
-          <p:cNvPr id="44" name="Shape 42"/>
-          <p:cNvSpPr/>
-          <p:nvPr/>
-        </p:nvSpPr>
-        <p:spPr>
-          <a:xfrm>
-            <a:off x="5759577" y="4169664"/>
-            <a:ext cx="685800" cy="384048"/>
+          <p:cNvPr id="47" name="Shape 45"/>
+          <p:cNvSpPr/>
+          <p:nvPr/>
+        </p:nvSpPr>
+        <p:spPr>
+          <a:xfrm>
+            <a:off x="4855464" y="4169664"/>
+            <a:ext cx="676656" cy="475488"/>
           </a:xfrm>
           <a:prstGeom prst="rect">
             <a:avLst>
-              <a:gd name="adj" fmla="val 9524"/>
+              <a:gd name="adj" fmla="val 7692"/>
             </a:avLst>
           </a:prstGeom>
           <a:solidFill>
@@ -10940,14 +11276,14 @@
       </p:sp>
       <p:sp>
         <p:nvSpPr>
-          <p:cNvPr id="45" name="Text 43"/>
-          <p:cNvSpPr/>
-          <p:nvPr/>
-        </p:nvSpPr>
-        <p:spPr>
-          <a:xfrm>
-            <a:off x="5759577" y="4169664"/>
-            <a:ext cx="685800" cy="384048"/>
+          <p:cNvPr id="48" name="Text 46"/>
+          <p:cNvSpPr/>
+          <p:nvPr/>
+        </p:nvSpPr>
+        <p:spPr>
+          <a:xfrm>
+            <a:off x="4855464" y="4169664"/>
+            <a:ext cx="676656" cy="475488"/>
           </a:xfrm>
           <a:prstGeom prst="rect">
             <a:avLst/>
@@ -10971,7 +11307,7 @@
                 <a:ea typeface="Trebuchet MS" pitchFamily="34" charset="-122"/>
                 <a:cs typeface="Trebuchet MS" pitchFamily="34" charset="-120"/>
               </a:rPr>
-              <a:t>sc</a:t>
+              <a:t>s</a:t>
             </a:r>
             <a:endParaRPr lang="en-US" sz="900" dirty="0"/>
           </a:p>
@@ -10979,57 +11315,18 @@
       </p:sp>
       <p:sp>
         <p:nvSpPr>
-          <p:cNvPr id="46" name="Text 44"/>
-          <p:cNvSpPr/>
-          <p:nvPr/>
-        </p:nvSpPr>
-        <p:spPr>
-          <a:xfrm>
-            <a:off x="5759577" y="4572000"/>
-            <a:ext cx="685800" cy="219456"/>
-          </a:xfrm>
-          <a:prstGeom prst="rect">
-            <a:avLst/>
-          </a:prstGeom>
-          <a:noFill/>
-          <a:ln/>
-        </p:spPr>
-        <p:txBody>
-          <a:bodyPr wrap="square" lIns="0" tIns="0" rIns="0" bIns="0" rtlCol="0" anchor="t"/>
-          <a:lstStyle/>
-          <a:p>
-            <a:pPr algn="ctr" indent="0" marL="0">
-              <a:buNone/>
-            </a:pPr>
-            <a:r>
-              <a:rPr lang="en-US" sz="750" i="1" dirty="0">
-                <a:solidFill>
-                  <a:srgbClr val="94A3B8"/>
-                </a:solidFill>
-                <a:latin typeface="Calibri" pitchFamily="34" charset="0"/>
-                <a:ea typeface="Calibri" pitchFamily="34" charset="-122"/>
-                <a:cs typeface="Calibri" pitchFamily="34" charset="-120"/>
-              </a:rPr>
-              <a:t>/sk/</a:t>
-            </a:r>
-            <a:endParaRPr lang="en-US" sz="750" dirty="0"/>
-          </a:p>
-        </p:txBody>
-      </p:sp>
-      <p:sp>
-        <p:nvSpPr>
-          <p:cNvPr id="47" name="Shape 45"/>
-          <p:cNvSpPr/>
-          <p:nvPr/>
-        </p:nvSpPr>
-        <p:spPr>
-          <a:xfrm>
-            <a:off x="6668262" y="4169664"/>
-            <a:ext cx="685800" cy="384048"/>
+          <p:cNvPr id="49" name="Shape 47"/>
+          <p:cNvSpPr/>
+          <p:nvPr/>
+        </p:nvSpPr>
+        <p:spPr>
+          <a:xfrm>
+            <a:off x="5581498" y="4169664"/>
+            <a:ext cx="676656" cy="475488"/>
           </a:xfrm>
           <a:prstGeom prst="rect">
             <a:avLst>
-              <a:gd name="adj" fmla="val 9524"/>
+              <a:gd name="adj" fmla="val 7692"/>
             </a:avLst>
           </a:prstGeom>
           <a:solidFill>
@@ -11045,14 +11342,14 @@
       </p:sp>
       <p:sp>
         <p:nvSpPr>
-          <p:cNvPr id="48" name="Text 46"/>
-          <p:cNvSpPr/>
-          <p:nvPr/>
-        </p:nvSpPr>
-        <p:spPr>
-          <a:xfrm>
-            <a:off x="6668262" y="4169664"/>
-            <a:ext cx="685800" cy="384048"/>
+          <p:cNvPr id="50" name="Text 48"/>
+          <p:cNvSpPr/>
+          <p:nvPr/>
+        </p:nvSpPr>
+        <p:spPr>
+          <a:xfrm>
+            <a:off x="5581498" y="4169664"/>
+            <a:ext cx="676656" cy="475488"/>
           </a:xfrm>
           <a:prstGeom prst="rect">
             <a:avLst/>
@@ -11076,7 +11373,7 @@
                 <a:ea typeface="Trebuchet MS" pitchFamily="34" charset="-122"/>
                 <a:cs typeface="Trebuchet MS" pitchFamily="34" charset="-120"/>
               </a:rPr>
-              <a:t>o</a:t>
+              <a:t>c</a:t>
             </a:r>
             <a:endParaRPr lang="en-US" sz="900" dirty="0"/>
           </a:p>
@@ -11084,18 +11381,18 @@
       </p:sp>
       <p:sp>
         <p:nvSpPr>
-          <p:cNvPr id="49" name="Shape 47"/>
-          <p:cNvSpPr/>
-          <p:nvPr/>
-        </p:nvSpPr>
-        <p:spPr>
-          <a:xfrm>
-            <a:off x="7576947" y="4169664"/>
-            <a:ext cx="685800" cy="384048"/>
+          <p:cNvPr id="51" name="Shape 49"/>
+          <p:cNvSpPr/>
+          <p:nvPr/>
+        </p:nvSpPr>
+        <p:spPr>
+          <a:xfrm>
+            <a:off x="6307531" y="4169664"/>
+            <a:ext cx="676656" cy="475488"/>
           </a:xfrm>
           <a:prstGeom prst="rect">
             <a:avLst>
-              <a:gd name="adj" fmla="val 9524"/>
+              <a:gd name="adj" fmla="val 7692"/>
             </a:avLst>
           </a:prstGeom>
           <a:solidFill>
@@ -11111,14 +11408,14 @@
       </p:sp>
       <p:sp>
         <p:nvSpPr>
-          <p:cNvPr id="50" name="Text 48"/>
-          <p:cNvSpPr/>
-          <p:nvPr/>
-        </p:nvSpPr>
-        <p:spPr>
-          <a:xfrm>
-            <a:off x="7576947" y="4169664"/>
-            <a:ext cx="685800" cy="384048"/>
+          <p:cNvPr id="52" name="Text 50"/>
+          <p:cNvSpPr/>
+          <p:nvPr/>
+        </p:nvSpPr>
+        <p:spPr>
+          <a:xfrm>
+            <a:off x="6307531" y="4169664"/>
+            <a:ext cx="676656" cy="475488"/>
           </a:xfrm>
           <a:prstGeom prst="rect">
             <a:avLst/>
@@ -11142,7 +11439,139 @@
                 <a:ea typeface="Trebuchet MS" pitchFamily="34" charset="-122"/>
                 <a:cs typeface="Trebuchet MS" pitchFamily="34" charset="-120"/>
               </a:rPr>
-              <a:t>pe</a:t>
+              <a:t>o_e</a:t>
+            </a:r>
+            <a:endParaRPr lang="en-US" sz="900" dirty="0"/>
+          </a:p>
+        </p:txBody>
+      </p:sp>
+      <p:sp>
+        <p:nvSpPr>
+          <p:cNvPr id="53" name="Shape 51"/>
+          <p:cNvSpPr/>
+          <p:nvPr/>
+        </p:nvSpPr>
+        <p:spPr>
+          <a:xfrm>
+            <a:off x="7033565" y="4169664"/>
+            <a:ext cx="676656" cy="475488"/>
+          </a:xfrm>
+          <a:prstGeom prst="rect">
+            <a:avLst>
+              <a:gd name="adj" fmla="val 7692"/>
+            </a:avLst>
+          </a:prstGeom>
+          <a:solidFill>
+            <a:srgbClr val="FFFFFF"/>
+          </a:solidFill>
+          <a:ln w="12700">
+            <a:solidFill>
+              <a:srgbClr val="DB2777"/>
+            </a:solidFill>
+            <a:prstDash val="solid"/>
+          </a:ln>
+        </p:spPr>
+      </p:sp>
+      <p:sp>
+        <p:nvSpPr>
+          <p:cNvPr id="54" name="Text 52"/>
+          <p:cNvSpPr/>
+          <p:nvPr/>
+        </p:nvSpPr>
+        <p:spPr>
+          <a:xfrm>
+            <a:off x="7033565" y="4169664"/>
+            <a:ext cx="676656" cy="475488"/>
+          </a:xfrm>
+          <a:prstGeom prst="rect">
+            <a:avLst/>
+          </a:prstGeom>
+          <a:noFill/>
+          <a:ln/>
+        </p:spPr>
+        <p:txBody>
+          <a:bodyPr wrap="square" lIns="0" tIns="0" rIns="0" bIns="0" rtlCol="0" anchor="ctr"/>
+          <a:lstStyle/>
+          <a:p>
+            <a:pPr algn="ctr" indent="0" marL="0">
+              <a:buNone/>
+            </a:pPr>
+            <a:r>
+              <a:rPr lang="en-US" sz="900" b="1" dirty="0">
+                <a:solidFill>
+                  <a:srgbClr val="9D174D"/>
+                </a:solidFill>
+                <a:latin typeface="Trebuchet MS" pitchFamily="34" charset="0"/>
+                <a:ea typeface="Trebuchet MS" pitchFamily="34" charset="-122"/>
+                <a:cs typeface="Trebuchet MS" pitchFamily="34" charset="-120"/>
+              </a:rPr>
+              <a:t>p</a:t>
+            </a:r>
+            <a:endParaRPr lang="en-US" sz="900" dirty="0"/>
+          </a:p>
+        </p:txBody>
+      </p:sp>
+      <p:sp>
+        <p:nvSpPr>
+          <p:cNvPr id="55" name="Shape 53"/>
+          <p:cNvSpPr/>
+          <p:nvPr/>
+        </p:nvSpPr>
+        <p:spPr>
+          <a:xfrm>
+            <a:off x="7759598" y="4169664"/>
+            <a:ext cx="676656" cy="475488"/>
+          </a:xfrm>
+          <a:prstGeom prst="rect">
+            <a:avLst>
+              <a:gd name="adj" fmla="val 7692"/>
+            </a:avLst>
+          </a:prstGeom>
+          <a:solidFill>
+            <a:srgbClr val="FFFFFF"/>
+          </a:solidFill>
+          <a:ln w="12700">
+            <a:solidFill>
+              <a:srgbClr val="DB2777"/>
+            </a:solidFill>
+            <a:prstDash val="solid"/>
+          </a:ln>
+        </p:spPr>
+      </p:sp>
+      <p:sp>
+        <p:nvSpPr>
+          <p:cNvPr id="56" name="Text 54"/>
+          <p:cNvSpPr/>
+          <p:nvPr/>
+        </p:nvSpPr>
+        <p:spPr>
+          <a:xfrm>
+            <a:off x="7759598" y="4169664"/>
+            <a:ext cx="676656" cy="475488"/>
+          </a:xfrm>
+          <a:prstGeom prst="rect">
+            <a:avLst/>
+          </a:prstGeom>
+          <a:noFill/>
+          <a:ln/>
+        </p:spPr>
+        <p:txBody>
+          <a:bodyPr wrap="square" lIns="0" tIns="0" rIns="0" bIns="0" rtlCol="0" anchor="ctr"/>
+          <a:lstStyle/>
+          <a:p>
+            <a:pPr algn="ctr" indent="0" marL="0">
+              <a:buNone/>
+            </a:pPr>
+            <a:r>
+              <a:rPr lang="en-US" sz="900" b="1" dirty="0">
+                <a:solidFill>
+                  <a:srgbClr val="9D174D"/>
+                </a:solidFill>
+                <a:latin typeface="Trebuchet MS" pitchFamily="34" charset="0"/>
+                <a:ea typeface="Trebuchet MS" pitchFamily="34" charset="-122"/>
+                <a:cs typeface="Trebuchet MS" pitchFamily="34" charset="-120"/>
+              </a:rPr>
+              <a:t>s</a:t>
             </a:r>
             <a:endParaRPr lang="en-US" sz="900" dirty="0"/>
           </a:p>
@@ -11434,7 +11863,7 @@
                 <a:ea typeface="Calibri" pitchFamily="34" charset="-122"/>
                 <a:cs typeface="Calibri" pitchFamily="34" charset="-120"/>
               </a:rPr>
-              <a:t>Word Labs  •  wordlabs.app  •  Root: 'scope' = to look, see, observe</a:t>
+              <a:t>Word Labs  •  wordlabs.app  •  Root: 'scope' = look; view; examine</a:t>
             </a:r>
             <a:endParaRPr lang="en-US" sz="800" dirty="0"/>
           </a:p>
@@ -11573,7 +12002,7 @@
                 <a:ea typeface="Trebuchet MS" pitchFamily="34" charset="-122"/>
                 <a:cs typeface="Trebuchet MS" pitchFamily="34" charset="-120"/>
               </a:rPr>
-              <a:t>periscope</a:t>
+              <a:t>stethoscope</a:t>
             </a:r>
             <a:endParaRPr lang="en-US" sz="2800" dirty="0"/>
           </a:p>
@@ -12261,7 +12690,7 @@
                 <a:ea typeface="Calibri" pitchFamily="34" charset="-122"/>
                 <a:cs typeface="Calibri" pitchFamily="34" charset="-120"/>
               </a:rPr>
-              <a:t>Word Labs  •  wordlabs.app  •  Root: 'scope' = to look, see, observe</a:t>
+              <a:t>Word Labs  •  wordlabs.app  •  Root: 'scope' = look; view; examine</a:t>
             </a:r>
             <a:endParaRPr lang="en-US" sz="800" dirty="0"/>
           </a:p>
@@ -12400,7 +12829,7 @@
                 <a:ea typeface="Trebuchet MS" pitchFamily="34" charset="-122"/>
                 <a:cs typeface="Trebuchet MS" pitchFamily="34" charset="-120"/>
               </a:rPr>
-              <a:t>periscope</a:t>
+              <a:t>stethoscope</a:t>
             </a:r>
             <a:endParaRPr lang="en-US" sz="2800" dirty="0"/>
           </a:p>
@@ -12539,7 +12968,7 @@
                 <a:ea typeface="Trebuchet MS" pitchFamily="34" charset="-122"/>
                 <a:cs typeface="Trebuchet MS" pitchFamily="34" charset="-120"/>
               </a:rPr>
-              <a:t>peri</a:t>
+              <a:t>stetho</a:t>
             </a:r>
             <a:endParaRPr lang="en-US" sz="1300" dirty="0"/>
           </a:p>
@@ -12578,7 +13007,7 @@
                 <a:ea typeface="Calibri" pitchFamily="34" charset="-122"/>
                 <a:cs typeface="Calibri" pitchFamily="34" charset="-120"/>
               </a:rPr>
-              <a:t>around</a:t>
+              <a:t>chest</a:t>
             </a:r>
             <a:endParaRPr lang="en-US" sz="850" dirty="0"/>
           </a:p>
@@ -12690,7 +13119,7 @@
                 <a:ea typeface="Calibri" pitchFamily="34" charset="-122"/>
                 <a:cs typeface="Calibri" pitchFamily="34" charset="-120"/>
               </a:rPr>
-              <a:t>to look or observe</a:t>
+              <a:t>look; view; examine</a:t>
             </a:r>
             <a:endParaRPr lang="en-US" sz="850" dirty="0"/>
           </a:p>
@@ -13246,7 +13675,7 @@
                 <a:ea typeface="Calibri" pitchFamily="34" charset="-122"/>
                 <a:cs typeface="Calibri" pitchFamily="34" charset="-120"/>
               </a:rPr>
-              <a:t>Word Labs  •  wordlabs.app  •  Root: 'scope' = to look, see, observe</a:t>
+              <a:t>Word Labs  •  wordlabs.app  •  Root: 'scope' = look; view; examine</a:t>
             </a:r>
             <a:endParaRPr lang="en-US" sz="800" dirty="0"/>
           </a:p>
@@ -13385,7 +13814,7 @@
                 <a:ea typeface="Trebuchet MS" pitchFamily="34" charset="-122"/>
                 <a:cs typeface="Trebuchet MS" pitchFamily="34" charset="-120"/>
               </a:rPr>
-              <a:t>periscope</a:t>
+              <a:t>stethoscope</a:t>
             </a:r>
             <a:endParaRPr lang="en-US" sz="2800" dirty="0"/>
           </a:p>
@@ -13524,7 +13953,7 @@
                 <a:ea typeface="Trebuchet MS" pitchFamily="34" charset="-122"/>
                 <a:cs typeface="Trebuchet MS" pitchFamily="34" charset="-120"/>
               </a:rPr>
-              <a:t>peri</a:t>
+              <a:t>stetho</a:t>
             </a:r>
             <a:endParaRPr lang="en-US" sz="1300" dirty="0"/>
           </a:p>
@@ -13563,7 +13992,7 @@
                 <a:ea typeface="Calibri" pitchFamily="34" charset="-122"/>
                 <a:cs typeface="Calibri" pitchFamily="34" charset="-120"/>
               </a:rPr>
-              <a:t>around</a:t>
+              <a:t>chest</a:t>
             </a:r>
             <a:endParaRPr lang="en-US" sz="850" dirty="0"/>
           </a:p>
@@ -13675,7 +14104,7 @@
                 <a:ea typeface="Calibri" pitchFamily="34" charset="-122"/>
                 <a:cs typeface="Calibri" pitchFamily="34" charset="-120"/>
               </a:rPr>
-              <a:t>to look or observe</a:t>
+              <a:t>look; view; examine</a:t>
             </a:r>
             <a:endParaRPr lang="en-US" sz="850" dirty="0"/>
           </a:p>
@@ -13834,7 +14263,7 @@
                 <a:ea typeface="Trebuchet MS" pitchFamily="34" charset="-122"/>
                 <a:cs typeface="Trebuchet MS" pitchFamily="34" charset="-120"/>
               </a:rPr>
-              <a:t>per</a:t>
+              <a:t>steth</a:t>
             </a:r>
             <a:endParaRPr lang="en-US" sz="1400" dirty="0"/>
           </a:p>
@@ -13939,7 +14368,7 @@
                 <a:ea typeface="Trebuchet MS" pitchFamily="34" charset="-122"/>
                 <a:cs typeface="Trebuchet MS" pitchFamily="34" charset="-120"/>
               </a:rPr>
-              <a:t>i</a:t>
+              <a:t>o</a:t>
             </a:r>
             <a:endParaRPr lang="en-US" sz="1400" dirty="0"/>
           </a:p>
@@ -14377,7 +14806,7 @@
                 <a:ea typeface="Calibri" pitchFamily="34" charset="-122"/>
                 <a:cs typeface="Calibri" pitchFamily="34" charset="-120"/>
               </a:rPr>
-              <a:t>Root 'scope' — to look, see, observe</a:t>
+              <a:t>Root 'scope' — look; view; examine</a:t>
             </a:r>
             <a:endParaRPr lang="en-US" sz="1600" dirty="0"/>
           </a:p>
@@ -14733,7 +15162,7 @@
                 <a:ea typeface="Calibri" pitchFamily="34" charset="-122"/>
                 <a:cs typeface="Calibri" pitchFamily="34" charset="-120"/>
               </a:rPr>
-              <a:t>Word Labs  •  wordlabs.app  •  Root: 'scope' = to look, see, observe</a:t>
+              <a:t>Word Labs  •  wordlabs.app  •  Root: 'scope' = look; view; examine</a:t>
             </a:r>
             <a:endParaRPr lang="en-US" sz="800" dirty="0"/>
           </a:p>
@@ -14872,7 +15301,7 @@
                 <a:ea typeface="Trebuchet MS" pitchFamily="34" charset="-122"/>
                 <a:cs typeface="Trebuchet MS" pitchFamily="34" charset="-120"/>
               </a:rPr>
-              <a:t>periscope</a:t>
+              <a:t>stethoscope</a:t>
             </a:r>
             <a:endParaRPr lang="en-US" sz="2800" dirty="0"/>
           </a:p>
@@ -15011,7 +15440,7 @@
                 <a:ea typeface="Trebuchet MS" pitchFamily="34" charset="-122"/>
                 <a:cs typeface="Trebuchet MS" pitchFamily="34" charset="-120"/>
               </a:rPr>
-              <a:t>peri</a:t>
+              <a:t>stetho</a:t>
             </a:r>
             <a:endParaRPr lang="en-US" sz="1300" dirty="0"/>
           </a:p>
@@ -15050,7 +15479,7 @@
                 <a:ea typeface="Calibri" pitchFamily="34" charset="-122"/>
                 <a:cs typeface="Calibri" pitchFamily="34" charset="-120"/>
               </a:rPr>
-              <a:t>around</a:t>
+              <a:t>chest</a:t>
             </a:r>
             <a:endParaRPr lang="en-US" sz="850" dirty="0"/>
           </a:p>
@@ -15162,7 +15591,7 @@
                 <a:ea typeface="Calibri" pitchFamily="34" charset="-122"/>
                 <a:cs typeface="Calibri" pitchFamily="34" charset="-120"/>
               </a:rPr>
-              <a:t>to look or observe</a:t>
+              <a:t>look; view; examine</a:t>
             </a:r>
             <a:endParaRPr lang="en-US" sz="850" dirty="0"/>
           </a:p>
@@ -15321,7 +15750,7 @@
                 <a:ea typeface="Trebuchet MS" pitchFamily="34" charset="-122"/>
                 <a:cs typeface="Trebuchet MS" pitchFamily="34" charset="-120"/>
               </a:rPr>
-              <a:t>per</a:t>
+              <a:t>steth</a:t>
             </a:r>
             <a:endParaRPr lang="en-US" sz="1400" dirty="0"/>
           </a:p>
@@ -15426,7 +15855,7 @@
                 <a:ea typeface="Trebuchet MS" pitchFamily="34" charset="-122"/>
                 <a:cs typeface="Trebuchet MS" pitchFamily="34" charset="-120"/>
               </a:rPr>
-              <a:t>i</a:t>
+              <a:t>o</a:t>
             </a:r>
             <a:endParaRPr lang="en-US" sz="1400" dirty="0"/>
           </a:p>
@@ -15612,11 +16041,11 @@
         <p:spPr>
           <a:xfrm>
             <a:off x="1874520" y="4096512"/>
-            <a:ext cx="6903720" cy="804672"/>
+            <a:ext cx="6903720" cy="658368"/>
           </a:xfrm>
           <a:prstGeom prst="rect">
             <a:avLst>
-              <a:gd name="adj" fmla="val 6818"/>
+              <a:gd name="adj" fmla="val 8333"/>
             </a:avLst>
           </a:prstGeom>
           <a:solidFill>
@@ -15638,12 +16067,12 @@
         </p:nvSpPr>
         <p:spPr>
           <a:xfrm>
-            <a:off x="2254649" y="4169664"/>
-            <a:ext cx="685800" cy="384048"/>
+            <a:off x="1951330" y="4169664"/>
+            <a:ext cx="676656" cy="475488"/>
           </a:xfrm>
           <a:prstGeom prst="rect">
             <a:avLst>
-              <a:gd name="adj" fmla="val 9524"/>
+              <a:gd name="adj" fmla="val 7692"/>
             </a:avLst>
           </a:prstGeom>
           <a:solidFill>
@@ -15665,8 +16094,8 @@
         </p:nvSpPr>
         <p:spPr>
           <a:xfrm>
-            <a:off x="2254649" y="4169664"/>
-            <a:ext cx="685800" cy="384048"/>
+            <a:off x="1951330" y="4169664"/>
+            <a:ext cx="676656" cy="475488"/>
           </a:xfrm>
           <a:prstGeom prst="rect">
             <a:avLst/>
@@ -15690,7 +16119,7 @@
                 <a:ea typeface="Trebuchet MS" pitchFamily="34" charset="-122"/>
                 <a:cs typeface="Trebuchet MS" pitchFamily="34" charset="-120"/>
               </a:rPr>
-              <a:t>p</a:t>
+              <a:t>s</a:t>
             </a:r>
             <a:endParaRPr lang="en-US" sz="900" dirty="0"/>
           </a:p>
@@ -15704,12 +16133,12 @@
         </p:nvSpPr>
         <p:spPr>
           <a:xfrm>
-            <a:off x="3293146" y="4169664"/>
-            <a:ext cx="685800" cy="384048"/>
+            <a:off x="2677363" y="4169664"/>
+            <a:ext cx="676656" cy="475488"/>
           </a:xfrm>
           <a:prstGeom prst="rect">
             <a:avLst>
-              <a:gd name="adj" fmla="val 9524"/>
+              <a:gd name="adj" fmla="val 7692"/>
             </a:avLst>
           </a:prstGeom>
           <a:solidFill>
@@ -15731,8 +16160,8 @@
         </p:nvSpPr>
         <p:spPr>
           <a:xfrm>
-            <a:off x="3293146" y="4169664"/>
-            <a:ext cx="685800" cy="384048"/>
+            <a:off x="2677363" y="4169664"/>
+            <a:ext cx="676656" cy="475488"/>
           </a:xfrm>
           <a:prstGeom prst="rect">
             <a:avLst/>
@@ -15756,7 +16185,7 @@
                 <a:ea typeface="Trebuchet MS" pitchFamily="34" charset="-122"/>
                 <a:cs typeface="Trebuchet MS" pitchFamily="34" charset="-120"/>
               </a:rPr>
-              <a:t>er</a:t>
+              <a:t>t</a:t>
             </a:r>
             <a:endParaRPr lang="en-US" sz="900" dirty="0"/>
           </a:p>
@@ -15770,12 +16199,12 @@
         </p:nvSpPr>
         <p:spPr>
           <a:xfrm>
-            <a:off x="4331643" y="4169664"/>
-            <a:ext cx="685800" cy="384048"/>
+            <a:off x="3403397" y="4169664"/>
+            <a:ext cx="676656" cy="475488"/>
           </a:xfrm>
           <a:prstGeom prst="rect">
             <a:avLst>
-              <a:gd name="adj" fmla="val 9524"/>
+              <a:gd name="adj" fmla="val 7692"/>
             </a:avLst>
           </a:prstGeom>
           <a:solidFill>
@@ -15797,8 +16226,8 @@
         </p:nvSpPr>
         <p:spPr>
           <a:xfrm>
-            <a:off x="4331643" y="4169664"/>
-            <a:ext cx="685800" cy="384048"/>
+            <a:off x="3403397" y="4169664"/>
+            <a:ext cx="676656" cy="475488"/>
           </a:xfrm>
           <a:prstGeom prst="rect">
             <a:avLst/>
@@ -15822,7 +16251,7 @@
                 <a:ea typeface="Trebuchet MS" pitchFamily="34" charset="-122"/>
                 <a:cs typeface="Trebuchet MS" pitchFamily="34" charset="-120"/>
               </a:rPr>
-              <a:t>i</a:t>
+              <a:t>e</a:t>
             </a:r>
             <a:endParaRPr lang="en-US" sz="900" dirty="0"/>
           </a:p>
@@ -15836,12 +16265,12 @@
         </p:nvSpPr>
         <p:spPr>
           <a:xfrm>
-            <a:off x="5370141" y="4169664"/>
-            <a:ext cx="685800" cy="384048"/>
+            <a:off x="4129430" y="4169664"/>
+            <a:ext cx="676656" cy="475488"/>
           </a:xfrm>
           <a:prstGeom prst="rect">
             <a:avLst>
-              <a:gd name="adj" fmla="val 9524"/>
+              <a:gd name="adj" fmla="val 7692"/>
             </a:avLst>
           </a:prstGeom>
           <a:solidFill>
@@ -15863,8 +16292,8 @@
         </p:nvSpPr>
         <p:spPr>
           <a:xfrm>
-            <a:off x="5370141" y="4169664"/>
-            <a:ext cx="685800" cy="384048"/>
+            <a:off x="4129430" y="4169664"/>
+            <a:ext cx="676656" cy="475488"/>
           </a:xfrm>
           <a:prstGeom prst="rect">
             <a:avLst/>
@@ -15888,7 +16317,7 @@
                 <a:ea typeface="Trebuchet MS" pitchFamily="34" charset="-122"/>
                 <a:cs typeface="Trebuchet MS" pitchFamily="34" charset="-120"/>
               </a:rPr>
-              <a:t>sc</a:t>
+              <a:t>th</a:t>
             </a:r>
             <a:endParaRPr lang="en-US" sz="900" dirty="0"/>
           </a:p>
@@ -15896,57 +16325,18 @@
       </p:sp>
       <p:sp>
         <p:nvSpPr>
-          <p:cNvPr id="44" name="Text 42"/>
-          <p:cNvSpPr/>
-          <p:nvPr/>
-        </p:nvSpPr>
-        <p:spPr>
-          <a:xfrm>
-            <a:off x="5370141" y="4572000"/>
-            <a:ext cx="685800" cy="219456"/>
-          </a:xfrm>
-          <a:prstGeom prst="rect">
-            <a:avLst/>
-          </a:prstGeom>
-          <a:noFill/>
-          <a:ln/>
-        </p:spPr>
-        <p:txBody>
-          <a:bodyPr wrap="square" lIns="0" tIns="0" rIns="0" bIns="0" rtlCol="0" anchor="t"/>
-          <a:lstStyle/>
-          <a:p>
-            <a:pPr algn="ctr" indent="0" marL="0">
-              <a:buNone/>
-            </a:pPr>
-            <a:r>
-              <a:rPr lang="en-US" sz="750" i="1" dirty="0">
-                <a:solidFill>
-                  <a:srgbClr val="94A3B8"/>
-                </a:solidFill>
-                <a:latin typeface="Calibri" pitchFamily="34" charset="0"/>
-                <a:ea typeface="Calibri" pitchFamily="34" charset="-122"/>
-                <a:cs typeface="Calibri" pitchFamily="34" charset="-120"/>
-              </a:rPr>
-              <a:t>/sk/</a:t>
-            </a:r>
-            <a:endParaRPr lang="en-US" sz="750" dirty="0"/>
-          </a:p>
-        </p:txBody>
-      </p:sp>
-      <p:sp>
-        <p:nvSpPr>
-          <p:cNvPr id="45" name="Shape 43"/>
-          <p:cNvSpPr/>
-          <p:nvPr/>
-        </p:nvSpPr>
-        <p:spPr>
-          <a:xfrm>
-            <a:off x="6408638" y="4169664"/>
-            <a:ext cx="685800" cy="384048"/>
+          <p:cNvPr id="44" name="Shape 42"/>
+          <p:cNvSpPr/>
+          <p:nvPr/>
+        </p:nvSpPr>
+        <p:spPr>
+          <a:xfrm>
+            <a:off x="4855464" y="4169664"/>
+            <a:ext cx="676656" cy="475488"/>
           </a:xfrm>
           <a:prstGeom prst="rect">
             <a:avLst>
-              <a:gd name="adj" fmla="val 9524"/>
+              <a:gd name="adj" fmla="val 7692"/>
             </a:avLst>
           </a:prstGeom>
           <a:solidFill>
@@ -15962,14 +16352,14 @@
       </p:sp>
       <p:sp>
         <p:nvSpPr>
-          <p:cNvPr id="46" name="Text 44"/>
-          <p:cNvSpPr/>
-          <p:nvPr/>
-        </p:nvSpPr>
-        <p:spPr>
-          <a:xfrm>
-            <a:off x="6408638" y="4169664"/>
-            <a:ext cx="685800" cy="384048"/>
+          <p:cNvPr id="45" name="Text 43"/>
+          <p:cNvSpPr/>
+          <p:nvPr/>
+        </p:nvSpPr>
+        <p:spPr>
+          <a:xfrm>
+            <a:off x="4855464" y="4169664"/>
+            <a:ext cx="676656" cy="475488"/>
           </a:xfrm>
           <a:prstGeom prst="rect">
             <a:avLst/>
@@ -16001,18 +16391,18 @@
       </p:sp>
       <p:sp>
         <p:nvSpPr>
-          <p:cNvPr id="47" name="Shape 45"/>
-          <p:cNvSpPr/>
-          <p:nvPr/>
-        </p:nvSpPr>
-        <p:spPr>
-          <a:xfrm>
-            <a:off x="7447135" y="4169664"/>
-            <a:ext cx="685800" cy="384048"/>
+          <p:cNvPr id="46" name="Shape 44"/>
+          <p:cNvSpPr/>
+          <p:nvPr/>
+        </p:nvSpPr>
+        <p:spPr>
+          <a:xfrm>
+            <a:off x="5581498" y="4169664"/>
+            <a:ext cx="676656" cy="475488"/>
           </a:xfrm>
           <a:prstGeom prst="rect">
             <a:avLst>
-              <a:gd name="adj" fmla="val 9524"/>
+              <a:gd name="adj" fmla="val 7692"/>
             </a:avLst>
           </a:prstGeom>
           <a:solidFill>
@@ -16028,14 +16418,14 @@
       </p:sp>
       <p:sp>
         <p:nvSpPr>
-          <p:cNvPr id="48" name="Text 46"/>
-          <p:cNvSpPr/>
-          <p:nvPr/>
-        </p:nvSpPr>
-        <p:spPr>
-          <a:xfrm>
-            <a:off x="7447135" y="4169664"/>
-            <a:ext cx="685800" cy="384048"/>
+          <p:cNvPr id="47" name="Text 45"/>
+          <p:cNvSpPr/>
+          <p:nvPr/>
+        </p:nvSpPr>
+        <p:spPr>
+          <a:xfrm>
+            <a:off x="5581498" y="4169664"/>
+            <a:ext cx="676656" cy="475488"/>
           </a:xfrm>
           <a:prstGeom prst="rect">
             <a:avLst/>
@@ -16059,7 +16449,205 @@
                 <a:ea typeface="Trebuchet MS" pitchFamily="34" charset="-122"/>
                 <a:cs typeface="Trebuchet MS" pitchFamily="34" charset="-120"/>
               </a:rPr>
-              <a:t>pe</a:t>
+              <a:t>s</a:t>
+            </a:r>
+            <a:endParaRPr lang="en-US" sz="900" dirty="0"/>
+          </a:p>
+        </p:txBody>
+      </p:sp>
+      <p:sp>
+        <p:nvSpPr>
+          <p:cNvPr id="48" name="Shape 46"/>
+          <p:cNvSpPr/>
+          <p:nvPr/>
+        </p:nvSpPr>
+        <p:spPr>
+          <a:xfrm>
+            <a:off x="6307531" y="4169664"/>
+            <a:ext cx="676656" cy="475488"/>
+          </a:xfrm>
+          <a:prstGeom prst="rect">
+            <a:avLst>
+              <a:gd name="adj" fmla="val 7692"/>
+            </a:avLst>
+          </a:prstGeom>
+          <a:solidFill>
+            <a:srgbClr val="FFFFFF"/>
+          </a:solidFill>
+          <a:ln w="12700">
+            <a:solidFill>
+              <a:srgbClr val="DB2777"/>
+            </a:solidFill>
+            <a:prstDash val="solid"/>
+          </a:ln>
+        </p:spPr>
+      </p:sp>
+      <p:sp>
+        <p:nvSpPr>
+          <p:cNvPr id="49" name="Text 47"/>
+          <p:cNvSpPr/>
+          <p:nvPr/>
+        </p:nvSpPr>
+        <p:spPr>
+          <a:xfrm>
+            <a:off x="6307531" y="4169664"/>
+            <a:ext cx="676656" cy="475488"/>
+          </a:xfrm>
+          <a:prstGeom prst="rect">
+            <a:avLst/>
+          </a:prstGeom>
+          <a:noFill/>
+          <a:ln/>
+        </p:spPr>
+        <p:txBody>
+          <a:bodyPr wrap="square" lIns="0" tIns="0" rIns="0" bIns="0" rtlCol="0" anchor="ctr"/>
+          <a:lstStyle/>
+          <a:p>
+            <a:pPr algn="ctr" indent="0" marL="0">
+              <a:buNone/>
+            </a:pPr>
+            <a:r>
+              <a:rPr lang="en-US" sz="900" b="1" dirty="0">
+                <a:solidFill>
+                  <a:srgbClr val="9D174D"/>
+                </a:solidFill>
+                <a:latin typeface="Trebuchet MS" pitchFamily="34" charset="0"/>
+                <a:ea typeface="Trebuchet MS" pitchFamily="34" charset="-122"/>
+                <a:cs typeface="Trebuchet MS" pitchFamily="34" charset="-120"/>
+              </a:rPr>
+              <a:t>c</a:t>
+            </a:r>
+            <a:endParaRPr lang="en-US" sz="900" dirty="0"/>
+          </a:p>
+        </p:txBody>
+      </p:sp>
+      <p:sp>
+        <p:nvSpPr>
+          <p:cNvPr id="50" name="Shape 48"/>
+          <p:cNvSpPr/>
+          <p:nvPr/>
+        </p:nvSpPr>
+        <p:spPr>
+          <a:xfrm>
+            <a:off x="7033565" y="4169664"/>
+            <a:ext cx="676656" cy="475488"/>
+          </a:xfrm>
+          <a:prstGeom prst="rect">
+            <a:avLst>
+              <a:gd name="adj" fmla="val 7692"/>
+            </a:avLst>
+          </a:prstGeom>
+          <a:solidFill>
+            <a:srgbClr val="FFFFFF"/>
+          </a:solidFill>
+          <a:ln w="12700">
+            <a:solidFill>
+              <a:srgbClr val="DB2777"/>
+            </a:solidFill>
+            <a:prstDash val="solid"/>
+          </a:ln>
+        </p:spPr>
+      </p:sp>
+      <p:sp>
+        <p:nvSpPr>
+          <p:cNvPr id="51" name="Text 49"/>
+          <p:cNvSpPr/>
+          <p:nvPr/>
+        </p:nvSpPr>
+        <p:spPr>
+          <a:xfrm>
+            <a:off x="7033565" y="4169664"/>
+            <a:ext cx="676656" cy="475488"/>
+          </a:xfrm>
+          <a:prstGeom prst="rect">
+            <a:avLst/>
+          </a:prstGeom>
+          <a:noFill/>
+          <a:ln/>
+        </p:spPr>
+        <p:txBody>
+          <a:bodyPr wrap="square" lIns="0" tIns="0" rIns="0" bIns="0" rtlCol="0" anchor="ctr"/>
+          <a:lstStyle/>
+          <a:p>
+            <a:pPr algn="ctr" indent="0" marL="0">
+              <a:buNone/>
+            </a:pPr>
+            <a:r>
+              <a:rPr lang="en-US" sz="900" b="1" dirty="0">
+                <a:solidFill>
+                  <a:srgbClr val="9D174D"/>
+                </a:solidFill>
+                <a:latin typeface="Trebuchet MS" pitchFamily="34" charset="0"/>
+                <a:ea typeface="Trebuchet MS" pitchFamily="34" charset="-122"/>
+                <a:cs typeface="Trebuchet MS" pitchFamily="34" charset="-120"/>
+              </a:rPr>
+              <a:t>o_e</a:t>
+            </a:r>
+            <a:endParaRPr lang="en-US" sz="900" dirty="0"/>
+          </a:p>
+        </p:txBody>
+      </p:sp>
+      <p:sp>
+        <p:nvSpPr>
+          <p:cNvPr id="52" name="Shape 50"/>
+          <p:cNvSpPr/>
+          <p:nvPr/>
+        </p:nvSpPr>
+        <p:spPr>
+          <a:xfrm>
+            <a:off x="7759598" y="4169664"/>
+            <a:ext cx="676656" cy="475488"/>
+          </a:xfrm>
+          <a:prstGeom prst="rect">
+            <a:avLst>
+              <a:gd name="adj" fmla="val 7692"/>
+            </a:avLst>
+          </a:prstGeom>
+          <a:solidFill>
+            <a:srgbClr val="FFFFFF"/>
+          </a:solidFill>
+          <a:ln w="12700">
+            <a:solidFill>
+              <a:srgbClr val="DB2777"/>
+            </a:solidFill>
+            <a:prstDash val="solid"/>
+          </a:ln>
+        </p:spPr>
+      </p:sp>
+      <p:sp>
+        <p:nvSpPr>
+          <p:cNvPr id="53" name="Text 51"/>
+          <p:cNvSpPr/>
+          <p:nvPr/>
+        </p:nvSpPr>
+        <p:spPr>
+          <a:xfrm>
+            <a:off x="7759598" y="4169664"/>
+            <a:ext cx="676656" cy="475488"/>
+          </a:xfrm>
+          <a:prstGeom prst="rect">
+            <a:avLst/>
+          </a:prstGeom>
+          <a:noFill/>
+          <a:ln/>
+        </p:spPr>
+        <p:txBody>
+          <a:bodyPr wrap="square" lIns="0" tIns="0" rIns="0" bIns="0" rtlCol="0" anchor="ctr"/>
+          <a:lstStyle/>
+          <a:p>
+            <a:pPr algn="ctr" indent="0" marL="0">
+              <a:buNone/>
+            </a:pPr>
+            <a:r>
+              <a:rPr lang="en-US" sz="900" b="1" dirty="0">
+                <a:solidFill>
+                  <a:srgbClr val="9D174D"/>
+                </a:solidFill>
+                <a:latin typeface="Trebuchet MS" pitchFamily="34" charset="0"/>
+                <a:ea typeface="Trebuchet MS" pitchFamily="34" charset="-122"/>
+                <a:cs typeface="Trebuchet MS" pitchFamily="34" charset="-120"/>
+              </a:rPr>
+              <a:t>p</a:t>
             </a:r>
             <a:endParaRPr lang="en-US" sz="900" dirty="0"/>
           </a:p>
@@ -16633,7 +17221,7 @@
                 <a:ea typeface="Calibri" pitchFamily="34" charset="-122"/>
                 <a:cs typeface="Calibri" pitchFamily="34" charset="-120"/>
               </a:rPr>
-              <a:t>Word Labs  •  wordlabs.app  •  Root: 'scope' = to look, see, observe</a:t>
+              <a:t>Word Labs  •  wordlabs.app  •  Root: 'scope' = look; view; examine</a:t>
             </a:r>
             <a:endParaRPr lang="en-US" sz="800" dirty="0"/>
           </a:p>
@@ -16967,7 +17555,7 @@
                 <a:ea typeface="Trebuchet MS" pitchFamily="34" charset="-122"/>
                 <a:cs typeface="Trebuchet MS" pitchFamily="34" charset="-120"/>
               </a:rPr>
-              <a:t>2</a:t>
+              <a:t>0</a:t>
             </a:r>
             <a:pPr algn="ctr" indent="0" marL="0">
               <a:buNone/>
@@ -16981,7 +17569,7 @@
                 <a:ea typeface="Trebuchet MS" pitchFamily="34" charset="-122"/>
                 <a:cs typeface="Trebuchet MS" pitchFamily="34" charset="-120"/>
               </a:rPr>
-              <a:t>  punctuation marks</a:t>
+              <a:t>  punctuation mark</a:t>
             </a:r>
             <a:endParaRPr lang="en-US" sz="2800" dirty="0"/>
           </a:p>
@@ -17273,7 +17861,7 @@
                 <a:ea typeface="Calibri" pitchFamily="34" charset="-122"/>
                 <a:cs typeface="Calibri" pitchFamily="34" charset="-120"/>
               </a:rPr>
-              <a:t>Word Labs  •  wordlabs.app  •  Root: 'scope' = to look, see, observe</a:t>
+              <a:t>Word Labs  •  wordlabs.app  •  Root: 'scope' = look; view; examine</a:t>
             </a:r>
             <a:endParaRPr lang="en-US" sz="800" dirty="0"/>
           </a:p>
@@ -17385,7 +17973,7 @@
                 <a:ea typeface="Calibri" pitchFamily="34" charset="-122"/>
                 <a:cs typeface="Calibri" pitchFamily="34" charset="-120"/>
               </a:rPr>
-              <a:t>The doctor used an </a:t>
+              <a:t>She loved looking through the </a:t>
             </a:r>
             <a:pPr algn="l" indent="0" marL="0">
               <a:buNone/>
@@ -17402,7 +17990,7 @@
                 <a:ea typeface="Calibri" pitchFamily="34" charset="-122"/>
                 <a:cs typeface="Calibri" pitchFamily="34" charset="-120"/>
               </a:rPr>
-              <a:t>endoscope</a:t>
+              <a:t>kaleidoscope</a:t>
             </a:r>
             <a:pPr algn="l" indent="0" marL="0">
               <a:buNone/>
@@ -17416,7 +18004,7 @@
                 <a:ea typeface="Calibri" pitchFamily="34" charset="-122"/>
                 <a:cs typeface="Calibri" pitchFamily="34" charset="-120"/>
               </a:rPr>
-              <a:t> to check inside the patient's body; meanwhile, the children took turns looking through the </a:t>
+              <a:t> at the spinning colours. The hospital ordered new </a:t>
             </a:r>
             <a:pPr algn="l" indent="0" marL="0">
               <a:buNone/>
@@ -17433,7 +18021,7 @@
                 <a:ea typeface="Calibri" pitchFamily="34" charset="-122"/>
                 <a:cs typeface="Calibri" pitchFamily="34" charset="-120"/>
               </a:rPr>
-              <a:t>kaleidoscope</a:t>
+              <a:t>stethoscopes</a:t>
             </a:r>
             <a:pPr algn="l" indent="0" marL="0">
               <a:buNone/>
@@ -17447,7 +18035,7 @@
                 <a:ea typeface="Calibri" pitchFamily="34" charset="-122"/>
                 <a:cs typeface="Calibri" pitchFamily="34" charset="-120"/>
               </a:rPr>
-              <a:t> and the </a:t>
+              <a:t> for the nurses. The gift shop sold </a:t>
             </a:r>
             <a:pPr algn="l" indent="0" marL="0">
               <a:buNone/>
@@ -17464,7 +18052,7 @@
                 <a:ea typeface="Calibri" pitchFamily="34" charset="-122"/>
                 <a:cs typeface="Calibri" pitchFamily="34" charset="-120"/>
               </a:rPr>
-              <a:t>microscope</a:t>
+              <a:t>kaleidoscopes</a:t>
             </a:r>
             <a:pPr algn="l" indent="0" marL="0">
               <a:buNone/>
@@ -17478,7 +18066,7 @@
                 <a:ea typeface="Calibri" pitchFamily="34" charset="-122"/>
                 <a:cs typeface="Calibri" pitchFamily="34" charset="-120"/>
               </a:rPr>
-              <a:t>.</a:t>
+              <a:t> in every colour.</a:t>
             </a:r>
             <a:endParaRPr lang="en-US" sz="1800" dirty="0"/>
           </a:p>
@@ -17633,7 +18221,7 @@
                 <a:ea typeface="Trebuchet MS" pitchFamily="34" charset="-122"/>
                 <a:cs typeface="Trebuchet MS" pitchFamily="34" charset="-120"/>
               </a:rPr>
-              <a:t>endoscope</a:t>
+              <a:t>kaleidoscope</a:t>
             </a:r>
             <a:endParaRPr lang="en-US" sz="1400" dirty="0"/>
           </a:p>
@@ -17761,7 +18349,7 @@
                 <a:ea typeface="Trebuchet MS" pitchFamily="34" charset="-122"/>
                 <a:cs typeface="Trebuchet MS" pitchFamily="34" charset="-120"/>
               </a:rPr>
-              <a:t>kaleidoscope</a:t>
+              <a:t>stethoscopes</a:t>
             </a:r>
             <a:endParaRPr lang="en-US" sz="1400" dirty="0"/>
           </a:p>
@@ -17889,7 +18477,7 @@
                 <a:ea typeface="Trebuchet MS" pitchFamily="34" charset="-122"/>
                 <a:cs typeface="Trebuchet MS" pitchFamily="34" charset="-120"/>
               </a:rPr>
-              <a:t>microscope</a:t>
+              <a:t>kaleidoscopes</a:t>
             </a:r>
             <a:endParaRPr lang="en-US" sz="1400" dirty="0"/>
           </a:p>
@@ -18220,7 +18808,7 @@
                 <a:ea typeface="Calibri" pitchFamily="34" charset="-122"/>
                 <a:cs typeface="Calibri" pitchFamily="34" charset="-120"/>
               </a:rPr>
-              <a:t>Word Labs  •  wordlabs.app  •  Root: 'scope' = to look, see, observe</a:t>
+              <a:t>Word Labs  •  wordlabs.app  •  Root: 'scope' = look; view; examine</a:t>
             </a:r>
             <a:endParaRPr lang="en-US" sz="800" dirty="0"/>
           </a:p>
@@ -18359,7 +18947,7 @@
                 <a:ea typeface="Trebuchet MS" pitchFamily="34" charset="-122"/>
                 <a:cs typeface="Trebuchet MS" pitchFamily="34" charset="-120"/>
               </a:rPr>
-              <a:t>endoscope</a:t>
+              <a:t>kaleidoscope</a:t>
             </a:r>
             <a:endParaRPr lang="en-US" sz="2800" dirty="0"/>
           </a:p>
@@ -19047,7 +19635,7 @@
                 <a:ea typeface="Calibri" pitchFamily="34" charset="-122"/>
                 <a:cs typeface="Calibri" pitchFamily="34" charset="-120"/>
               </a:rPr>
-              <a:t>Word Labs  •  wordlabs.app  •  Root: 'scope' = to look, see, observe</a:t>
+              <a:t>Word Labs  •  wordlabs.app  •  Root: 'scope' = look; view; examine</a:t>
             </a:r>
             <a:endParaRPr lang="en-US" sz="800" dirty="0"/>
           </a:p>
@@ -19186,7 +19774,7 @@
                 <a:ea typeface="Trebuchet MS" pitchFamily="34" charset="-122"/>
                 <a:cs typeface="Trebuchet MS" pitchFamily="34" charset="-120"/>
               </a:rPr>
-              <a:t>endoscope</a:t>
+              <a:t>kaleidoscope</a:t>
             </a:r>
             <a:endParaRPr lang="en-US" sz="2800" dirty="0"/>
           </a:p>
@@ -19325,7 +19913,7 @@
                 <a:ea typeface="Trebuchet MS" pitchFamily="34" charset="-122"/>
                 <a:cs typeface="Trebuchet MS" pitchFamily="34" charset="-120"/>
               </a:rPr>
-              <a:t>endo</a:t>
+              <a:t>kaleido</a:t>
             </a:r>
             <a:endParaRPr lang="en-US" sz="1300" dirty="0"/>
           </a:p>
@@ -19364,7 +19952,7 @@
                 <a:ea typeface="Calibri" pitchFamily="34" charset="-122"/>
                 <a:cs typeface="Calibri" pitchFamily="34" charset="-120"/>
               </a:rPr>
-              <a:t>within, inside</a:t>
+              <a:t>beautiful form</a:t>
             </a:r>
             <a:endParaRPr lang="en-US" sz="850" dirty="0"/>
           </a:p>
@@ -19476,7 +20064,7 @@
                 <a:ea typeface="Calibri" pitchFamily="34" charset="-122"/>
                 <a:cs typeface="Calibri" pitchFamily="34" charset="-120"/>
               </a:rPr>
-              <a:t>to look or observe</a:t>
+              <a:t>look; view; examine</a:t>
             </a:r>
             <a:endParaRPr lang="en-US" sz="850" dirty="0"/>
           </a:p>
@@ -20032,7 +20620,7 @@
                 <a:ea typeface="Calibri" pitchFamily="34" charset="-122"/>
                 <a:cs typeface="Calibri" pitchFamily="34" charset="-120"/>
               </a:rPr>
-              <a:t>Word Labs  •  wordlabs.app  •  Root: 'scope' = to look, see, observe</a:t>
+              <a:t>Word Labs  •  wordlabs.app  •  Root: 'scope' = look; view; examine</a:t>
             </a:r>
             <a:endParaRPr lang="en-US" sz="800" dirty="0"/>
           </a:p>
@@ -20171,7 +20759,7 @@
                 <a:ea typeface="Trebuchet MS" pitchFamily="34" charset="-122"/>
                 <a:cs typeface="Trebuchet MS" pitchFamily="34" charset="-120"/>
               </a:rPr>
-              <a:t>endoscope</a:t>
+              <a:t>kaleidoscope</a:t>
             </a:r>
             <a:endParaRPr lang="en-US" sz="2800" dirty="0"/>
           </a:p>
@@ -20310,7 +20898,7 @@
                 <a:ea typeface="Trebuchet MS" pitchFamily="34" charset="-122"/>
                 <a:cs typeface="Trebuchet MS" pitchFamily="34" charset="-120"/>
               </a:rPr>
-              <a:t>endo</a:t>
+              <a:t>kaleido</a:t>
             </a:r>
             <a:endParaRPr lang="en-US" sz="1300" dirty="0"/>
           </a:p>
@@ -20349,7 +20937,7 @@
                 <a:ea typeface="Calibri" pitchFamily="34" charset="-122"/>
                 <a:cs typeface="Calibri" pitchFamily="34" charset="-120"/>
               </a:rPr>
-              <a:t>within, inside</a:t>
+              <a:t>beautiful form</a:t>
             </a:r>
             <a:endParaRPr lang="en-US" sz="850" dirty="0"/>
           </a:p>
@@ -20461,7 +21049,7 @@
                 <a:ea typeface="Calibri" pitchFamily="34" charset="-122"/>
                 <a:cs typeface="Calibri" pitchFamily="34" charset="-120"/>
               </a:rPr>
-              <a:t>to look or observe</a:t>
+              <a:t>look; view; examine</a:t>
             </a:r>
             <a:endParaRPr lang="en-US" sz="850" dirty="0"/>
           </a:p>
@@ -20568,8 +21156,8 @@
         </p:nvSpPr>
         <p:spPr>
           <a:xfrm>
-            <a:off x="2313432" y="3364992"/>
-            <a:ext cx="1645920" cy="475488"/>
+            <a:off x="1975104" y="3364992"/>
+            <a:ext cx="1554480" cy="475488"/>
           </a:xfrm>
           <a:prstGeom prst="rect">
             <a:avLst>
@@ -20595,8 +21183,8 @@
         </p:nvSpPr>
         <p:spPr>
           <a:xfrm>
-            <a:off x="2313432" y="3364992"/>
-            <a:ext cx="1645920" cy="475488"/>
+            <a:off x="1975104" y="3364992"/>
+            <a:ext cx="1554480" cy="475488"/>
           </a:xfrm>
           <a:prstGeom prst="rect">
             <a:avLst/>
@@ -20620,7 +21208,7 @@
                 <a:ea typeface="Trebuchet MS" pitchFamily="34" charset="-122"/>
                 <a:cs typeface="Trebuchet MS" pitchFamily="34" charset="-120"/>
               </a:rPr>
-              <a:t>en</a:t>
+              <a:t>ka</a:t>
             </a:r>
             <a:endParaRPr lang="en-US" sz="1400" dirty="0"/>
           </a:p>
@@ -20634,8 +21222,8 @@
         </p:nvSpPr>
         <p:spPr>
           <a:xfrm>
-            <a:off x="3959352" y="3364992"/>
-            <a:ext cx="411480" cy="475488"/>
+            <a:off x="3529584" y="3364992"/>
+            <a:ext cx="73152" cy="475488"/>
           </a:xfrm>
           <a:prstGeom prst="rect">
             <a:avLst/>
@@ -20673,8 +21261,8 @@
         </p:nvSpPr>
         <p:spPr>
           <a:xfrm>
-            <a:off x="4370832" y="3364992"/>
-            <a:ext cx="1645920" cy="475488"/>
+            <a:off x="3602736" y="3364992"/>
+            <a:ext cx="1554480" cy="475488"/>
           </a:xfrm>
           <a:prstGeom prst="rect">
             <a:avLst>
@@ -20700,8 +21288,8 @@
         </p:nvSpPr>
         <p:spPr>
           <a:xfrm>
-            <a:off x="4370832" y="3364992"/>
-            <a:ext cx="1645920" cy="475488"/>
+            <a:off x="3602736" y="3364992"/>
+            <a:ext cx="1554480" cy="475488"/>
           </a:xfrm>
           <a:prstGeom prst="rect">
             <a:avLst/>
@@ -20725,7 +21313,7 @@
                 <a:ea typeface="Trebuchet MS" pitchFamily="34" charset="-122"/>
                 <a:cs typeface="Trebuchet MS" pitchFamily="34" charset="-120"/>
               </a:rPr>
-              <a:t>do</a:t>
+              <a:t>lei</a:t>
             </a:r>
             <a:endParaRPr lang="en-US" sz="1400" dirty="0"/>
           </a:p>
@@ -20739,8 +21327,8 @@
         </p:nvSpPr>
         <p:spPr>
           <a:xfrm>
-            <a:off x="6016752" y="3364992"/>
-            <a:ext cx="411480" cy="475488"/>
+            <a:off x="5157216" y="3364992"/>
+            <a:ext cx="73152" cy="475488"/>
           </a:xfrm>
           <a:prstGeom prst="rect">
             <a:avLst/>
@@ -20778,8 +21366,8 @@
         </p:nvSpPr>
         <p:spPr>
           <a:xfrm>
-            <a:off x="6428232" y="3364992"/>
-            <a:ext cx="1645920" cy="475488"/>
+            <a:off x="5230368" y="3364992"/>
+            <a:ext cx="1554480" cy="475488"/>
           </a:xfrm>
           <a:prstGeom prst="rect">
             <a:avLst>
@@ -20805,8 +21393,8 @@
         </p:nvSpPr>
         <p:spPr>
           <a:xfrm>
-            <a:off x="6428232" y="3364992"/>
-            <a:ext cx="1645920" cy="475488"/>
+            <a:off x="5230368" y="3364992"/>
+            <a:ext cx="1554480" cy="475488"/>
           </a:xfrm>
           <a:prstGeom prst="rect">
             <a:avLst/>
@@ -20830,6 +21418,111 @@
                 <a:ea typeface="Trebuchet MS" pitchFamily="34" charset="-122"/>
                 <a:cs typeface="Trebuchet MS" pitchFamily="34" charset="-120"/>
               </a:rPr>
+              <a:t>do</a:t>
+            </a:r>
+            <a:endParaRPr lang="en-US" sz="1400" dirty="0"/>
+          </a:p>
+        </p:txBody>
+      </p:sp>
+      <p:sp>
+        <p:nvSpPr>
+          <p:cNvPr id="33" name="Text 31"/>
+          <p:cNvSpPr/>
+          <p:nvPr/>
+        </p:nvSpPr>
+        <p:spPr>
+          <a:xfrm>
+            <a:off x="6784848" y="3364992"/>
+            <a:ext cx="73152" cy="475488"/>
+          </a:xfrm>
+          <a:prstGeom prst="rect">
+            <a:avLst/>
+          </a:prstGeom>
+          <a:noFill/>
+          <a:ln/>
+        </p:spPr>
+        <p:txBody>
+          <a:bodyPr wrap="square" lIns="0" tIns="0" rIns="0" bIns="0" rtlCol="0" anchor="ctr"/>
+          <a:lstStyle/>
+          <a:p>
+            <a:pPr algn="ctr" indent="0" marL="0">
+              <a:buNone/>
+            </a:pPr>
+            <a:r>
+              <a:rPr lang="en-US" sz="1600" b="1" dirty="0">
+                <a:solidFill>
+                  <a:srgbClr val="0D9488"/>
+                </a:solidFill>
+                <a:latin typeface="Trebuchet MS" pitchFamily="34" charset="0"/>
+                <a:ea typeface="Trebuchet MS" pitchFamily="34" charset="-122"/>
+                <a:cs typeface="Trebuchet MS" pitchFamily="34" charset="-120"/>
+              </a:rPr>
+              <a:t>·</a:t>
+            </a:r>
+            <a:endParaRPr lang="en-US" sz="1600" dirty="0"/>
+          </a:p>
+        </p:txBody>
+      </p:sp>
+      <p:sp>
+        <p:nvSpPr>
+          <p:cNvPr id="34" name="Shape 32"/>
+          <p:cNvSpPr/>
+          <p:nvPr/>
+        </p:nvSpPr>
+        <p:spPr>
+          <a:xfrm>
+            <a:off x="6858000" y="3364992"/>
+            <a:ext cx="1554480" cy="475488"/>
+          </a:xfrm>
+          <a:prstGeom prst="rect">
+            <a:avLst>
+              <a:gd name="adj" fmla="val 9615"/>
+            </a:avLst>
+          </a:prstGeom>
+          <a:solidFill>
+            <a:srgbClr val="FFFFFF"/>
+          </a:solidFill>
+          <a:ln w="12700">
+            <a:solidFill>
+              <a:srgbClr val="0D9488"/>
+            </a:solidFill>
+            <a:prstDash val="solid"/>
+          </a:ln>
+        </p:spPr>
+      </p:sp>
+      <p:sp>
+        <p:nvSpPr>
+          <p:cNvPr id="35" name="Text 33"/>
+          <p:cNvSpPr/>
+          <p:nvPr/>
+        </p:nvSpPr>
+        <p:spPr>
+          <a:xfrm>
+            <a:off x="6858000" y="3364992"/>
+            <a:ext cx="1554480" cy="475488"/>
+          </a:xfrm>
+          <a:prstGeom prst="rect">
+            <a:avLst/>
+          </a:prstGeom>
+          <a:noFill/>
+          <a:ln/>
+        </p:spPr>
+        <p:txBody>
+          <a:bodyPr wrap="square" lIns="0" tIns="0" rIns="0" bIns="0" rtlCol="0" anchor="ctr"/>
+          <a:lstStyle/>
+          <a:p>
+            <a:pPr algn="ctr" indent="0" marL="0">
+              <a:buNone/>
+            </a:pPr>
+            <a:r>
+              <a:rPr lang="en-US" sz="1400" b="1" dirty="0">
+                <a:solidFill>
+                  <a:srgbClr val="0D9488"/>
+                </a:solidFill>
+                <a:latin typeface="Trebuchet MS" pitchFamily="34" charset="0"/>
+                <a:ea typeface="Trebuchet MS" pitchFamily="34" charset="-122"/>
+                <a:cs typeface="Trebuchet MS" pitchFamily="34" charset="-120"/>
+              </a:rPr>
               <a:t>scope</a:t>
             </a:r>
             <a:endParaRPr lang="en-US" sz="1400" dirty="0"/>
@@ -20838,7 +21531,7 @@
       </p:sp>
       <p:sp>
         <p:nvSpPr>
-          <p:cNvPr id="33" name="Shape 31"/>
+          <p:cNvPr id="36" name="Shape 34"/>
           <p:cNvSpPr/>
           <p:nvPr/>
         </p:nvSpPr>
@@ -20865,7 +21558,7 @@
       </p:sp>
       <p:sp>
         <p:nvSpPr>
-          <p:cNvPr id="34" name="Text 32"/>
+          <p:cNvPr id="37" name="Text 35"/>
           <p:cNvSpPr/>
           <p:nvPr/>
         </p:nvSpPr>
@@ -20904,7 +21597,7 @@
       </p:sp>
       <p:sp>
         <p:nvSpPr>
-          <p:cNvPr id="35" name="Shape 33"/>
+          <p:cNvPr id="38" name="Shape 36"/>
           <p:cNvSpPr/>
           <p:nvPr/>
         </p:nvSpPr>
@@ -20931,7 +21624,7 @@
       </p:sp>
       <p:sp>
         <p:nvSpPr>
-          <p:cNvPr id="36" name="Text 34"/>
+          <p:cNvPr id="39" name="Text 37"/>
           <p:cNvSpPr/>
           <p:nvPr/>
         </p:nvSpPr>
@@ -21254,7 +21947,7 @@
                 <a:ea typeface="Calibri" pitchFamily="34" charset="-122"/>
                 <a:cs typeface="Calibri" pitchFamily="34" charset="-120"/>
               </a:rPr>
-              <a:t>Word Labs  •  wordlabs.app  •  Root: 'scope' = to look, see, observe</a:t>
+              <a:t>Word Labs  •  wordlabs.app  •  Root: 'scope' = look; view; examine</a:t>
             </a:r>
             <a:endParaRPr lang="en-US" sz="800" dirty="0"/>
           </a:p>
@@ -21393,7 +22086,7 @@
                 <a:ea typeface="Trebuchet MS" pitchFamily="34" charset="-122"/>
                 <a:cs typeface="Trebuchet MS" pitchFamily="34" charset="-120"/>
               </a:rPr>
-              <a:t>endoscope</a:t>
+              <a:t>kaleidoscope</a:t>
             </a:r>
             <a:endParaRPr lang="en-US" sz="2800" dirty="0"/>
           </a:p>
@@ -21532,7 +22225,7 @@
                 <a:ea typeface="Trebuchet MS" pitchFamily="34" charset="-122"/>
                 <a:cs typeface="Trebuchet MS" pitchFamily="34" charset="-120"/>
               </a:rPr>
-              <a:t>endo</a:t>
+              <a:t>kaleido</a:t>
             </a:r>
             <a:endParaRPr lang="en-US" sz="1300" dirty="0"/>
           </a:p>
@@ -21571,7 +22264,7 @@
                 <a:ea typeface="Calibri" pitchFamily="34" charset="-122"/>
                 <a:cs typeface="Calibri" pitchFamily="34" charset="-120"/>
               </a:rPr>
-              <a:t>within, inside</a:t>
+              <a:t>beautiful form</a:t>
             </a:r>
             <a:endParaRPr lang="en-US" sz="850" dirty="0"/>
           </a:p>
@@ -21683,7 +22376,7 @@
                 <a:ea typeface="Calibri" pitchFamily="34" charset="-122"/>
                 <a:cs typeface="Calibri" pitchFamily="34" charset="-120"/>
               </a:rPr>
-              <a:t>to look or observe</a:t>
+              <a:t>look; view; examine</a:t>
             </a:r>
             <a:endParaRPr lang="en-US" sz="850" dirty="0"/>
           </a:p>
@@ -21790,8 +22483,8 @@
         </p:nvSpPr>
         <p:spPr>
           <a:xfrm>
-            <a:off x="2313432" y="3364992"/>
-            <a:ext cx="1645920" cy="475488"/>
+            <a:off x="1975104" y="3364992"/>
+            <a:ext cx="1554480" cy="475488"/>
           </a:xfrm>
           <a:prstGeom prst="rect">
             <a:avLst>
@@ -21817,8 +22510,8 @@
         </p:nvSpPr>
         <p:spPr>
           <a:xfrm>
-            <a:off x="2313432" y="3364992"/>
-            <a:ext cx="1645920" cy="475488"/>
+            <a:off x="1975104" y="3364992"/>
+            <a:ext cx="1554480" cy="475488"/>
           </a:xfrm>
           <a:prstGeom prst="rect">
             <a:avLst/>
@@ -21842,7 +22535,7 @@
                 <a:ea typeface="Trebuchet MS" pitchFamily="34" charset="-122"/>
                 <a:cs typeface="Trebuchet MS" pitchFamily="34" charset="-120"/>
               </a:rPr>
-              <a:t>en</a:t>
+              <a:t>ka</a:t>
             </a:r>
             <a:endParaRPr lang="en-US" sz="1400" dirty="0"/>
           </a:p>
@@ -21856,8 +22549,8 @@
         </p:nvSpPr>
         <p:spPr>
           <a:xfrm>
-            <a:off x="3959352" y="3364992"/>
-            <a:ext cx="411480" cy="475488"/>
+            <a:off x="3529584" y="3364992"/>
+            <a:ext cx="73152" cy="475488"/>
           </a:xfrm>
           <a:prstGeom prst="rect">
             <a:avLst/>
@@ -21895,8 +22588,8 @@
         </p:nvSpPr>
         <p:spPr>
           <a:xfrm>
-            <a:off x="4370832" y="3364992"/>
-            <a:ext cx="1645920" cy="475488"/>
+            <a:off x="3602736" y="3364992"/>
+            <a:ext cx="1554480" cy="475488"/>
           </a:xfrm>
           <a:prstGeom prst="rect">
             <a:avLst>
@@ -21922,8 +22615,8 @@
         </p:nvSpPr>
         <p:spPr>
           <a:xfrm>
-            <a:off x="4370832" y="3364992"/>
-            <a:ext cx="1645920" cy="475488"/>
+            <a:off x="3602736" y="3364992"/>
+            <a:ext cx="1554480" cy="475488"/>
           </a:xfrm>
           <a:prstGeom prst="rect">
             <a:avLst/>
@@ -21947,7 +22640,7 @@
                 <a:ea typeface="Trebuchet MS" pitchFamily="34" charset="-122"/>
                 <a:cs typeface="Trebuchet MS" pitchFamily="34" charset="-120"/>
               </a:rPr>
-              <a:t>do</a:t>
+              <a:t>lei</a:t>
             </a:r>
             <a:endParaRPr lang="en-US" sz="1400" dirty="0"/>
           </a:p>
@@ -21961,8 +22654,8 @@
         </p:nvSpPr>
         <p:spPr>
           <a:xfrm>
-            <a:off x="6016752" y="3364992"/>
-            <a:ext cx="411480" cy="475488"/>
+            <a:off x="5157216" y="3364992"/>
+            <a:ext cx="73152" cy="475488"/>
           </a:xfrm>
           <a:prstGeom prst="rect">
             <a:avLst/>
@@ -22000,8 +22693,8 @@
         </p:nvSpPr>
         <p:spPr>
           <a:xfrm>
-            <a:off x="6428232" y="3364992"/>
-            <a:ext cx="1645920" cy="475488"/>
+            <a:off x="5230368" y="3364992"/>
+            <a:ext cx="1554480" cy="475488"/>
           </a:xfrm>
           <a:prstGeom prst="rect">
             <a:avLst>
@@ -22027,8 +22720,8 @@
         </p:nvSpPr>
         <p:spPr>
           <a:xfrm>
-            <a:off x="6428232" y="3364992"/>
-            <a:ext cx="1645920" cy="475488"/>
+            <a:off x="5230368" y="3364992"/>
+            <a:ext cx="1554480" cy="475488"/>
           </a:xfrm>
           <a:prstGeom prst="rect">
             <a:avLst/>
@@ -22052,6 +22745,111 @@
                 <a:ea typeface="Trebuchet MS" pitchFamily="34" charset="-122"/>
                 <a:cs typeface="Trebuchet MS" pitchFamily="34" charset="-120"/>
               </a:rPr>
+              <a:t>do</a:t>
+            </a:r>
+            <a:endParaRPr lang="en-US" sz="1400" dirty="0"/>
+          </a:p>
+        </p:txBody>
+      </p:sp>
+      <p:sp>
+        <p:nvSpPr>
+          <p:cNvPr id="33" name="Text 31"/>
+          <p:cNvSpPr/>
+          <p:nvPr/>
+        </p:nvSpPr>
+        <p:spPr>
+          <a:xfrm>
+            <a:off x="6784848" y="3364992"/>
+            <a:ext cx="73152" cy="475488"/>
+          </a:xfrm>
+          <a:prstGeom prst="rect">
+            <a:avLst/>
+          </a:prstGeom>
+          <a:noFill/>
+          <a:ln/>
+        </p:spPr>
+        <p:txBody>
+          <a:bodyPr wrap="square" lIns="0" tIns="0" rIns="0" bIns="0" rtlCol="0" anchor="ctr"/>
+          <a:lstStyle/>
+          <a:p>
+            <a:pPr algn="ctr" indent="0" marL="0">
+              <a:buNone/>
+            </a:pPr>
+            <a:r>
+              <a:rPr lang="en-US" sz="1600" b="1" dirty="0">
+                <a:solidFill>
+                  <a:srgbClr val="0D9488"/>
+                </a:solidFill>
+                <a:latin typeface="Trebuchet MS" pitchFamily="34" charset="0"/>
+                <a:ea typeface="Trebuchet MS" pitchFamily="34" charset="-122"/>
+                <a:cs typeface="Trebuchet MS" pitchFamily="34" charset="-120"/>
+              </a:rPr>
+              <a:t>·</a:t>
+            </a:r>
+            <a:endParaRPr lang="en-US" sz="1600" dirty="0"/>
+          </a:p>
+        </p:txBody>
+      </p:sp>
+      <p:sp>
+        <p:nvSpPr>
+          <p:cNvPr id="34" name="Shape 32"/>
+          <p:cNvSpPr/>
+          <p:nvPr/>
+        </p:nvSpPr>
+        <p:spPr>
+          <a:xfrm>
+            <a:off x="6858000" y="3364992"/>
+            <a:ext cx="1554480" cy="475488"/>
+          </a:xfrm>
+          <a:prstGeom prst="rect">
+            <a:avLst>
+              <a:gd name="adj" fmla="val 9615"/>
+            </a:avLst>
+          </a:prstGeom>
+          <a:solidFill>
+            <a:srgbClr val="FFFFFF"/>
+          </a:solidFill>
+          <a:ln w="12700">
+            <a:solidFill>
+              <a:srgbClr val="0D9488"/>
+            </a:solidFill>
+            <a:prstDash val="solid"/>
+          </a:ln>
+        </p:spPr>
+      </p:sp>
+      <p:sp>
+        <p:nvSpPr>
+          <p:cNvPr id="35" name="Text 33"/>
+          <p:cNvSpPr/>
+          <p:nvPr/>
+        </p:nvSpPr>
+        <p:spPr>
+          <a:xfrm>
+            <a:off x="6858000" y="3364992"/>
+            <a:ext cx="1554480" cy="475488"/>
+          </a:xfrm>
+          <a:prstGeom prst="rect">
+            <a:avLst/>
+          </a:prstGeom>
+          <a:noFill/>
+          <a:ln/>
+        </p:spPr>
+        <p:txBody>
+          <a:bodyPr wrap="square" lIns="0" tIns="0" rIns="0" bIns="0" rtlCol="0" anchor="ctr"/>
+          <a:lstStyle/>
+          <a:p>
+            <a:pPr algn="ctr" indent="0" marL="0">
+              <a:buNone/>
+            </a:pPr>
+            <a:r>
+              <a:rPr lang="en-US" sz="1400" b="1" dirty="0">
+                <a:solidFill>
+                  <a:srgbClr val="0D9488"/>
+                </a:solidFill>
+                <a:latin typeface="Trebuchet MS" pitchFamily="34" charset="0"/>
+                <a:ea typeface="Trebuchet MS" pitchFamily="34" charset="-122"/>
+                <a:cs typeface="Trebuchet MS" pitchFamily="34" charset="-120"/>
+              </a:rPr>
               <a:t>scope</a:t>
             </a:r>
             <a:endParaRPr lang="en-US" sz="1400" dirty="0"/>
@@ -22060,7 +22858,7 @@
       </p:sp>
       <p:sp>
         <p:nvSpPr>
-          <p:cNvPr id="33" name="Shape 31"/>
+          <p:cNvPr id="36" name="Shape 34"/>
           <p:cNvSpPr/>
           <p:nvPr/>
         </p:nvSpPr>
@@ -22087,7 +22885,7 @@
       </p:sp>
       <p:sp>
         <p:nvSpPr>
-          <p:cNvPr id="34" name="Text 32"/>
+          <p:cNvPr id="37" name="Text 35"/>
           <p:cNvSpPr/>
           <p:nvPr/>
         </p:nvSpPr>
@@ -22126,18 +22924,18 @@
       </p:sp>
       <p:sp>
         <p:nvSpPr>
-          <p:cNvPr id="35" name="Shape 33"/>
+          <p:cNvPr id="38" name="Shape 36"/>
           <p:cNvSpPr/>
           <p:nvPr/>
         </p:nvSpPr>
         <p:spPr>
           <a:xfrm>
             <a:off x="1874520" y="4096512"/>
-            <a:ext cx="6903720" cy="804672"/>
+            <a:ext cx="6903720" cy="658368"/>
           </a:xfrm>
           <a:prstGeom prst="rect">
             <a:avLst>
-              <a:gd name="adj" fmla="val 6818"/>
+              <a:gd name="adj" fmla="val 8333"/>
             </a:avLst>
           </a:prstGeom>
           <a:solidFill>
@@ -22153,18 +22951,18 @@
       </p:sp>
       <p:sp>
         <p:nvSpPr>
-          <p:cNvPr id="36" name="Shape 34"/>
-          <p:cNvSpPr/>
-          <p:nvPr/>
-        </p:nvSpPr>
-        <p:spPr>
-          <a:xfrm>
-            <a:off x="2124837" y="4169664"/>
-            <a:ext cx="685800" cy="384048"/>
+          <p:cNvPr id="39" name="Shape 37"/>
+          <p:cNvSpPr/>
+          <p:nvPr/>
+        </p:nvSpPr>
+        <p:spPr>
+          <a:xfrm>
+            <a:off x="1951828" y="4169664"/>
+            <a:ext cx="603504" cy="475488"/>
           </a:xfrm>
           <a:prstGeom prst="rect">
             <a:avLst>
-              <a:gd name="adj" fmla="val 9524"/>
+              <a:gd name="adj" fmla="val 7692"/>
             </a:avLst>
           </a:prstGeom>
           <a:solidFill>
@@ -22180,14 +22978,14 @@
       </p:sp>
       <p:sp>
         <p:nvSpPr>
-          <p:cNvPr id="37" name="Text 35"/>
-          <p:cNvSpPr/>
-          <p:nvPr/>
-        </p:nvSpPr>
-        <p:spPr>
-          <a:xfrm>
-            <a:off x="2124837" y="4169664"/>
-            <a:ext cx="685800" cy="384048"/>
+          <p:cNvPr id="40" name="Text 38"/>
+          <p:cNvSpPr/>
+          <p:nvPr/>
+        </p:nvSpPr>
+        <p:spPr>
+          <a:xfrm>
+            <a:off x="1951828" y="4169664"/>
+            <a:ext cx="603504" cy="475488"/>
           </a:xfrm>
           <a:prstGeom prst="rect">
             <a:avLst/>
@@ -22211,7 +23009,7 @@
                 <a:ea typeface="Trebuchet MS" pitchFamily="34" charset="-122"/>
                 <a:cs typeface="Trebuchet MS" pitchFamily="34" charset="-120"/>
               </a:rPr>
-              <a:t>e</a:t>
+              <a:t>k</a:t>
             </a:r>
             <a:endParaRPr lang="en-US" sz="900" dirty="0"/>
           </a:p>
@@ -22219,18 +23017,18 @@
       </p:sp>
       <p:sp>
         <p:nvSpPr>
-          <p:cNvPr id="38" name="Shape 36"/>
-          <p:cNvSpPr/>
-          <p:nvPr/>
-        </p:nvSpPr>
-        <p:spPr>
-          <a:xfrm>
-            <a:off x="3033522" y="4169664"/>
-            <a:ext cx="685800" cy="384048"/>
+          <p:cNvPr id="41" name="Shape 39"/>
+          <p:cNvSpPr/>
+          <p:nvPr/>
+        </p:nvSpPr>
+        <p:spPr>
+          <a:xfrm>
+            <a:off x="2605209" y="4169664"/>
+            <a:ext cx="603504" cy="475488"/>
           </a:xfrm>
           <a:prstGeom prst="rect">
             <a:avLst>
-              <a:gd name="adj" fmla="val 9524"/>
+              <a:gd name="adj" fmla="val 7692"/>
             </a:avLst>
           </a:prstGeom>
           <a:solidFill>
@@ -22246,14 +23044,14 @@
       </p:sp>
       <p:sp>
         <p:nvSpPr>
-          <p:cNvPr id="39" name="Text 37"/>
-          <p:cNvSpPr/>
-          <p:nvPr/>
-        </p:nvSpPr>
-        <p:spPr>
-          <a:xfrm>
-            <a:off x="3033522" y="4169664"/>
-            <a:ext cx="685800" cy="384048"/>
+          <p:cNvPr id="42" name="Text 40"/>
+          <p:cNvSpPr/>
+          <p:nvPr/>
+        </p:nvSpPr>
+        <p:spPr>
+          <a:xfrm>
+            <a:off x="2605209" y="4169664"/>
+            <a:ext cx="603504" cy="475488"/>
           </a:xfrm>
           <a:prstGeom prst="rect">
             <a:avLst/>
@@ -22277,7 +23075,7 @@
                 <a:ea typeface="Trebuchet MS" pitchFamily="34" charset="-122"/>
                 <a:cs typeface="Trebuchet MS" pitchFamily="34" charset="-120"/>
               </a:rPr>
-              <a:t>n</a:t>
+              <a:t>a</a:t>
             </a:r>
             <a:endParaRPr lang="en-US" sz="900" dirty="0"/>
           </a:p>
@@ -22285,18 +23083,18 @@
       </p:sp>
       <p:sp>
         <p:nvSpPr>
-          <p:cNvPr id="40" name="Shape 38"/>
-          <p:cNvSpPr/>
-          <p:nvPr/>
-        </p:nvSpPr>
-        <p:spPr>
-          <a:xfrm>
-            <a:off x="3942207" y="4169664"/>
-            <a:ext cx="685800" cy="384048"/>
+          <p:cNvPr id="43" name="Shape 41"/>
+          <p:cNvSpPr/>
+          <p:nvPr/>
+        </p:nvSpPr>
+        <p:spPr>
+          <a:xfrm>
+            <a:off x="3258589" y="4169664"/>
+            <a:ext cx="603504" cy="475488"/>
           </a:xfrm>
           <a:prstGeom prst="rect">
             <a:avLst>
-              <a:gd name="adj" fmla="val 9524"/>
+              <a:gd name="adj" fmla="val 7692"/>
             </a:avLst>
           </a:prstGeom>
           <a:solidFill>
@@ -22312,14 +23110,14 @@
       </p:sp>
       <p:sp>
         <p:nvSpPr>
-          <p:cNvPr id="41" name="Text 39"/>
-          <p:cNvSpPr/>
-          <p:nvPr/>
-        </p:nvSpPr>
-        <p:spPr>
-          <a:xfrm>
-            <a:off x="3942207" y="4169664"/>
-            <a:ext cx="685800" cy="384048"/>
+          <p:cNvPr id="44" name="Text 42"/>
+          <p:cNvSpPr/>
+          <p:nvPr/>
+        </p:nvSpPr>
+        <p:spPr>
+          <a:xfrm>
+            <a:off x="3258589" y="4169664"/>
+            <a:ext cx="603504" cy="475488"/>
           </a:xfrm>
           <a:prstGeom prst="rect">
             <a:avLst/>
@@ -22343,7 +23141,7 @@
                 <a:ea typeface="Trebuchet MS" pitchFamily="34" charset="-122"/>
                 <a:cs typeface="Trebuchet MS" pitchFamily="34" charset="-120"/>
               </a:rPr>
-              <a:t>d</a:t>
+              <a:t>l</a:t>
             </a:r>
             <a:endParaRPr lang="en-US" sz="900" dirty="0"/>
           </a:p>
@@ -22351,18 +23149,18 @@
       </p:sp>
       <p:sp>
         <p:nvSpPr>
-          <p:cNvPr id="42" name="Shape 40"/>
-          <p:cNvSpPr/>
-          <p:nvPr/>
-        </p:nvSpPr>
-        <p:spPr>
-          <a:xfrm>
-            <a:off x="4850892" y="4169664"/>
-            <a:ext cx="685800" cy="384048"/>
+          <p:cNvPr id="45" name="Shape 43"/>
+          <p:cNvSpPr/>
+          <p:nvPr/>
+        </p:nvSpPr>
+        <p:spPr>
+          <a:xfrm>
+            <a:off x="3911969" y="4169664"/>
+            <a:ext cx="603504" cy="475488"/>
           </a:xfrm>
           <a:prstGeom prst="rect">
             <a:avLst>
-              <a:gd name="adj" fmla="val 9524"/>
+              <a:gd name="adj" fmla="val 7692"/>
             </a:avLst>
           </a:prstGeom>
           <a:solidFill>
@@ -22378,14 +23176,14 @@
       </p:sp>
       <p:sp>
         <p:nvSpPr>
-          <p:cNvPr id="43" name="Text 41"/>
-          <p:cNvSpPr/>
-          <p:nvPr/>
-        </p:nvSpPr>
-        <p:spPr>
-          <a:xfrm>
-            <a:off x="4850892" y="4169664"/>
-            <a:ext cx="685800" cy="384048"/>
+          <p:cNvPr id="46" name="Text 44"/>
+          <p:cNvSpPr/>
+          <p:nvPr/>
+        </p:nvSpPr>
+        <p:spPr>
+          <a:xfrm>
+            <a:off x="3911969" y="4169664"/>
+            <a:ext cx="603504" cy="475488"/>
           </a:xfrm>
           <a:prstGeom prst="rect">
             <a:avLst/>
@@ -22409,7 +23207,7 @@
                 <a:ea typeface="Trebuchet MS" pitchFamily="34" charset="-122"/>
                 <a:cs typeface="Trebuchet MS" pitchFamily="34" charset="-120"/>
               </a:rPr>
-              <a:t>o</a:t>
+              <a:t>ei</a:t>
             </a:r>
             <a:endParaRPr lang="en-US" sz="900" dirty="0"/>
           </a:p>
@@ -22417,18 +23215,18 @@
       </p:sp>
       <p:sp>
         <p:nvSpPr>
-          <p:cNvPr id="44" name="Shape 42"/>
-          <p:cNvSpPr/>
-          <p:nvPr/>
-        </p:nvSpPr>
-        <p:spPr>
-          <a:xfrm>
-            <a:off x="5759577" y="4169664"/>
-            <a:ext cx="685800" cy="384048"/>
+          <p:cNvPr id="47" name="Shape 45"/>
+          <p:cNvSpPr/>
+          <p:nvPr/>
+        </p:nvSpPr>
+        <p:spPr>
+          <a:xfrm>
+            <a:off x="4565350" y="4169664"/>
+            <a:ext cx="603504" cy="475488"/>
           </a:xfrm>
           <a:prstGeom prst="rect">
             <a:avLst>
-              <a:gd name="adj" fmla="val 9524"/>
+              <a:gd name="adj" fmla="val 7692"/>
             </a:avLst>
           </a:prstGeom>
           <a:solidFill>
@@ -22444,14 +23242,14 @@
       </p:sp>
       <p:sp>
         <p:nvSpPr>
-          <p:cNvPr id="45" name="Text 43"/>
-          <p:cNvSpPr/>
-          <p:nvPr/>
-        </p:nvSpPr>
-        <p:spPr>
-          <a:xfrm>
-            <a:off x="5759577" y="4169664"/>
-            <a:ext cx="685800" cy="384048"/>
+          <p:cNvPr id="48" name="Text 46"/>
+          <p:cNvSpPr/>
+          <p:nvPr/>
+        </p:nvSpPr>
+        <p:spPr>
+          <a:xfrm>
+            <a:off x="4565350" y="4169664"/>
+            <a:ext cx="603504" cy="475488"/>
           </a:xfrm>
           <a:prstGeom prst="rect">
             <a:avLst/>
@@ -22475,7 +23273,7 @@
                 <a:ea typeface="Trebuchet MS" pitchFamily="34" charset="-122"/>
                 <a:cs typeface="Trebuchet MS" pitchFamily="34" charset="-120"/>
               </a:rPr>
-              <a:t>sc</a:t>
+              <a:t>d</a:t>
             </a:r>
             <a:endParaRPr lang="en-US" sz="900" dirty="0"/>
           </a:p>
@@ -22483,57 +23281,18 @@
       </p:sp>
       <p:sp>
         <p:nvSpPr>
-          <p:cNvPr id="46" name="Text 44"/>
-          <p:cNvSpPr/>
-          <p:nvPr/>
-        </p:nvSpPr>
-        <p:spPr>
-          <a:xfrm>
-            <a:off x="5759577" y="4572000"/>
-            <a:ext cx="685800" cy="219456"/>
-          </a:xfrm>
-          <a:prstGeom prst="rect">
-            <a:avLst/>
-          </a:prstGeom>
-          <a:noFill/>
-          <a:ln/>
-        </p:spPr>
-        <p:txBody>
-          <a:bodyPr wrap="square" lIns="0" tIns="0" rIns="0" bIns="0" rtlCol="0" anchor="t"/>
-          <a:lstStyle/>
-          <a:p>
-            <a:pPr algn="ctr" indent="0" marL="0">
-              <a:buNone/>
-            </a:pPr>
-            <a:r>
-              <a:rPr lang="en-US" sz="750" i="1" dirty="0">
-                <a:solidFill>
-                  <a:srgbClr val="94A3B8"/>
-                </a:solidFill>
-                <a:latin typeface="Calibri" pitchFamily="34" charset="0"/>
-                <a:ea typeface="Calibri" pitchFamily="34" charset="-122"/>
-                <a:cs typeface="Calibri" pitchFamily="34" charset="-120"/>
-              </a:rPr>
-              <a:t>/sk/</a:t>
-            </a:r>
-            <a:endParaRPr lang="en-US" sz="750" dirty="0"/>
-          </a:p>
-        </p:txBody>
-      </p:sp>
-      <p:sp>
-        <p:nvSpPr>
-          <p:cNvPr id="47" name="Shape 45"/>
-          <p:cNvSpPr/>
-          <p:nvPr/>
-        </p:nvSpPr>
-        <p:spPr>
-          <a:xfrm>
-            <a:off x="6668262" y="4169664"/>
-            <a:ext cx="685800" cy="384048"/>
+          <p:cNvPr id="49" name="Shape 47"/>
+          <p:cNvSpPr/>
+          <p:nvPr/>
+        </p:nvSpPr>
+        <p:spPr>
+          <a:xfrm>
+            <a:off x="5218730" y="4169664"/>
+            <a:ext cx="603504" cy="475488"/>
           </a:xfrm>
           <a:prstGeom prst="rect">
             <a:avLst>
-              <a:gd name="adj" fmla="val 9524"/>
+              <a:gd name="adj" fmla="val 7692"/>
             </a:avLst>
           </a:prstGeom>
           <a:solidFill>
@@ -22549,14 +23308,14 @@
       </p:sp>
       <p:sp>
         <p:nvSpPr>
-          <p:cNvPr id="48" name="Text 46"/>
-          <p:cNvSpPr/>
-          <p:nvPr/>
-        </p:nvSpPr>
-        <p:spPr>
-          <a:xfrm>
-            <a:off x="6668262" y="4169664"/>
-            <a:ext cx="685800" cy="384048"/>
+          <p:cNvPr id="50" name="Text 48"/>
+          <p:cNvSpPr/>
+          <p:nvPr/>
+        </p:nvSpPr>
+        <p:spPr>
+          <a:xfrm>
+            <a:off x="5218730" y="4169664"/>
+            <a:ext cx="603504" cy="475488"/>
           </a:xfrm>
           <a:prstGeom prst="rect">
             <a:avLst/>
@@ -22588,18 +23347,18 @@
       </p:sp>
       <p:sp>
         <p:nvSpPr>
-          <p:cNvPr id="49" name="Shape 47"/>
-          <p:cNvSpPr/>
-          <p:nvPr/>
-        </p:nvSpPr>
-        <p:spPr>
-          <a:xfrm>
-            <a:off x="7576947" y="4169664"/>
-            <a:ext cx="685800" cy="384048"/>
+          <p:cNvPr id="51" name="Shape 49"/>
+          <p:cNvSpPr/>
+          <p:nvPr/>
+        </p:nvSpPr>
+        <p:spPr>
+          <a:xfrm>
+            <a:off x="5872111" y="4169664"/>
+            <a:ext cx="603504" cy="475488"/>
           </a:xfrm>
           <a:prstGeom prst="rect">
             <a:avLst>
-              <a:gd name="adj" fmla="val 9524"/>
+              <a:gd name="adj" fmla="val 7692"/>
             </a:avLst>
           </a:prstGeom>
           <a:solidFill>
@@ -22615,14 +23374,14 @@
       </p:sp>
       <p:sp>
         <p:nvSpPr>
-          <p:cNvPr id="50" name="Text 48"/>
-          <p:cNvSpPr/>
-          <p:nvPr/>
-        </p:nvSpPr>
-        <p:spPr>
-          <a:xfrm>
-            <a:off x="7576947" y="4169664"/>
-            <a:ext cx="685800" cy="384048"/>
+          <p:cNvPr id="52" name="Text 50"/>
+          <p:cNvSpPr/>
+          <p:nvPr/>
+        </p:nvSpPr>
+        <p:spPr>
+          <a:xfrm>
+            <a:off x="5872111" y="4169664"/>
+            <a:ext cx="603504" cy="475488"/>
           </a:xfrm>
           <a:prstGeom prst="rect">
             <a:avLst/>
@@ -22646,7 +23405,205 @@
                 <a:ea typeface="Trebuchet MS" pitchFamily="34" charset="-122"/>
                 <a:cs typeface="Trebuchet MS" pitchFamily="34" charset="-120"/>
               </a:rPr>
-              <a:t>pe</a:t>
+              <a:t>s</a:t>
+            </a:r>
+            <a:endParaRPr lang="en-US" sz="900" dirty="0"/>
+          </a:p>
+        </p:txBody>
+      </p:sp>
+      <p:sp>
+        <p:nvSpPr>
+          <p:cNvPr id="53" name="Shape 51"/>
+          <p:cNvSpPr/>
+          <p:nvPr/>
+        </p:nvSpPr>
+        <p:spPr>
+          <a:xfrm>
+            <a:off x="6525491" y="4169664"/>
+            <a:ext cx="603504" cy="475488"/>
+          </a:xfrm>
+          <a:prstGeom prst="rect">
+            <a:avLst>
+              <a:gd name="adj" fmla="val 7692"/>
+            </a:avLst>
+          </a:prstGeom>
+          <a:solidFill>
+            <a:srgbClr val="FFFFFF"/>
+          </a:solidFill>
+          <a:ln w="12700">
+            <a:solidFill>
+              <a:srgbClr val="DB2777"/>
+            </a:solidFill>
+            <a:prstDash val="solid"/>
+          </a:ln>
+        </p:spPr>
+      </p:sp>
+      <p:sp>
+        <p:nvSpPr>
+          <p:cNvPr id="54" name="Text 52"/>
+          <p:cNvSpPr/>
+          <p:nvPr/>
+        </p:nvSpPr>
+        <p:spPr>
+          <a:xfrm>
+            <a:off x="6525491" y="4169664"/>
+            <a:ext cx="603504" cy="475488"/>
+          </a:xfrm>
+          <a:prstGeom prst="rect">
+            <a:avLst/>
+          </a:prstGeom>
+          <a:noFill/>
+          <a:ln/>
+        </p:spPr>
+        <p:txBody>
+          <a:bodyPr wrap="square" lIns="0" tIns="0" rIns="0" bIns="0" rtlCol="0" anchor="ctr"/>
+          <a:lstStyle/>
+          <a:p>
+            <a:pPr algn="ctr" indent="0" marL="0">
+              <a:buNone/>
+            </a:pPr>
+            <a:r>
+              <a:rPr lang="en-US" sz="900" b="1" dirty="0">
+                <a:solidFill>
+                  <a:srgbClr val="9D174D"/>
+                </a:solidFill>
+                <a:latin typeface="Trebuchet MS" pitchFamily="34" charset="0"/>
+                <a:ea typeface="Trebuchet MS" pitchFamily="34" charset="-122"/>
+                <a:cs typeface="Trebuchet MS" pitchFamily="34" charset="-120"/>
+              </a:rPr>
+              <a:t>c</a:t>
+            </a:r>
+            <a:endParaRPr lang="en-US" sz="900" dirty="0"/>
+          </a:p>
+        </p:txBody>
+      </p:sp>
+      <p:sp>
+        <p:nvSpPr>
+          <p:cNvPr id="55" name="Shape 53"/>
+          <p:cNvSpPr/>
+          <p:nvPr/>
+        </p:nvSpPr>
+        <p:spPr>
+          <a:xfrm>
+            <a:off x="7178871" y="4169664"/>
+            <a:ext cx="603504" cy="475488"/>
+          </a:xfrm>
+          <a:prstGeom prst="rect">
+            <a:avLst>
+              <a:gd name="adj" fmla="val 7692"/>
+            </a:avLst>
+          </a:prstGeom>
+          <a:solidFill>
+            <a:srgbClr val="FFFFFF"/>
+          </a:solidFill>
+          <a:ln w="12700">
+            <a:solidFill>
+              <a:srgbClr val="DB2777"/>
+            </a:solidFill>
+            <a:prstDash val="solid"/>
+          </a:ln>
+        </p:spPr>
+      </p:sp>
+      <p:sp>
+        <p:nvSpPr>
+          <p:cNvPr id="56" name="Text 54"/>
+          <p:cNvSpPr/>
+          <p:nvPr/>
+        </p:nvSpPr>
+        <p:spPr>
+          <a:xfrm>
+            <a:off x="7178871" y="4169664"/>
+            <a:ext cx="603504" cy="475488"/>
+          </a:xfrm>
+          <a:prstGeom prst="rect">
+            <a:avLst/>
+          </a:prstGeom>
+          <a:noFill/>
+          <a:ln/>
+        </p:spPr>
+        <p:txBody>
+          <a:bodyPr wrap="square" lIns="0" tIns="0" rIns="0" bIns="0" rtlCol="0" anchor="ctr"/>
+          <a:lstStyle/>
+          <a:p>
+            <a:pPr algn="ctr" indent="0" marL="0">
+              <a:buNone/>
+            </a:pPr>
+            <a:r>
+              <a:rPr lang="en-US" sz="900" b="1" dirty="0">
+                <a:solidFill>
+                  <a:srgbClr val="9D174D"/>
+                </a:solidFill>
+                <a:latin typeface="Trebuchet MS" pitchFamily="34" charset="0"/>
+                <a:ea typeface="Trebuchet MS" pitchFamily="34" charset="-122"/>
+                <a:cs typeface="Trebuchet MS" pitchFamily="34" charset="-120"/>
+              </a:rPr>
+              <a:t>o_e</a:t>
+            </a:r>
+            <a:endParaRPr lang="en-US" sz="900" dirty="0"/>
+          </a:p>
+        </p:txBody>
+      </p:sp>
+      <p:sp>
+        <p:nvSpPr>
+          <p:cNvPr id="57" name="Shape 55"/>
+          <p:cNvSpPr/>
+          <p:nvPr/>
+        </p:nvSpPr>
+        <p:spPr>
+          <a:xfrm>
+            <a:off x="7832252" y="4169664"/>
+            <a:ext cx="603504" cy="475488"/>
+          </a:xfrm>
+          <a:prstGeom prst="rect">
+            <a:avLst>
+              <a:gd name="adj" fmla="val 7692"/>
+            </a:avLst>
+          </a:prstGeom>
+          <a:solidFill>
+            <a:srgbClr val="FFFFFF"/>
+          </a:solidFill>
+          <a:ln w="12700">
+            <a:solidFill>
+              <a:srgbClr val="DB2777"/>
+            </a:solidFill>
+            <a:prstDash val="solid"/>
+          </a:ln>
+        </p:spPr>
+      </p:sp>
+      <p:sp>
+        <p:nvSpPr>
+          <p:cNvPr id="58" name="Text 56"/>
+          <p:cNvSpPr/>
+          <p:nvPr/>
+        </p:nvSpPr>
+        <p:spPr>
+          <a:xfrm>
+            <a:off x="7832252" y="4169664"/>
+            <a:ext cx="603504" cy="475488"/>
+          </a:xfrm>
+          <a:prstGeom prst="rect">
+            <a:avLst/>
+          </a:prstGeom>
+          <a:noFill/>
+          <a:ln/>
+        </p:spPr>
+        <p:txBody>
+          <a:bodyPr wrap="square" lIns="0" tIns="0" rIns="0" bIns="0" rtlCol="0" anchor="ctr"/>
+          <a:lstStyle/>
+          <a:p>
+            <a:pPr algn="ctr" indent="0" marL="0">
+              <a:buNone/>
+            </a:pPr>
+            <a:r>
+              <a:rPr lang="en-US" sz="900" b="1" dirty="0">
+                <a:solidFill>
+                  <a:srgbClr val="9D174D"/>
+                </a:solidFill>
+                <a:latin typeface="Trebuchet MS" pitchFamily="34" charset="0"/>
+                <a:ea typeface="Trebuchet MS" pitchFamily="34" charset="-122"/>
+                <a:cs typeface="Trebuchet MS" pitchFamily="34" charset="-120"/>
+              </a:rPr>
+              <a:t>p</a:t>
             </a:r>
             <a:endParaRPr lang="en-US" sz="900" dirty="0"/>
           </a:p>
@@ -22938,7 +23895,7 @@
                 <a:ea typeface="Calibri" pitchFamily="34" charset="-122"/>
                 <a:cs typeface="Calibri" pitchFamily="34" charset="-120"/>
               </a:rPr>
-              <a:t>Word Labs  •  wordlabs.app  •  Root: 'scope' = to look, see, observe</a:t>
+              <a:t>Word Labs  •  wordlabs.app  •  Root: 'scope' = look; view; examine</a:t>
             </a:r>
             <a:endParaRPr lang="en-US" sz="800" dirty="0"/>
           </a:p>
@@ -23077,7 +24034,7 @@
                 <a:ea typeface="Trebuchet MS" pitchFamily="34" charset="-122"/>
                 <a:cs typeface="Trebuchet MS" pitchFamily="34" charset="-120"/>
               </a:rPr>
-              <a:t>kaleidoscope</a:t>
+              <a:t>stethoscopes</a:t>
             </a:r>
             <a:endParaRPr lang="en-US" sz="2800" dirty="0"/>
           </a:p>
@@ -23765,7 +24722,7 @@
                 <a:ea typeface="Calibri" pitchFamily="34" charset="-122"/>
                 <a:cs typeface="Calibri" pitchFamily="34" charset="-120"/>
               </a:rPr>
-              <a:t>Word Labs  •  wordlabs.app  •  Root: 'scope' = to look, see, observe</a:t>
+              <a:t>Word Labs  •  wordlabs.app  •  Root: 'scope' = look; view; examine</a:t>
             </a:r>
             <a:endParaRPr lang="en-US" sz="800" dirty="0"/>
           </a:p>
@@ -23904,7 +24861,7 @@
                 <a:ea typeface="Trebuchet MS" pitchFamily="34" charset="-122"/>
                 <a:cs typeface="Trebuchet MS" pitchFamily="34" charset="-120"/>
               </a:rPr>
-              <a:t>kaleidoscope</a:t>
+              <a:t>stethoscopes</a:t>
             </a:r>
             <a:endParaRPr lang="en-US" sz="2800" dirty="0"/>
           </a:p>
@@ -24043,7 +25000,7 @@
                 <a:ea typeface="Trebuchet MS" pitchFamily="34" charset="-122"/>
                 <a:cs typeface="Trebuchet MS" pitchFamily="34" charset="-120"/>
               </a:rPr>
-              <a:t>kaleid</a:t>
+              <a:t>stetho</a:t>
             </a:r>
             <a:endParaRPr lang="en-US" sz="1300" dirty="0"/>
           </a:p>
@@ -24082,7 +25039,7 @@
                 <a:ea typeface="Calibri" pitchFamily="34" charset="-122"/>
                 <a:cs typeface="Calibri" pitchFamily="34" charset="-120"/>
               </a:rPr>
-              <a:t>beautiful form</a:t>
+              <a:t>chest</a:t>
             </a:r>
             <a:endParaRPr lang="en-US" sz="850" dirty="0"/>
           </a:p>
@@ -24105,11 +25062,11 @@
             </a:avLst>
           </a:prstGeom>
           <a:solidFill>
-            <a:srgbClr val="FCE7F3"/>
+            <a:srgbClr val="CCFBF1"/>
           </a:solidFill>
           <a:ln w="19050">
             <a:solidFill>
-              <a:srgbClr val="DB2777"/>
+              <a:srgbClr val="0D9488"/>
             </a:solidFill>
             <a:prstDash val="solid"/>
           </a:ln>
@@ -24149,13 +25106,13 @@
             <a:r>
               <a:rPr lang="en-US" sz="1300" b="1" dirty="0">
                 <a:solidFill>
-                  <a:srgbClr val="9D174D"/>
+                  <a:srgbClr val="0F766E"/>
                 </a:solidFill>
                 <a:latin typeface="Trebuchet MS" pitchFamily="34" charset="0"/>
                 <a:ea typeface="Trebuchet MS" pitchFamily="34" charset="-122"/>
                 <a:cs typeface="Trebuchet MS" pitchFamily="34" charset="-120"/>
               </a:rPr>
-              <a:t>o</a:t>
+              <a:t>scope</a:t>
             </a:r>
             <a:endParaRPr lang="en-US" sz="1300" dirty="0"/>
           </a:p>
@@ -24194,7 +25151,7 @@
                 <a:ea typeface="Calibri" pitchFamily="34" charset="-122"/>
                 <a:cs typeface="Calibri" pitchFamily="34" charset="-120"/>
               </a:rPr>
-              <a:t>connecting vowel</a:t>
+              <a:t>look; view; examine</a:t>
             </a:r>
             <a:endParaRPr lang="en-US" sz="850" dirty="0"/>
           </a:p>
@@ -24202,46 +25159,7 @@
       </p:sp>
       <p:sp>
         <p:nvSpPr>
-          <p:cNvPr id="22" name="Text 20"/>
-          <p:cNvSpPr/>
-          <p:nvPr/>
-        </p:nvSpPr>
-        <p:spPr>
-          <a:xfrm>
-            <a:off x="4370832" y="2752344"/>
-            <a:ext cx="1828800" cy="182880"/>
-          </a:xfrm>
-          <a:prstGeom prst="rect">
-            <a:avLst/>
-          </a:prstGeom>
-          <a:noFill/>
-          <a:ln/>
-        </p:spPr>
-        <p:txBody>
-          <a:bodyPr wrap="square" lIns="0" tIns="0" rIns="0" bIns="0" rtlCol="0" anchor="t"/>
-          <a:lstStyle/>
-          <a:p>
-            <a:pPr algn="ctr" indent="0" marL="0">
-              <a:buNone/>
-            </a:pPr>
-            <a:r>
-              <a:rPr lang="en-US" sz="700" i="1" dirty="0">
-                <a:solidFill>
-                  <a:srgbClr val="94A3B8"/>
-                </a:solidFill>
-                <a:latin typeface="Calibri" pitchFamily="34" charset="0"/>
-                <a:ea typeface="Calibri" pitchFamily="34" charset="-122"/>
-                <a:cs typeface="Calibri" pitchFamily="34" charset="-120"/>
-              </a:rPr>
-              <a:t>links base to root</a:t>
-            </a:r>
-            <a:endParaRPr lang="en-US" sz="700" dirty="0"/>
-          </a:p>
-        </p:txBody>
-      </p:sp>
-      <p:sp>
-        <p:nvSpPr>
-          <p:cNvPr id="23" name="Shape 21"/>
+          <p:cNvPr id="22" name="Shape 20"/>
           <p:cNvSpPr/>
           <p:nvPr/>
         </p:nvSpPr>
@@ -24256,11 +25174,11 @@
             </a:avLst>
           </a:prstGeom>
           <a:solidFill>
-            <a:srgbClr val="CCFBF1"/>
+            <a:srgbClr val="FCE7F3"/>
           </a:solidFill>
           <a:ln w="19050">
             <a:solidFill>
-              <a:srgbClr val="0D9488"/>
+              <a:srgbClr val="DB2777"/>
             </a:solidFill>
             <a:prstDash val="solid"/>
           </a:ln>
@@ -24275,7 +25193,7 @@
       </p:sp>
       <p:sp>
         <p:nvSpPr>
-          <p:cNvPr id="24" name="Text 22"/>
+          <p:cNvPr id="23" name="Text 21"/>
           <p:cNvSpPr/>
           <p:nvPr/>
         </p:nvSpPr>
@@ -24300,13 +25218,13 @@
             <a:r>
               <a:rPr lang="en-US" sz="1300" b="1" dirty="0">
                 <a:solidFill>
-                  <a:srgbClr val="0F766E"/>
+                  <a:srgbClr val="9D174D"/>
                 </a:solidFill>
                 <a:latin typeface="Trebuchet MS" pitchFamily="34" charset="0"/>
                 <a:ea typeface="Trebuchet MS" pitchFamily="34" charset="-122"/>
                 <a:cs typeface="Trebuchet MS" pitchFamily="34" charset="-120"/>
               </a:rPr>
-              <a:t>scope</a:t>
+              <a:t>s</a:t>
             </a:r>
             <a:endParaRPr lang="en-US" sz="1300" dirty="0"/>
           </a:p>
@@ -24314,7 +25232,7 @@
       </p:sp>
       <p:sp>
         <p:nvSpPr>
-          <p:cNvPr id="25" name="Text 23"/>
+          <p:cNvPr id="24" name="Text 22"/>
           <p:cNvSpPr/>
           <p:nvPr/>
         </p:nvSpPr>
@@ -24345,7 +25263,7 @@
                 <a:ea typeface="Calibri" pitchFamily="34" charset="-122"/>
                 <a:cs typeface="Calibri" pitchFamily="34" charset="-120"/>
               </a:rPr>
-              <a:t>to look or observe</a:t>
+              <a:t>plural or present tense</a:t>
             </a:r>
             <a:endParaRPr lang="en-US" sz="850" dirty="0"/>
           </a:p>
@@ -24353,7 +25271,7 @@
       </p:sp>
       <p:sp>
         <p:nvSpPr>
-          <p:cNvPr id="26" name="Shape 24"/>
+          <p:cNvPr id="25" name="Shape 23"/>
           <p:cNvSpPr/>
           <p:nvPr/>
         </p:nvSpPr>
@@ -24380,7 +25298,7 @@
       </p:sp>
       <p:sp>
         <p:nvSpPr>
-          <p:cNvPr id="27" name="Text 25"/>
+          <p:cNvPr id="26" name="Text 24"/>
           <p:cNvSpPr/>
           <p:nvPr/>
         </p:nvSpPr>
@@ -24419,7 +25337,7 @@
       </p:sp>
       <p:sp>
         <p:nvSpPr>
-          <p:cNvPr id="28" name="Shape 26"/>
+          <p:cNvPr id="27" name="Shape 25"/>
           <p:cNvSpPr/>
           <p:nvPr/>
         </p:nvSpPr>
@@ -24446,7 +25364,7 @@
       </p:sp>
       <p:sp>
         <p:nvSpPr>
-          <p:cNvPr id="29" name="Text 27"/>
+          <p:cNvPr id="28" name="Text 26"/>
           <p:cNvSpPr/>
           <p:nvPr/>
         </p:nvSpPr>
@@ -24485,7 +25403,7 @@
       </p:sp>
       <p:sp>
         <p:nvSpPr>
-          <p:cNvPr id="30" name="Shape 28"/>
+          <p:cNvPr id="29" name="Shape 27"/>
           <p:cNvSpPr/>
           <p:nvPr/>
         </p:nvSpPr>
@@ -24512,7 +25430,7 @@
       </p:sp>
       <p:sp>
         <p:nvSpPr>
-          <p:cNvPr id="31" name="Text 29"/>
+          <p:cNvPr id="30" name="Text 28"/>
           <p:cNvSpPr/>
           <p:nvPr/>
         </p:nvSpPr>
@@ -24551,7 +25469,7 @@
       </p:sp>
       <p:sp>
         <p:nvSpPr>
-          <p:cNvPr id="32" name="Shape 30"/>
+          <p:cNvPr id="31" name="Shape 29"/>
           <p:cNvSpPr/>
           <p:nvPr/>
         </p:nvSpPr>
@@ -24578,7 +25496,7 @@
       </p:sp>
       <p:sp>
         <p:nvSpPr>
-          <p:cNvPr id="33" name="Text 31"/>
+          <p:cNvPr id="32" name="Text 30"/>
           <p:cNvSpPr/>
           <p:nvPr/>
         </p:nvSpPr>
@@ -24901,7 +25819,7 @@
                 <a:ea typeface="Calibri" pitchFamily="34" charset="-122"/>
                 <a:cs typeface="Calibri" pitchFamily="34" charset="-120"/>
               </a:rPr>
-              <a:t>Word Labs  •  wordlabs.app  •  Root: 'scope' = to look, see, observe</a:t>
+              <a:t>Word Labs  •  wordlabs.app  •  Root: 'scope' = look; view; examine</a:t>
             </a:r>
             <a:endParaRPr lang="en-US" sz="800" dirty="0"/>
           </a:p>
@@ -24974,7 +25892,7 @@
                 <a:ea typeface="Trebuchet MS" pitchFamily="34" charset="-122"/>
                 <a:cs typeface="Trebuchet MS" pitchFamily="34" charset="-120"/>
               </a:rPr>
-              <a:t>We are learning that the root 'scope' means 'to look, see, observe'.</a:t>
+              <a:t>We are learning that the root 'scope' means 'look; view; examine'.</a:t>
             </a:r>
             <a:endParaRPr lang="en-US" sz="2000" dirty="0"/>
           </a:p>
@@ -25620,7 +26538,7 @@
                 <a:ea typeface="Calibri" pitchFamily="34" charset="-122"/>
                 <a:cs typeface="Calibri" pitchFamily="34" charset="-120"/>
               </a:rPr>
-              <a:t>Word Labs  •  wordlabs.app  •  Root: 'scope' = to look, see, observe</a:t>
+              <a:t>Word Labs  •  wordlabs.app  •  Root: 'scope' = look; view; examine</a:t>
             </a:r>
             <a:endParaRPr lang="en-US" sz="800" dirty="0"/>
           </a:p>
@@ -25759,7 +26677,7 @@
                 <a:ea typeface="Trebuchet MS" pitchFamily="34" charset="-122"/>
                 <a:cs typeface="Trebuchet MS" pitchFamily="34" charset="-120"/>
               </a:rPr>
-              <a:t>kaleidoscope</a:t>
+              <a:t>stethoscopes</a:t>
             </a:r>
             <a:endParaRPr lang="en-US" sz="2800" dirty="0"/>
           </a:p>
@@ -25898,7 +26816,7 @@
                 <a:ea typeface="Trebuchet MS" pitchFamily="34" charset="-122"/>
                 <a:cs typeface="Trebuchet MS" pitchFamily="34" charset="-120"/>
               </a:rPr>
-              <a:t>kaleid</a:t>
+              <a:t>stetho</a:t>
             </a:r>
             <a:endParaRPr lang="en-US" sz="1300" dirty="0"/>
           </a:p>
@@ -25937,7 +26855,7 @@
                 <a:ea typeface="Calibri" pitchFamily="34" charset="-122"/>
                 <a:cs typeface="Calibri" pitchFamily="34" charset="-120"/>
               </a:rPr>
-              <a:t>beautiful form</a:t>
+              <a:t>chest</a:t>
             </a:r>
             <a:endParaRPr lang="en-US" sz="850" dirty="0"/>
           </a:p>
@@ -25960,11 +26878,11 @@
             </a:avLst>
           </a:prstGeom>
           <a:solidFill>
-            <a:srgbClr val="FCE7F3"/>
+            <a:srgbClr val="CCFBF1"/>
           </a:solidFill>
           <a:ln w="19050">
             <a:solidFill>
-              <a:srgbClr val="DB2777"/>
+              <a:srgbClr val="0D9488"/>
             </a:solidFill>
             <a:prstDash val="solid"/>
           </a:ln>
@@ -26004,13 +26922,13 @@
             <a:r>
               <a:rPr lang="en-US" sz="1300" b="1" dirty="0">
                 <a:solidFill>
-                  <a:srgbClr val="9D174D"/>
+                  <a:srgbClr val="0F766E"/>
                 </a:solidFill>
                 <a:latin typeface="Trebuchet MS" pitchFamily="34" charset="0"/>
                 <a:ea typeface="Trebuchet MS" pitchFamily="34" charset="-122"/>
                 <a:cs typeface="Trebuchet MS" pitchFamily="34" charset="-120"/>
               </a:rPr>
-              <a:t>o</a:t>
+              <a:t>scope</a:t>
             </a:r>
             <a:endParaRPr lang="en-US" sz="1300" dirty="0"/>
           </a:p>
@@ -26049,7 +26967,7 @@
                 <a:ea typeface="Calibri" pitchFamily="34" charset="-122"/>
                 <a:cs typeface="Calibri" pitchFamily="34" charset="-120"/>
               </a:rPr>
-              <a:t>connecting vowel</a:t>
+              <a:t>look; view; examine</a:t>
             </a:r>
             <a:endParaRPr lang="en-US" sz="850" dirty="0"/>
           </a:p>
@@ -26057,46 +26975,7 @@
       </p:sp>
       <p:sp>
         <p:nvSpPr>
-          <p:cNvPr id="22" name="Text 20"/>
-          <p:cNvSpPr/>
-          <p:nvPr/>
-        </p:nvSpPr>
-        <p:spPr>
-          <a:xfrm>
-            <a:off x="4370832" y="2752344"/>
-            <a:ext cx="1828800" cy="182880"/>
-          </a:xfrm>
-          <a:prstGeom prst="rect">
-            <a:avLst/>
-          </a:prstGeom>
-          <a:noFill/>
-          <a:ln/>
-        </p:spPr>
-        <p:txBody>
-          <a:bodyPr wrap="square" lIns="0" tIns="0" rIns="0" bIns="0" rtlCol="0" anchor="t"/>
-          <a:lstStyle/>
-          <a:p>
-            <a:pPr algn="ctr" indent="0" marL="0">
-              <a:buNone/>
-            </a:pPr>
-            <a:r>
-              <a:rPr lang="en-US" sz="700" i="1" dirty="0">
-                <a:solidFill>
-                  <a:srgbClr val="94A3B8"/>
-                </a:solidFill>
-                <a:latin typeface="Calibri" pitchFamily="34" charset="0"/>
-                <a:ea typeface="Calibri" pitchFamily="34" charset="-122"/>
-                <a:cs typeface="Calibri" pitchFamily="34" charset="-120"/>
-              </a:rPr>
-              <a:t>links base to root</a:t>
-            </a:r>
-            <a:endParaRPr lang="en-US" sz="700" dirty="0"/>
-          </a:p>
-        </p:txBody>
-      </p:sp>
-      <p:sp>
-        <p:nvSpPr>
-          <p:cNvPr id="23" name="Shape 21"/>
+          <p:cNvPr id="22" name="Shape 20"/>
           <p:cNvSpPr/>
           <p:nvPr/>
         </p:nvSpPr>
@@ -26111,11 +26990,11 @@
             </a:avLst>
           </a:prstGeom>
           <a:solidFill>
-            <a:srgbClr val="CCFBF1"/>
+            <a:srgbClr val="FCE7F3"/>
           </a:solidFill>
           <a:ln w="19050">
             <a:solidFill>
-              <a:srgbClr val="0D9488"/>
+              <a:srgbClr val="DB2777"/>
             </a:solidFill>
             <a:prstDash val="solid"/>
           </a:ln>
@@ -26130,7 +27009,7 @@
       </p:sp>
       <p:sp>
         <p:nvSpPr>
-          <p:cNvPr id="24" name="Text 22"/>
+          <p:cNvPr id="23" name="Text 21"/>
           <p:cNvSpPr/>
           <p:nvPr/>
         </p:nvSpPr>
@@ -26155,13 +27034,13 @@
             <a:r>
               <a:rPr lang="en-US" sz="1300" b="1" dirty="0">
                 <a:solidFill>
-                  <a:srgbClr val="0F766E"/>
+                  <a:srgbClr val="9D174D"/>
                 </a:solidFill>
                 <a:latin typeface="Trebuchet MS" pitchFamily="34" charset="0"/>
                 <a:ea typeface="Trebuchet MS" pitchFamily="34" charset="-122"/>
                 <a:cs typeface="Trebuchet MS" pitchFamily="34" charset="-120"/>
               </a:rPr>
-              <a:t>scope</a:t>
+              <a:t>s</a:t>
             </a:r>
             <a:endParaRPr lang="en-US" sz="1300" dirty="0"/>
           </a:p>
@@ -26169,7 +27048,7 @@
       </p:sp>
       <p:sp>
         <p:nvSpPr>
-          <p:cNvPr id="25" name="Text 23"/>
+          <p:cNvPr id="24" name="Text 22"/>
           <p:cNvSpPr/>
           <p:nvPr/>
         </p:nvSpPr>
@@ -26200,7 +27079,7 @@
                 <a:ea typeface="Calibri" pitchFamily="34" charset="-122"/>
                 <a:cs typeface="Calibri" pitchFamily="34" charset="-120"/>
               </a:rPr>
-              <a:t>to look or observe</a:t>
+              <a:t>plural or present tense</a:t>
             </a:r>
             <a:endParaRPr lang="en-US" sz="850" dirty="0"/>
           </a:p>
@@ -26208,7 +27087,7 @@
       </p:sp>
       <p:sp>
         <p:nvSpPr>
-          <p:cNvPr id="26" name="Shape 24"/>
+          <p:cNvPr id="25" name="Shape 23"/>
           <p:cNvSpPr/>
           <p:nvPr/>
         </p:nvSpPr>
@@ -26235,7 +27114,7 @@
       </p:sp>
       <p:sp>
         <p:nvSpPr>
-          <p:cNvPr id="27" name="Text 25"/>
+          <p:cNvPr id="26" name="Text 24"/>
           <p:cNvSpPr/>
           <p:nvPr/>
         </p:nvSpPr>
@@ -26274,7 +27153,7 @@
       </p:sp>
       <p:sp>
         <p:nvSpPr>
-          <p:cNvPr id="28" name="Shape 26"/>
+          <p:cNvPr id="27" name="Shape 25"/>
           <p:cNvSpPr/>
           <p:nvPr/>
         </p:nvSpPr>
@@ -26301,14 +27180,14 @@
       </p:sp>
       <p:sp>
         <p:nvSpPr>
-          <p:cNvPr id="29" name="Shape 27"/>
-          <p:cNvSpPr/>
-          <p:nvPr/>
-        </p:nvSpPr>
-        <p:spPr>
-          <a:xfrm>
-            <a:off x="1975104" y="3364992"/>
-            <a:ext cx="1554480" cy="475488"/>
+          <p:cNvPr id="28" name="Shape 26"/>
+          <p:cNvSpPr/>
+          <p:nvPr/>
+        </p:nvSpPr>
+        <p:spPr>
+          <a:xfrm>
+            <a:off x="2313432" y="3364992"/>
+            <a:ext cx="1645920" cy="475488"/>
           </a:xfrm>
           <a:prstGeom prst="rect">
             <a:avLst>
@@ -26328,14 +27207,14 @@
       </p:sp>
       <p:sp>
         <p:nvSpPr>
-          <p:cNvPr id="30" name="Text 28"/>
-          <p:cNvSpPr/>
-          <p:nvPr/>
-        </p:nvSpPr>
-        <p:spPr>
-          <a:xfrm>
-            <a:off x="1975104" y="3364992"/>
-            <a:ext cx="1554480" cy="475488"/>
+          <p:cNvPr id="29" name="Text 27"/>
+          <p:cNvSpPr/>
+          <p:nvPr/>
+        </p:nvSpPr>
+        <p:spPr>
+          <a:xfrm>
+            <a:off x="2313432" y="3364992"/>
+            <a:ext cx="1645920" cy="475488"/>
           </a:xfrm>
           <a:prstGeom prst="rect">
             <a:avLst/>
@@ -26359,7 +27238,7 @@
                 <a:ea typeface="Trebuchet MS" pitchFamily="34" charset="-122"/>
                 <a:cs typeface="Trebuchet MS" pitchFamily="34" charset="-120"/>
               </a:rPr>
-              <a:t>ka</a:t>
+              <a:t>steth</a:t>
             </a:r>
             <a:endParaRPr lang="en-US" sz="1400" dirty="0"/>
           </a:p>
@@ -26367,14 +27246,14 @@
       </p:sp>
       <p:sp>
         <p:nvSpPr>
-          <p:cNvPr id="31" name="Text 29"/>
-          <p:cNvSpPr/>
-          <p:nvPr/>
-        </p:nvSpPr>
-        <p:spPr>
-          <a:xfrm>
-            <a:off x="3529584" y="3364992"/>
-            <a:ext cx="73152" cy="475488"/>
+          <p:cNvPr id="30" name="Text 28"/>
+          <p:cNvSpPr/>
+          <p:nvPr/>
+        </p:nvSpPr>
+        <p:spPr>
+          <a:xfrm>
+            <a:off x="3959352" y="3364992"/>
+            <a:ext cx="411480" cy="475488"/>
           </a:xfrm>
           <a:prstGeom prst="rect">
             <a:avLst/>
@@ -26406,14 +27285,14 @@
       </p:sp>
       <p:sp>
         <p:nvSpPr>
-          <p:cNvPr id="32" name="Shape 30"/>
-          <p:cNvSpPr/>
-          <p:nvPr/>
-        </p:nvSpPr>
-        <p:spPr>
-          <a:xfrm>
-            <a:off x="3602736" y="3364992"/>
-            <a:ext cx="1554480" cy="475488"/>
+          <p:cNvPr id="31" name="Shape 29"/>
+          <p:cNvSpPr/>
+          <p:nvPr/>
+        </p:nvSpPr>
+        <p:spPr>
+          <a:xfrm>
+            <a:off x="4370832" y="3364992"/>
+            <a:ext cx="1645920" cy="475488"/>
           </a:xfrm>
           <a:prstGeom prst="rect">
             <a:avLst>
@@ -26433,14 +27312,14 @@
       </p:sp>
       <p:sp>
         <p:nvSpPr>
-          <p:cNvPr id="33" name="Text 31"/>
-          <p:cNvSpPr/>
-          <p:nvPr/>
-        </p:nvSpPr>
-        <p:spPr>
-          <a:xfrm>
-            <a:off x="3602736" y="3364992"/>
-            <a:ext cx="1554480" cy="475488"/>
+          <p:cNvPr id="32" name="Text 30"/>
+          <p:cNvSpPr/>
+          <p:nvPr/>
+        </p:nvSpPr>
+        <p:spPr>
+          <a:xfrm>
+            <a:off x="4370832" y="3364992"/>
+            <a:ext cx="1645920" cy="475488"/>
           </a:xfrm>
           <a:prstGeom prst="rect">
             <a:avLst/>
@@ -26464,7 +27343,7 @@
                 <a:ea typeface="Trebuchet MS" pitchFamily="34" charset="-122"/>
                 <a:cs typeface="Trebuchet MS" pitchFamily="34" charset="-120"/>
               </a:rPr>
-              <a:t>lei</a:t>
+              <a:t>o</a:t>
             </a:r>
             <a:endParaRPr lang="en-US" sz="1400" dirty="0"/>
           </a:p>
@@ -26472,14 +27351,14 @@
       </p:sp>
       <p:sp>
         <p:nvSpPr>
-          <p:cNvPr id="34" name="Text 32"/>
-          <p:cNvSpPr/>
-          <p:nvPr/>
-        </p:nvSpPr>
-        <p:spPr>
-          <a:xfrm>
-            <a:off x="5157216" y="3364992"/>
-            <a:ext cx="73152" cy="475488"/>
+          <p:cNvPr id="33" name="Text 31"/>
+          <p:cNvSpPr/>
+          <p:nvPr/>
+        </p:nvSpPr>
+        <p:spPr>
+          <a:xfrm>
+            <a:off x="6016752" y="3364992"/>
+            <a:ext cx="411480" cy="475488"/>
           </a:xfrm>
           <a:prstGeom prst="rect">
             <a:avLst/>
@@ -26511,14 +27390,14 @@
       </p:sp>
       <p:sp>
         <p:nvSpPr>
-          <p:cNvPr id="35" name="Shape 33"/>
-          <p:cNvSpPr/>
-          <p:nvPr/>
-        </p:nvSpPr>
-        <p:spPr>
-          <a:xfrm>
-            <a:off x="5230368" y="3364992"/>
-            <a:ext cx="1554480" cy="475488"/>
+          <p:cNvPr id="34" name="Shape 32"/>
+          <p:cNvSpPr/>
+          <p:nvPr/>
+        </p:nvSpPr>
+        <p:spPr>
+          <a:xfrm>
+            <a:off x="6428232" y="3364992"/>
+            <a:ext cx="1645920" cy="475488"/>
           </a:xfrm>
           <a:prstGeom prst="rect">
             <a:avLst>
@@ -26538,14 +27417,14 @@
       </p:sp>
       <p:sp>
         <p:nvSpPr>
-          <p:cNvPr id="36" name="Text 34"/>
-          <p:cNvSpPr/>
-          <p:nvPr/>
-        </p:nvSpPr>
-        <p:spPr>
-          <a:xfrm>
-            <a:off x="5230368" y="3364992"/>
-            <a:ext cx="1554480" cy="475488"/>
+          <p:cNvPr id="35" name="Text 33"/>
+          <p:cNvSpPr/>
+          <p:nvPr/>
+        </p:nvSpPr>
+        <p:spPr>
+          <a:xfrm>
+            <a:off x="6428232" y="3364992"/>
+            <a:ext cx="1645920" cy="475488"/>
           </a:xfrm>
           <a:prstGeom prst="rect">
             <a:avLst/>
@@ -26569,7 +27448,7 @@
                 <a:ea typeface="Trebuchet MS" pitchFamily="34" charset="-122"/>
                 <a:cs typeface="Trebuchet MS" pitchFamily="34" charset="-120"/>
               </a:rPr>
-              <a:t>do</a:t>
+              <a:t>scopes</a:t>
             </a:r>
             <a:endParaRPr lang="en-US" sz="1400" dirty="0"/>
           </a:p>
@@ -26577,40 +27456,67 @@
       </p:sp>
       <p:sp>
         <p:nvSpPr>
+          <p:cNvPr id="36" name="Shape 34"/>
+          <p:cNvSpPr/>
+          <p:nvPr/>
+        </p:nvSpPr>
+        <p:spPr>
+          <a:xfrm>
+            <a:off x="365760" y="4096512"/>
+            <a:ext cx="1371600" cy="804672"/>
+          </a:xfrm>
+          <a:prstGeom prst="rect">
+            <a:avLst>
+              <a:gd name="adj" fmla="val 6818"/>
+            </a:avLst>
+          </a:prstGeom>
+          <a:solidFill>
+            <a:srgbClr val="E2E8F0"/>
+          </a:solidFill>
+          <a:ln w="12700">
+            <a:solidFill>
+              <a:srgbClr val="E2E8F0"/>
+            </a:solidFill>
+            <a:prstDash val="solid"/>
+          </a:ln>
+        </p:spPr>
+      </p:sp>
+      <p:sp>
+        <p:nvSpPr>
           <p:cNvPr id="37" name="Text 35"/>
           <p:cNvSpPr/>
           <p:nvPr/>
         </p:nvSpPr>
         <p:spPr>
           <a:xfrm>
-            <a:off x="6784848" y="3364992"/>
-            <a:ext cx="73152" cy="475488"/>
-          </a:xfrm>
-          <a:prstGeom prst="rect">
-            <a:avLst/>
-          </a:prstGeom>
-          <a:noFill/>
-          <a:ln/>
-        </p:spPr>
-        <p:txBody>
-          <a:bodyPr wrap="square" lIns="0" tIns="0" rIns="0" bIns="0" rtlCol="0" anchor="ctr"/>
-          <a:lstStyle/>
-          <a:p>
-            <a:pPr algn="ctr" indent="0" marL="0">
-              <a:buNone/>
-            </a:pPr>
-            <a:r>
-              <a:rPr lang="en-US" sz="1600" b="1" dirty="0">
-                <a:solidFill>
-                  <a:srgbClr val="0D9488"/>
+            <a:off x="365760" y="4096512"/>
+            <a:ext cx="1371600" cy="804672"/>
+          </a:xfrm>
+          <a:prstGeom prst="rect">
+            <a:avLst/>
+          </a:prstGeom>
+          <a:noFill/>
+          <a:ln/>
+        </p:spPr>
+        <p:txBody>
+          <a:bodyPr wrap="square" lIns="0" tIns="0" rIns="0" bIns="0" rtlCol="0" anchor="ctr"/>
+          <a:lstStyle/>
+          <a:p>
+            <a:pPr algn="ctr" indent="0" marL="0">
+              <a:buNone/>
+            </a:pPr>
+            <a:r>
+              <a:rPr lang="en-US" sz="1100" b="1" dirty="0">
+                <a:solidFill>
+                  <a:srgbClr val="475569"/>
                 </a:solidFill>
                 <a:latin typeface="Trebuchet MS" pitchFamily="34" charset="0"/>
                 <a:ea typeface="Trebuchet MS" pitchFamily="34" charset="-122"/>
                 <a:cs typeface="Trebuchet MS" pitchFamily="34" charset="-120"/>
               </a:rPr>
-              <a:t>·</a:t>
-            </a:r>
-            <a:endParaRPr lang="en-US" sz="1600" dirty="0"/>
+              <a:t>Phonemes</a:t>
+            </a:r>
+            <a:endParaRPr lang="en-US" sz="1100" dirty="0"/>
           </a:p>
         </p:txBody>
       </p:sp>
@@ -26622,74 +27528,8 @@
         </p:nvSpPr>
         <p:spPr>
           <a:xfrm>
-            <a:off x="6858000" y="3364992"/>
-            <a:ext cx="1554480" cy="475488"/>
-          </a:xfrm>
-          <a:prstGeom prst="rect">
-            <a:avLst>
-              <a:gd name="adj" fmla="val 9615"/>
-            </a:avLst>
-          </a:prstGeom>
-          <a:solidFill>
-            <a:srgbClr val="FFFFFF"/>
-          </a:solidFill>
-          <a:ln w="12700">
-            <a:solidFill>
-              <a:srgbClr val="0D9488"/>
-            </a:solidFill>
-            <a:prstDash val="solid"/>
-          </a:ln>
-        </p:spPr>
-      </p:sp>
-      <p:sp>
-        <p:nvSpPr>
-          <p:cNvPr id="39" name="Text 37"/>
-          <p:cNvSpPr/>
-          <p:nvPr/>
-        </p:nvSpPr>
-        <p:spPr>
-          <a:xfrm>
-            <a:off x="6858000" y="3364992"/>
-            <a:ext cx="1554480" cy="475488"/>
-          </a:xfrm>
-          <a:prstGeom prst="rect">
-            <a:avLst/>
-          </a:prstGeom>
-          <a:noFill/>
-          <a:ln/>
-        </p:spPr>
-        <p:txBody>
-          <a:bodyPr wrap="square" lIns="0" tIns="0" rIns="0" bIns="0" rtlCol="0" anchor="ctr"/>
-          <a:lstStyle/>
-          <a:p>
-            <a:pPr algn="ctr" indent="0" marL="0">
-              <a:buNone/>
-            </a:pPr>
-            <a:r>
-              <a:rPr lang="en-US" sz="1400" b="1" dirty="0">
-                <a:solidFill>
-                  <a:srgbClr val="0D9488"/>
-                </a:solidFill>
-                <a:latin typeface="Trebuchet MS" pitchFamily="34" charset="0"/>
-                <a:ea typeface="Trebuchet MS" pitchFamily="34" charset="-122"/>
-                <a:cs typeface="Trebuchet MS" pitchFamily="34" charset="-120"/>
-              </a:rPr>
-              <a:t>scope</a:t>
-            </a:r>
-            <a:endParaRPr lang="en-US" sz="1400" dirty="0"/>
-          </a:p>
-        </p:txBody>
-      </p:sp>
-      <p:sp>
-        <p:nvSpPr>
-          <p:cNvPr id="40" name="Shape 38"/>
-          <p:cNvSpPr/>
-          <p:nvPr/>
-        </p:nvSpPr>
-        <p:spPr>
-          <a:xfrm>
-            <a:off x="365760" y="4096512"/>
-            <a:ext cx="1371600" cy="804672"/>
+            <a:off x="1874520" y="4096512"/>
+            <a:ext cx="6903720" cy="804672"/>
           </a:xfrm>
           <a:prstGeom prst="rect">
             <a:avLst>
@@ -26697,85 +27537,19 @@
             </a:avLst>
           </a:prstGeom>
           <a:solidFill>
-            <a:srgbClr val="E2E8F0"/>
+            <a:srgbClr val="F8FAFC"/>
           </a:solidFill>
           <a:ln w="12700">
             <a:solidFill>
               <a:srgbClr val="E2E8F0"/>
             </a:solidFill>
-            <a:prstDash val="solid"/>
-          </a:ln>
-        </p:spPr>
-      </p:sp>
-      <p:sp>
-        <p:nvSpPr>
-          <p:cNvPr id="41" name="Text 39"/>
-          <p:cNvSpPr/>
-          <p:nvPr/>
-        </p:nvSpPr>
-        <p:spPr>
-          <a:xfrm>
-            <a:off x="365760" y="4096512"/>
-            <a:ext cx="1371600" cy="804672"/>
-          </a:xfrm>
-          <a:prstGeom prst="rect">
-            <a:avLst/>
-          </a:prstGeom>
-          <a:noFill/>
-          <a:ln/>
-        </p:spPr>
-        <p:txBody>
-          <a:bodyPr wrap="square" lIns="0" tIns="0" rIns="0" bIns="0" rtlCol="0" anchor="ctr"/>
-          <a:lstStyle/>
-          <a:p>
-            <a:pPr algn="ctr" indent="0" marL="0">
-              <a:buNone/>
-            </a:pPr>
-            <a:r>
-              <a:rPr lang="en-US" sz="1100" b="1" dirty="0">
-                <a:solidFill>
-                  <a:srgbClr val="475569"/>
-                </a:solidFill>
-                <a:latin typeface="Trebuchet MS" pitchFamily="34" charset="0"/>
-                <a:ea typeface="Trebuchet MS" pitchFamily="34" charset="-122"/>
-                <a:cs typeface="Trebuchet MS" pitchFamily="34" charset="-120"/>
-              </a:rPr>
-              <a:t>Phonemes</a:t>
-            </a:r>
-            <a:endParaRPr lang="en-US" sz="1100" dirty="0"/>
-          </a:p>
-        </p:txBody>
-      </p:sp>
-      <p:sp>
-        <p:nvSpPr>
-          <p:cNvPr id="42" name="Shape 40"/>
-          <p:cNvSpPr/>
-          <p:nvPr/>
-        </p:nvSpPr>
-        <p:spPr>
-          <a:xfrm>
-            <a:off x="1874520" y="4096512"/>
-            <a:ext cx="6903720" cy="804672"/>
-          </a:xfrm>
-          <a:prstGeom prst="rect">
-            <a:avLst>
-              <a:gd name="adj" fmla="val 6818"/>
-            </a:avLst>
-          </a:prstGeom>
-          <a:solidFill>
-            <a:srgbClr val="F8FAFC"/>
-          </a:solidFill>
-          <a:ln w="12700">
-            <a:solidFill>
-              <a:srgbClr val="E2E8F0"/>
-            </a:solidFill>
             <a:prstDash val="dash"/>
           </a:ln>
         </p:spPr>
       </p:sp>
       <p:sp>
         <p:nvSpPr>
-          <p:cNvPr id="43" name="Text 41"/>
+          <p:cNvPr id="39" name="Text 37"/>
           <p:cNvSpPr/>
           <p:nvPr/>
         </p:nvSpPr>
@@ -27098,7 +27872,7 @@
                 <a:ea typeface="Calibri" pitchFamily="34" charset="-122"/>
                 <a:cs typeface="Calibri" pitchFamily="34" charset="-120"/>
               </a:rPr>
-              <a:t>Word Labs  •  wordlabs.app  •  Root: 'scope' = to look, see, observe</a:t>
+              <a:t>Word Labs  •  wordlabs.app  •  Root: 'scope' = look; view; examine</a:t>
             </a:r>
             <a:endParaRPr lang="en-US" sz="800" dirty="0"/>
           </a:p>
@@ -27237,7 +28011,7 @@
                 <a:ea typeface="Trebuchet MS" pitchFamily="34" charset="-122"/>
                 <a:cs typeface="Trebuchet MS" pitchFamily="34" charset="-120"/>
               </a:rPr>
-              <a:t>kaleidoscope</a:t>
+              <a:t>stethoscopes</a:t>
             </a:r>
             <a:endParaRPr lang="en-US" sz="2800" dirty="0"/>
           </a:p>
@@ -27376,7 +28150,7 @@
                 <a:ea typeface="Trebuchet MS" pitchFamily="34" charset="-122"/>
                 <a:cs typeface="Trebuchet MS" pitchFamily="34" charset="-120"/>
               </a:rPr>
-              <a:t>kaleid</a:t>
+              <a:t>stetho</a:t>
             </a:r>
             <a:endParaRPr lang="en-US" sz="1300" dirty="0"/>
           </a:p>
@@ -27415,7 +28189,7 @@
                 <a:ea typeface="Calibri" pitchFamily="34" charset="-122"/>
                 <a:cs typeface="Calibri" pitchFamily="34" charset="-120"/>
               </a:rPr>
-              <a:t>beautiful form</a:t>
+              <a:t>chest</a:t>
             </a:r>
             <a:endParaRPr lang="en-US" sz="850" dirty="0"/>
           </a:p>
@@ -27438,11 +28212,11 @@
             </a:avLst>
           </a:prstGeom>
           <a:solidFill>
-            <a:srgbClr val="FCE7F3"/>
+            <a:srgbClr val="CCFBF1"/>
           </a:solidFill>
           <a:ln w="19050">
             <a:solidFill>
-              <a:srgbClr val="DB2777"/>
+              <a:srgbClr val="0D9488"/>
             </a:solidFill>
             <a:prstDash val="solid"/>
           </a:ln>
@@ -27482,13 +28256,13 @@
             <a:r>
               <a:rPr lang="en-US" sz="1300" b="1" dirty="0">
                 <a:solidFill>
-                  <a:srgbClr val="9D174D"/>
+                  <a:srgbClr val="0F766E"/>
                 </a:solidFill>
                 <a:latin typeface="Trebuchet MS" pitchFamily="34" charset="0"/>
                 <a:ea typeface="Trebuchet MS" pitchFamily="34" charset="-122"/>
                 <a:cs typeface="Trebuchet MS" pitchFamily="34" charset="-120"/>
               </a:rPr>
-              <a:t>o</a:t>
+              <a:t>scope</a:t>
             </a:r>
             <a:endParaRPr lang="en-US" sz="1300" dirty="0"/>
           </a:p>
@@ -27527,7 +28301,7 @@
                 <a:ea typeface="Calibri" pitchFamily="34" charset="-122"/>
                 <a:cs typeface="Calibri" pitchFamily="34" charset="-120"/>
               </a:rPr>
-              <a:t>connecting vowel</a:t>
+              <a:t>look; view; examine</a:t>
             </a:r>
             <a:endParaRPr lang="en-US" sz="850" dirty="0"/>
           </a:p>
@@ -27535,46 +28309,7 @@
       </p:sp>
       <p:sp>
         <p:nvSpPr>
-          <p:cNvPr id="22" name="Text 20"/>
-          <p:cNvSpPr/>
-          <p:nvPr/>
-        </p:nvSpPr>
-        <p:spPr>
-          <a:xfrm>
-            <a:off x="4370832" y="2752344"/>
-            <a:ext cx="1828800" cy="182880"/>
-          </a:xfrm>
-          <a:prstGeom prst="rect">
-            <a:avLst/>
-          </a:prstGeom>
-          <a:noFill/>
-          <a:ln/>
-        </p:spPr>
-        <p:txBody>
-          <a:bodyPr wrap="square" lIns="0" tIns="0" rIns="0" bIns="0" rtlCol="0" anchor="t"/>
-          <a:lstStyle/>
-          <a:p>
-            <a:pPr algn="ctr" indent="0" marL="0">
-              <a:buNone/>
-            </a:pPr>
-            <a:r>
-              <a:rPr lang="en-US" sz="700" i="1" dirty="0">
-                <a:solidFill>
-                  <a:srgbClr val="94A3B8"/>
-                </a:solidFill>
-                <a:latin typeface="Calibri" pitchFamily="34" charset="0"/>
-                <a:ea typeface="Calibri" pitchFamily="34" charset="-122"/>
-                <a:cs typeface="Calibri" pitchFamily="34" charset="-120"/>
-              </a:rPr>
-              <a:t>links base to root</a:t>
-            </a:r>
-            <a:endParaRPr lang="en-US" sz="700" dirty="0"/>
-          </a:p>
-        </p:txBody>
-      </p:sp>
-      <p:sp>
-        <p:nvSpPr>
-          <p:cNvPr id="23" name="Shape 21"/>
+          <p:cNvPr id="22" name="Shape 20"/>
           <p:cNvSpPr/>
           <p:nvPr/>
         </p:nvSpPr>
@@ -27589,11 +28324,11 @@
             </a:avLst>
           </a:prstGeom>
           <a:solidFill>
-            <a:srgbClr val="CCFBF1"/>
+            <a:srgbClr val="FCE7F3"/>
           </a:solidFill>
           <a:ln w="19050">
             <a:solidFill>
-              <a:srgbClr val="0D9488"/>
+              <a:srgbClr val="DB2777"/>
             </a:solidFill>
             <a:prstDash val="solid"/>
           </a:ln>
@@ -27608,7 +28343,7 @@
       </p:sp>
       <p:sp>
         <p:nvSpPr>
-          <p:cNvPr id="24" name="Text 22"/>
+          <p:cNvPr id="23" name="Text 21"/>
           <p:cNvSpPr/>
           <p:nvPr/>
         </p:nvSpPr>
@@ -27633,13 +28368,13 @@
             <a:r>
               <a:rPr lang="en-US" sz="1300" b="1" dirty="0">
                 <a:solidFill>
-                  <a:srgbClr val="0F766E"/>
+                  <a:srgbClr val="9D174D"/>
                 </a:solidFill>
                 <a:latin typeface="Trebuchet MS" pitchFamily="34" charset="0"/>
                 <a:ea typeface="Trebuchet MS" pitchFamily="34" charset="-122"/>
                 <a:cs typeface="Trebuchet MS" pitchFamily="34" charset="-120"/>
               </a:rPr>
-              <a:t>scope</a:t>
+              <a:t>s</a:t>
             </a:r>
             <a:endParaRPr lang="en-US" sz="1300" dirty="0"/>
           </a:p>
@@ -27647,7 +28382,7 @@
       </p:sp>
       <p:sp>
         <p:nvSpPr>
-          <p:cNvPr id="25" name="Text 23"/>
+          <p:cNvPr id="24" name="Text 22"/>
           <p:cNvSpPr/>
           <p:nvPr/>
         </p:nvSpPr>
@@ -27678,7 +28413,7 @@
                 <a:ea typeface="Calibri" pitchFamily="34" charset="-122"/>
                 <a:cs typeface="Calibri" pitchFamily="34" charset="-120"/>
               </a:rPr>
-              <a:t>to look or observe</a:t>
+              <a:t>plural or present tense</a:t>
             </a:r>
             <a:endParaRPr lang="en-US" sz="850" dirty="0"/>
           </a:p>
@@ -27686,7 +28421,7 @@
       </p:sp>
       <p:sp>
         <p:nvSpPr>
-          <p:cNvPr id="26" name="Shape 24"/>
+          <p:cNvPr id="25" name="Shape 23"/>
           <p:cNvSpPr/>
           <p:nvPr/>
         </p:nvSpPr>
@@ -27713,7 +28448,7 @@
       </p:sp>
       <p:sp>
         <p:nvSpPr>
-          <p:cNvPr id="27" name="Text 25"/>
+          <p:cNvPr id="26" name="Text 24"/>
           <p:cNvSpPr/>
           <p:nvPr/>
         </p:nvSpPr>
@@ -27752,7 +28487,7 @@
       </p:sp>
       <p:sp>
         <p:nvSpPr>
-          <p:cNvPr id="28" name="Shape 26"/>
+          <p:cNvPr id="27" name="Shape 25"/>
           <p:cNvSpPr/>
           <p:nvPr/>
         </p:nvSpPr>
@@ -27779,14 +28514,14 @@
       </p:sp>
       <p:sp>
         <p:nvSpPr>
-          <p:cNvPr id="29" name="Shape 27"/>
-          <p:cNvSpPr/>
-          <p:nvPr/>
-        </p:nvSpPr>
-        <p:spPr>
-          <a:xfrm>
-            <a:off x="1975104" y="3364992"/>
-            <a:ext cx="1554480" cy="475488"/>
+          <p:cNvPr id="28" name="Shape 26"/>
+          <p:cNvSpPr/>
+          <p:nvPr/>
+        </p:nvSpPr>
+        <p:spPr>
+          <a:xfrm>
+            <a:off x="2313432" y="3364992"/>
+            <a:ext cx="1645920" cy="475488"/>
           </a:xfrm>
           <a:prstGeom prst="rect">
             <a:avLst>
@@ -27806,14 +28541,14 @@
       </p:sp>
       <p:sp>
         <p:nvSpPr>
-          <p:cNvPr id="30" name="Text 28"/>
-          <p:cNvSpPr/>
-          <p:nvPr/>
-        </p:nvSpPr>
-        <p:spPr>
-          <a:xfrm>
-            <a:off x="1975104" y="3364992"/>
-            <a:ext cx="1554480" cy="475488"/>
+          <p:cNvPr id="29" name="Text 27"/>
+          <p:cNvSpPr/>
+          <p:nvPr/>
+        </p:nvSpPr>
+        <p:spPr>
+          <a:xfrm>
+            <a:off x="2313432" y="3364992"/>
+            <a:ext cx="1645920" cy="475488"/>
           </a:xfrm>
           <a:prstGeom prst="rect">
             <a:avLst/>
@@ -27837,7 +28572,7 @@
                 <a:ea typeface="Trebuchet MS" pitchFamily="34" charset="-122"/>
                 <a:cs typeface="Trebuchet MS" pitchFamily="34" charset="-120"/>
               </a:rPr>
-              <a:t>ka</a:t>
+              <a:t>steth</a:t>
             </a:r>
             <a:endParaRPr lang="en-US" sz="1400" dirty="0"/>
           </a:p>
@@ -27845,14 +28580,14 @@
       </p:sp>
       <p:sp>
         <p:nvSpPr>
-          <p:cNvPr id="31" name="Text 29"/>
-          <p:cNvSpPr/>
-          <p:nvPr/>
-        </p:nvSpPr>
-        <p:spPr>
-          <a:xfrm>
-            <a:off x="3529584" y="3364992"/>
-            <a:ext cx="73152" cy="475488"/>
+          <p:cNvPr id="30" name="Text 28"/>
+          <p:cNvSpPr/>
+          <p:nvPr/>
+        </p:nvSpPr>
+        <p:spPr>
+          <a:xfrm>
+            <a:off x="3959352" y="3364992"/>
+            <a:ext cx="411480" cy="475488"/>
           </a:xfrm>
           <a:prstGeom prst="rect">
             <a:avLst/>
@@ -27884,14 +28619,14 @@
       </p:sp>
       <p:sp>
         <p:nvSpPr>
-          <p:cNvPr id="32" name="Shape 30"/>
-          <p:cNvSpPr/>
-          <p:nvPr/>
-        </p:nvSpPr>
-        <p:spPr>
-          <a:xfrm>
-            <a:off x="3602736" y="3364992"/>
-            <a:ext cx="1554480" cy="475488"/>
+          <p:cNvPr id="31" name="Shape 29"/>
+          <p:cNvSpPr/>
+          <p:nvPr/>
+        </p:nvSpPr>
+        <p:spPr>
+          <a:xfrm>
+            <a:off x="4370832" y="3364992"/>
+            <a:ext cx="1645920" cy="475488"/>
           </a:xfrm>
           <a:prstGeom prst="rect">
             <a:avLst>
@@ -27911,14 +28646,14 @@
       </p:sp>
       <p:sp>
         <p:nvSpPr>
-          <p:cNvPr id="33" name="Text 31"/>
-          <p:cNvSpPr/>
-          <p:nvPr/>
-        </p:nvSpPr>
-        <p:spPr>
-          <a:xfrm>
-            <a:off x="3602736" y="3364992"/>
-            <a:ext cx="1554480" cy="475488"/>
+          <p:cNvPr id="32" name="Text 30"/>
+          <p:cNvSpPr/>
+          <p:nvPr/>
+        </p:nvSpPr>
+        <p:spPr>
+          <a:xfrm>
+            <a:off x="4370832" y="3364992"/>
+            <a:ext cx="1645920" cy="475488"/>
           </a:xfrm>
           <a:prstGeom prst="rect">
             <a:avLst/>
@@ -27942,7 +28677,7 @@
                 <a:ea typeface="Trebuchet MS" pitchFamily="34" charset="-122"/>
                 <a:cs typeface="Trebuchet MS" pitchFamily="34" charset="-120"/>
               </a:rPr>
-              <a:t>lei</a:t>
+              <a:t>o</a:t>
             </a:r>
             <a:endParaRPr lang="en-US" sz="1400" dirty="0"/>
           </a:p>
@@ -27950,14 +28685,14 @@
       </p:sp>
       <p:sp>
         <p:nvSpPr>
-          <p:cNvPr id="34" name="Text 32"/>
-          <p:cNvSpPr/>
-          <p:nvPr/>
-        </p:nvSpPr>
-        <p:spPr>
-          <a:xfrm>
-            <a:off x="5157216" y="3364992"/>
-            <a:ext cx="73152" cy="475488"/>
+          <p:cNvPr id="33" name="Text 31"/>
+          <p:cNvSpPr/>
+          <p:nvPr/>
+        </p:nvSpPr>
+        <p:spPr>
+          <a:xfrm>
+            <a:off x="6016752" y="3364992"/>
+            <a:ext cx="411480" cy="475488"/>
           </a:xfrm>
           <a:prstGeom prst="rect">
             <a:avLst/>
@@ -27989,14 +28724,14 @@
       </p:sp>
       <p:sp>
         <p:nvSpPr>
-          <p:cNvPr id="35" name="Shape 33"/>
-          <p:cNvSpPr/>
-          <p:nvPr/>
-        </p:nvSpPr>
-        <p:spPr>
-          <a:xfrm>
-            <a:off x="5230368" y="3364992"/>
-            <a:ext cx="1554480" cy="475488"/>
+          <p:cNvPr id="34" name="Shape 32"/>
+          <p:cNvSpPr/>
+          <p:nvPr/>
+        </p:nvSpPr>
+        <p:spPr>
+          <a:xfrm>
+            <a:off x="6428232" y="3364992"/>
+            <a:ext cx="1645920" cy="475488"/>
           </a:xfrm>
           <a:prstGeom prst="rect">
             <a:avLst>
@@ -28016,14 +28751,14 @@
       </p:sp>
       <p:sp>
         <p:nvSpPr>
-          <p:cNvPr id="36" name="Text 34"/>
-          <p:cNvSpPr/>
-          <p:nvPr/>
-        </p:nvSpPr>
-        <p:spPr>
-          <a:xfrm>
-            <a:off x="5230368" y="3364992"/>
-            <a:ext cx="1554480" cy="475488"/>
+          <p:cNvPr id="35" name="Text 33"/>
+          <p:cNvSpPr/>
+          <p:nvPr/>
+        </p:nvSpPr>
+        <p:spPr>
+          <a:xfrm>
+            <a:off x="6428232" y="3364992"/>
+            <a:ext cx="1645920" cy="475488"/>
           </a:xfrm>
           <a:prstGeom prst="rect">
             <a:avLst/>
@@ -28047,7 +28782,7 @@
                 <a:ea typeface="Trebuchet MS" pitchFamily="34" charset="-122"/>
                 <a:cs typeface="Trebuchet MS" pitchFamily="34" charset="-120"/>
               </a:rPr>
-              <a:t>do</a:t>
+              <a:t>scopes</a:t>
             </a:r>
             <a:endParaRPr lang="en-US" sz="1400" dirty="0"/>
           </a:p>
@@ -28055,40 +28790,67 @@
       </p:sp>
       <p:sp>
         <p:nvSpPr>
+          <p:cNvPr id="36" name="Shape 34"/>
+          <p:cNvSpPr/>
+          <p:nvPr/>
+        </p:nvSpPr>
+        <p:spPr>
+          <a:xfrm>
+            <a:off x="365760" y="4096512"/>
+            <a:ext cx="1371600" cy="804672"/>
+          </a:xfrm>
+          <a:prstGeom prst="rect">
+            <a:avLst>
+              <a:gd name="adj" fmla="val 6818"/>
+            </a:avLst>
+          </a:prstGeom>
+          <a:solidFill>
+            <a:srgbClr val="E2E8F0"/>
+          </a:solidFill>
+          <a:ln w="12700">
+            <a:solidFill>
+              <a:srgbClr val="E2E8F0"/>
+            </a:solidFill>
+            <a:prstDash val="solid"/>
+          </a:ln>
+        </p:spPr>
+      </p:sp>
+      <p:sp>
+        <p:nvSpPr>
           <p:cNvPr id="37" name="Text 35"/>
           <p:cNvSpPr/>
           <p:nvPr/>
         </p:nvSpPr>
         <p:spPr>
           <a:xfrm>
-            <a:off x="6784848" y="3364992"/>
-            <a:ext cx="73152" cy="475488"/>
-          </a:xfrm>
-          <a:prstGeom prst="rect">
-            <a:avLst/>
-          </a:prstGeom>
-          <a:noFill/>
-          <a:ln/>
-        </p:spPr>
-        <p:txBody>
-          <a:bodyPr wrap="square" lIns="0" tIns="0" rIns="0" bIns="0" rtlCol="0" anchor="ctr"/>
-          <a:lstStyle/>
-          <a:p>
-            <a:pPr algn="ctr" indent="0" marL="0">
-              <a:buNone/>
-            </a:pPr>
-            <a:r>
-              <a:rPr lang="en-US" sz="1600" b="1" dirty="0">
-                <a:solidFill>
-                  <a:srgbClr val="0D9488"/>
+            <a:off x="365760" y="4096512"/>
+            <a:ext cx="1371600" cy="804672"/>
+          </a:xfrm>
+          <a:prstGeom prst="rect">
+            <a:avLst/>
+          </a:prstGeom>
+          <a:noFill/>
+          <a:ln/>
+        </p:spPr>
+        <p:txBody>
+          <a:bodyPr wrap="square" lIns="0" tIns="0" rIns="0" bIns="0" rtlCol="0" anchor="ctr"/>
+          <a:lstStyle/>
+          <a:p>
+            <a:pPr algn="ctr" indent="0" marL="0">
+              <a:buNone/>
+            </a:pPr>
+            <a:r>
+              <a:rPr lang="en-US" sz="1100" b="1" dirty="0">
+                <a:solidFill>
+                  <a:srgbClr val="475569"/>
                 </a:solidFill>
                 <a:latin typeface="Trebuchet MS" pitchFamily="34" charset="0"/>
                 <a:ea typeface="Trebuchet MS" pitchFamily="34" charset="-122"/>
                 <a:cs typeface="Trebuchet MS" pitchFamily="34" charset="-120"/>
               </a:rPr>
-              <a:t>·</a:t>
-            </a:r>
-            <a:endParaRPr lang="en-US" sz="1600" dirty="0"/>
+              <a:t>Phonemes</a:t>
+            </a:r>
+            <a:endParaRPr lang="en-US" sz="1100" dirty="0"/>
           </a:p>
         </p:txBody>
       </p:sp>
@@ -28100,148 +28862,175 @@
         </p:nvSpPr>
         <p:spPr>
           <a:xfrm>
-            <a:off x="6858000" y="3364992"/>
-            <a:ext cx="1554480" cy="475488"/>
+            <a:off x="1874520" y="4096512"/>
+            <a:ext cx="6903720" cy="658368"/>
           </a:xfrm>
           <a:prstGeom prst="rect">
             <a:avLst>
-              <a:gd name="adj" fmla="val 9615"/>
+              <a:gd name="adj" fmla="val 8333"/>
             </a:avLst>
           </a:prstGeom>
           <a:solidFill>
+            <a:srgbClr val="FCE7F3"/>
+          </a:solidFill>
+          <a:ln w="12700">
+            <a:solidFill>
+              <a:srgbClr val="DB2777"/>
+            </a:solidFill>
+            <a:prstDash val="solid"/>
+          </a:ln>
+        </p:spPr>
+      </p:sp>
+      <p:sp>
+        <p:nvSpPr>
+          <p:cNvPr id="39" name="Shape 37"/>
+          <p:cNvSpPr/>
+          <p:nvPr/>
+        </p:nvSpPr>
+        <p:spPr>
+          <a:xfrm>
+            <a:off x="1951828" y="4169664"/>
+            <a:ext cx="603504" cy="475488"/>
+          </a:xfrm>
+          <a:prstGeom prst="rect">
+            <a:avLst>
+              <a:gd name="adj" fmla="val 7692"/>
+            </a:avLst>
+          </a:prstGeom>
+          <a:solidFill>
             <a:srgbClr val="FFFFFF"/>
           </a:solidFill>
           <a:ln w="12700">
             <a:solidFill>
-              <a:srgbClr val="0D9488"/>
-            </a:solidFill>
-            <a:prstDash val="solid"/>
-          </a:ln>
-        </p:spPr>
-      </p:sp>
-      <p:sp>
-        <p:nvSpPr>
-          <p:cNvPr id="39" name="Text 37"/>
-          <p:cNvSpPr/>
-          <p:nvPr/>
-        </p:nvSpPr>
-        <p:spPr>
-          <a:xfrm>
-            <a:off x="6858000" y="3364992"/>
-            <a:ext cx="1554480" cy="475488"/>
-          </a:xfrm>
-          <a:prstGeom prst="rect">
-            <a:avLst/>
-          </a:prstGeom>
-          <a:noFill/>
-          <a:ln/>
-        </p:spPr>
-        <p:txBody>
-          <a:bodyPr wrap="square" lIns="0" tIns="0" rIns="0" bIns="0" rtlCol="0" anchor="ctr"/>
-          <a:lstStyle/>
-          <a:p>
-            <a:pPr algn="ctr" indent="0" marL="0">
-              <a:buNone/>
-            </a:pPr>
-            <a:r>
-              <a:rPr lang="en-US" sz="1400" b="1" dirty="0">
-                <a:solidFill>
-                  <a:srgbClr val="0D9488"/>
+              <a:srgbClr val="DB2777"/>
+            </a:solidFill>
+            <a:prstDash val="solid"/>
+          </a:ln>
+        </p:spPr>
+      </p:sp>
+      <p:sp>
+        <p:nvSpPr>
+          <p:cNvPr id="40" name="Text 38"/>
+          <p:cNvSpPr/>
+          <p:nvPr/>
+        </p:nvSpPr>
+        <p:spPr>
+          <a:xfrm>
+            <a:off x="1951828" y="4169664"/>
+            <a:ext cx="603504" cy="475488"/>
+          </a:xfrm>
+          <a:prstGeom prst="rect">
+            <a:avLst/>
+          </a:prstGeom>
+          <a:noFill/>
+          <a:ln/>
+        </p:spPr>
+        <p:txBody>
+          <a:bodyPr wrap="square" lIns="0" tIns="0" rIns="0" bIns="0" rtlCol="0" anchor="ctr"/>
+          <a:lstStyle/>
+          <a:p>
+            <a:pPr algn="ctr" indent="0" marL="0">
+              <a:buNone/>
+            </a:pPr>
+            <a:r>
+              <a:rPr lang="en-US" sz="900" b="1" dirty="0">
+                <a:solidFill>
+                  <a:srgbClr val="9D174D"/>
                 </a:solidFill>
                 <a:latin typeface="Trebuchet MS" pitchFamily="34" charset="0"/>
                 <a:ea typeface="Trebuchet MS" pitchFamily="34" charset="-122"/>
                 <a:cs typeface="Trebuchet MS" pitchFamily="34" charset="-120"/>
               </a:rPr>
-              <a:t>scope</a:t>
-            </a:r>
-            <a:endParaRPr lang="en-US" sz="1400" dirty="0"/>
-          </a:p>
-        </p:txBody>
-      </p:sp>
-      <p:sp>
-        <p:nvSpPr>
-          <p:cNvPr id="40" name="Shape 38"/>
-          <p:cNvSpPr/>
-          <p:nvPr/>
-        </p:nvSpPr>
-        <p:spPr>
-          <a:xfrm>
-            <a:off x="365760" y="4096512"/>
-            <a:ext cx="1371600" cy="804672"/>
+              <a:t>s</a:t>
+            </a:r>
+            <a:endParaRPr lang="en-US" sz="900" dirty="0"/>
+          </a:p>
+        </p:txBody>
+      </p:sp>
+      <p:sp>
+        <p:nvSpPr>
+          <p:cNvPr id="41" name="Shape 39"/>
+          <p:cNvSpPr/>
+          <p:nvPr/>
+        </p:nvSpPr>
+        <p:spPr>
+          <a:xfrm>
+            <a:off x="2605209" y="4169664"/>
+            <a:ext cx="603504" cy="475488"/>
           </a:xfrm>
           <a:prstGeom prst="rect">
             <a:avLst>
-              <a:gd name="adj" fmla="val 6818"/>
+              <a:gd name="adj" fmla="val 7692"/>
             </a:avLst>
           </a:prstGeom>
           <a:solidFill>
-            <a:srgbClr val="E2E8F0"/>
-          </a:solidFill>
-          <a:ln w="12700">
-            <a:solidFill>
-              <a:srgbClr val="E2E8F0"/>
-            </a:solidFill>
-            <a:prstDash val="solid"/>
-          </a:ln>
-        </p:spPr>
-      </p:sp>
-      <p:sp>
-        <p:nvSpPr>
-          <p:cNvPr id="41" name="Text 39"/>
-          <p:cNvSpPr/>
-          <p:nvPr/>
-        </p:nvSpPr>
-        <p:spPr>
-          <a:xfrm>
-            <a:off x="365760" y="4096512"/>
-            <a:ext cx="1371600" cy="804672"/>
-          </a:xfrm>
-          <a:prstGeom prst="rect">
-            <a:avLst/>
-          </a:prstGeom>
-          <a:noFill/>
-          <a:ln/>
-        </p:spPr>
-        <p:txBody>
-          <a:bodyPr wrap="square" lIns="0" tIns="0" rIns="0" bIns="0" rtlCol="0" anchor="ctr"/>
-          <a:lstStyle/>
-          <a:p>
-            <a:pPr algn="ctr" indent="0" marL="0">
-              <a:buNone/>
-            </a:pPr>
-            <a:r>
-              <a:rPr lang="en-US" sz="1100" b="1" dirty="0">
-                <a:solidFill>
-                  <a:srgbClr val="475569"/>
+            <a:srgbClr val="FFFFFF"/>
+          </a:solidFill>
+          <a:ln w="12700">
+            <a:solidFill>
+              <a:srgbClr val="DB2777"/>
+            </a:solidFill>
+            <a:prstDash val="solid"/>
+          </a:ln>
+        </p:spPr>
+      </p:sp>
+      <p:sp>
+        <p:nvSpPr>
+          <p:cNvPr id="42" name="Text 40"/>
+          <p:cNvSpPr/>
+          <p:nvPr/>
+        </p:nvSpPr>
+        <p:spPr>
+          <a:xfrm>
+            <a:off x="2605209" y="4169664"/>
+            <a:ext cx="603504" cy="475488"/>
+          </a:xfrm>
+          <a:prstGeom prst="rect">
+            <a:avLst/>
+          </a:prstGeom>
+          <a:noFill/>
+          <a:ln/>
+        </p:spPr>
+        <p:txBody>
+          <a:bodyPr wrap="square" lIns="0" tIns="0" rIns="0" bIns="0" rtlCol="0" anchor="ctr"/>
+          <a:lstStyle/>
+          <a:p>
+            <a:pPr algn="ctr" indent="0" marL="0">
+              <a:buNone/>
+            </a:pPr>
+            <a:r>
+              <a:rPr lang="en-US" sz="900" b="1" dirty="0">
+                <a:solidFill>
+                  <a:srgbClr val="9D174D"/>
                 </a:solidFill>
                 <a:latin typeface="Trebuchet MS" pitchFamily="34" charset="0"/>
                 <a:ea typeface="Trebuchet MS" pitchFamily="34" charset="-122"/>
                 <a:cs typeface="Trebuchet MS" pitchFamily="34" charset="-120"/>
               </a:rPr>
-              <a:t>Phonemes</a:t>
-            </a:r>
-            <a:endParaRPr lang="en-US" sz="1100" dirty="0"/>
-          </a:p>
-        </p:txBody>
-      </p:sp>
-      <p:sp>
-        <p:nvSpPr>
-          <p:cNvPr id="42" name="Shape 40"/>
-          <p:cNvSpPr/>
-          <p:nvPr/>
-        </p:nvSpPr>
-        <p:spPr>
-          <a:xfrm>
-            <a:off x="1874520" y="4096512"/>
-            <a:ext cx="6903720" cy="804672"/>
+              <a:t>t</a:t>
+            </a:r>
+            <a:endParaRPr lang="en-US" sz="900" dirty="0"/>
+          </a:p>
+        </p:txBody>
+      </p:sp>
+      <p:sp>
+        <p:nvSpPr>
+          <p:cNvPr id="43" name="Shape 41"/>
+          <p:cNvSpPr/>
+          <p:nvPr/>
+        </p:nvSpPr>
+        <p:spPr>
+          <a:xfrm>
+            <a:off x="3258589" y="4169664"/>
+            <a:ext cx="603504" cy="475488"/>
           </a:xfrm>
           <a:prstGeom prst="rect">
             <a:avLst>
-              <a:gd name="adj" fmla="val 6818"/>
+              <a:gd name="adj" fmla="val 7692"/>
             </a:avLst>
           </a:prstGeom>
           <a:solidFill>
-            <a:srgbClr val="FCE7F3"/>
+            <a:srgbClr val="FFFFFF"/>
           </a:solidFill>
           <a:ln w="12700">
             <a:solidFill>
@@ -28253,41 +29042,14 @@
       </p:sp>
       <p:sp>
         <p:nvSpPr>
-          <p:cNvPr id="43" name="Shape 41"/>
-          <p:cNvSpPr/>
-          <p:nvPr/>
-        </p:nvSpPr>
-        <p:spPr>
-          <a:xfrm>
-            <a:off x="1951330" y="4169664"/>
-            <a:ext cx="676656" cy="384048"/>
-          </a:xfrm>
-          <a:prstGeom prst="rect">
-            <a:avLst>
-              <a:gd name="adj" fmla="val 9524"/>
-            </a:avLst>
-          </a:prstGeom>
-          <a:solidFill>
-            <a:srgbClr val="FFFFFF"/>
-          </a:solidFill>
-          <a:ln w="12700">
-            <a:solidFill>
-              <a:srgbClr val="DB2777"/>
-            </a:solidFill>
-            <a:prstDash val="solid"/>
-          </a:ln>
-        </p:spPr>
-      </p:sp>
-      <p:sp>
-        <p:nvSpPr>
           <p:cNvPr id="44" name="Text 42"/>
           <p:cNvSpPr/>
           <p:nvPr/>
         </p:nvSpPr>
         <p:spPr>
           <a:xfrm>
-            <a:off x="1951330" y="4169664"/>
-            <a:ext cx="676656" cy="384048"/>
+            <a:off x="3258589" y="4169664"/>
+            <a:ext cx="603504" cy="475488"/>
           </a:xfrm>
           <a:prstGeom prst="rect">
             <a:avLst/>
@@ -28311,7 +29073,7 @@
                 <a:ea typeface="Trebuchet MS" pitchFamily="34" charset="-122"/>
                 <a:cs typeface="Trebuchet MS" pitchFamily="34" charset="-120"/>
               </a:rPr>
-              <a:t>k</a:t>
+              <a:t>e</a:t>
             </a:r>
             <a:endParaRPr lang="en-US" sz="900" dirty="0"/>
           </a:p>
@@ -28325,12 +29087,12 @@
         </p:nvSpPr>
         <p:spPr>
           <a:xfrm>
-            <a:off x="2677363" y="4169664"/>
-            <a:ext cx="676656" cy="384048"/>
+            <a:off x="3911969" y="4169664"/>
+            <a:ext cx="603504" cy="475488"/>
           </a:xfrm>
           <a:prstGeom prst="rect">
             <a:avLst>
-              <a:gd name="adj" fmla="val 9524"/>
+              <a:gd name="adj" fmla="val 7692"/>
             </a:avLst>
           </a:prstGeom>
           <a:solidFill>
@@ -28352,8 +29114,8 @@
         </p:nvSpPr>
         <p:spPr>
           <a:xfrm>
-            <a:off x="2677363" y="4169664"/>
-            <a:ext cx="676656" cy="384048"/>
+            <a:off x="3911969" y="4169664"/>
+            <a:ext cx="603504" cy="475488"/>
           </a:xfrm>
           <a:prstGeom prst="rect">
             <a:avLst/>
@@ -28377,7 +29139,7 @@
                 <a:ea typeface="Trebuchet MS" pitchFamily="34" charset="-122"/>
                 <a:cs typeface="Trebuchet MS" pitchFamily="34" charset="-120"/>
               </a:rPr>
-              <a:t>a</a:t>
+              <a:t>th</a:t>
             </a:r>
             <a:endParaRPr lang="en-US" sz="900" dirty="0"/>
           </a:p>
@@ -28391,12 +29153,12 @@
         </p:nvSpPr>
         <p:spPr>
           <a:xfrm>
-            <a:off x="3403397" y="4169664"/>
-            <a:ext cx="676656" cy="384048"/>
+            <a:off x="4565350" y="4169664"/>
+            <a:ext cx="603504" cy="475488"/>
           </a:xfrm>
           <a:prstGeom prst="rect">
             <a:avLst>
-              <a:gd name="adj" fmla="val 9524"/>
+              <a:gd name="adj" fmla="val 7692"/>
             </a:avLst>
           </a:prstGeom>
           <a:solidFill>
@@ -28418,8 +29180,8 @@
         </p:nvSpPr>
         <p:spPr>
           <a:xfrm>
-            <a:off x="3403397" y="4169664"/>
-            <a:ext cx="676656" cy="384048"/>
+            <a:off x="4565350" y="4169664"/>
+            <a:ext cx="603504" cy="475488"/>
           </a:xfrm>
           <a:prstGeom prst="rect">
             <a:avLst/>
@@ -28443,7 +29205,7 @@
                 <a:ea typeface="Trebuchet MS" pitchFamily="34" charset="-122"/>
                 <a:cs typeface="Trebuchet MS" pitchFamily="34" charset="-120"/>
               </a:rPr>
-              <a:t>l</a:t>
+              <a:t>o</a:t>
             </a:r>
             <a:endParaRPr lang="en-US" sz="900" dirty="0"/>
           </a:p>
@@ -28457,12 +29219,12 @@
         </p:nvSpPr>
         <p:spPr>
           <a:xfrm>
-            <a:off x="4129430" y="4169664"/>
-            <a:ext cx="676656" cy="384048"/>
+            <a:off x="5218730" y="4169664"/>
+            <a:ext cx="603504" cy="475488"/>
           </a:xfrm>
           <a:prstGeom prst="rect">
             <a:avLst>
-              <a:gd name="adj" fmla="val 9524"/>
+              <a:gd name="adj" fmla="val 7692"/>
             </a:avLst>
           </a:prstGeom>
           <a:solidFill>
@@ -28484,8 +29246,8 @@
         </p:nvSpPr>
         <p:spPr>
           <a:xfrm>
-            <a:off x="4129430" y="4169664"/>
-            <a:ext cx="676656" cy="384048"/>
+            <a:off x="5218730" y="4169664"/>
+            <a:ext cx="603504" cy="475488"/>
           </a:xfrm>
           <a:prstGeom prst="rect">
             <a:avLst/>
@@ -28509,7 +29271,7 @@
                 <a:ea typeface="Trebuchet MS" pitchFamily="34" charset="-122"/>
                 <a:cs typeface="Trebuchet MS" pitchFamily="34" charset="-120"/>
               </a:rPr>
-              <a:t>ei</a:t>
+              <a:t>s</a:t>
             </a:r>
             <a:endParaRPr lang="en-US" sz="900" dirty="0"/>
           </a:p>
@@ -28523,12 +29285,12 @@
         </p:nvSpPr>
         <p:spPr>
           <a:xfrm>
-            <a:off x="4855464" y="4169664"/>
-            <a:ext cx="676656" cy="384048"/>
+            <a:off x="5872111" y="4169664"/>
+            <a:ext cx="603504" cy="475488"/>
           </a:xfrm>
           <a:prstGeom prst="rect">
             <a:avLst>
-              <a:gd name="adj" fmla="val 9524"/>
+              <a:gd name="adj" fmla="val 7692"/>
             </a:avLst>
           </a:prstGeom>
           <a:solidFill>
@@ -28550,8 +29312,8 @@
         </p:nvSpPr>
         <p:spPr>
           <a:xfrm>
-            <a:off x="4855464" y="4169664"/>
-            <a:ext cx="676656" cy="384048"/>
+            <a:off x="5872111" y="4169664"/>
+            <a:ext cx="603504" cy="475488"/>
           </a:xfrm>
           <a:prstGeom prst="rect">
             <a:avLst/>
@@ -28575,7 +29337,7 @@
                 <a:ea typeface="Trebuchet MS" pitchFamily="34" charset="-122"/>
                 <a:cs typeface="Trebuchet MS" pitchFamily="34" charset="-120"/>
               </a:rPr>
-              <a:t>d</a:t>
+              <a:t>c</a:t>
             </a:r>
             <a:endParaRPr lang="en-US" sz="900" dirty="0"/>
           </a:p>
@@ -28589,12 +29351,12 @@
         </p:nvSpPr>
         <p:spPr>
           <a:xfrm>
-            <a:off x="5581498" y="4169664"/>
-            <a:ext cx="676656" cy="384048"/>
+            <a:off x="6525491" y="4169664"/>
+            <a:ext cx="603504" cy="475488"/>
           </a:xfrm>
           <a:prstGeom prst="rect">
             <a:avLst>
-              <a:gd name="adj" fmla="val 9524"/>
+              <a:gd name="adj" fmla="val 7692"/>
             </a:avLst>
           </a:prstGeom>
           <a:solidFill>
@@ -28616,8 +29378,8 @@
         </p:nvSpPr>
         <p:spPr>
           <a:xfrm>
-            <a:off x="5581498" y="4169664"/>
-            <a:ext cx="676656" cy="384048"/>
+            <a:off x="6525491" y="4169664"/>
+            <a:ext cx="603504" cy="475488"/>
           </a:xfrm>
           <a:prstGeom prst="rect">
             <a:avLst/>
@@ -28641,7 +29403,7 @@
                 <a:ea typeface="Trebuchet MS" pitchFamily="34" charset="-122"/>
                 <a:cs typeface="Trebuchet MS" pitchFamily="34" charset="-120"/>
               </a:rPr>
-              <a:t>o</a:t>
+              <a:t>o_e</a:t>
             </a:r>
             <a:endParaRPr lang="en-US" sz="900" dirty="0"/>
           </a:p>
@@ -28655,12 +29417,12 @@
         </p:nvSpPr>
         <p:spPr>
           <a:xfrm>
-            <a:off x="6307531" y="4169664"/>
-            <a:ext cx="676656" cy="384048"/>
+            <a:off x="7178871" y="4169664"/>
+            <a:ext cx="603504" cy="475488"/>
           </a:xfrm>
           <a:prstGeom prst="rect">
             <a:avLst>
-              <a:gd name="adj" fmla="val 9524"/>
+              <a:gd name="adj" fmla="val 7692"/>
             </a:avLst>
           </a:prstGeom>
           <a:solidFill>
@@ -28682,8 +29444,8 @@
         </p:nvSpPr>
         <p:spPr>
           <a:xfrm>
-            <a:off x="6307531" y="4169664"/>
-            <a:ext cx="676656" cy="384048"/>
+            <a:off x="7178871" y="4169664"/>
+            <a:ext cx="603504" cy="475488"/>
           </a:xfrm>
           <a:prstGeom prst="rect">
             <a:avLst/>
@@ -28707,7 +29469,7 @@
                 <a:ea typeface="Trebuchet MS" pitchFamily="34" charset="-122"/>
                 <a:cs typeface="Trebuchet MS" pitchFamily="34" charset="-120"/>
               </a:rPr>
-              <a:t>sc</a:t>
+              <a:t>p</a:t>
             </a:r>
             <a:endParaRPr lang="en-US" sz="900" dirty="0"/>
           </a:p>
@@ -28715,57 +29477,18 @@
       </p:sp>
       <p:sp>
         <p:nvSpPr>
-          <p:cNvPr id="57" name="Text 55"/>
-          <p:cNvSpPr/>
-          <p:nvPr/>
-        </p:nvSpPr>
-        <p:spPr>
-          <a:xfrm>
-            <a:off x="6307531" y="4572000"/>
-            <a:ext cx="676656" cy="219456"/>
-          </a:xfrm>
-          <a:prstGeom prst="rect">
-            <a:avLst/>
-          </a:prstGeom>
-          <a:noFill/>
-          <a:ln/>
-        </p:spPr>
-        <p:txBody>
-          <a:bodyPr wrap="square" lIns="0" tIns="0" rIns="0" bIns="0" rtlCol="0" anchor="t"/>
-          <a:lstStyle/>
-          <a:p>
-            <a:pPr algn="ctr" indent="0" marL="0">
-              <a:buNone/>
-            </a:pPr>
-            <a:r>
-              <a:rPr lang="en-US" sz="750" i="1" dirty="0">
-                <a:solidFill>
-                  <a:srgbClr val="94A3B8"/>
-                </a:solidFill>
-                <a:latin typeface="Calibri" pitchFamily="34" charset="0"/>
-                <a:ea typeface="Calibri" pitchFamily="34" charset="-122"/>
-                <a:cs typeface="Calibri" pitchFamily="34" charset="-120"/>
-              </a:rPr>
-              <a:t>/sk/</a:t>
-            </a:r>
-            <a:endParaRPr lang="en-US" sz="750" dirty="0"/>
-          </a:p>
-        </p:txBody>
-      </p:sp>
-      <p:sp>
-        <p:nvSpPr>
-          <p:cNvPr id="58" name="Shape 56"/>
-          <p:cNvSpPr/>
-          <p:nvPr/>
-        </p:nvSpPr>
-        <p:spPr>
-          <a:xfrm>
-            <a:off x="7033565" y="4169664"/>
-            <a:ext cx="676656" cy="384048"/>
+          <p:cNvPr id="57" name="Shape 55"/>
+          <p:cNvSpPr/>
+          <p:nvPr/>
+        </p:nvSpPr>
+        <p:spPr>
+          <a:xfrm>
+            <a:off x="7832252" y="4169664"/>
+            <a:ext cx="603504" cy="475488"/>
           </a:xfrm>
           <a:prstGeom prst="rect">
             <a:avLst>
-              <a:gd name="adj" fmla="val 9524"/>
+              <a:gd name="adj" fmla="val 7692"/>
             </a:avLst>
           </a:prstGeom>
           <a:solidFill>
@@ -28781,14 +29504,14 @@
       </p:sp>
       <p:sp>
         <p:nvSpPr>
-          <p:cNvPr id="59" name="Text 57"/>
-          <p:cNvSpPr/>
-          <p:nvPr/>
-        </p:nvSpPr>
-        <p:spPr>
-          <a:xfrm>
-            <a:off x="7033565" y="4169664"/>
-            <a:ext cx="676656" cy="384048"/>
+          <p:cNvPr id="58" name="Text 56"/>
+          <p:cNvSpPr/>
+          <p:nvPr/>
+        </p:nvSpPr>
+        <p:spPr>
+          <a:xfrm>
+            <a:off x="7832252" y="4169664"/>
+            <a:ext cx="603504" cy="475488"/>
           </a:xfrm>
           <a:prstGeom prst="rect">
             <a:avLst/>
@@ -28812,73 +29535,7 @@
                 <a:ea typeface="Trebuchet MS" pitchFamily="34" charset="-122"/>
                 <a:cs typeface="Trebuchet MS" pitchFamily="34" charset="-120"/>
               </a:rPr>
-              <a:t>o</a:t>
-            </a:r>
-            <a:endParaRPr lang="en-US" sz="900" dirty="0"/>
-          </a:p>
-        </p:txBody>
-      </p:sp>
-      <p:sp>
-        <p:nvSpPr>
-          <p:cNvPr id="60" name="Shape 58"/>
-          <p:cNvSpPr/>
-          <p:nvPr/>
-        </p:nvSpPr>
-        <p:spPr>
-          <a:xfrm>
-            <a:off x="7759598" y="4169664"/>
-            <a:ext cx="676656" cy="384048"/>
-          </a:xfrm>
-          <a:prstGeom prst="rect">
-            <a:avLst>
-              <a:gd name="adj" fmla="val 9524"/>
-            </a:avLst>
-          </a:prstGeom>
-          <a:solidFill>
-            <a:srgbClr val="FFFFFF"/>
-          </a:solidFill>
-          <a:ln w="12700">
-            <a:solidFill>
-              <a:srgbClr val="DB2777"/>
-            </a:solidFill>
-            <a:prstDash val="solid"/>
-          </a:ln>
-        </p:spPr>
-      </p:sp>
-      <p:sp>
-        <p:nvSpPr>
-          <p:cNvPr id="61" name="Text 59"/>
-          <p:cNvSpPr/>
-          <p:nvPr/>
-        </p:nvSpPr>
-        <p:spPr>
-          <a:xfrm>
-            <a:off x="7759598" y="4169664"/>
-            <a:ext cx="676656" cy="384048"/>
-          </a:xfrm>
-          <a:prstGeom prst="rect">
-            <a:avLst/>
-          </a:prstGeom>
-          <a:noFill/>
-          <a:ln/>
-        </p:spPr>
-        <p:txBody>
-          <a:bodyPr wrap="square" lIns="0" tIns="0" rIns="0" bIns="0" rtlCol="0" anchor="ctr"/>
-          <a:lstStyle/>
-          <a:p>
-            <a:pPr algn="ctr" indent="0" marL="0">
-              <a:buNone/>
-            </a:pPr>
-            <a:r>
-              <a:rPr lang="en-US" sz="900" b="1" dirty="0">
-                <a:solidFill>
-                  <a:srgbClr val="9D174D"/>
-                </a:solidFill>
-                <a:latin typeface="Trebuchet MS" pitchFamily="34" charset="0"/>
-                <a:ea typeface="Trebuchet MS" pitchFamily="34" charset="-122"/>
-                <a:cs typeface="Trebuchet MS" pitchFamily="34" charset="-120"/>
-              </a:rPr>
-              <a:t>pe</a:t>
+              <a:t>s</a:t>
             </a:r>
             <a:endParaRPr lang="en-US" sz="900" dirty="0"/>
           </a:p>
@@ -29170,7 +29827,7 @@
                 <a:ea typeface="Calibri" pitchFamily="34" charset="-122"/>
                 <a:cs typeface="Calibri" pitchFamily="34" charset="-120"/>
               </a:rPr>
-              <a:t>Word Labs  •  wordlabs.app  •  Root: 'scope' = to look, see, observe</a:t>
+              <a:t>Word Labs  •  wordlabs.app  •  Root: 'scope' = look; view; examine</a:t>
             </a:r>
             <a:endParaRPr lang="en-US" sz="800" dirty="0"/>
           </a:p>
@@ -29309,7 +29966,7 @@
                 <a:ea typeface="Trebuchet MS" pitchFamily="34" charset="-122"/>
                 <a:cs typeface="Trebuchet MS" pitchFamily="34" charset="-120"/>
               </a:rPr>
-              <a:t>microscope</a:t>
+              <a:t>kaleidoscopes</a:t>
             </a:r>
             <a:endParaRPr lang="en-US" sz="2800" dirty="0"/>
           </a:p>
@@ -29997,7 +30654,7 @@
                 <a:ea typeface="Calibri" pitchFamily="34" charset="-122"/>
                 <a:cs typeface="Calibri" pitchFamily="34" charset="-120"/>
               </a:rPr>
-              <a:t>Word Labs  •  wordlabs.app  •  Root: 'scope' = to look, see, observe</a:t>
+              <a:t>Word Labs  •  wordlabs.app  •  Root: 'scope' = look; view; examine</a:t>
             </a:r>
             <a:endParaRPr lang="en-US" sz="800" dirty="0"/>
           </a:p>
@@ -30136,7 +30793,7 @@
                 <a:ea typeface="Trebuchet MS" pitchFamily="34" charset="-122"/>
                 <a:cs typeface="Trebuchet MS" pitchFamily="34" charset="-120"/>
               </a:rPr>
-              <a:t>microscope</a:t>
+              <a:t>kaleidoscopes</a:t>
             </a:r>
             <a:endParaRPr lang="en-US" sz="2800" dirty="0"/>
           </a:p>
@@ -30216,7 +30873,7 @@
         </p:nvSpPr>
         <p:spPr>
           <a:xfrm>
-            <a:off x="2938272" y="2258568"/>
+            <a:off x="2221992" y="2258568"/>
             <a:ext cx="1828800" cy="292608"/>
           </a:xfrm>
           <a:prstGeom prst="rect">
@@ -30250,7 +30907,7 @@
         </p:nvSpPr>
         <p:spPr>
           <a:xfrm>
-            <a:off x="2938272" y="2258568"/>
+            <a:off x="2221992" y="2258568"/>
             <a:ext cx="1828800" cy="292608"/>
           </a:xfrm>
           <a:prstGeom prst="rect">
@@ -30275,7 +30932,7 @@
                 <a:ea typeface="Trebuchet MS" pitchFamily="34" charset="-122"/>
                 <a:cs typeface="Trebuchet MS" pitchFamily="34" charset="-120"/>
               </a:rPr>
-              <a:t>micro</a:t>
+              <a:t>kaleido</a:t>
             </a:r>
             <a:endParaRPr lang="en-US" sz="1300" dirty="0"/>
           </a:p>
@@ -30289,7 +30946,7 @@
         </p:nvSpPr>
         <p:spPr>
           <a:xfrm>
-            <a:off x="2938272" y="2569464"/>
+            <a:off x="2221992" y="2569464"/>
             <a:ext cx="1828800" cy="201168"/>
           </a:xfrm>
           <a:prstGeom prst="rect">
@@ -30314,7 +30971,7 @@
                 <a:ea typeface="Calibri" pitchFamily="34" charset="-122"/>
                 <a:cs typeface="Calibri" pitchFamily="34" charset="-120"/>
               </a:rPr>
-              <a:t>very small</a:t>
+              <a:t>beautiful form</a:t>
             </a:r>
             <a:endParaRPr lang="en-US" sz="850" dirty="0"/>
           </a:p>
@@ -30328,7 +30985,7 @@
         </p:nvSpPr>
         <p:spPr>
           <a:xfrm>
-            <a:off x="5803392" y="2258568"/>
+            <a:off x="4370832" y="2258568"/>
             <a:ext cx="1828800" cy="292608"/>
           </a:xfrm>
           <a:prstGeom prst="rect">
@@ -30362,7 +31019,7 @@
         </p:nvSpPr>
         <p:spPr>
           <a:xfrm>
-            <a:off x="5803392" y="2258568"/>
+            <a:off x="4370832" y="2258568"/>
             <a:ext cx="1828800" cy="292608"/>
           </a:xfrm>
           <a:prstGeom prst="rect">
@@ -30401,7 +31058,7 @@
         </p:nvSpPr>
         <p:spPr>
           <a:xfrm>
-            <a:off x="5803392" y="2569464"/>
+            <a:off x="4370832" y="2569464"/>
             <a:ext cx="1828800" cy="201168"/>
           </a:xfrm>
           <a:prstGeom prst="rect">
@@ -30426,7 +31083,7 @@
                 <a:ea typeface="Calibri" pitchFamily="34" charset="-122"/>
                 <a:cs typeface="Calibri" pitchFamily="34" charset="-120"/>
               </a:rPr>
-              <a:t>to look or observe</a:t>
+              <a:t>look; view; examine</a:t>
             </a:r>
             <a:endParaRPr lang="en-US" sz="850" dirty="0"/>
           </a:p>
@@ -30435,6 +31092,118 @@
       <p:sp>
         <p:nvSpPr>
           <p:cNvPr id="22" name="Shape 20"/>
+          <p:cNvSpPr/>
+          <p:nvPr/>
+        </p:nvSpPr>
+        <p:spPr>
+          <a:xfrm>
+            <a:off x="6519672" y="2258568"/>
+            <a:ext cx="1828800" cy="292608"/>
+          </a:xfrm>
+          <a:prstGeom prst="rect">
+            <a:avLst>
+              <a:gd name="adj" fmla="val 25000"/>
+            </a:avLst>
+          </a:prstGeom>
+          <a:solidFill>
+            <a:srgbClr val="FCE7F3"/>
+          </a:solidFill>
+          <a:ln w="19050">
+            <a:solidFill>
+              <a:srgbClr val="DB2777"/>
+            </a:solidFill>
+            <a:prstDash val="solid"/>
+          </a:ln>
+          <a:effectLst>
+            <a:outerShdw sx="100000" sy="100000" kx="0" ky="0" algn="bl" rotWithShape="0" blurRad="101600" dist="38100" dir="8100000">
+              <a:srgbClr val="000000">
+                <a:alpha val="12000"/>
+              </a:srgbClr>
+            </a:outerShdw>
+          </a:effectLst>
+        </p:spPr>
+      </p:sp>
+      <p:sp>
+        <p:nvSpPr>
+          <p:cNvPr id="23" name="Text 21"/>
+          <p:cNvSpPr/>
+          <p:nvPr/>
+        </p:nvSpPr>
+        <p:spPr>
+          <a:xfrm>
+            <a:off x="6519672" y="2258568"/>
+            <a:ext cx="1828800" cy="292608"/>
+          </a:xfrm>
+          <a:prstGeom prst="rect">
+            <a:avLst/>
+          </a:prstGeom>
+          <a:noFill/>
+          <a:ln/>
+        </p:spPr>
+        <p:txBody>
+          <a:bodyPr wrap="square" lIns="0" tIns="0" rIns="0" bIns="0" rtlCol="0" anchor="ctr"/>
+          <a:lstStyle/>
+          <a:p>
+            <a:pPr algn="ctr" indent="0" marL="0">
+              <a:buNone/>
+            </a:pPr>
+            <a:r>
+              <a:rPr lang="en-US" sz="1300" b="1" dirty="0">
+                <a:solidFill>
+                  <a:srgbClr val="9D174D"/>
+                </a:solidFill>
+                <a:latin typeface="Trebuchet MS" pitchFamily="34" charset="0"/>
+                <a:ea typeface="Trebuchet MS" pitchFamily="34" charset="-122"/>
+                <a:cs typeface="Trebuchet MS" pitchFamily="34" charset="-120"/>
+              </a:rPr>
+              <a:t>s</a:t>
+            </a:r>
+            <a:endParaRPr lang="en-US" sz="1300" dirty="0"/>
+          </a:p>
+        </p:txBody>
+      </p:sp>
+      <p:sp>
+        <p:nvSpPr>
+          <p:cNvPr id="24" name="Text 22"/>
+          <p:cNvSpPr/>
+          <p:nvPr/>
+        </p:nvSpPr>
+        <p:spPr>
+          <a:xfrm>
+            <a:off x="6519672" y="2569464"/>
+            <a:ext cx="1828800" cy="201168"/>
+          </a:xfrm>
+          <a:prstGeom prst="rect">
+            <a:avLst/>
+          </a:prstGeom>
+          <a:noFill/>
+          <a:ln/>
+        </p:spPr>
+        <p:txBody>
+          <a:bodyPr wrap="square" lIns="0" tIns="0" rIns="0" bIns="0" rtlCol="0" anchor="t"/>
+          <a:lstStyle/>
+          <a:p>
+            <a:pPr algn="ctr" indent="0" marL="0">
+              <a:buNone/>
+            </a:pPr>
+            <a:r>
+              <a:rPr lang="en-US" sz="850" dirty="0">
+                <a:solidFill>
+                  <a:srgbClr val="475569"/>
+                </a:solidFill>
+                <a:latin typeface="Calibri" pitchFamily="34" charset="0"/>
+                <a:ea typeface="Calibri" pitchFamily="34" charset="-122"/>
+                <a:cs typeface="Calibri" pitchFamily="34" charset="-120"/>
+              </a:rPr>
+              <a:t>plural or present tense</a:t>
+            </a:r>
+            <a:endParaRPr lang="en-US" sz="850" dirty="0"/>
+          </a:p>
+        </p:txBody>
+      </p:sp>
+      <p:sp>
+        <p:nvSpPr>
+          <p:cNvPr id="25" name="Shape 23"/>
           <p:cNvSpPr/>
           <p:nvPr/>
         </p:nvSpPr>
@@ -30461,7 +31230,7 @@
       </p:sp>
       <p:sp>
         <p:nvSpPr>
-          <p:cNvPr id="23" name="Text 21"/>
+          <p:cNvPr id="26" name="Text 24"/>
           <p:cNvSpPr/>
           <p:nvPr/>
         </p:nvSpPr>
@@ -30500,7 +31269,7 @@
       </p:sp>
       <p:sp>
         <p:nvSpPr>
-          <p:cNvPr id="24" name="Shape 22"/>
+          <p:cNvPr id="27" name="Shape 25"/>
           <p:cNvSpPr/>
           <p:nvPr/>
         </p:nvSpPr>
@@ -30527,7 +31296,7 @@
       </p:sp>
       <p:sp>
         <p:nvSpPr>
-          <p:cNvPr id="25" name="Text 23"/>
+          <p:cNvPr id="28" name="Text 26"/>
           <p:cNvSpPr/>
           <p:nvPr/>
         </p:nvSpPr>
@@ -30566,7 +31335,7 @@
       </p:sp>
       <p:sp>
         <p:nvSpPr>
-          <p:cNvPr id="26" name="Shape 24"/>
+          <p:cNvPr id="29" name="Shape 27"/>
           <p:cNvSpPr/>
           <p:nvPr/>
         </p:nvSpPr>
@@ -30593,7 +31362,7 @@
       </p:sp>
       <p:sp>
         <p:nvSpPr>
-          <p:cNvPr id="27" name="Text 25"/>
+          <p:cNvPr id="30" name="Text 28"/>
           <p:cNvSpPr/>
           <p:nvPr/>
         </p:nvSpPr>
@@ -30632,7 +31401,7 @@
       </p:sp>
       <p:sp>
         <p:nvSpPr>
-          <p:cNvPr id="28" name="Shape 26"/>
+          <p:cNvPr id="31" name="Shape 29"/>
           <p:cNvSpPr/>
           <p:nvPr/>
         </p:nvSpPr>
@@ -30659,7 +31428,7 @@
       </p:sp>
       <p:sp>
         <p:nvSpPr>
-          <p:cNvPr id="29" name="Text 27"/>
+          <p:cNvPr id="32" name="Text 30"/>
           <p:cNvSpPr/>
           <p:nvPr/>
         </p:nvSpPr>
@@ -30982,7 +31751,7 @@
                 <a:ea typeface="Calibri" pitchFamily="34" charset="-122"/>
                 <a:cs typeface="Calibri" pitchFamily="34" charset="-120"/>
               </a:rPr>
-              <a:t>Word Labs  •  wordlabs.app  •  Root: 'scope' = to look, see, observe</a:t>
+              <a:t>Word Labs  •  wordlabs.app  •  Root: 'scope' = look; view; examine</a:t>
             </a:r>
             <a:endParaRPr lang="en-US" sz="800" dirty="0"/>
           </a:p>
@@ -31121,7 +31890,7 @@
                 <a:ea typeface="Trebuchet MS" pitchFamily="34" charset="-122"/>
                 <a:cs typeface="Trebuchet MS" pitchFamily="34" charset="-120"/>
               </a:rPr>
-              <a:t>microscope</a:t>
+              <a:t>kaleidoscopes</a:t>
             </a:r>
             <a:endParaRPr lang="en-US" sz="2800" dirty="0"/>
           </a:p>
@@ -31201,7 +31970,7 @@
         </p:nvSpPr>
         <p:spPr>
           <a:xfrm>
-            <a:off x="2938272" y="2258568"/>
+            <a:off x="2221992" y="2258568"/>
             <a:ext cx="1828800" cy="292608"/>
           </a:xfrm>
           <a:prstGeom prst="rect">
@@ -31235,7 +32004,7 @@
         </p:nvSpPr>
         <p:spPr>
           <a:xfrm>
-            <a:off x="2938272" y="2258568"/>
+            <a:off x="2221992" y="2258568"/>
             <a:ext cx="1828800" cy="292608"/>
           </a:xfrm>
           <a:prstGeom prst="rect">
@@ -31260,7 +32029,7 @@
                 <a:ea typeface="Trebuchet MS" pitchFamily="34" charset="-122"/>
                 <a:cs typeface="Trebuchet MS" pitchFamily="34" charset="-120"/>
               </a:rPr>
-              <a:t>micro</a:t>
+              <a:t>kaleido</a:t>
             </a:r>
             <a:endParaRPr lang="en-US" sz="1300" dirty="0"/>
           </a:p>
@@ -31274,7 +32043,7 @@
         </p:nvSpPr>
         <p:spPr>
           <a:xfrm>
-            <a:off x="2938272" y="2569464"/>
+            <a:off x="2221992" y="2569464"/>
             <a:ext cx="1828800" cy="201168"/>
           </a:xfrm>
           <a:prstGeom prst="rect">
@@ -31299,7 +32068,7 @@
                 <a:ea typeface="Calibri" pitchFamily="34" charset="-122"/>
                 <a:cs typeface="Calibri" pitchFamily="34" charset="-120"/>
               </a:rPr>
-              <a:t>very small</a:t>
+              <a:t>beautiful form</a:t>
             </a:r>
             <a:endParaRPr lang="en-US" sz="850" dirty="0"/>
           </a:p>
@@ -31313,7 +32082,7 @@
         </p:nvSpPr>
         <p:spPr>
           <a:xfrm>
-            <a:off x="5803392" y="2258568"/>
+            <a:off x="4370832" y="2258568"/>
             <a:ext cx="1828800" cy="292608"/>
           </a:xfrm>
           <a:prstGeom prst="rect">
@@ -31347,7 +32116,7 @@
         </p:nvSpPr>
         <p:spPr>
           <a:xfrm>
-            <a:off x="5803392" y="2258568"/>
+            <a:off x="4370832" y="2258568"/>
             <a:ext cx="1828800" cy="292608"/>
           </a:xfrm>
           <a:prstGeom prst="rect">
@@ -31386,7 +32155,7 @@
         </p:nvSpPr>
         <p:spPr>
           <a:xfrm>
-            <a:off x="5803392" y="2569464"/>
+            <a:off x="4370832" y="2569464"/>
             <a:ext cx="1828800" cy="201168"/>
           </a:xfrm>
           <a:prstGeom prst="rect">
@@ -31411,7 +32180,7 @@
                 <a:ea typeface="Calibri" pitchFamily="34" charset="-122"/>
                 <a:cs typeface="Calibri" pitchFamily="34" charset="-120"/>
               </a:rPr>
-              <a:t>to look or observe</a:t>
+              <a:t>look; view; examine</a:t>
             </a:r>
             <a:endParaRPr lang="en-US" sz="850" dirty="0"/>
           </a:p>
@@ -31420,6 +32189,118 @@
       <p:sp>
         <p:nvSpPr>
           <p:cNvPr id="22" name="Shape 20"/>
+          <p:cNvSpPr/>
+          <p:nvPr/>
+        </p:nvSpPr>
+        <p:spPr>
+          <a:xfrm>
+            <a:off x="6519672" y="2258568"/>
+            <a:ext cx="1828800" cy="292608"/>
+          </a:xfrm>
+          <a:prstGeom prst="rect">
+            <a:avLst>
+              <a:gd name="adj" fmla="val 25000"/>
+            </a:avLst>
+          </a:prstGeom>
+          <a:solidFill>
+            <a:srgbClr val="FCE7F3"/>
+          </a:solidFill>
+          <a:ln w="19050">
+            <a:solidFill>
+              <a:srgbClr val="DB2777"/>
+            </a:solidFill>
+            <a:prstDash val="solid"/>
+          </a:ln>
+          <a:effectLst>
+            <a:outerShdw sx="100000" sy="100000" kx="0" ky="0" algn="bl" rotWithShape="0" blurRad="101600" dist="38100" dir="8100000">
+              <a:srgbClr val="000000">
+                <a:alpha val="12000"/>
+              </a:srgbClr>
+            </a:outerShdw>
+          </a:effectLst>
+        </p:spPr>
+      </p:sp>
+      <p:sp>
+        <p:nvSpPr>
+          <p:cNvPr id="23" name="Text 21"/>
+          <p:cNvSpPr/>
+          <p:nvPr/>
+        </p:nvSpPr>
+        <p:spPr>
+          <a:xfrm>
+            <a:off x="6519672" y="2258568"/>
+            <a:ext cx="1828800" cy="292608"/>
+          </a:xfrm>
+          <a:prstGeom prst="rect">
+            <a:avLst/>
+          </a:prstGeom>
+          <a:noFill/>
+          <a:ln/>
+        </p:spPr>
+        <p:txBody>
+          <a:bodyPr wrap="square" lIns="0" tIns="0" rIns="0" bIns="0" rtlCol="0" anchor="ctr"/>
+          <a:lstStyle/>
+          <a:p>
+            <a:pPr algn="ctr" indent="0" marL="0">
+              <a:buNone/>
+            </a:pPr>
+            <a:r>
+              <a:rPr lang="en-US" sz="1300" b="1" dirty="0">
+                <a:solidFill>
+                  <a:srgbClr val="9D174D"/>
+                </a:solidFill>
+                <a:latin typeface="Trebuchet MS" pitchFamily="34" charset="0"/>
+                <a:ea typeface="Trebuchet MS" pitchFamily="34" charset="-122"/>
+                <a:cs typeface="Trebuchet MS" pitchFamily="34" charset="-120"/>
+              </a:rPr>
+              <a:t>s</a:t>
+            </a:r>
+            <a:endParaRPr lang="en-US" sz="1300" dirty="0"/>
+          </a:p>
+        </p:txBody>
+      </p:sp>
+      <p:sp>
+        <p:nvSpPr>
+          <p:cNvPr id="24" name="Text 22"/>
+          <p:cNvSpPr/>
+          <p:nvPr/>
+        </p:nvSpPr>
+        <p:spPr>
+          <a:xfrm>
+            <a:off x="6519672" y="2569464"/>
+            <a:ext cx="1828800" cy="201168"/>
+          </a:xfrm>
+          <a:prstGeom prst="rect">
+            <a:avLst/>
+          </a:prstGeom>
+          <a:noFill/>
+          <a:ln/>
+        </p:spPr>
+        <p:txBody>
+          <a:bodyPr wrap="square" lIns="0" tIns="0" rIns="0" bIns="0" rtlCol="0" anchor="t"/>
+          <a:lstStyle/>
+          <a:p>
+            <a:pPr algn="ctr" indent="0" marL="0">
+              <a:buNone/>
+            </a:pPr>
+            <a:r>
+              <a:rPr lang="en-US" sz="850" dirty="0">
+                <a:solidFill>
+                  <a:srgbClr val="475569"/>
+                </a:solidFill>
+                <a:latin typeface="Calibri" pitchFamily="34" charset="0"/>
+                <a:ea typeface="Calibri" pitchFamily="34" charset="-122"/>
+                <a:cs typeface="Calibri" pitchFamily="34" charset="-120"/>
+              </a:rPr>
+              <a:t>plural or present tense</a:t>
+            </a:r>
+            <a:endParaRPr lang="en-US" sz="850" dirty="0"/>
+          </a:p>
+        </p:txBody>
+      </p:sp>
+      <p:sp>
+        <p:nvSpPr>
+          <p:cNvPr id="25" name="Shape 23"/>
           <p:cNvSpPr/>
           <p:nvPr/>
         </p:nvSpPr>
@@ -31446,7 +32327,7 @@
       </p:sp>
       <p:sp>
         <p:nvSpPr>
-          <p:cNvPr id="23" name="Text 21"/>
+          <p:cNvPr id="26" name="Text 24"/>
           <p:cNvSpPr/>
           <p:nvPr/>
         </p:nvSpPr>
@@ -31485,7 +32366,7 @@
       </p:sp>
       <p:sp>
         <p:nvSpPr>
-          <p:cNvPr id="24" name="Shape 22"/>
+          <p:cNvPr id="27" name="Shape 25"/>
           <p:cNvSpPr/>
           <p:nvPr/>
         </p:nvSpPr>
@@ -31512,14 +32393,14 @@
       </p:sp>
       <p:sp>
         <p:nvSpPr>
-          <p:cNvPr id="25" name="Shape 23"/>
-          <p:cNvSpPr/>
-          <p:nvPr/>
-        </p:nvSpPr>
-        <p:spPr>
-          <a:xfrm>
-            <a:off x="2313432" y="3364992"/>
-            <a:ext cx="1645920" cy="475488"/>
+          <p:cNvPr id="28" name="Shape 26"/>
+          <p:cNvSpPr/>
+          <p:nvPr/>
+        </p:nvSpPr>
+        <p:spPr>
+          <a:xfrm>
+            <a:off x="1975104" y="3364992"/>
+            <a:ext cx="1554480" cy="475488"/>
           </a:xfrm>
           <a:prstGeom prst="rect">
             <a:avLst>
@@ -31539,14 +32420,14 @@
       </p:sp>
       <p:sp>
         <p:nvSpPr>
-          <p:cNvPr id="26" name="Text 24"/>
-          <p:cNvSpPr/>
-          <p:nvPr/>
-        </p:nvSpPr>
-        <p:spPr>
-          <a:xfrm>
-            <a:off x="2313432" y="3364992"/>
-            <a:ext cx="1645920" cy="475488"/>
+          <p:cNvPr id="29" name="Text 27"/>
+          <p:cNvSpPr/>
+          <p:nvPr/>
+        </p:nvSpPr>
+        <p:spPr>
+          <a:xfrm>
+            <a:off x="1975104" y="3364992"/>
+            <a:ext cx="1554480" cy="475488"/>
           </a:xfrm>
           <a:prstGeom prst="rect">
             <a:avLst/>
@@ -31570,7 +32451,7 @@
                 <a:ea typeface="Trebuchet MS" pitchFamily="34" charset="-122"/>
                 <a:cs typeface="Trebuchet MS" pitchFamily="34" charset="-120"/>
               </a:rPr>
-              <a:t>mi</a:t>
+              <a:t>ka</a:t>
             </a:r>
             <a:endParaRPr lang="en-US" sz="1400" dirty="0"/>
           </a:p>
@@ -31578,14 +32459,14 @@
       </p:sp>
       <p:sp>
         <p:nvSpPr>
-          <p:cNvPr id="27" name="Text 25"/>
-          <p:cNvSpPr/>
-          <p:nvPr/>
-        </p:nvSpPr>
-        <p:spPr>
-          <a:xfrm>
-            <a:off x="3959352" y="3364992"/>
-            <a:ext cx="411480" cy="475488"/>
+          <p:cNvPr id="30" name="Text 28"/>
+          <p:cNvSpPr/>
+          <p:nvPr/>
+        </p:nvSpPr>
+        <p:spPr>
+          <a:xfrm>
+            <a:off x="3529584" y="3364992"/>
+            <a:ext cx="73152" cy="475488"/>
           </a:xfrm>
           <a:prstGeom prst="rect">
             <a:avLst/>
@@ -31617,14 +32498,14 @@
       </p:sp>
       <p:sp>
         <p:nvSpPr>
-          <p:cNvPr id="28" name="Shape 26"/>
-          <p:cNvSpPr/>
-          <p:nvPr/>
-        </p:nvSpPr>
-        <p:spPr>
-          <a:xfrm>
-            <a:off x="4370832" y="3364992"/>
-            <a:ext cx="1645920" cy="475488"/>
+          <p:cNvPr id="31" name="Shape 29"/>
+          <p:cNvSpPr/>
+          <p:nvPr/>
+        </p:nvSpPr>
+        <p:spPr>
+          <a:xfrm>
+            <a:off x="3602736" y="3364992"/>
+            <a:ext cx="1554480" cy="475488"/>
           </a:xfrm>
           <a:prstGeom prst="rect">
             <a:avLst>
@@ -31644,14 +32525,14 @@
       </p:sp>
       <p:sp>
         <p:nvSpPr>
-          <p:cNvPr id="29" name="Text 27"/>
-          <p:cNvSpPr/>
-          <p:nvPr/>
-        </p:nvSpPr>
-        <p:spPr>
-          <a:xfrm>
-            <a:off x="4370832" y="3364992"/>
-            <a:ext cx="1645920" cy="475488"/>
+          <p:cNvPr id="32" name="Text 30"/>
+          <p:cNvSpPr/>
+          <p:nvPr/>
+        </p:nvSpPr>
+        <p:spPr>
+          <a:xfrm>
+            <a:off x="3602736" y="3364992"/>
+            <a:ext cx="1554480" cy="475488"/>
           </a:xfrm>
           <a:prstGeom prst="rect">
             <a:avLst/>
@@ -31675,7 +32556,7 @@
                 <a:ea typeface="Trebuchet MS" pitchFamily="34" charset="-122"/>
                 <a:cs typeface="Trebuchet MS" pitchFamily="34" charset="-120"/>
               </a:rPr>
-              <a:t>cro</a:t>
+              <a:t>lei</a:t>
             </a:r>
             <a:endParaRPr lang="en-US" sz="1400" dirty="0"/>
           </a:p>
@@ -31683,14 +32564,14 @@
       </p:sp>
       <p:sp>
         <p:nvSpPr>
-          <p:cNvPr id="30" name="Text 28"/>
-          <p:cNvSpPr/>
-          <p:nvPr/>
-        </p:nvSpPr>
-        <p:spPr>
-          <a:xfrm>
-            <a:off x="6016752" y="3364992"/>
-            <a:ext cx="411480" cy="475488"/>
+          <p:cNvPr id="33" name="Text 31"/>
+          <p:cNvSpPr/>
+          <p:nvPr/>
+        </p:nvSpPr>
+        <p:spPr>
+          <a:xfrm>
+            <a:off x="5157216" y="3364992"/>
+            <a:ext cx="73152" cy="475488"/>
           </a:xfrm>
           <a:prstGeom prst="rect">
             <a:avLst/>
@@ -31722,14 +32603,14 @@
       </p:sp>
       <p:sp>
         <p:nvSpPr>
-          <p:cNvPr id="31" name="Shape 29"/>
-          <p:cNvSpPr/>
-          <p:nvPr/>
-        </p:nvSpPr>
-        <p:spPr>
-          <a:xfrm>
-            <a:off x="6428232" y="3364992"/>
-            <a:ext cx="1645920" cy="475488"/>
+          <p:cNvPr id="34" name="Shape 32"/>
+          <p:cNvSpPr/>
+          <p:nvPr/>
+        </p:nvSpPr>
+        <p:spPr>
+          <a:xfrm>
+            <a:off x="5230368" y="3364992"/>
+            <a:ext cx="1554480" cy="475488"/>
           </a:xfrm>
           <a:prstGeom prst="rect">
             <a:avLst>
@@ -31749,14 +32630,14 @@
       </p:sp>
       <p:sp>
         <p:nvSpPr>
-          <p:cNvPr id="32" name="Text 30"/>
-          <p:cNvSpPr/>
-          <p:nvPr/>
-        </p:nvSpPr>
-        <p:spPr>
-          <a:xfrm>
-            <a:off x="6428232" y="3364992"/>
-            <a:ext cx="1645920" cy="475488"/>
+          <p:cNvPr id="35" name="Text 33"/>
+          <p:cNvSpPr/>
+          <p:nvPr/>
+        </p:nvSpPr>
+        <p:spPr>
+          <a:xfrm>
+            <a:off x="5230368" y="3364992"/>
+            <a:ext cx="1554480" cy="475488"/>
           </a:xfrm>
           <a:prstGeom prst="rect">
             <a:avLst/>
@@ -31780,7 +32661,7 @@
                 <a:ea typeface="Trebuchet MS" pitchFamily="34" charset="-122"/>
                 <a:cs typeface="Trebuchet MS" pitchFamily="34" charset="-120"/>
               </a:rPr>
-              <a:t>scope</a:t>
+              <a:t>do</a:t>
             </a:r>
             <a:endParaRPr lang="en-US" sz="1400" dirty="0"/>
           </a:p>
@@ -31788,7 +32669,112 @@
       </p:sp>
       <p:sp>
         <p:nvSpPr>
-          <p:cNvPr id="33" name="Shape 31"/>
+          <p:cNvPr id="36" name="Text 34"/>
+          <p:cNvSpPr/>
+          <p:nvPr/>
+        </p:nvSpPr>
+        <p:spPr>
+          <a:xfrm>
+            <a:off x="6784848" y="3364992"/>
+            <a:ext cx="73152" cy="475488"/>
+          </a:xfrm>
+          <a:prstGeom prst="rect">
+            <a:avLst/>
+          </a:prstGeom>
+          <a:noFill/>
+          <a:ln/>
+        </p:spPr>
+        <p:txBody>
+          <a:bodyPr wrap="square" lIns="0" tIns="0" rIns="0" bIns="0" rtlCol="0" anchor="ctr"/>
+          <a:lstStyle/>
+          <a:p>
+            <a:pPr algn="ctr" indent="0" marL="0">
+              <a:buNone/>
+            </a:pPr>
+            <a:r>
+              <a:rPr lang="en-US" sz="1600" b="1" dirty="0">
+                <a:solidFill>
+                  <a:srgbClr val="0D9488"/>
+                </a:solidFill>
+                <a:latin typeface="Trebuchet MS" pitchFamily="34" charset="0"/>
+                <a:ea typeface="Trebuchet MS" pitchFamily="34" charset="-122"/>
+                <a:cs typeface="Trebuchet MS" pitchFamily="34" charset="-120"/>
+              </a:rPr>
+              <a:t>·</a:t>
+            </a:r>
+            <a:endParaRPr lang="en-US" sz="1600" dirty="0"/>
+          </a:p>
+        </p:txBody>
+      </p:sp>
+      <p:sp>
+        <p:nvSpPr>
+          <p:cNvPr id="37" name="Shape 35"/>
+          <p:cNvSpPr/>
+          <p:nvPr/>
+        </p:nvSpPr>
+        <p:spPr>
+          <a:xfrm>
+            <a:off x="6858000" y="3364992"/>
+            <a:ext cx="1554480" cy="475488"/>
+          </a:xfrm>
+          <a:prstGeom prst="rect">
+            <a:avLst>
+              <a:gd name="adj" fmla="val 9615"/>
+            </a:avLst>
+          </a:prstGeom>
+          <a:solidFill>
+            <a:srgbClr val="FFFFFF"/>
+          </a:solidFill>
+          <a:ln w="12700">
+            <a:solidFill>
+              <a:srgbClr val="0D9488"/>
+            </a:solidFill>
+            <a:prstDash val="solid"/>
+          </a:ln>
+        </p:spPr>
+      </p:sp>
+      <p:sp>
+        <p:nvSpPr>
+          <p:cNvPr id="38" name="Text 36"/>
+          <p:cNvSpPr/>
+          <p:nvPr/>
+        </p:nvSpPr>
+        <p:spPr>
+          <a:xfrm>
+            <a:off x="6858000" y="3364992"/>
+            <a:ext cx="1554480" cy="475488"/>
+          </a:xfrm>
+          <a:prstGeom prst="rect">
+            <a:avLst/>
+          </a:prstGeom>
+          <a:noFill/>
+          <a:ln/>
+        </p:spPr>
+        <p:txBody>
+          <a:bodyPr wrap="square" lIns="0" tIns="0" rIns="0" bIns="0" rtlCol="0" anchor="ctr"/>
+          <a:lstStyle/>
+          <a:p>
+            <a:pPr algn="ctr" indent="0" marL="0">
+              <a:buNone/>
+            </a:pPr>
+            <a:r>
+              <a:rPr lang="en-US" sz="1400" b="1" dirty="0">
+                <a:solidFill>
+                  <a:srgbClr val="0D9488"/>
+                </a:solidFill>
+                <a:latin typeface="Trebuchet MS" pitchFamily="34" charset="0"/>
+                <a:ea typeface="Trebuchet MS" pitchFamily="34" charset="-122"/>
+                <a:cs typeface="Trebuchet MS" pitchFamily="34" charset="-120"/>
+              </a:rPr>
+              <a:t>scopes</a:t>
+            </a:r>
+            <a:endParaRPr lang="en-US" sz="1400" dirty="0"/>
+          </a:p>
+        </p:txBody>
+      </p:sp>
+      <p:sp>
+        <p:nvSpPr>
+          <p:cNvPr id="39" name="Shape 37"/>
           <p:cNvSpPr/>
           <p:nvPr/>
         </p:nvSpPr>
@@ -31815,7 +32801,7 @@
       </p:sp>
       <p:sp>
         <p:nvSpPr>
-          <p:cNvPr id="34" name="Text 32"/>
+          <p:cNvPr id="40" name="Text 38"/>
           <p:cNvSpPr/>
           <p:nvPr/>
         </p:nvSpPr>
@@ -31854,7 +32840,7 @@
       </p:sp>
       <p:sp>
         <p:nvSpPr>
-          <p:cNvPr id="35" name="Shape 33"/>
+          <p:cNvPr id="41" name="Shape 39"/>
           <p:cNvSpPr/>
           <p:nvPr/>
         </p:nvSpPr>
@@ -31881,7 +32867,7 @@
       </p:sp>
       <p:sp>
         <p:nvSpPr>
-          <p:cNvPr id="36" name="Text 34"/>
+          <p:cNvPr id="42" name="Text 40"/>
           <p:cNvSpPr/>
           <p:nvPr/>
         </p:nvSpPr>
@@ -32204,7 +33190,7 @@
                 <a:ea typeface="Calibri" pitchFamily="34" charset="-122"/>
                 <a:cs typeface="Calibri" pitchFamily="34" charset="-120"/>
               </a:rPr>
-              <a:t>Word Labs  •  wordlabs.app  •  Root: 'scope' = to look, see, observe</a:t>
+              <a:t>Word Labs  •  wordlabs.app  •  Root: 'scope' = look; view; examine</a:t>
             </a:r>
             <a:endParaRPr lang="en-US" sz="800" dirty="0"/>
           </a:p>
@@ -32343,7 +33329,7 @@
                 <a:ea typeface="Trebuchet MS" pitchFamily="34" charset="-122"/>
                 <a:cs typeface="Trebuchet MS" pitchFamily="34" charset="-120"/>
               </a:rPr>
-              <a:t>microscope</a:t>
+              <a:t>kaleidoscopes</a:t>
             </a:r>
             <a:endParaRPr lang="en-US" sz="2800" dirty="0"/>
           </a:p>
@@ -32423,7 +33409,7 @@
         </p:nvSpPr>
         <p:spPr>
           <a:xfrm>
-            <a:off x="2938272" y="2258568"/>
+            <a:off x="2221992" y="2258568"/>
             <a:ext cx="1828800" cy="292608"/>
           </a:xfrm>
           <a:prstGeom prst="rect">
@@ -32457,7 +33443,7 @@
         </p:nvSpPr>
         <p:spPr>
           <a:xfrm>
-            <a:off x="2938272" y="2258568"/>
+            <a:off x="2221992" y="2258568"/>
             <a:ext cx="1828800" cy="292608"/>
           </a:xfrm>
           <a:prstGeom prst="rect">
@@ -32482,7 +33468,7 @@
                 <a:ea typeface="Trebuchet MS" pitchFamily="34" charset="-122"/>
                 <a:cs typeface="Trebuchet MS" pitchFamily="34" charset="-120"/>
               </a:rPr>
-              <a:t>micro</a:t>
+              <a:t>kaleido</a:t>
             </a:r>
             <a:endParaRPr lang="en-US" sz="1300" dirty="0"/>
           </a:p>
@@ -32496,7 +33482,7 @@
         </p:nvSpPr>
         <p:spPr>
           <a:xfrm>
-            <a:off x="2938272" y="2569464"/>
+            <a:off x="2221992" y="2569464"/>
             <a:ext cx="1828800" cy="201168"/>
           </a:xfrm>
           <a:prstGeom prst="rect">
@@ -32521,7 +33507,7 @@
                 <a:ea typeface="Calibri" pitchFamily="34" charset="-122"/>
                 <a:cs typeface="Calibri" pitchFamily="34" charset="-120"/>
               </a:rPr>
-              <a:t>very small</a:t>
+              <a:t>beautiful form</a:t>
             </a:r>
             <a:endParaRPr lang="en-US" sz="850" dirty="0"/>
           </a:p>
@@ -32535,7 +33521,7 @@
         </p:nvSpPr>
         <p:spPr>
           <a:xfrm>
-            <a:off x="5803392" y="2258568"/>
+            <a:off x="4370832" y="2258568"/>
             <a:ext cx="1828800" cy="292608"/>
           </a:xfrm>
           <a:prstGeom prst="rect">
@@ -32569,7 +33555,7 @@
         </p:nvSpPr>
         <p:spPr>
           <a:xfrm>
-            <a:off x="5803392" y="2258568"/>
+            <a:off x="4370832" y="2258568"/>
             <a:ext cx="1828800" cy="292608"/>
           </a:xfrm>
           <a:prstGeom prst="rect">
@@ -32608,7 +33594,7 @@
         </p:nvSpPr>
         <p:spPr>
           <a:xfrm>
-            <a:off x="5803392" y="2569464"/>
+            <a:off x="4370832" y="2569464"/>
             <a:ext cx="1828800" cy="201168"/>
           </a:xfrm>
           <a:prstGeom prst="rect">
@@ -32633,7 +33619,7 @@
                 <a:ea typeface="Calibri" pitchFamily="34" charset="-122"/>
                 <a:cs typeface="Calibri" pitchFamily="34" charset="-120"/>
               </a:rPr>
-              <a:t>to look or observe</a:t>
+              <a:t>look; view; examine</a:t>
             </a:r>
             <a:endParaRPr lang="en-US" sz="850" dirty="0"/>
           </a:p>
@@ -32642,6 +33628,118 @@
       <p:sp>
         <p:nvSpPr>
           <p:cNvPr id="22" name="Shape 20"/>
+          <p:cNvSpPr/>
+          <p:nvPr/>
+        </p:nvSpPr>
+        <p:spPr>
+          <a:xfrm>
+            <a:off x="6519672" y="2258568"/>
+            <a:ext cx="1828800" cy="292608"/>
+          </a:xfrm>
+          <a:prstGeom prst="rect">
+            <a:avLst>
+              <a:gd name="adj" fmla="val 25000"/>
+            </a:avLst>
+          </a:prstGeom>
+          <a:solidFill>
+            <a:srgbClr val="FCE7F3"/>
+          </a:solidFill>
+          <a:ln w="19050">
+            <a:solidFill>
+              <a:srgbClr val="DB2777"/>
+            </a:solidFill>
+            <a:prstDash val="solid"/>
+          </a:ln>
+          <a:effectLst>
+            <a:outerShdw sx="100000" sy="100000" kx="0" ky="0" algn="bl" rotWithShape="0" blurRad="101600" dist="38100" dir="8100000">
+              <a:srgbClr val="000000">
+                <a:alpha val="12000"/>
+              </a:srgbClr>
+            </a:outerShdw>
+          </a:effectLst>
+        </p:spPr>
+      </p:sp>
+      <p:sp>
+        <p:nvSpPr>
+          <p:cNvPr id="23" name="Text 21"/>
+          <p:cNvSpPr/>
+          <p:nvPr/>
+        </p:nvSpPr>
+        <p:spPr>
+          <a:xfrm>
+            <a:off x="6519672" y="2258568"/>
+            <a:ext cx="1828800" cy="292608"/>
+          </a:xfrm>
+          <a:prstGeom prst="rect">
+            <a:avLst/>
+          </a:prstGeom>
+          <a:noFill/>
+          <a:ln/>
+        </p:spPr>
+        <p:txBody>
+          <a:bodyPr wrap="square" lIns="0" tIns="0" rIns="0" bIns="0" rtlCol="0" anchor="ctr"/>
+          <a:lstStyle/>
+          <a:p>
+            <a:pPr algn="ctr" indent="0" marL="0">
+              <a:buNone/>
+            </a:pPr>
+            <a:r>
+              <a:rPr lang="en-US" sz="1300" b="1" dirty="0">
+                <a:solidFill>
+                  <a:srgbClr val="9D174D"/>
+                </a:solidFill>
+                <a:latin typeface="Trebuchet MS" pitchFamily="34" charset="0"/>
+                <a:ea typeface="Trebuchet MS" pitchFamily="34" charset="-122"/>
+                <a:cs typeface="Trebuchet MS" pitchFamily="34" charset="-120"/>
+              </a:rPr>
+              <a:t>s</a:t>
+            </a:r>
+            <a:endParaRPr lang="en-US" sz="1300" dirty="0"/>
+          </a:p>
+        </p:txBody>
+      </p:sp>
+      <p:sp>
+        <p:nvSpPr>
+          <p:cNvPr id="24" name="Text 22"/>
+          <p:cNvSpPr/>
+          <p:nvPr/>
+        </p:nvSpPr>
+        <p:spPr>
+          <a:xfrm>
+            <a:off x="6519672" y="2569464"/>
+            <a:ext cx="1828800" cy="201168"/>
+          </a:xfrm>
+          <a:prstGeom prst="rect">
+            <a:avLst/>
+          </a:prstGeom>
+          <a:noFill/>
+          <a:ln/>
+        </p:spPr>
+        <p:txBody>
+          <a:bodyPr wrap="square" lIns="0" tIns="0" rIns="0" bIns="0" rtlCol="0" anchor="t"/>
+          <a:lstStyle/>
+          <a:p>
+            <a:pPr algn="ctr" indent="0" marL="0">
+              <a:buNone/>
+            </a:pPr>
+            <a:r>
+              <a:rPr lang="en-US" sz="850" dirty="0">
+                <a:solidFill>
+                  <a:srgbClr val="475569"/>
+                </a:solidFill>
+                <a:latin typeface="Calibri" pitchFamily="34" charset="0"/>
+                <a:ea typeface="Calibri" pitchFamily="34" charset="-122"/>
+                <a:cs typeface="Calibri" pitchFamily="34" charset="-120"/>
+              </a:rPr>
+              <a:t>plural or present tense</a:t>
+            </a:r>
+            <a:endParaRPr lang="en-US" sz="850" dirty="0"/>
+          </a:p>
+        </p:txBody>
+      </p:sp>
+      <p:sp>
+        <p:nvSpPr>
+          <p:cNvPr id="25" name="Shape 23"/>
           <p:cNvSpPr/>
           <p:nvPr/>
         </p:nvSpPr>
@@ -32668,7 +33766,7 @@
       </p:sp>
       <p:sp>
         <p:nvSpPr>
-          <p:cNvPr id="23" name="Text 21"/>
+          <p:cNvPr id="26" name="Text 24"/>
           <p:cNvSpPr/>
           <p:nvPr/>
         </p:nvSpPr>
@@ -32707,7 +33805,7 @@
       </p:sp>
       <p:sp>
         <p:nvSpPr>
-          <p:cNvPr id="24" name="Shape 22"/>
+          <p:cNvPr id="27" name="Shape 25"/>
           <p:cNvSpPr/>
           <p:nvPr/>
         </p:nvSpPr>
@@ -32734,14 +33832,14 @@
       </p:sp>
       <p:sp>
         <p:nvSpPr>
-          <p:cNvPr id="25" name="Shape 23"/>
-          <p:cNvSpPr/>
-          <p:nvPr/>
-        </p:nvSpPr>
-        <p:spPr>
-          <a:xfrm>
-            <a:off x="2313432" y="3364992"/>
-            <a:ext cx="1645920" cy="475488"/>
+          <p:cNvPr id="28" name="Shape 26"/>
+          <p:cNvSpPr/>
+          <p:nvPr/>
+        </p:nvSpPr>
+        <p:spPr>
+          <a:xfrm>
+            <a:off x="1975104" y="3364992"/>
+            <a:ext cx="1554480" cy="475488"/>
           </a:xfrm>
           <a:prstGeom prst="rect">
             <a:avLst>
@@ -32761,14 +33859,14 @@
       </p:sp>
       <p:sp>
         <p:nvSpPr>
-          <p:cNvPr id="26" name="Text 24"/>
-          <p:cNvSpPr/>
-          <p:nvPr/>
-        </p:nvSpPr>
-        <p:spPr>
-          <a:xfrm>
-            <a:off x="2313432" y="3364992"/>
-            <a:ext cx="1645920" cy="475488"/>
+          <p:cNvPr id="29" name="Text 27"/>
+          <p:cNvSpPr/>
+          <p:nvPr/>
+        </p:nvSpPr>
+        <p:spPr>
+          <a:xfrm>
+            <a:off x="1975104" y="3364992"/>
+            <a:ext cx="1554480" cy="475488"/>
           </a:xfrm>
           <a:prstGeom prst="rect">
             <a:avLst/>
@@ -32792,7 +33890,7 @@
                 <a:ea typeface="Trebuchet MS" pitchFamily="34" charset="-122"/>
                 <a:cs typeface="Trebuchet MS" pitchFamily="34" charset="-120"/>
               </a:rPr>
-              <a:t>mi</a:t>
+              <a:t>ka</a:t>
             </a:r>
             <a:endParaRPr lang="en-US" sz="1400" dirty="0"/>
           </a:p>
@@ -32800,14 +33898,14 @@
       </p:sp>
       <p:sp>
         <p:nvSpPr>
-          <p:cNvPr id="27" name="Text 25"/>
-          <p:cNvSpPr/>
-          <p:nvPr/>
-        </p:nvSpPr>
-        <p:spPr>
-          <a:xfrm>
-            <a:off x="3959352" y="3364992"/>
-            <a:ext cx="411480" cy="475488"/>
+          <p:cNvPr id="30" name="Text 28"/>
+          <p:cNvSpPr/>
+          <p:nvPr/>
+        </p:nvSpPr>
+        <p:spPr>
+          <a:xfrm>
+            <a:off x="3529584" y="3364992"/>
+            <a:ext cx="73152" cy="475488"/>
           </a:xfrm>
           <a:prstGeom prst="rect">
             <a:avLst/>
@@ -32839,14 +33937,14 @@
       </p:sp>
       <p:sp>
         <p:nvSpPr>
-          <p:cNvPr id="28" name="Shape 26"/>
-          <p:cNvSpPr/>
-          <p:nvPr/>
-        </p:nvSpPr>
-        <p:spPr>
-          <a:xfrm>
-            <a:off x="4370832" y="3364992"/>
-            <a:ext cx="1645920" cy="475488"/>
+          <p:cNvPr id="31" name="Shape 29"/>
+          <p:cNvSpPr/>
+          <p:nvPr/>
+        </p:nvSpPr>
+        <p:spPr>
+          <a:xfrm>
+            <a:off x="3602736" y="3364992"/>
+            <a:ext cx="1554480" cy="475488"/>
           </a:xfrm>
           <a:prstGeom prst="rect">
             <a:avLst>
@@ -32866,14 +33964,14 @@
       </p:sp>
       <p:sp>
         <p:nvSpPr>
-          <p:cNvPr id="29" name="Text 27"/>
-          <p:cNvSpPr/>
-          <p:nvPr/>
-        </p:nvSpPr>
-        <p:spPr>
-          <a:xfrm>
-            <a:off x="4370832" y="3364992"/>
-            <a:ext cx="1645920" cy="475488"/>
+          <p:cNvPr id="32" name="Text 30"/>
+          <p:cNvSpPr/>
+          <p:nvPr/>
+        </p:nvSpPr>
+        <p:spPr>
+          <a:xfrm>
+            <a:off x="3602736" y="3364992"/>
+            <a:ext cx="1554480" cy="475488"/>
           </a:xfrm>
           <a:prstGeom prst="rect">
             <a:avLst/>
@@ -32897,7 +33995,7 @@
                 <a:ea typeface="Trebuchet MS" pitchFamily="34" charset="-122"/>
                 <a:cs typeface="Trebuchet MS" pitchFamily="34" charset="-120"/>
               </a:rPr>
-              <a:t>cro</a:t>
+              <a:t>lei</a:t>
             </a:r>
             <a:endParaRPr lang="en-US" sz="1400" dirty="0"/>
           </a:p>
@@ -32905,14 +34003,14 @@
       </p:sp>
       <p:sp>
         <p:nvSpPr>
-          <p:cNvPr id="30" name="Text 28"/>
-          <p:cNvSpPr/>
-          <p:nvPr/>
-        </p:nvSpPr>
-        <p:spPr>
-          <a:xfrm>
-            <a:off x="6016752" y="3364992"/>
-            <a:ext cx="411480" cy="475488"/>
+          <p:cNvPr id="33" name="Text 31"/>
+          <p:cNvSpPr/>
+          <p:nvPr/>
+        </p:nvSpPr>
+        <p:spPr>
+          <a:xfrm>
+            <a:off x="5157216" y="3364992"/>
+            <a:ext cx="73152" cy="475488"/>
           </a:xfrm>
           <a:prstGeom prst="rect">
             <a:avLst/>
@@ -32944,14 +34042,14 @@
       </p:sp>
       <p:sp>
         <p:nvSpPr>
-          <p:cNvPr id="31" name="Shape 29"/>
-          <p:cNvSpPr/>
-          <p:nvPr/>
-        </p:nvSpPr>
-        <p:spPr>
-          <a:xfrm>
-            <a:off x="6428232" y="3364992"/>
-            <a:ext cx="1645920" cy="475488"/>
+          <p:cNvPr id="34" name="Shape 32"/>
+          <p:cNvSpPr/>
+          <p:nvPr/>
+        </p:nvSpPr>
+        <p:spPr>
+          <a:xfrm>
+            <a:off x="5230368" y="3364992"/>
+            <a:ext cx="1554480" cy="475488"/>
           </a:xfrm>
           <a:prstGeom prst="rect">
             <a:avLst>
@@ -32971,14 +34069,14 @@
       </p:sp>
       <p:sp>
         <p:nvSpPr>
-          <p:cNvPr id="32" name="Text 30"/>
-          <p:cNvSpPr/>
-          <p:nvPr/>
-        </p:nvSpPr>
-        <p:spPr>
-          <a:xfrm>
-            <a:off x="6428232" y="3364992"/>
-            <a:ext cx="1645920" cy="475488"/>
+          <p:cNvPr id="35" name="Text 33"/>
+          <p:cNvSpPr/>
+          <p:nvPr/>
+        </p:nvSpPr>
+        <p:spPr>
+          <a:xfrm>
+            <a:off x="5230368" y="3364992"/>
+            <a:ext cx="1554480" cy="475488"/>
           </a:xfrm>
           <a:prstGeom prst="rect">
             <a:avLst/>
@@ -33002,7 +34100,7 @@
                 <a:ea typeface="Trebuchet MS" pitchFamily="34" charset="-122"/>
                 <a:cs typeface="Trebuchet MS" pitchFamily="34" charset="-120"/>
               </a:rPr>
-              <a:t>scope</a:t>
+              <a:t>do</a:t>
             </a:r>
             <a:endParaRPr lang="en-US" sz="1400" dirty="0"/>
           </a:p>
@@ -33010,7 +34108,112 @@
       </p:sp>
       <p:sp>
         <p:nvSpPr>
-          <p:cNvPr id="33" name="Shape 31"/>
+          <p:cNvPr id="36" name="Text 34"/>
+          <p:cNvSpPr/>
+          <p:nvPr/>
+        </p:nvSpPr>
+        <p:spPr>
+          <a:xfrm>
+            <a:off x="6784848" y="3364992"/>
+            <a:ext cx="73152" cy="475488"/>
+          </a:xfrm>
+          <a:prstGeom prst="rect">
+            <a:avLst/>
+          </a:prstGeom>
+          <a:noFill/>
+          <a:ln/>
+        </p:spPr>
+        <p:txBody>
+          <a:bodyPr wrap="square" lIns="0" tIns="0" rIns="0" bIns="0" rtlCol="0" anchor="ctr"/>
+          <a:lstStyle/>
+          <a:p>
+            <a:pPr algn="ctr" indent="0" marL="0">
+              <a:buNone/>
+            </a:pPr>
+            <a:r>
+              <a:rPr lang="en-US" sz="1600" b="1" dirty="0">
+                <a:solidFill>
+                  <a:srgbClr val="0D9488"/>
+                </a:solidFill>
+                <a:latin typeface="Trebuchet MS" pitchFamily="34" charset="0"/>
+                <a:ea typeface="Trebuchet MS" pitchFamily="34" charset="-122"/>
+                <a:cs typeface="Trebuchet MS" pitchFamily="34" charset="-120"/>
+              </a:rPr>
+              <a:t>·</a:t>
+            </a:r>
+            <a:endParaRPr lang="en-US" sz="1600" dirty="0"/>
+          </a:p>
+        </p:txBody>
+      </p:sp>
+      <p:sp>
+        <p:nvSpPr>
+          <p:cNvPr id="37" name="Shape 35"/>
+          <p:cNvSpPr/>
+          <p:nvPr/>
+        </p:nvSpPr>
+        <p:spPr>
+          <a:xfrm>
+            <a:off x="6858000" y="3364992"/>
+            <a:ext cx="1554480" cy="475488"/>
+          </a:xfrm>
+          <a:prstGeom prst="rect">
+            <a:avLst>
+              <a:gd name="adj" fmla="val 9615"/>
+            </a:avLst>
+          </a:prstGeom>
+          <a:solidFill>
+            <a:srgbClr val="FFFFFF"/>
+          </a:solidFill>
+          <a:ln w="12700">
+            <a:solidFill>
+              <a:srgbClr val="0D9488"/>
+            </a:solidFill>
+            <a:prstDash val="solid"/>
+          </a:ln>
+        </p:spPr>
+      </p:sp>
+      <p:sp>
+        <p:nvSpPr>
+          <p:cNvPr id="38" name="Text 36"/>
+          <p:cNvSpPr/>
+          <p:nvPr/>
+        </p:nvSpPr>
+        <p:spPr>
+          <a:xfrm>
+            <a:off x="6858000" y="3364992"/>
+            <a:ext cx="1554480" cy="475488"/>
+          </a:xfrm>
+          <a:prstGeom prst="rect">
+            <a:avLst/>
+          </a:prstGeom>
+          <a:noFill/>
+          <a:ln/>
+        </p:spPr>
+        <p:txBody>
+          <a:bodyPr wrap="square" lIns="0" tIns="0" rIns="0" bIns="0" rtlCol="0" anchor="ctr"/>
+          <a:lstStyle/>
+          <a:p>
+            <a:pPr algn="ctr" indent="0" marL="0">
+              <a:buNone/>
+            </a:pPr>
+            <a:r>
+              <a:rPr lang="en-US" sz="1400" b="1" dirty="0">
+                <a:solidFill>
+                  <a:srgbClr val="0D9488"/>
+                </a:solidFill>
+                <a:latin typeface="Trebuchet MS" pitchFamily="34" charset="0"/>
+                <a:ea typeface="Trebuchet MS" pitchFamily="34" charset="-122"/>
+                <a:cs typeface="Trebuchet MS" pitchFamily="34" charset="-120"/>
+              </a:rPr>
+              <a:t>scopes</a:t>
+            </a:r>
+            <a:endParaRPr lang="en-US" sz="1400" dirty="0"/>
+          </a:p>
+        </p:txBody>
+      </p:sp>
+      <p:sp>
+        <p:nvSpPr>
+          <p:cNvPr id="39" name="Shape 37"/>
           <p:cNvSpPr/>
           <p:nvPr/>
         </p:nvSpPr>
@@ -33037,7 +34240,7 @@
       </p:sp>
       <p:sp>
         <p:nvSpPr>
-          <p:cNvPr id="34" name="Text 32"/>
+          <p:cNvPr id="40" name="Text 38"/>
           <p:cNvSpPr/>
           <p:nvPr/>
         </p:nvSpPr>
@@ -33076,18 +34279,18 @@
       </p:sp>
       <p:sp>
         <p:nvSpPr>
-          <p:cNvPr id="35" name="Shape 33"/>
+          <p:cNvPr id="41" name="Shape 39"/>
           <p:cNvSpPr/>
           <p:nvPr/>
         </p:nvSpPr>
         <p:spPr>
           <a:xfrm>
             <a:off x="1874520" y="4096512"/>
-            <a:ext cx="6903720" cy="804672"/>
+            <a:ext cx="6903720" cy="658368"/>
           </a:xfrm>
           <a:prstGeom prst="rect">
             <a:avLst>
-              <a:gd name="adj" fmla="val 6818"/>
+              <a:gd name="adj" fmla="val 8333"/>
             </a:avLst>
           </a:prstGeom>
           <a:solidFill>
@@ -33103,18 +34306,18 @@
       </p:sp>
       <p:sp>
         <p:nvSpPr>
-          <p:cNvPr id="36" name="Shape 34"/>
-          <p:cNvSpPr/>
-          <p:nvPr/>
-        </p:nvSpPr>
-        <p:spPr>
-          <a:xfrm>
-            <a:off x="2124837" y="4169664"/>
-            <a:ext cx="685800" cy="384048"/>
+          <p:cNvPr id="42" name="Shape 40"/>
+          <p:cNvSpPr/>
+          <p:nvPr/>
+        </p:nvSpPr>
+        <p:spPr>
+          <a:xfrm>
+            <a:off x="1952244" y="4169664"/>
+            <a:ext cx="543652" cy="475488"/>
           </a:xfrm>
           <a:prstGeom prst="rect">
             <a:avLst>
-              <a:gd name="adj" fmla="val 9524"/>
+              <a:gd name="adj" fmla="val 7692"/>
             </a:avLst>
           </a:prstGeom>
           <a:solidFill>
@@ -33130,14 +34333,14 @@
       </p:sp>
       <p:sp>
         <p:nvSpPr>
-          <p:cNvPr id="37" name="Text 35"/>
-          <p:cNvSpPr/>
-          <p:nvPr/>
-        </p:nvSpPr>
-        <p:spPr>
-          <a:xfrm>
-            <a:off x="2124837" y="4169664"/>
-            <a:ext cx="685800" cy="384048"/>
+          <p:cNvPr id="43" name="Text 41"/>
+          <p:cNvSpPr/>
+          <p:nvPr/>
+        </p:nvSpPr>
+        <p:spPr>
+          <a:xfrm>
+            <a:off x="1952244" y="4169664"/>
+            <a:ext cx="543652" cy="475488"/>
           </a:xfrm>
           <a:prstGeom prst="rect">
             <a:avLst/>
@@ -33161,7 +34364,7 @@
                 <a:ea typeface="Trebuchet MS" pitchFamily="34" charset="-122"/>
                 <a:cs typeface="Trebuchet MS" pitchFamily="34" charset="-120"/>
               </a:rPr>
-              <a:t>m</a:t>
+              <a:t>k</a:t>
             </a:r>
             <a:endParaRPr lang="en-US" sz="900" dirty="0"/>
           </a:p>
@@ -33169,18 +34372,18 @@
       </p:sp>
       <p:sp>
         <p:nvSpPr>
-          <p:cNvPr id="38" name="Shape 36"/>
-          <p:cNvSpPr/>
-          <p:nvPr/>
-        </p:nvSpPr>
-        <p:spPr>
-          <a:xfrm>
-            <a:off x="3033522" y="4169664"/>
-            <a:ext cx="685800" cy="384048"/>
+          <p:cNvPr id="44" name="Shape 42"/>
+          <p:cNvSpPr/>
+          <p:nvPr/>
+        </p:nvSpPr>
+        <p:spPr>
+          <a:xfrm>
+            <a:off x="2546188" y="4169664"/>
+            <a:ext cx="543652" cy="475488"/>
           </a:xfrm>
           <a:prstGeom prst="rect">
             <a:avLst>
-              <a:gd name="adj" fmla="val 9524"/>
+              <a:gd name="adj" fmla="val 7692"/>
             </a:avLst>
           </a:prstGeom>
           <a:solidFill>
@@ -33196,14 +34399,14 @@
       </p:sp>
       <p:sp>
         <p:nvSpPr>
-          <p:cNvPr id="39" name="Text 37"/>
-          <p:cNvSpPr/>
-          <p:nvPr/>
-        </p:nvSpPr>
-        <p:spPr>
-          <a:xfrm>
-            <a:off x="3033522" y="4169664"/>
-            <a:ext cx="685800" cy="384048"/>
+          <p:cNvPr id="45" name="Text 43"/>
+          <p:cNvSpPr/>
+          <p:nvPr/>
+        </p:nvSpPr>
+        <p:spPr>
+          <a:xfrm>
+            <a:off x="2546188" y="4169664"/>
+            <a:ext cx="543652" cy="475488"/>
           </a:xfrm>
           <a:prstGeom prst="rect">
             <a:avLst/>
@@ -33227,7 +34430,7 @@
                 <a:ea typeface="Trebuchet MS" pitchFamily="34" charset="-122"/>
                 <a:cs typeface="Trebuchet MS" pitchFamily="34" charset="-120"/>
               </a:rPr>
-              <a:t>i</a:t>
+              <a:t>a</a:t>
             </a:r>
             <a:endParaRPr lang="en-US" sz="900" dirty="0"/>
           </a:p>
@@ -33235,18 +34438,18 @@
       </p:sp>
       <p:sp>
         <p:nvSpPr>
-          <p:cNvPr id="40" name="Shape 38"/>
-          <p:cNvSpPr/>
-          <p:nvPr/>
-        </p:nvSpPr>
-        <p:spPr>
-          <a:xfrm>
-            <a:off x="3942207" y="4169664"/>
-            <a:ext cx="685800" cy="384048"/>
+          <p:cNvPr id="46" name="Shape 44"/>
+          <p:cNvSpPr/>
+          <p:nvPr/>
+        </p:nvSpPr>
+        <p:spPr>
+          <a:xfrm>
+            <a:off x="3140133" y="4169664"/>
+            <a:ext cx="543652" cy="475488"/>
           </a:xfrm>
           <a:prstGeom prst="rect">
             <a:avLst>
-              <a:gd name="adj" fmla="val 9524"/>
+              <a:gd name="adj" fmla="val 7692"/>
             </a:avLst>
           </a:prstGeom>
           <a:solidFill>
@@ -33262,14 +34465,14 @@
       </p:sp>
       <p:sp>
         <p:nvSpPr>
-          <p:cNvPr id="41" name="Text 39"/>
-          <p:cNvSpPr/>
-          <p:nvPr/>
-        </p:nvSpPr>
-        <p:spPr>
-          <a:xfrm>
-            <a:off x="3942207" y="4169664"/>
-            <a:ext cx="685800" cy="384048"/>
+          <p:cNvPr id="47" name="Text 45"/>
+          <p:cNvSpPr/>
+          <p:nvPr/>
+        </p:nvSpPr>
+        <p:spPr>
+          <a:xfrm>
+            <a:off x="3140133" y="4169664"/>
+            <a:ext cx="543652" cy="475488"/>
           </a:xfrm>
           <a:prstGeom prst="rect">
             <a:avLst/>
@@ -33293,7 +34496,7 @@
                 <a:ea typeface="Trebuchet MS" pitchFamily="34" charset="-122"/>
                 <a:cs typeface="Trebuchet MS" pitchFamily="34" charset="-120"/>
               </a:rPr>
-              <a:t>cr</a:t>
+              <a:t>l</a:t>
             </a:r>
             <a:endParaRPr lang="en-US" sz="900" dirty="0"/>
           </a:p>
@@ -33301,57 +34504,18 @@
       </p:sp>
       <p:sp>
         <p:nvSpPr>
-          <p:cNvPr id="42" name="Text 40"/>
-          <p:cNvSpPr/>
-          <p:nvPr/>
-        </p:nvSpPr>
-        <p:spPr>
-          <a:xfrm>
-            <a:off x="3942207" y="4572000"/>
-            <a:ext cx="685800" cy="219456"/>
-          </a:xfrm>
-          <a:prstGeom prst="rect">
-            <a:avLst/>
-          </a:prstGeom>
-          <a:noFill/>
-          <a:ln/>
-        </p:spPr>
-        <p:txBody>
-          <a:bodyPr wrap="square" lIns="0" tIns="0" rIns="0" bIns="0" rtlCol="0" anchor="t"/>
-          <a:lstStyle/>
-          <a:p>
-            <a:pPr algn="ctr" indent="0" marL="0">
-              <a:buNone/>
-            </a:pPr>
-            <a:r>
-              <a:rPr lang="en-US" sz="750" i="1" dirty="0">
-                <a:solidFill>
-                  <a:srgbClr val="94A3B8"/>
-                </a:solidFill>
-                <a:latin typeface="Calibri" pitchFamily="34" charset="0"/>
-                <a:ea typeface="Calibri" pitchFamily="34" charset="-122"/>
-                <a:cs typeface="Calibri" pitchFamily="34" charset="-120"/>
-              </a:rPr>
-              <a:t>/kr/</a:t>
-            </a:r>
-            <a:endParaRPr lang="en-US" sz="750" dirty="0"/>
-          </a:p>
-        </p:txBody>
-      </p:sp>
-      <p:sp>
-        <p:nvSpPr>
-          <p:cNvPr id="43" name="Shape 41"/>
-          <p:cNvSpPr/>
-          <p:nvPr/>
-        </p:nvSpPr>
-        <p:spPr>
-          <a:xfrm>
-            <a:off x="4850892" y="4169664"/>
-            <a:ext cx="685800" cy="384048"/>
+          <p:cNvPr id="48" name="Shape 46"/>
+          <p:cNvSpPr/>
+          <p:nvPr/>
+        </p:nvSpPr>
+        <p:spPr>
+          <a:xfrm>
+            <a:off x="3734077" y="4169664"/>
+            <a:ext cx="543652" cy="475488"/>
           </a:xfrm>
           <a:prstGeom prst="rect">
             <a:avLst>
-              <a:gd name="adj" fmla="val 9524"/>
+              <a:gd name="adj" fmla="val 7692"/>
             </a:avLst>
           </a:prstGeom>
           <a:solidFill>
@@ -33367,14 +34531,14 @@
       </p:sp>
       <p:sp>
         <p:nvSpPr>
-          <p:cNvPr id="44" name="Text 42"/>
-          <p:cNvSpPr/>
-          <p:nvPr/>
-        </p:nvSpPr>
-        <p:spPr>
-          <a:xfrm>
-            <a:off x="4850892" y="4169664"/>
-            <a:ext cx="685800" cy="384048"/>
+          <p:cNvPr id="49" name="Text 47"/>
+          <p:cNvSpPr/>
+          <p:nvPr/>
+        </p:nvSpPr>
+        <p:spPr>
+          <a:xfrm>
+            <a:off x="3734077" y="4169664"/>
+            <a:ext cx="543652" cy="475488"/>
           </a:xfrm>
           <a:prstGeom prst="rect">
             <a:avLst/>
@@ -33398,7 +34562,7 @@
                 <a:ea typeface="Trebuchet MS" pitchFamily="34" charset="-122"/>
                 <a:cs typeface="Trebuchet MS" pitchFamily="34" charset="-120"/>
               </a:rPr>
-              <a:t>o</a:t>
+              <a:t>ei</a:t>
             </a:r>
             <a:endParaRPr lang="en-US" sz="900" dirty="0"/>
           </a:p>
@@ -33406,18 +34570,18 @@
       </p:sp>
       <p:sp>
         <p:nvSpPr>
-          <p:cNvPr id="45" name="Shape 43"/>
-          <p:cNvSpPr/>
-          <p:nvPr/>
-        </p:nvSpPr>
-        <p:spPr>
-          <a:xfrm>
-            <a:off x="5759577" y="4169664"/>
-            <a:ext cx="685800" cy="384048"/>
+          <p:cNvPr id="50" name="Shape 48"/>
+          <p:cNvSpPr/>
+          <p:nvPr/>
+        </p:nvSpPr>
+        <p:spPr>
+          <a:xfrm>
+            <a:off x="4328021" y="4169664"/>
+            <a:ext cx="543652" cy="475488"/>
           </a:xfrm>
           <a:prstGeom prst="rect">
             <a:avLst>
-              <a:gd name="adj" fmla="val 9524"/>
+              <a:gd name="adj" fmla="val 7692"/>
             </a:avLst>
           </a:prstGeom>
           <a:solidFill>
@@ -33433,14 +34597,14 @@
       </p:sp>
       <p:sp>
         <p:nvSpPr>
-          <p:cNvPr id="46" name="Text 44"/>
-          <p:cNvSpPr/>
-          <p:nvPr/>
-        </p:nvSpPr>
-        <p:spPr>
-          <a:xfrm>
-            <a:off x="5759577" y="4169664"/>
-            <a:ext cx="685800" cy="384048"/>
+          <p:cNvPr id="51" name="Text 49"/>
+          <p:cNvSpPr/>
+          <p:nvPr/>
+        </p:nvSpPr>
+        <p:spPr>
+          <a:xfrm>
+            <a:off x="4328021" y="4169664"/>
+            <a:ext cx="543652" cy="475488"/>
           </a:xfrm>
           <a:prstGeom prst="rect">
             <a:avLst/>
@@ -33464,7 +34628,7 @@
                 <a:ea typeface="Trebuchet MS" pitchFamily="34" charset="-122"/>
                 <a:cs typeface="Trebuchet MS" pitchFamily="34" charset="-120"/>
               </a:rPr>
-              <a:t>sc</a:t>
+              <a:t>d</a:t>
             </a:r>
             <a:endParaRPr lang="en-US" sz="900" dirty="0"/>
           </a:p>
@@ -33472,57 +34636,18 @@
       </p:sp>
       <p:sp>
         <p:nvSpPr>
-          <p:cNvPr id="47" name="Text 45"/>
-          <p:cNvSpPr/>
-          <p:nvPr/>
-        </p:nvSpPr>
-        <p:spPr>
-          <a:xfrm>
-            <a:off x="5759577" y="4572000"/>
-            <a:ext cx="685800" cy="219456"/>
-          </a:xfrm>
-          <a:prstGeom prst="rect">
-            <a:avLst/>
-          </a:prstGeom>
-          <a:noFill/>
-          <a:ln/>
-        </p:spPr>
-        <p:txBody>
-          <a:bodyPr wrap="square" lIns="0" tIns="0" rIns="0" bIns="0" rtlCol="0" anchor="t"/>
-          <a:lstStyle/>
-          <a:p>
-            <a:pPr algn="ctr" indent="0" marL="0">
-              <a:buNone/>
-            </a:pPr>
-            <a:r>
-              <a:rPr lang="en-US" sz="750" i="1" dirty="0">
-                <a:solidFill>
-                  <a:srgbClr val="94A3B8"/>
-                </a:solidFill>
-                <a:latin typeface="Calibri" pitchFamily="34" charset="0"/>
-                <a:ea typeface="Calibri" pitchFamily="34" charset="-122"/>
-                <a:cs typeface="Calibri" pitchFamily="34" charset="-120"/>
-              </a:rPr>
-              <a:t>/sk/</a:t>
-            </a:r>
-            <a:endParaRPr lang="en-US" sz="750" dirty="0"/>
-          </a:p>
-        </p:txBody>
-      </p:sp>
-      <p:sp>
-        <p:nvSpPr>
-          <p:cNvPr id="48" name="Shape 46"/>
-          <p:cNvSpPr/>
-          <p:nvPr/>
-        </p:nvSpPr>
-        <p:spPr>
-          <a:xfrm>
-            <a:off x="6668262" y="4169664"/>
-            <a:ext cx="685800" cy="384048"/>
+          <p:cNvPr id="52" name="Shape 50"/>
+          <p:cNvSpPr/>
+          <p:nvPr/>
+        </p:nvSpPr>
+        <p:spPr>
+          <a:xfrm>
+            <a:off x="4921966" y="4169664"/>
+            <a:ext cx="543652" cy="475488"/>
           </a:xfrm>
           <a:prstGeom prst="rect">
             <a:avLst>
-              <a:gd name="adj" fmla="val 9524"/>
+              <a:gd name="adj" fmla="val 7692"/>
             </a:avLst>
           </a:prstGeom>
           <a:solidFill>
@@ -33538,14 +34663,14 @@
       </p:sp>
       <p:sp>
         <p:nvSpPr>
-          <p:cNvPr id="49" name="Text 47"/>
-          <p:cNvSpPr/>
-          <p:nvPr/>
-        </p:nvSpPr>
-        <p:spPr>
-          <a:xfrm>
-            <a:off x="6668262" y="4169664"/>
-            <a:ext cx="685800" cy="384048"/>
+          <p:cNvPr id="53" name="Text 51"/>
+          <p:cNvSpPr/>
+          <p:nvPr/>
+        </p:nvSpPr>
+        <p:spPr>
+          <a:xfrm>
+            <a:off x="4921966" y="4169664"/>
+            <a:ext cx="543652" cy="475488"/>
           </a:xfrm>
           <a:prstGeom prst="rect">
             <a:avLst/>
@@ -33577,18 +34702,18 @@
       </p:sp>
       <p:sp>
         <p:nvSpPr>
-          <p:cNvPr id="50" name="Shape 48"/>
-          <p:cNvSpPr/>
-          <p:nvPr/>
-        </p:nvSpPr>
-        <p:spPr>
-          <a:xfrm>
-            <a:off x="7576947" y="4169664"/>
-            <a:ext cx="685800" cy="384048"/>
+          <p:cNvPr id="54" name="Shape 52"/>
+          <p:cNvSpPr/>
+          <p:nvPr/>
+        </p:nvSpPr>
+        <p:spPr>
+          <a:xfrm>
+            <a:off x="5515910" y="4169664"/>
+            <a:ext cx="543652" cy="475488"/>
           </a:xfrm>
           <a:prstGeom prst="rect">
             <a:avLst>
-              <a:gd name="adj" fmla="val 9524"/>
+              <a:gd name="adj" fmla="val 7692"/>
             </a:avLst>
           </a:prstGeom>
           <a:solidFill>
@@ -33604,14 +34729,14 @@
       </p:sp>
       <p:sp>
         <p:nvSpPr>
-          <p:cNvPr id="51" name="Text 49"/>
-          <p:cNvSpPr/>
-          <p:nvPr/>
-        </p:nvSpPr>
-        <p:spPr>
-          <a:xfrm>
-            <a:off x="7576947" y="4169664"/>
-            <a:ext cx="685800" cy="384048"/>
+          <p:cNvPr id="55" name="Text 53"/>
+          <p:cNvSpPr/>
+          <p:nvPr/>
+        </p:nvSpPr>
+        <p:spPr>
+          <a:xfrm>
+            <a:off x="5515910" y="4169664"/>
+            <a:ext cx="543652" cy="475488"/>
           </a:xfrm>
           <a:prstGeom prst="rect">
             <a:avLst/>
@@ -33635,7 +34760,271 @@
                 <a:ea typeface="Trebuchet MS" pitchFamily="34" charset="-122"/>
                 <a:cs typeface="Trebuchet MS" pitchFamily="34" charset="-120"/>
               </a:rPr>
-              <a:t>pe</a:t>
+              <a:t>s</a:t>
+            </a:r>
+            <a:endParaRPr lang="en-US" sz="900" dirty="0"/>
+          </a:p>
+        </p:txBody>
+      </p:sp>
+      <p:sp>
+        <p:nvSpPr>
+          <p:cNvPr id="56" name="Shape 54"/>
+          <p:cNvSpPr/>
+          <p:nvPr/>
+        </p:nvSpPr>
+        <p:spPr>
+          <a:xfrm>
+            <a:off x="6109855" y="4169664"/>
+            <a:ext cx="543652" cy="475488"/>
+          </a:xfrm>
+          <a:prstGeom prst="rect">
+            <a:avLst>
+              <a:gd name="adj" fmla="val 7692"/>
+            </a:avLst>
+          </a:prstGeom>
+          <a:solidFill>
+            <a:srgbClr val="FFFFFF"/>
+          </a:solidFill>
+          <a:ln w="12700">
+            <a:solidFill>
+              <a:srgbClr val="DB2777"/>
+            </a:solidFill>
+            <a:prstDash val="solid"/>
+          </a:ln>
+        </p:spPr>
+      </p:sp>
+      <p:sp>
+        <p:nvSpPr>
+          <p:cNvPr id="57" name="Text 55"/>
+          <p:cNvSpPr/>
+          <p:nvPr/>
+        </p:nvSpPr>
+        <p:spPr>
+          <a:xfrm>
+            <a:off x="6109855" y="4169664"/>
+            <a:ext cx="543652" cy="475488"/>
+          </a:xfrm>
+          <a:prstGeom prst="rect">
+            <a:avLst/>
+          </a:prstGeom>
+          <a:noFill/>
+          <a:ln/>
+        </p:spPr>
+        <p:txBody>
+          <a:bodyPr wrap="square" lIns="0" tIns="0" rIns="0" bIns="0" rtlCol="0" anchor="ctr"/>
+          <a:lstStyle/>
+          <a:p>
+            <a:pPr algn="ctr" indent="0" marL="0">
+              <a:buNone/>
+            </a:pPr>
+            <a:r>
+              <a:rPr lang="en-US" sz="900" b="1" dirty="0">
+                <a:solidFill>
+                  <a:srgbClr val="9D174D"/>
+                </a:solidFill>
+                <a:latin typeface="Trebuchet MS" pitchFamily="34" charset="0"/>
+                <a:ea typeface="Trebuchet MS" pitchFamily="34" charset="-122"/>
+                <a:cs typeface="Trebuchet MS" pitchFamily="34" charset="-120"/>
+              </a:rPr>
+              <a:t>c</a:t>
+            </a:r>
+            <a:endParaRPr lang="en-US" sz="900" dirty="0"/>
+          </a:p>
+        </p:txBody>
+      </p:sp>
+      <p:sp>
+        <p:nvSpPr>
+          <p:cNvPr id="58" name="Shape 56"/>
+          <p:cNvSpPr/>
+          <p:nvPr/>
+        </p:nvSpPr>
+        <p:spPr>
+          <a:xfrm>
+            <a:off x="6703799" y="4169664"/>
+            <a:ext cx="543652" cy="475488"/>
+          </a:xfrm>
+          <a:prstGeom prst="rect">
+            <a:avLst>
+              <a:gd name="adj" fmla="val 7692"/>
+            </a:avLst>
+          </a:prstGeom>
+          <a:solidFill>
+            <a:srgbClr val="FFFFFF"/>
+          </a:solidFill>
+          <a:ln w="12700">
+            <a:solidFill>
+              <a:srgbClr val="DB2777"/>
+            </a:solidFill>
+            <a:prstDash val="solid"/>
+          </a:ln>
+        </p:spPr>
+      </p:sp>
+      <p:sp>
+        <p:nvSpPr>
+          <p:cNvPr id="59" name="Text 57"/>
+          <p:cNvSpPr/>
+          <p:nvPr/>
+        </p:nvSpPr>
+        <p:spPr>
+          <a:xfrm>
+            <a:off x="6703799" y="4169664"/>
+            <a:ext cx="543652" cy="475488"/>
+          </a:xfrm>
+          <a:prstGeom prst="rect">
+            <a:avLst/>
+          </a:prstGeom>
+          <a:noFill/>
+          <a:ln/>
+        </p:spPr>
+        <p:txBody>
+          <a:bodyPr wrap="square" lIns="0" tIns="0" rIns="0" bIns="0" rtlCol="0" anchor="ctr"/>
+          <a:lstStyle/>
+          <a:p>
+            <a:pPr algn="ctr" indent="0" marL="0">
+              <a:buNone/>
+            </a:pPr>
+            <a:r>
+              <a:rPr lang="en-US" sz="900" b="1" dirty="0">
+                <a:solidFill>
+                  <a:srgbClr val="9D174D"/>
+                </a:solidFill>
+                <a:latin typeface="Trebuchet MS" pitchFamily="34" charset="0"/>
+                <a:ea typeface="Trebuchet MS" pitchFamily="34" charset="-122"/>
+                <a:cs typeface="Trebuchet MS" pitchFamily="34" charset="-120"/>
+              </a:rPr>
+              <a:t>o_e</a:t>
+            </a:r>
+            <a:endParaRPr lang="en-US" sz="900" dirty="0"/>
+          </a:p>
+        </p:txBody>
+      </p:sp>
+      <p:sp>
+        <p:nvSpPr>
+          <p:cNvPr id="60" name="Shape 58"/>
+          <p:cNvSpPr/>
+          <p:nvPr/>
+        </p:nvSpPr>
+        <p:spPr>
+          <a:xfrm>
+            <a:off x="7297743" y="4169664"/>
+            <a:ext cx="543652" cy="475488"/>
+          </a:xfrm>
+          <a:prstGeom prst="rect">
+            <a:avLst>
+              <a:gd name="adj" fmla="val 7692"/>
+            </a:avLst>
+          </a:prstGeom>
+          <a:solidFill>
+            <a:srgbClr val="FFFFFF"/>
+          </a:solidFill>
+          <a:ln w="12700">
+            <a:solidFill>
+              <a:srgbClr val="DB2777"/>
+            </a:solidFill>
+            <a:prstDash val="solid"/>
+          </a:ln>
+        </p:spPr>
+      </p:sp>
+      <p:sp>
+        <p:nvSpPr>
+          <p:cNvPr id="61" name="Text 59"/>
+          <p:cNvSpPr/>
+          <p:nvPr/>
+        </p:nvSpPr>
+        <p:spPr>
+          <a:xfrm>
+            <a:off x="7297743" y="4169664"/>
+            <a:ext cx="543652" cy="475488"/>
+          </a:xfrm>
+          <a:prstGeom prst="rect">
+            <a:avLst/>
+          </a:prstGeom>
+          <a:noFill/>
+          <a:ln/>
+        </p:spPr>
+        <p:txBody>
+          <a:bodyPr wrap="square" lIns="0" tIns="0" rIns="0" bIns="0" rtlCol="0" anchor="ctr"/>
+          <a:lstStyle/>
+          <a:p>
+            <a:pPr algn="ctr" indent="0" marL="0">
+              <a:buNone/>
+            </a:pPr>
+            <a:r>
+              <a:rPr lang="en-US" sz="900" b="1" dirty="0">
+                <a:solidFill>
+                  <a:srgbClr val="9D174D"/>
+                </a:solidFill>
+                <a:latin typeface="Trebuchet MS" pitchFamily="34" charset="0"/>
+                <a:ea typeface="Trebuchet MS" pitchFamily="34" charset="-122"/>
+                <a:cs typeface="Trebuchet MS" pitchFamily="34" charset="-120"/>
+              </a:rPr>
+              <a:t>p</a:t>
+            </a:r>
+            <a:endParaRPr lang="en-US" sz="900" dirty="0"/>
+          </a:p>
+        </p:txBody>
+      </p:sp>
+      <p:sp>
+        <p:nvSpPr>
+          <p:cNvPr id="62" name="Shape 60"/>
+          <p:cNvSpPr/>
+          <p:nvPr/>
+        </p:nvSpPr>
+        <p:spPr>
+          <a:xfrm>
+            <a:off x="7891688" y="4169664"/>
+            <a:ext cx="543652" cy="475488"/>
+          </a:xfrm>
+          <a:prstGeom prst="rect">
+            <a:avLst>
+              <a:gd name="adj" fmla="val 7692"/>
+            </a:avLst>
+          </a:prstGeom>
+          <a:solidFill>
+            <a:srgbClr val="FFFFFF"/>
+          </a:solidFill>
+          <a:ln w="12700">
+            <a:solidFill>
+              <a:srgbClr val="DB2777"/>
+            </a:solidFill>
+            <a:prstDash val="solid"/>
+          </a:ln>
+        </p:spPr>
+      </p:sp>
+      <p:sp>
+        <p:nvSpPr>
+          <p:cNvPr id="63" name="Text 61"/>
+          <p:cNvSpPr/>
+          <p:nvPr/>
+        </p:nvSpPr>
+        <p:spPr>
+          <a:xfrm>
+            <a:off x="7891688" y="4169664"/>
+            <a:ext cx="543652" cy="475488"/>
+          </a:xfrm>
+          <a:prstGeom prst="rect">
+            <a:avLst/>
+          </a:prstGeom>
+          <a:noFill/>
+          <a:ln/>
+        </p:spPr>
+        <p:txBody>
+          <a:bodyPr wrap="square" lIns="0" tIns="0" rIns="0" bIns="0" rtlCol="0" anchor="ctr"/>
+          <a:lstStyle/>
+          <a:p>
+            <a:pPr algn="ctr" indent="0" marL="0">
+              <a:buNone/>
+            </a:pPr>
+            <a:r>
+              <a:rPr lang="en-US" sz="900" b="1" dirty="0">
+                <a:solidFill>
+                  <a:srgbClr val="9D174D"/>
+                </a:solidFill>
+                <a:latin typeface="Trebuchet MS" pitchFamily="34" charset="0"/>
+                <a:ea typeface="Trebuchet MS" pitchFamily="34" charset="-122"/>
+                <a:cs typeface="Trebuchet MS" pitchFamily="34" charset="-120"/>
+              </a:rPr>
+              <a:t>s</a:t>
             </a:r>
             <a:endParaRPr lang="en-US" sz="900" dirty="0"/>
           </a:p>
@@ -33927,7 +35316,7 @@
                 <a:ea typeface="Calibri" pitchFamily="34" charset="-122"/>
                 <a:cs typeface="Calibri" pitchFamily="34" charset="-120"/>
               </a:rPr>
-              <a:t>Word Labs  •  wordlabs.app  •  Root: 'scope' = to look, see, observe</a:t>
+              <a:t>Word Labs  •  wordlabs.app  •  Root: 'scope' = look; view; examine</a:t>
             </a:r>
             <a:endParaRPr lang="en-US" sz="800" dirty="0"/>
           </a:p>
@@ -35096,7 +36485,7 @@
                 <a:ea typeface="Calibri" pitchFamily="34" charset="-122"/>
                 <a:cs typeface="Calibri" pitchFamily="34" charset="-120"/>
               </a:rPr>
-              <a:t>Word Labs  •  wordlabs.app  •  Root: 'scope' = to look, see, observe</a:t>
+              <a:t>Word Labs  •  wordlabs.app  •  Root: 'scope' = look; view; examine</a:t>
             </a:r>
             <a:endParaRPr lang="en-US" sz="800" dirty="0"/>
           </a:p>
@@ -35397,7 +36786,7 @@
                 <a:ea typeface="Trebuchet MS" pitchFamily="34" charset="-122"/>
                 <a:cs typeface="Trebuchet MS" pitchFamily="34" charset="-120"/>
               </a:rPr>
-              <a:t>tele-</a:t>
+              <a:t>endo-</a:t>
             </a:r>
             <a:endParaRPr lang="en-US" sz="1300" dirty="0"/>
           </a:p>
@@ -35525,7 +36914,7 @@
                 <a:ea typeface="Trebuchet MS" pitchFamily="34" charset="-122"/>
                 <a:cs typeface="Trebuchet MS" pitchFamily="34" charset="-120"/>
               </a:rPr>
-              <a:t>-ic</a:t>
+              <a:t>-s</a:t>
             </a:r>
             <a:endParaRPr lang="en-US" sz="1300" dirty="0"/>
           </a:p>
@@ -35589,7 +36978,7 @@
                 <a:ea typeface="Trebuchet MS" pitchFamily="34" charset="-122"/>
                 <a:cs typeface="Trebuchet MS" pitchFamily="34" charset="-120"/>
               </a:rPr>
-              <a:t>micro-</a:t>
+              <a:t>gyro-</a:t>
             </a:r>
             <a:endParaRPr lang="en-US" sz="1300" dirty="0"/>
           </a:p>
@@ -35678,7 +37067,7 @@
                 <a:ea typeface="Trebuchet MS" pitchFamily="34" charset="-122"/>
                 <a:cs typeface="Trebuchet MS" pitchFamily="34" charset="-120"/>
               </a:rPr>
-              <a:t>-ist</a:t>
+              <a:t>-ed</a:t>
             </a:r>
             <a:endParaRPr lang="en-US" sz="1300" dirty="0"/>
           </a:p>
@@ -35742,7 +37131,7 @@
                 <a:ea typeface="Trebuchet MS" pitchFamily="34" charset="-122"/>
                 <a:cs typeface="Trebuchet MS" pitchFamily="34" charset="-120"/>
               </a:rPr>
-              <a:t>kaleid-</a:t>
+              <a:t>horo-</a:t>
             </a:r>
             <a:endParaRPr lang="en-US" sz="1300" dirty="0"/>
           </a:p>
@@ -35831,7 +37220,7 @@
                 <a:ea typeface="Trebuchet MS" pitchFamily="34" charset="-122"/>
                 <a:cs typeface="Trebuchet MS" pitchFamily="34" charset="-120"/>
               </a:rPr>
-              <a:t>-ical</a:t>
+              <a:t>-ic</a:t>
             </a:r>
             <a:endParaRPr lang="en-US" sz="1300" dirty="0"/>
           </a:p>
@@ -35895,7 +37284,7 @@
                 <a:ea typeface="Trebuchet MS" pitchFamily="34" charset="-122"/>
                 <a:cs typeface="Trebuchet MS" pitchFamily="34" charset="-120"/>
               </a:rPr>
-              <a:t>peri-</a:t>
+              <a:t>kaleido-</a:t>
             </a:r>
             <a:endParaRPr lang="en-US" sz="1300" dirty="0"/>
           </a:p>
@@ -35984,7 +37373,7 @@
                 <a:ea typeface="Trebuchet MS" pitchFamily="34" charset="-122"/>
                 <a:cs typeface="Trebuchet MS" pitchFamily="34" charset="-120"/>
               </a:rPr>
-              <a:t>-ed</a:t>
+              <a:t>-ing</a:t>
             </a:r>
             <a:endParaRPr lang="en-US" sz="1300" dirty="0"/>
           </a:p>
@@ -36048,7 +37437,7 @@
                 <a:ea typeface="Trebuchet MS" pitchFamily="34" charset="-122"/>
                 <a:cs typeface="Trebuchet MS" pitchFamily="34" charset="-120"/>
               </a:rPr>
-              <a:t>endo-</a:t>
+              <a:t>peri-</a:t>
             </a:r>
             <a:endParaRPr lang="en-US" sz="1300" dirty="0"/>
           </a:p>
@@ -36094,7 +37483,7 @@
             <a:avLst/>
           </a:prstGeom>
           <a:solidFill>
-            <a:srgbClr val="FCE7F3"/>
+            <a:srgbClr val="F8FAFC"/>
           </a:solidFill>
           <a:ln w="12700">
             <a:solidFill>
@@ -36106,14 +37495,39 @@
       </p:sp>
       <p:sp>
         <p:nvSpPr>
-          <p:cNvPr id="42" name="Text 40"/>
-          <p:cNvSpPr/>
-          <p:nvPr/>
-        </p:nvSpPr>
-        <p:spPr>
-          <a:xfrm>
-            <a:off x="5943600" y="3246120"/>
-            <a:ext cx="2834640" cy="402336"/>
+          <p:cNvPr id="42" name="Shape 40"/>
+          <p:cNvSpPr/>
+          <p:nvPr/>
+        </p:nvSpPr>
+        <p:spPr>
+          <a:xfrm>
+            <a:off x="365760" y="3666744"/>
+            <a:ext cx="2468880" cy="402336"/>
+          </a:xfrm>
+          <a:prstGeom prst="rect">
+            <a:avLst/>
+          </a:prstGeom>
+          <a:solidFill>
+            <a:srgbClr val="DDD6FE"/>
+          </a:solidFill>
+          <a:ln w="12700">
+            <a:solidFill>
+              <a:srgbClr val="E2E8F0"/>
+            </a:solidFill>
+            <a:prstDash val="solid"/>
+          </a:ln>
+        </p:spPr>
+      </p:sp>
+      <p:sp>
+        <p:nvSpPr>
+          <p:cNvPr id="43" name="Text 41"/>
+          <p:cNvSpPr/>
+          <p:nvPr/>
+        </p:nvSpPr>
+        <p:spPr>
+          <a:xfrm>
+            <a:off x="365760" y="3666744"/>
+            <a:ext cx="2468880" cy="402336"/>
           </a:xfrm>
           <a:prstGeom prst="rect">
             <a:avLst/>
@@ -36131,13 +37545,13 @@
             <a:r>
               <a:rPr lang="en-US" sz="1300" b="1" dirty="0">
                 <a:solidFill>
-                  <a:srgbClr val="9D174D"/>
+                  <a:srgbClr val="4C1D95"/>
                 </a:solidFill>
                 <a:latin typeface="Trebuchet MS" pitchFamily="34" charset="0"/>
                 <a:ea typeface="Trebuchet MS" pitchFamily="34" charset="-122"/>
                 <a:cs typeface="Trebuchet MS" pitchFamily="34" charset="-120"/>
               </a:rPr>
-              <a:t>-ing</a:t>
+              <a:t>stetho-</a:t>
             </a:r>
             <a:endParaRPr lang="en-US" sz="1300" dirty="0"/>
           </a:p>
@@ -36145,7 +37559,57 @@
       </p:sp>
       <p:sp>
         <p:nvSpPr>
-          <p:cNvPr id="43" name="Text 41"/>
+          <p:cNvPr id="44" name="Shape 42"/>
+          <p:cNvSpPr/>
+          <p:nvPr/>
+        </p:nvSpPr>
+        <p:spPr>
+          <a:xfrm>
+            <a:off x="2971800" y="3666744"/>
+            <a:ext cx="2834640" cy="402336"/>
+          </a:xfrm>
+          <a:prstGeom prst="rect">
+            <a:avLst/>
+          </a:prstGeom>
+          <a:solidFill>
+            <a:srgbClr val="F1F5F9"/>
+          </a:solidFill>
+          <a:ln w="12700">
+            <a:solidFill>
+              <a:srgbClr val="E2E8F0"/>
+            </a:solidFill>
+            <a:prstDash val="solid"/>
+          </a:ln>
+        </p:spPr>
+      </p:sp>
+      <p:sp>
+        <p:nvSpPr>
+          <p:cNvPr id="45" name="Shape 43"/>
+          <p:cNvSpPr/>
+          <p:nvPr/>
+        </p:nvSpPr>
+        <p:spPr>
+          <a:xfrm>
+            <a:off x="5943600" y="3666744"/>
+            <a:ext cx="2834640" cy="402336"/>
+          </a:xfrm>
+          <a:prstGeom prst="rect">
+            <a:avLst/>
+          </a:prstGeom>
+          <a:solidFill>
+            <a:srgbClr val="F1F5F9"/>
+          </a:solidFill>
+          <a:ln w="12700">
+            <a:solidFill>
+              <a:srgbClr val="E2E8F0"/>
+            </a:solidFill>
+            <a:prstDash val="solid"/>
+          </a:ln>
+        </p:spPr>
+      </p:sp>
+      <p:sp>
+        <p:nvSpPr>
+          <p:cNvPr id="46" name="Text 44"/>
           <p:cNvSpPr/>
           <p:nvPr/>
         </p:nvSpPr>
@@ -36184,7 +37648,7 @@
       </p:sp>
       <p:sp>
         <p:nvSpPr>
-          <p:cNvPr id="44" name="Shape 42"/>
+          <p:cNvPr id="47" name="Shape 45"/>
           <p:cNvSpPr/>
           <p:nvPr/>
         </p:nvSpPr>
@@ -36211,7 +37675,7 @@
       </p:sp>
       <p:sp>
         <p:nvSpPr>
-          <p:cNvPr id="45" name="Text 43"/>
+          <p:cNvPr id="48" name="Text 46"/>
           <p:cNvSpPr/>
           <p:nvPr/>
         </p:nvSpPr>
@@ -36242,7 +37706,7 @@
                 <a:ea typeface="Trebuchet MS" pitchFamily="34" charset="-122"/>
                 <a:cs typeface="Trebuchet MS" pitchFamily="34" charset="-120"/>
               </a:rPr>
-              <a:t>telescope</a:t>
+              <a:t>scope</a:t>
             </a:r>
             <a:endParaRPr lang="en-US" sz="1200" dirty="0"/>
           </a:p>
@@ -36250,7 +37714,7 @@
       </p:sp>
       <p:sp>
         <p:nvSpPr>
-          <p:cNvPr id="46" name="Shape 44"/>
+          <p:cNvPr id="49" name="Shape 47"/>
           <p:cNvSpPr/>
           <p:nvPr/>
         </p:nvSpPr>
@@ -36277,7 +37741,7 @@
       </p:sp>
       <p:sp>
         <p:nvSpPr>
-          <p:cNvPr id="47" name="Text 45"/>
+          <p:cNvPr id="50" name="Text 48"/>
           <p:cNvSpPr/>
           <p:nvPr/>
         </p:nvSpPr>
@@ -36308,7 +37772,7 @@
                 <a:ea typeface="Trebuchet MS" pitchFamily="34" charset="-122"/>
                 <a:cs typeface="Trebuchet MS" pitchFamily="34" charset="-120"/>
               </a:rPr>
-              <a:t>microscope</a:t>
+              <a:t>scopes</a:t>
             </a:r>
             <a:endParaRPr lang="en-US" sz="1200" dirty="0"/>
           </a:p>
@@ -36316,7 +37780,7 @@
       </p:sp>
       <p:sp>
         <p:nvSpPr>
-          <p:cNvPr id="48" name="Shape 46"/>
+          <p:cNvPr id="51" name="Shape 49"/>
           <p:cNvSpPr/>
           <p:nvPr/>
         </p:nvSpPr>
@@ -36343,7 +37807,7 @@
       </p:sp>
       <p:sp>
         <p:nvSpPr>
-          <p:cNvPr id="49" name="Text 47"/>
+          <p:cNvPr id="52" name="Text 50"/>
           <p:cNvSpPr/>
           <p:nvPr/>
         </p:nvSpPr>
@@ -36374,7 +37838,7 @@
                 <a:ea typeface="Trebuchet MS" pitchFamily="34" charset="-122"/>
                 <a:cs typeface="Trebuchet MS" pitchFamily="34" charset="-120"/>
               </a:rPr>
-              <a:t>kaleidoscope</a:t>
+              <a:t>telescope</a:t>
             </a:r>
             <a:endParaRPr lang="en-US" sz="1200" dirty="0"/>
           </a:p>
@@ -36382,7 +37846,7 @@
       </p:sp>
       <p:sp>
         <p:nvSpPr>
-          <p:cNvPr id="50" name="Shape 48"/>
+          <p:cNvPr id="53" name="Shape 51"/>
           <p:cNvSpPr/>
           <p:nvPr/>
         </p:nvSpPr>
@@ -36409,7 +37873,7 @@
       </p:sp>
       <p:sp>
         <p:nvSpPr>
-          <p:cNvPr id="51" name="Text 49"/>
+          <p:cNvPr id="54" name="Text 52"/>
           <p:cNvSpPr/>
           <p:nvPr/>
         </p:nvSpPr>
@@ -36440,7 +37904,7 @@
                 <a:ea typeface="Trebuchet MS" pitchFamily="34" charset="-122"/>
                 <a:cs typeface="Trebuchet MS" pitchFamily="34" charset="-120"/>
               </a:rPr>
-              <a:t>periscope</a:t>
+              <a:t>telescoped</a:t>
             </a:r>
             <a:endParaRPr lang="en-US" sz="1200" dirty="0"/>
           </a:p>
@@ -36448,7 +37912,7 @@
       </p:sp>
       <p:sp>
         <p:nvSpPr>
-          <p:cNvPr id="52" name="Shape 50"/>
+          <p:cNvPr id="55" name="Shape 53"/>
           <p:cNvSpPr/>
           <p:nvPr/>
         </p:nvSpPr>
@@ -36475,7 +37939,7 @@
       </p:sp>
       <p:sp>
         <p:nvSpPr>
-          <p:cNvPr id="53" name="Text 51"/>
+          <p:cNvPr id="56" name="Text 54"/>
           <p:cNvSpPr/>
           <p:nvPr/>
         </p:nvSpPr>
@@ -36506,7 +37970,7 @@
                 <a:ea typeface="Trebuchet MS" pitchFamily="34" charset="-122"/>
                 <a:cs typeface="Trebuchet MS" pitchFamily="34" charset="-120"/>
               </a:rPr>
-              <a:t>endoscope</a:t>
+              <a:t>telescopes</a:t>
             </a:r>
             <a:endParaRPr lang="en-US" sz="1200" dirty="0"/>
           </a:p>
@@ -36514,7 +37978,7 @@
       </p:sp>
       <p:sp>
         <p:nvSpPr>
-          <p:cNvPr id="54" name="Shape 52"/>
+          <p:cNvPr id="57" name="Shape 55"/>
           <p:cNvSpPr/>
           <p:nvPr/>
         </p:nvSpPr>
@@ -36541,7 +38005,7 @@
       </p:sp>
       <p:sp>
         <p:nvSpPr>
-          <p:cNvPr id="55" name="Text 53"/>
+          <p:cNvPr id="58" name="Text 56"/>
           <p:cNvSpPr/>
           <p:nvPr/>
         </p:nvSpPr>
@@ -36572,7 +38036,7 @@
                 <a:ea typeface="Trebuchet MS" pitchFamily="34" charset="-122"/>
                 <a:cs typeface="Trebuchet MS" pitchFamily="34" charset="-120"/>
               </a:rPr>
-              <a:t>stethoscope</a:t>
+              <a:t>telescopic</a:t>
             </a:r>
             <a:endParaRPr lang="en-US" sz="1200" dirty="0"/>
           </a:p>
@@ -36580,7 +38044,7 @@
       </p:sp>
       <p:sp>
         <p:nvSpPr>
-          <p:cNvPr id="56" name="Shape 54"/>
+          <p:cNvPr id="59" name="Shape 57"/>
           <p:cNvSpPr/>
           <p:nvPr/>
         </p:nvSpPr>
@@ -36607,7 +38071,7 @@
       </p:sp>
       <p:sp>
         <p:nvSpPr>
-          <p:cNvPr id="57" name="Text 55"/>
+          <p:cNvPr id="60" name="Text 58"/>
           <p:cNvSpPr/>
           <p:nvPr/>
         </p:nvSpPr>
@@ -36638,73 +38102,7 @@
                 <a:ea typeface="Trebuchet MS" pitchFamily="34" charset="-122"/>
                 <a:cs typeface="Trebuchet MS" pitchFamily="34" charset="-120"/>
               </a:rPr>
-              <a:t>horoscope</a:t>
-            </a:r>
-            <a:endParaRPr lang="en-US" sz="1200" dirty="0"/>
-          </a:p>
-        </p:txBody>
-      </p:sp>
-      <p:sp>
-        <p:nvSpPr>
-          <p:cNvPr id="58" name="Shape 56"/>
-          <p:cNvSpPr/>
-          <p:nvPr/>
-        </p:nvSpPr>
-        <p:spPr>
-          <a:xfrm>
-            <a:off x="6894576" y="4498848"/>
-            <a:ext cx="2011680" cy="402336"/>
-          </a:xfrm>
-          <a:prstGeom prst="rect">
-            <a:avLst>
-              <a:gd name="adj" fmla="val 13636"/>
-            </a:avLst>
-          </a:prstGeom>
-          <a:solidFill>
-            <a:srgbClr val="EEF2FF"/>
-          </a:solidFill>
-          <a:ln w="12700">
-            <a:solidFill>
-              <a:srgbClr val="6366F1"/>
-            </a:solidFill>
-            <a:prstDash val="solid"/>
-          </a:ln>
-        </p:spPr>
-      </p:sp>
-      <p:sp>
-        <p:nvSpPr>
-          <p:cNvPr id="59" name="Text 57"/>
-          <p:cNvSpPr/>
-          <p:nvPr/>
-        </p:nvSpPr>
-        <p:spPr>
-          <a:xfrm>
-            <a:off x="6894576" y="4498848"/>
-            <a:ext cx="2011680" cy="402336"/>
-          </a:xfrm>
-          <a:prstGeom prst="rect">
-            <a:avLst/>
-          </a:prstGeom>
-          <a:noFill/>
-          <a:ln/>
-        </p:spPr>
-        <p:txBody>
-          <a:bodyPr wrap="square" lIns="0" tIns="0" rIns="0" bIns="0" rtlCol="0" anchor="ctr"/>
-          <a:lstStyle/>
-          <a:p>
-            <a:pPr algn="ctr" indent="0" marL="0">
-              <a:buNone/>
-            </a:pPr>
-            <a:r>
-              <a:rPr lang="en-US" sz="1200" b="1" dirty="0">
-                <a:solidFill>
-                  <a:srgbClr val="4338CA"/>
-                </a:solidFill>
-                <a:latin typeface="Trebuchet MS" pitchFamily="34" charset="0"/>
-                <a:ea typeface="Trebuchet MS" pitchFamily="34" charset="-122"/>
-                <a:cs typeface="Trebuchet MS" pitchFamily="34" charset="-120"/>
-              </a:rPr>
-              <a:t>scope</a:t>
+              <a:t>telescoping</a:t>
             </a:r>
             <a:endParaRPr lang="en-US" sz="1200" dirty="0"/>
           </a:p>
@@ -36996,7 +38394,7 @@
                 <a:ea typeface="Calibri" pitchFamily="34" charset="-122"/>
                 <a:cs typeface="Calibri" pitchFamily="34" charset="-120"/>
               </a:rPr>
-              <a:t>Word Labs  •  wordlabs.app  •  Root: 'scope' = to look, see, observe</a:t>
+              <a:t>Word Labs  •  wordlabs.app  •  Root: 'scope' = look; view; examine</a:t>
             </a:r>
             <a:endParaRPr lang="en-US" sz="800" dirty="0"/>
           </a:p>
@@ -37160,7 +38558,7 @@
                 <a:ea typeface="Calibri" pitchFamily="34" charset="-122"/>
                 <a:cs typeface="Calibri" pitchFamily="34" charset="-120"/>
               </a:rPr>
-              <a:t>The core part of a word carrying its basic meaning. For example, 'scope' means 'to look, see, observe'.</a:t>
+              <a:t>The core part of a word carrying its basic meaning. For example, 'scope' means 'look; view; examine'.</a:t>
             </a:r>
             <a:endParaRPr lang="en-US" sz="1350" dirty="0"/>
           </a:p>
@@ -37780,7 +39178,7 @@
                 <a:ea typeface="Calibri" pitchFamily="34" charset="-122"/>
                 <a:cs typeface="Calibri" pitchFamily="34" charset="-120"/>
               </a:rPr>
-              <a:t>Word Labs  •  wordlabs.app  •  Root: 'scope' = to look, see, observe</a:t>
+              <a:t>Word Labs  •  wordlabs.app  •  Root: 'scope' = look; view; examine</a:t>
             </a:r>
             <a:endParaRPr lang="en-US" sz="800" dirty="0"/>
           </a:p>
@@ -37892,7 +39290,7 @@
                 <a:ea typeface="Calibri" pitchFamily="34" charset="-122"/>
                 <a:cs typeface="Calibri" pitchFamily="34" charset="-120"/>
               </a:rPr>
-              <a:t>1.  A periscope uses mirrors to help you see around corners or over obstacles.</a:t>
+              <a:t>1.  'scope' means 'a type of musical instrument played by blowing air into it'.</a:t>
             </a:r>
             <a:endParaRPr lang="en-US" sz="1300" dirty="0"/>
           </a:p>
@@ -37915,11 +39313,11 @@
             </a:avLst>
           </a:prstGeom>
           <a:solidFill>
-            <a:srgbClr val="DCFCE7"/>
-          </a:solidFill>
-          <a:ln w="12700">
-            <a:solidFill>
-              <a:srgbClr val="16A34A"/>
+            <a:srgbClr val="FEE2E2"/>
+          </a:solidFill>
+          <a:ln w="12700">
+            <a:solidFill>
+              <a:srgbClr val="DC2626"/>
             </a:solidFill>
             <a:prstDash val="solid"/>
           </a:ln>
@@ -37952,13 +39350,13 @@
             <a:r>
               <a:rPr lang="en-US" sz="1100" b="1" dirty="0">
                 <a:solidFill>
-                  <a:srgbClr val="16A34A"/>
+                  <a:srgbClr val="DC2626"/>
                 </a:solidFill>
                 <a:latin typeface="Trebuchet MS" pitchFamily="34" charset="0"/>
                 <a:ea typeface="Trebuchet MS" pitchFamily="34" charset="-122"/>
                 <a:cs typeface="Trebuchet MS" pitchFamily="34" charset="-120"/>
               </a:rPr>
-              <a:t>TRUE</a:t>
+              <a:t>FALSE</a:t>
             </a:r>
             <a:endParaRPr lang="en-US" sz="1100" dirty="0"/>
           </a:p>
@@ -38031,7 +39429,7 @@
                 <a:ea typeface="Calibri" pitchFamily="34" charset="-122"/>
                 <a:cs typeface="Calibri" pitchFamily="34" charset="-120"/>
               </a:rPr>
-              <a:t>2.  The root 'scope' comes from a Greek word meaning to look or observe.</a:t>
+              <a:t>2.  'scope' means 'the range or extent of something, or an instrument for looking closely at things'.</a:t>
             </a:r>
             <a:endParaRPr lang="en-US" sz="1300" dirty="0"/>
           </a:p>
@@ -38170,7 +39568,7 @@
                 <a:ea typeface="Calibri" pitchFamily="34" charset="-122"/>
                 <a:cs typeface="Calibri" pitchFamily="34" charset="-120"/>
               </a:rPr>
-              <a:t>3.  A microscope is used to see things that are very far away.</a:t>
+              <a:t>3.  'scope' means 'look; view; examine'.</a:t>
             </a:r>
             <a:endParaRPr lang="en-US" sz="1300" dirty="0"/>
           </a:p>
@@ -38193,11 +39591,11 @@
             </a:avLst>
           </a:prstGeom>
           <a:solidFill>
-            <a:srgbClr val="FEE2E2"/>
-          </a:solidFill>
-          <a:ln w="12700">
-            <a:solidFill>
-              <a:srgbClr val="DC2626"/>
+            <a:srgbClr val="DCFCE7"/>
+          </a:solidFill>
+          <a:ln w="12700">
+            <a:solidFill>
+              <a:srgbClr val="16A34A"/>
             </a:solidFill>
             <a:prstDash val="solid"/>
           </a:ln>
@@ -38230,13 +39628,13 @@
             <a:r>
               <a:rPr lang="en-US" sz="1100" b="1" dirty="0">
                 <a:solidFill>
-                  <a:srgbClr val="DC2626"/>
+                  <a:srgbClr val="16A34A"/>
                 </a:solidFill>
                 <a:latin typeface="Trebuchet MS" pitchFamily="34" charset="0"/>
                 <a:ea typeface="Trebuchet MS" pitchFamily="34" charset="-122"/>
                 <a:cs typeface="Trebuchet MS" pitchFamily="34" charset="-120"/>
               </a:rPr>
-              <a:t>FALSE</a:t>
+              <a:t>TRUE</a:t>
             </a:r>
             <a:endParaRPr lang="en-US" sz="1100" dirty="0"/>
           </a:p>
@@ -38309,7 +39707,7 @@
                 <a:ea typeface="Calibri" pitchFamily="34" charset="-122"/>
                 <a:cs typeface="Calibri" pitchFamily="34" charset="-120"/>
               </a:rPr>
-              <a:t>4.  The word 'stethoscope' contains the root 'scope'.</a:t>
+              <a:t>4.  'scopes' means 'small brushes used for painting pictures'.</a:t>
             </a:r>
             <a:endParaRPr lang="en-US" sz="1300" dirty="0"/>
           </a:p>
@@ -38332,11 +39730,11 @@
             </a:avLst>
           </a:prstGeom>
           <a:solidFill>
-            <a:srgbClr val="DCFCE7"/>
-          </a:solidFill>
-          <a:ln w="12700">
-            <a:solidFill>
-              <a:srgbClr val="16A34A"/>
+            <a:srgbClr val="FEE2E2"/>
+          </a:solidFill>
+          <a:ln w="12700">
+            <a:solidFill>
+              <a:srgbClr val="DC2626"/>
             </a:solidFill>
             <a:prstDash val="solid"/>
           </a:ln>
@@ -38369,13 +39767,13 @@
             <a:r>
               <a:rPr lang="en-US" sz="1100" b="1" dirty="0">
                 <a:solidFill>
-                  <a:srgbClr val="16A34A"/>
+                  <a:srgbClr val="DC2626"/>
                 </a:solidFill>
                 <a:latin typeface="Trebuchet MS" pitchFamily="34" charset="0"/>
                 <a:ea typeface="Trebuchet MS" pitchFamily="34" charset="-122"/>
                 <a:cs typeface="Trebuchet MS" pitchFamily="34" charset="-120"/>
               </a:rPr>
-              <a:t>TRUE</a:t>
+              <a:t>FALSE</a:t>
             </a:r>
             <a:endParaRPr lang="en-US" sz="1100" dirty="0"/>
           </a:p>
@@ -38448,7 +39846,7 @@
                 <a:ea typeface="Calibri" pitchFamily="34" charset="-122"/>
                 <a:cs typeface="Calibri" pitchFamily="34" charset="-120"/>
               </a:rPr>
-              <a:t>5.  The root 'scope' comes from a Latin word meaning to measure.</a:t>
+              <a:t>5.  'scopes' means 'ranges or extents of things, or instruments used for looking at things closely'.</a:t>
             </a:r>
             <a:endParaRPr lang="en-US" sz="1300" dirty="0"/>
           </a:p>
@@ -38471,11 +39869,11 @@
             </a:avLst>
           </a:prstGeom>
           <a:solidFill>
-            <a:srgbClr val="FEE2E2"/>
-          </a:solidFill>
-          <a:ln w="12700">
-            <a:solidFill>
-              <a:srgbClr val="DC2626"/>
+            <a:srgbClr val="DCFCE7"/>
+          </a:solidFill>
+          <a:ln w="12700">
+            <a:solidFill>
+              <a:srgbClr val="16A34A"/>
             </a:solidFill>
             <a:prstDash val="solid"/>
           </a:ln>
@@ -38508,13 +39906,13 @@
             <a:r>
               <a:rPr lang="en-US" sz="1100" b="1" dirty="0">
                 <a:solidFill>
-                  <a:srgbClr val="DC2626"/>
+                  <a:srgbClr val="16A34A"/>
                 </a:solidFill>
                 <a:latin typeface="Trebuchet MS" pitchFamily="34" charset="0"/>
                 <a:ea typeface="Trebuchet MS" pitchFamily="34" charset="-122"/>
                 <a:cs typeface="Trebuchet MS" pitchFamily="34" charset="-120"/>
               </a:rPr>
-              <a:t>FALSE</a:t>
+              <a:t>TRUE</a:t>
             </a:r>
             <a:endParaRPr lang="en-US" sz="1100" dirty="0"/>
           </a:p>
@@ -38806,7 +40204,7 @@
                 <a:ea typeface="Calibri" pitchFamily="34" charset="-122"/>
                 <a:cs typeface="Calibri" pitchFamily="34" charset="-120"/>
               </a:rPr>
-              <a:t>Word Labs  •  wordlabs.app  •  Root: 'scope' = to look, see, observe</a:t>
+              <a:t>Word Labs  •  wordlabs.app  •  Root: 'scope' = look; view; examine</a:t>
             </a:r>
             <a:endParaRPr lang="en-US" sz="800" dirty="0"/>
           </a:p>
@@ -38943,7 +40341,7 @@
                 <a:ea typeface="Trebuchet MS" pitchFamily="34" charset="-122"/>
                 <a:cs typeface="Trebuchet MS" pitchFamily="34" charset="-120"/>
               </a:rPr>
-              <a:t>to look, see, observe</a:t>
+              <a:t>look; view; examine</a:t>
             </a:r>
             <a:endParaRPr lang="en-US" sz="2000" dirty="0"/>
           </a:p>
@@ -38982,7 +40380,7 @@
                 <a:ea typeface="Calibri" pitchFamily="34" charset="-122"/>
                 <a:cs typeface="Calibri" pitchFamily="34" charset="-120"/>
               </a:rPr>
-              <a:t>Origin: Greek: skopein</a:t>
+              <a:t>Origin: Greek root</a:t>
             </a:r>
             <a:endParaRPr lang="en-US" sz="1100" dirty="0"/>
           </a:p>
@@ -39087,7 +40485,7 @@
                 <a:ea typeface="Trebuchet MS" pitchFamily="34" charset="-122"/>
                 <a:cs typeface="Trebuchet MS" pitchFamily="34" charset="-120"/>
               </a:rPr>
-              <a:t>telescope</a:t>
+              <a:t>scope</a:t>
             </a:r>
             <a:endParaRPr lang="en-US" sz="1300" dirty="0"/>
           </a:p>
@@ -39153,7 +40551,7 @@
                 <a:ea typeface="Trebuchet MS" pitchFamily="34" charset="-122"/>
                 <a:cs typeface="Trebuchet MS" pitchFamily="34" charset="-120"/>
               </a:rPr>
-              <a:t>microscope</a:t>
+              <a:t>scopes</a:t>
             </a:r>
             <a:endParaRPr lang="en-US" sz="1300" dirty="0"/>
           </a:p>
@@ -39219,7 +40617,7 @@
                 <a:ea typeface="Trebuchet MS" pitchFamily="34" charset="-122"/>
                 <a:cs typeface="Trebuchet MS" pitchFamily="34" charset="-120"/>
               </a:rPr>
-              <a:t>kaleidoscope</a:t>
+              <a:t>telescope</a:t>
             </a:r>
             <a:endParaRPr lang="en-US" sz="1300" dirty="0"/>
           </a:p>
@@ -39285,7 +40683,7 @@
                 <a:ea typeface="Trebuchet MS" pitchFamily="34" charset="-122"/>
                 <a:cs typeface="Trebuchet MS" pitchFamily="34" charset="-120"/>
               </a:rPr>
-              <a:t>periscope</a:t>
+              <a:t>telescoped</a:t>
             </a:r>
             <a:endParaRPr lang="en-US" sz="1300" dirty="0"/>
           </a:p>
@@ -39351,7 +40749,7 @@
                 <a:ea typeface="Trebuchet MS" pitchFamily="34" charset="-122"/>
                 <a:cs typeface="Trebuchet MS" pitchFamily="34" charset="-120"/>
               </a:rPr>
-              <a:t>endoscope</a:t>
+              <a:t>telescopes</a:t>
             </a:r>
             <a:endParaRPr lang="en-US" sz="1300" dirty="0"/>
           </a:p>
@@ -39417,7 +40815,7 @@
                 <a:ea typeface="Trebuchet MS" pitchFamily="34" charset="-122"/>
                 <a:cs typeface="Trebuchet MS" pitchFamily="34" charset="-120"/>
               </a:rPr>
-              <a:t>stethoscope</a:t>
+              <a:t>telescopic</a:t>
             </a:r>
             <a:endParaRPr lang="en-US" sz="1300" dirty="0"/>
           </a:p>
@@ -39483,7 +40881,7 @@
                 <a:ea typeface="Trebuchet MS" pitchFamily="34" charset="-122"/>
                 <a:cs typeface="Trebuchet MS" pitchFamily="34" charset="-120"/>
               </a:rPr>
-              <a:t>horoscope</a:t>
+              <a:t>telescoping</a:t>
             </a:r>
             <a:endParaRPr lang="en-US" sz="1300" dirty="0"/>
           </a:p>
@@ -39775,7 +41173,7 @@
                 <a:ea typeface="Calibri" pitchFamily="34" charset="-122"/>
                 <a:cs typeface="Calibri" pitchFamily="34" charset="-120"/>
               </a:rPr>
-              <a:t>Word Labs  •  wordlabs.app  •  Root: 'scope' = to look, see, observe</a:t>
+              <a:t>Word Labs  •  wordlabs.app  •  Root: 'scope' = look; view; examine</a:t>
             </a:r>
             <a:endParaRPr lang="en-US" sz="800" dirty="0"/>
           </a:p>
@@ -40076,7 +41474,7 @@
                 <a:ea typeface="Trebuchet MS" pitchFamily="34" charset="-122"/>
                 <a:cs typeface="Trebuchet MS" pitchFamily="34" charset="-120"/>
               </a:rPr>
-              <a:t>tele-</a:t>
+              <a:t>endo-</a:t>
             </a:r>
             <a:endParaRPr lang="en-US" sz="1300" dirty="0"/>
           </a:p>
@@ -40204,7 +41602,7 @@
                 <a:ea typeface="Trebuchet MS" pitchFamily="34" charset="-122"/>
                 <a:cs typeface="Trebuchet MS" pitchFamily="34" charset="-120"/>
               </a:rPr>
-              <a:t>-ic</a:t>
+              <a:t>-s</a:t>
             </a:r>
             <a:endParaRPr lang="en-US" sz="1300" dirty="0"/>
           </a:p>
@@ -40268,7 +41666,7 @@
                 <a:ea typeface="Trebuchet MS" pitchFamily="34" charset="-122"/>
                 <a:cs typeface="Trebuchet MS" pitchFamily="34" charset="-120"/>
               </a:rPr>
-              <a:t>micro-</a:t>
+              <a:t>gyro-</a:t>
             </a:r>
             <a:endParaRPr lang="en-US" sz="1300" dirty="0"/>
           </a:p>
@@ -40357,7 +41755,7 @@
                 <a:ea typeface="Trebuchet MS" pitchFamily="34" charset="-122"/>
                 <a:cs typeface="Trebuchet MS" pitchFamily="34" charset="-120"/>
               </a:rPr>
-              <a:t>-ist</a:t>
+              <a:t>-ed</a:t>
             </a:r>
             <a:endParaRPr lang="en-US" sz="1300" dirty="0"/>
           </a:p>
@@ -40421,7 +41819,7 @@
                 <a:ea typeface="Trebuchet MS" pitchFamily="34" charset="-122"/>
                 <a:cs typeface="Trebuchet MS" pitchFamily="34" charset="-120"/>
               </a:rPr>
-              <a:t>kaleid-</a:t>
+              <a:t>horo-</a:t>
             </a:r>
             <a:endParaRPr lang="en-US" sz="1300" dirty="0"/>
           </a:p>
@@ -40510,7 +41908,7 @@
                 <a:ea typeface="Trebuchet MS" pitchFamily="34" charset="-122"/>
                 <a:cs typeface="Trebuchet MS" pitchFamily="34" charset="-120"/>
               </a:rPr>
-              <a:t>-ical</a:t>
+              <a:t>-ic</a:t>
             </a:r>
             <a:endParaRPr lang="en-US" sz="1300" dirty="0"/>
           </a:p>
@@ -40574,7 +41972,7 @@
                 <a:ea typeface="Trebuchet MS" pitchFamily="34" charset="-122"/>
                 <a:cs typeface="Trebuchet MS" pitchFamily="34" charset="-120"/>
               </a:rPr>
-              <a:t>peri-</a:t>
+              <a:t>kaleido-</a:t>
             </a:r>
             <a:endParaRPr lang="en-US" sz="1300" dirty="0"/>
           </a:p>
@@ -40663,7 +42061,7 @@
                 <a:ea typeface="Trebuchet MS" pitchFamily="34" charset="-122"/>
                 <a:cs typeface="Trebuchet MS" pitchFamily="34" charset="-120"/>
               </a:rPr>
-              <a:t>-ed</a:t>
+              <a:t>-ing</a:t>
             </a:r>
             <a:endParaRPr lang="en-US" sz="1300" dirty="0"/>
           </a:p>
@@ -40727,7 +42125,7 @@
                 <a:ea typeface="Trebuchet MS" pitchFamily="34" charset="-122"/>
                 <a:cs typeface="Trebuchet MS" pitchFamily="34" charset="-120"/>
               </a:rPr>
-              <a:t>endo-</a:t>
+              <a:t>peri-</a:t>
             </a:r>
             <a:endParaRPr lang="en-US" sz="1300" dirty="0"/>
           </a:p>
@@ -40773,7 +42171,7 @@
             <a:avLst/>
           </a:prstGeom>
           <a:solidFill>
-            <a:srgbClr val="FCE7F3"/>
+            <a:srgbClr val="F8FAFC"/>
           </a:solidFill>
           <a:ln w="12700">
             <a:solidFill>
@@ -40785,18 +42183,43 @@
       </p:sp>
       <p:sp>
         <p:nvSpPr>
-          <p:cNvPr id="42" name="Text 40"/>
-          <p:cNvSpPr/>
-          <p:nvPr/>
-        </p:nvSpPr>
-        <p:spPr>
-          <a:xfrm>
-            <a:off x="5943600" y="3584448"/>
+          <p:cNvPr id="42" name="Shape 40"/>
+          <p:cNvSpPr/>
+          <p:nvPr/>
+        </p:nvSpPr>
+        <p:spPr>
+          <a:xfrm>
+            <a:off x="640080" y="4041648"/>
             <a:ext cx="1463040" cy="420624"/>
           </a:xfrm>
           <a:prstGeom prst="rect">
             <a:avLst/>
           </a:prstGeom>
+          <a:solidFill>
+            <a:srgbClr val="DDD6FE"/>
+          </a:solidFill>
+          <a:ln w="12700">
+            <a:solidFill>
+              <a:srgbClr val="E5E7EB"/>
+            </a:solidFill>
+            <a:prstDash val="solid"/>
+          </a:ln>
+        </p:spPr>
+      </p:sp>
+      <p:sp>
+        <p:nvSpPr>
+          <p:cNvPr id="43" name="Text 41"/>
+          <p:cNvSpPr/>
+          <p:nvPr/>
+        </p:nvSpPr>
+        <p:spPr>
+          <a:xfrm>
+            <a:off x="640080" y="4041648"/>
+            <a:ext cx="1463040" cy="420624"/>
+          </a:xfrm>
+          <a:prstGeom prst="rect">
+            <a:avLst/>
+          </a:prstGeom>
           <a:noFill/>
           <a:ln/>
         </p:spPr>
@@ -40810,13 +42233,13 @@
             <a:r>
               <a:rPr lang="en-US" sz="1300" b="1" dirty="0">
                 <a:solidFill>
-                  <a:srgbClr val="9D174D"/>
+                  <a:srgbClr val="4C1D95"/>
                 </a:solidFill>
                 <a:latin typeface="Trebuchet MS" pitchFamily="34" charset="0"/>
                 <a:ea typeface="Trebuchet MS" pitchFamily="34" charset="-122"/>
                 <a:cs typeface="Trebuchet MS" pitchFamily="34" charset="-120"/>
               </a:rPr>
-              <a:t>-ing</a:t>
+              <a:t>stetho-</a:t>
             </a:r>
             <a:endParaRPr lang="en-US" sz="1300" dirty="0"/>
           </a:p>
@@ -40824,13 +42247,63 @@
       </p:sp>
       <p:sp>
         <p:nvSpPr>
-          <p:cNvPr id="43" name="Text 41"/>
-          <p:cNvSpPr/>
-          <p:nvPr/>
-        </p:nvSpPr>
-        <p:spPr>
-          <a:xfrm>
-            <a:off x="365760" y="4178808"/>
+          <p:cNvPr id="44" name="Shape 42"/>
+          <p:cNvSpPr/>
+          <p:nvPr/>
+        </p:nvSpPr>
+        <p:spPr>
+          <a:xfrm>
+            <a:off x="3291840" y="4041648"/>
+            <a:ext cx="1645920" cy="420624"/>
+          </a:xfrm>
+          <a:prstGeom prst="rect">
+            <a:avLst/>
+          </a:prstGeom>
+          <a:solidFill>
+            <a:srgbClr val="F1F5F9"/>
+          </a:solidFill>
+          <a:ln w="12700">
+            <a:solidFill>
+              <a:srgbClr val="E5E7EB"/>
+            </a:solidFill>
+            <a:prstDash val="solid"/>
+          </a:ln>
+        </p:spPr>
+      </p:sp>
+      <p:sp>
+        <p:nvSpPr>
+          <p:cNvPr id="45" name="Shape 43"/>
+          <p:cNvSpPr/>
+          <p:nvPr/>
+        </p:nvSpPr>
+        <p:spPr>
+          <a:xfrm>
+            <a:off x="5943600" y="4041648"/>
+            <a:ext cx="1463040" cy="420624"/>
+          </a:xfrm>
+          <a:prstGeom prst="rect">
+            <a:avLst/>
+          </a:prstGeom>
+          <a:solidFill>
+            <a:srgbClr val="F1F5F9"/>
+          </a:solidFill>
+          <a:ln w="12700">
+            <a:solidFill>
+              <a:srgbClr val="E5E7EB"/>
+            </a:solidFill>
+            <a:prstDash val="solid"/>
+          </a:ln>
+        </p:spPr>
+      </p:sp>
+      <p:sp>
+        <p:nvSpPr>
+          <p:cNvPr id="46" name="Text 44"/>
+          <p:cNvSpPr/>
+          <p:nvPr/>
+        </p:nvSpPr>
+        <p:spPr>
+          <a:xfrm>
+            <a:off x="365760" y="4636008"/>
             <a:ext cx="1097280" cy="420624"/>
           </a:xfrm>
           <a:prstGeom prst="rect">
@@ -40863,13 +42336,13 @@
       </p:sp>
       <p:sp>
         <p:nvSpPr>
-          <p:cNvPr id="44" name="Shape 42"/>
-          <p:cNvSpPr/>
-          <p:nvPr/>
-        </p:nvSpPr>
-        <p:spPr>
-          <a:xfrm>
-            <a:off x="1508760" y="4178808"/>
+          <p:cNvPr id="47" name="Shape 45"/>
+          <p:cNvSpPr/>
+          <p:nvPr/>
+        </p:nvSpPr>
+        <p:spPr>
+          <a:xfrm>
+            <a:off x="1508760" y="4636008"/>
             <a:ext cx="1097280" cy="420624"/>
           </a:xfrm>
           <a:prstGeom prst="rect">
@@ -40897,13 +42370,13 @@
       </p:sp>
       <p:sp>
         <p:nvSpPr>
-          <p:cNvPr id="45" name="Text 43"/>
-          <p:cNvSpPr/>
-          <p:nvPr/>
-        </p:nvSpPr>
-        <p:spPr>
-          <a:xfrm>
-            <a:off x="1508760" y="4178808"/>
+          <p:cNvPr id="48" name="Text 46"/>
+          <p:cNvSpPr/>
+          <p:nvPr/>
+        </p:nvSpPr>
+        <p:spPr>
+          <a:xfrm>
+            <a:off x="1508760" y="4636008"/>
             <a:ext cx="1097280" cy="420624"/>
           </a:xfrm>
           <a:prstGeom prst="rect">
@@ -40928,7 +42401,7 @@
                 <a:ea typeface="Trebuchet MS" pitchFamily="34" charset="-122"/>
                 <a:cs typeface="Trebuchet MS" pitchFamily="34" charset="-120"/>
               </a:rPr>
-              <a:t>tele-</a:t>
+              <a:t>endo-</a:t>
             </a:r>
             <a:endParaRPr lang="en-US" sz="1300" dirty="0"/>
           </a:p>
@@ -40936,13 +42409,13 @@
       </p:sp>
       <p:sp>
         <p:nvSpPr>
-          <p:cNvPr id="46" name="Text 44"/>
-          <p:cNvSpPr/>
-          <p:nvPr/>
-        </p:nvSpPr>
-        <p:spPr>
-          <a:xfrm>
-            <a:off x="2633472" y="4178808"/>
+          <p:cNvPr id="49" name="Text 47"/>
+          <p:cNvSpPr/>
+          <p:nvPr/>
+        </p:nvSpPr>
+        <p:spPr>
+          <a:xfrm>
+            <a:off x="2633472" y="4636008"/>
             <a:ext cx="320040" cy="420624"/>
           </a:xfrm>
           <a:prstGeom prst="rect">
@@ -40975,13 +42448,13 @@
       </p:sp>
       <p:sp>
         <p:nvSpPr>
-          <p:cNvPr id="47" name="Shape 45"/>
-          <p:cNvSpPr/>
-          <p:nvPr/>
-        </p:nvSpPr>
-        <p:spPr>
-          <a:xfrm>
-            <a:off x="2980944" y="4178808"/>
+          <p:cNvPr id="50" name="Shape 48"/>
+          <p:cNvSpPr/>
+          <p:nvPr/>
+        </p:nvSpPr>
+        <p:spPr>
+          <a:xfrm>
+            <a:off x="2980944" y="4636008"/>
             <a:ext cx="1389888" cy="420624"/>
           </a:xfrm>
           <a:prstGeom prst="rect">
@@ -41009,13 +42482,13 @@
       </p:sp>
       <p:sp>
         <p:nvSpPr>
-          <p:cNvPr id="48" name="Text 46"/>
-          <p:cNvSpPr/>
-          <p:nvPr/>
-        </p:nvSpPr>
-        <p:spPr>
-          <a:xfrm>
-            <a:off x="2980944" y="4178808"/>
+          <p:cNvPr id="51" name="Text 49"/>
+          <p:cNvSpPr/>
+          <p:nvPr/>
+        </p:nvSpPr>
+        <p:spPr>
+          <a:xfrm>
+            <a:off x="2980944" y="4636008"/>
             <a:ext cx="1389888" cy="420624"/>
           </a:xfrm>
           <a:prstGeom prst="rect">
@@ -41048,13 +42521,13 @@
       </p:sp>
       <p:sp>
         <p:nvSpPr>
-          <p:cNvPr id="49" name="Text 47"/>
-          <p:cNvSpPr/>
-          <p:nvPr/>
-        </p:nvSpPr>
-        <p:spPr>
-          <a:xfrm>
-            <a:off x="4398264" y="4178808"/>
+          <p:cNvPr id="52" name="Text 50"/>
+          <p:cNvSpPr/>
+          <p:nvPr/>
+        </p:nvSpPr>
+        <p:spPr>
+          <a:xfrm>
+            <a:off x="4398264" y="4636008"/>
             <a:ext cx="320040" cy="420624"/>
           </a:xfrm>
           <a:prstGeom prst="rect">
@@ -41087,13 +42560,13 @@
       </p:sp>
       <p:sp>
         <p:nvSpPr>
-          <p:cNvPr id="50" name="Shape 48"/>
-          <p:cNvSpPr/>
-          <p:nvPr/>
-        </p:nvSpPr>
-        <p:spPr>
-          <a:xfrm>
-            <a:off x="4745736" y="4178808"/>
+          <p:cNvPr id="53" name="Shape 51"/>
+          <p:cNvSpPr/>
+          <p:nvPr/>
+        </p:nvSpPr>
+        <p:spPr>
+          <a:xfrm>
+            <a:off x="4745736" y="4636008"/>
             <a:ext cx="822960" cy="420624"/>
           </a:xfrm>
           <a:prstGeom prst="rect">
@@ -41121,13 +42594,13 @@
       </p:sp>
       <p:sp>
         <p:nvSpPr>
-          <p:cNvPr id="51" name="Text 49"/>
-          <p:cNvSpPr/>
-          <p:nvPr/>
-        </p:nvSpPr>
-        <p:spPr>
-          <a:xfrm>
-            <a:off x="4745736" y="4178808"/>
+          <p:cNvPr id="54" name="Text 52"/>
+          <p:cNvSpPr/>
+          <p:nvPr/>
+        </p:nvSpPr>
+        <p:spPr>
+          <a:xfrm>
+            <a:off x="4745736" y="4636008"/>
             <a:ext cx="822960" cy="420624"/>
           </a:xfrm>
           <a:prstGeom prst="rect">
@@ -41152,7 +42625,7 @@
                 <a:ea typeface="Trebuchet MS" pitchFamily="34" charset="-122"/>
                 <a:cs typeface="Trebuchet MS" pitchFamily="34" charset="-120"/>
               </a:rPr>
-              <a:t>-ic</a:t>
+              <a:t>-s</a:t>
             </a:r>
             <a:endParaRPr lang="en-US" sz="1300" dirty="0"/>
           </a:p>
@@ -41160,13 +42633,13 @@
       </p:sp>
       <p:sp>
         <p:nvSpPr>
-          <p:cNvPr id="52" name="Text 50"/>
-          <p:cNvSpPr/>
-          <p:nvPr/>
-        </p:nvSpPr>
-        <p:spPr>
-          <a:xfrm>
-            <a:off x="5641848" y="4178808"/>
+          <p:cNvPr id="55" name="Text 53"/>
+          <p:cNvSpPr/>
+          <p:nvPr/>
+        </p:nvSpPr>
+        <p:spPr>
+          <a:xfrm>
+            <a:off x="5641848" y="4636008"/>
             <a:ext cx="365760" cy="420624"/>
           </a:xfrm>
           <a:prstGeom prst="rect">
@@ -41199,13 +42672,13 @@
       </p:sp>
       <p:sp>
         <p:nvSpPr>
-          <p:cNvPr id="53" name="Shape 51"/>
-          <p:cNvSpPr/>
-          <p:nvPr/>
-        </p:nvSpPr>
-        <p:spPr>
-          <a:xfrm>
-            <a:off x="6053328" y="4178808"/>
+          <p:cNvPr id="56" name="Shape 54"/>
+          <p:cNvSpPr/>
+          <p:nvPr/>
+        </p:nvSpPr>
+        <p:spPr>
+          <a:xfrm>
+            <a:off x="6053328" y="4636008"/>
             <a:ext cx="2194560" cy="420624"/>
           </a:xfrm>
           <a:prstGeom prst="rect">
@@ -41226,13 +42699,13 @@
       </p:sp>
       <p:sp>
         <p:nvSpPr>
-          <p:cNvPr id="54" name="Text 52"/>
-          <p:cNvSpPr/>
-          <p:nvPr/>
-        </p:nvSpPr>
-        <p:spPr>
-          <a:xfrm>
-            <a:off x="6053328" y="4178808"/>
+          <p:cNvPr id="57" name="Text 55"/>
+          <p:cNvSpPr/>
+          <p:nvPr/>
+        </p:nvSpPr>
+        <p:spPr>
+          <a:xfrm>
+            <a:off x="6053328" y="4636008"/>
             <a:ext cx="2194560" cy="420624"/>
           </a:xfrm>
           <a:prstGeom prst="rect">
@@ -41257,7 +42730,7 @@
                 <a:ea typeface="Trebuchet MS" pitchFamily="34" charset="-122"/>
                 <a:cs typeface="Trebuchet MS" pitchFamily="34" charset="-120"/>
               </a:rPr>
-              <a:t>telescope</a:t>
+              <a:t>scope</a:t>
             </a:r>
             <a:endParaRPr lang="en-US" sz="1400" dirty="0"/>
           </a:p>
@@ -41549,7 +43022,7 @@
                 <a:ea typeface="Calibri" pitchFamily="34" charset="-122"/>
                 <a:cs typeface="Calibri" pitchFamily="34" charset="-120"/>
               </a:rPr>
-              <a:t>Word Labs  •  wordlabs.app  •  Root: 'scope' = to look, see, observe</a:t>
+              <a:t>Word Labs  •  wordlabs.app  •  Root: 'scope' = look; view; examine</a:t>
             </a:r>
             <a:endParaRPr lang="en-US" sz="800" dirty="0"/>
           </a:p>
@@ -41661,7 +43134,7 @@
                 <a:ea typeface="Trebuchet MS" pitchFamily="34" charset="-122"/>
                 <a:cs typeface="Trebuchet MS" pitchFamily="34" charset="-120"/>
               </a:rPr>
-              <a:t>telescope</a:t>
+              <a:t>scope</a:t>
             </a:r>
             <a:endParaRPr lang="en-US" sz="1200" dirty="0"/>
           </a:p>
@@ -41727,7 +43200,7 @@
                 <a:ea typeface="Calibri" pitchFamily="34" charset="-122"/>
                 <a:cs typeface="Calibri" pitchFamily="34" charset="-120"/>
               </a:rPr>
-              <a:t>A reading based on stars and planets that some people believe predicts what might happen in their life.</a:t>
+              <a:t>sliding sections together so that they overlap, in the manner of a telescope</a:t>
             </a:r>
             <a:endParaRPr lang="en-US" sz="1200" dirty="0"/>
           </a:p>
@@ -41800,7 +43273,7 @@
                 <a:ea typeface="Trebuchet MS" pitchFamily="34" charset="-122"/>
                 <a:cs typeface="Trebuchet MS" pitchFamily="34" charset="-120"/>
               </a:rPr>
-              <a:t>microscope</a:t>
+              <a:t>scopes</a:t>
             </a:r>
             <a:endParaRPr lang="en-US" sz="1200" dirty="0"/>
           </a:p>
@@ -41866,7 +43339,7 @@
                 <a:ea typeface="Calibri" pitchFamily="34" charset="-122"/>
                 <a:cs typeface="Calibri" pitchFamily="34" charset="-120"/>
               </a:rPr>
-              <a:t>A special medical tool that lets doctors look inside a person's body.</a:t>
+              <a:t>instruments with lenses used to see faraway objects, or slides sections together so they overlap</a:t>
             </a:r>
             <a:endParaRPr lang="en-US" sz="1200" dirty="0"/>
           </a:p>
@@ -41939,7 +43412,7 @@
                 <a:ea typeface="Trebuchet MS" pitchFamily="34" charset="-122"/>
                 <a:cs typeface="Trebuchet MS" pitchFamily="34" charset="-120"/>
               </a:rPr>
-              <a:t>kaleidoscope</a:t>
+              <a:t>telescope</a:t>
             </a:r>
             <a:endParaRPr lang="en-US" sz="1200" dirty="0"/>
           </a:p>
@@ -42005,7 +43478,7 @@
                 <a:ea typeface="Calibri" pitchFamily="34" charset="-122"/>
                 <a:cs typeface="Calibri" pitchFamily="34" charset="-120"/>
               </a:rPr>
-              <a:t>A tube with mirrors that lets you see around corners or above water, used in submarines.</a:t>
+              <a:t>slid or crushed together so that parts overlap, like sections of a collapsible tube</a:t>
             </a:r>
             <a:endParaRPr lang="en-US" sz="1200" dirty="0"/>
           </a:p>
@@ -42078,7 +43551,7 @@
                 <a:ea typeface="Trebuchet MS" pitchFamily="34" charset="-122"/>
                 <a:cs typeface="Trebuchet MS" pitchFamily="34" charset="-120"/>
               </a:rPr>
-              <a:t>periscope</a:t>
+              <a:t>telescoped</a:t>
             </a:r>
             <a:endParaRPr lang="en-US" sz="1200" dirty="0"/>
           </a:p>
@@ -42144,7 +43617,7 @@
                 <a:ea typeface="Calibri" pitchFamily="34" charset="-122"/>
                 <a:cs typeface="Calibri" pitchFamily="34" charset="-120"/>
               </a:rPr>
-              <a:t>A medical tool that doctors use to listen to your heart and lungs.</a:t>
+              <a:t>able to extend or slide together in overlapping sections, like a telescope, or relating to telescopes</a:t>
             </a:r>
             <a:endParaRPr lang="en-US" sz="1200" dirty="0"/>
           </a:p>
@@ -42217,7 +43690,7 @@
                 <a:ea typeface="Trebuchet MS" pitchFamily="34" charset="-122"/>
                 <a:cs typeface="Trebuchet MS" pitchFamily="34" charset="-120"/>
               </a:rPr>
-              <a:t>endoscope</a:t>
+              <a:t>telescopes</a:t>
             </a:r>
             <a:endParaRPr lang="en-US" sz="1200" dirty="0"/>
           </a:p>
@@ -42283,7 +43756,7 @@
                 <a:ea typeface="Calibri" pitchFamily="34" charset="-122"/>
                 <a:cs typeface="Calibri" pitchFamily="34" charset="-120"/>
               </a:rPr>
-              <a:t>A tube you look through that shows colourful, changing patterns when you twist it.</a:t>
+              <a:t>an instrument with lenses used to see faraway objects, such as stars and planets, up close</a:t>
             </a:r>
             <a:endParaRPr lang="en-US" sz="1200" dirty="0"/>
           </a:p>
@@ -42356,7 +43829,7 @@
                 <a:ea typeface="Trebuchet MS" pitchFamily="34" charset="-122"/>
                 <a:cs typeface="Trebuchet MS" pitchFamily="34" charset="-120"/>
               </a:rPr>
-              <a:t>stethoscope</a:t>
+              <a:t>telescopic</a:t>
             </a:r>
             <a:endParaRPr lang="en-US" sz="1200" dirty="0"/>
           </a:p>
@@ -42422,7 +43895,7 @@
                 <a:ea typeface="Calibri" pitchFamily="34" charset="-122"/>
                 <a:cs typeface="Calibri" pitchFamily="34" charset="-120"/>
               </a:rPr>
-              <a:t>A tool that makes faraway things like stars and planets look much closer.</a:t>
+              <a:t>the range or extent of something, or an instrument for looking closely at things</a:t>
             </a:r>
             <a:endParaRPr lang="en-US" sz="1200" dirty="0"/>
           </a:p>
@@ -42495,7 +43968,7 @@
                 <a:ea typeface="Trebuchet MS" pitchFamily="34" charset="-122"/>
                 <a:cs typeface="Trebuchet MS" pitchFamily="34" charset="-120"/>
               </a:rPr>
-              <a:t>horoscope</a:t>
+              <a:t>telescoping</a:t>
             </a:r>
             <a:endParaRPr lang="en-US" sz="1200" dirty="0"/>
           </a:p>
@@ -42561,7 +44034,7 @@
                 <a:ea typeface="Calibri" pitchFamily="34" charset="-122"/>
                 <a:cs typeface="Calibri" pitchFamily="34" charset="-120"/>
               </a:rPr>
-              <a:t>A tool that makes very tiny things look much bigger so you can see them clearly.</a:t>
+              <a:t>ranges or extents of things, or instruments used for looking at things closely</a:t>
             </a:r>
             <a:endParaRPr lang="en-US" sz="1200" dirty="0"/>
           </a:p>
@@ -42853,7 +44326,7 @@
                 <a:ea typeface="Calibri" pitchFamily="34" charset="-122"/>
                 <a:cs typeface="Calibri" pitchFamily="34" charset="-120"/>
               </a:rPr>
-              <a:t>Word Labs  •  wordlabs.app  •  Root: 'scope' = to look, see, observe</a:t>
+              <a:t>Word Labs  •  wordlabs.app  •  Root: 'scope' = look; view; examine</a:t>
             </a:r>
             <a:endParaRPr lang="en-US" sz="800" dirty="0"/>
           </a:p>
@@ -43056,7 +44529,7 @@
                 <a:ea typeface="Calibri" pitchFamily="34" charset="-122"/>
                 <a:cs typeface="Calibri" pitchFamily="34" charset="-120"/>
               </a:rPr>
-              <a:t>The scientist used a microscope to look at the tiny cells on the slide.</a:t>
+              <a:t>The scope of the project grew much larger than expected.</a:t>
             </a:r>
             <a:endParaRPr lang="en-US" sz="1500" dirty="0"/>
           </a:p>
@@ -43220,7 +44693,7 @@
                 <a:ea typeface="Calibri" pitchFamily="34" charset="-122"/>
                 <a:cs typeface="Calibri" pitchFamily="34" charset="-120"/>
               </a:rPr>
-              <a:t>We pointed the telescope at the sky and could clearly see the craters on the moon.</a:t>
+              <a:t>The scopes of the two projects overlapped in several areas.</a:t>
             </a:r>
             <a:endParaRPr lang="en-US" sz="1500" dirty="0"/>
           </a:p>
@@ -43384,7 +44857,7 @@
                 <a:ea typeface="Calibri" pitchFamily="34" charset="-122"/>
                 <a:cs typeface="Calibri" pitchFamily="34" charset="-120"/>
               </a:rPr>
-              <a:t>The doctor used a stethoscope to listen to the patient's heartbeat.</a:t>
+              <a:t>The astronomer pointed her telescope at the rings of Saturn.</a:t>
             </a:r>
             <a:endParaRPr lang="en-US" sz="1500" dirty="0"/>
           </a:p>
